--- a/courses/ai-native/sessions/s06.pptx
+++ b/courses/ai-native/sessions/s06.pptx
@@ -1156,7 +1156,7 @@
             <a:pPr lvl="0"/>
             <a:r>
               <a:rPr lang="ko-KR" sz="1200"/>
-              <a:t>배송 시스템을 금지에 더한 것이 강의 사례와 다른 점이다. 신청한다는 회차만 예정으로 만들고 배송 요청은 하지 않는다.</a:t>
+              <a:t>배송 시스템을 금지에 더한 것이 강의 사례와 다른 점이다. "신청한다"는 회차만 예정으로 만들고 배송 요청은 하지 않는다.</a:t>
             </a:r>
           </a:p>
           <a:p>
@@ -7555,7 +7555,7 @@
                 <a:latin typeface="맑은 고딕"/>
                 <a:ea typeface="맑은 고딕"/>
               </a:rPr>
-              <a:t> 주문한다</a:t>
+              <a:t> "주문한다"</a:t>
             </a:r>
           </a:p>
           <a:p>
@@ -7956,7 +7956,7 @@
                 <a:latin typeface="맑은 고딕"/>
                 <a:ea typeface="맑은 고딕"/>
               </a:rPr>
-              <a:t>주문한다의 위임 계약은 쓰기를 </a:t>
+              <a:t>"주문한다"의 위임 계약은 쓰기를 </a:t>
             </a:r>
             <a:r>
               <a:rPr sz="1400" b="0">
@@ -11135,7 +11135,7 @@
                 <a:latin typeface="맑은 고딕"/>
                 <a:ea typeface="맑은 고딕"/>
               </a:rPr>
-              <a:t>신청한다의 위임 계약</a:t>
+              <a:t>"신청한다"의 위임 계약</a:t>
             </a:r>
             <a:r>
               <a:rPr sz="1600" b="0">
@@ -11397,7 +11397,7 @@
                 <a:latin typeface="맑은 고딕"/>
                 <a:ea typeface="맑은 고딕"/>
               </a:rPr>
-              <a:t> 신청한다에 필요한 도구만 있고, 주지 않은 도구가 경계가 되는가?</a:t>
+              <a:t> "신청한다"에 필요한 도구만 있고, 주지 않은 도구가 경계가 되는가?</a:t>
             </a:r>
           </a:p>
           <a:p>
@@ -11755,7 +11755,7 @@
                 <a:latin typeface="맑은 고딕"/>
                 <a:ea typeface="맑은 고딕"/>
               </a:rPr>
-              <a:t> 신청한다의 위임 계약. 실습 7의 입력이 됩니다.</a:t>
+              <a:t> "신청한다"의 위임 계약. 실습 7의 입력이 됩니다.</a:t>
             </a:r>
           </a:p>
         </p:txBody>
@@ -12584,8 +12584,8 @@
         </p:nvSpPr>
         <p:spPr>
           <a:xfrm>
-            <a:off x="233172" y="1414318"/>
-            <a:ext cx="4338828" cy="4898147"/>
+            <a:off x="233172" y="1616364"/>
+            <a:ext cx="4338828" cy="4696101"/>
           </a:xfrm>
         </p:spPr>
         <p:txBody>
@@ -12633,7 +12633,7 @@
                 <a:latin typeface="맑은 고딕"/>
                 <a:ea typeface="맑은 고딕"/>
               </a:rPr>
-              <a:t> 신청한다</a:t>
+              <a:t> "신청한다"</a:t>
             </a:r>
           </a:p>
           <a:p>
@@ -13028,7 +13028,7 @@
         <p:spPr>
           <a:xfrm>
             <a:off x="233172" y="960120"/>
-            <a:ext cx="8778240" cy="454198"/>
+            <a:ext cx="8778240" cy="656244"/>
           </a:xfrm>
         </p:spPr>
         <p:txBody>
@@ -13054,7 +13054,7 @@
                 <a:latin typeface="맑은 고딕"/>
                 <a:ea typeface="맑은 고딕"/>
               </a:rPr>
-              <a:t>신청한다의 위임 계약은 쓰기를 </a:t>
+              <a:t>"신청한다"의 위임 계약은 쓰기를 </a:t>
             </a:r>
             <a:r>
               <a:rPr sz="1400" b="0">
@@ -13117,8 +13117,8 @@
         </p:nvSpPr>
         <p:spPr>
           <a:xfrm>
-            <a:off x="4572000" y="1414318"/>
-            <a:ext cx="4439412" cy="4898147"/>
+            <a:off x="4572000" y="1616364"/>
+            <a:ext cx="4439412" cy="4696101"/>
           </a:xfrm>
         </p:spPr>
         <p:txBody>
@@ -15167,7 +15167,7 @@
                 <a:latin typeface="맑은 고딕"/>
                 <a:ea typeface="맑은 고딕"/>
               </a:rPr>
-              <a:t>주문한다의 위임 경계</a:t>
+              <a:t>"주문한다"의 위임 경계</a:t>
             </a:r>
           </a:p>
         </p:txBody>
@@ -16791,7 +16791,7 @@
                           <a:ea typeface="맑은 고딕" panose="020B0503020000020004" pitchFamily="34" charset="-127"/>
                           <a:cs typeface="맑은 고딕"/>
                         </a:rPr>
-                        <a:t>주문한다에서</a:t>
+                        <a:t>"주문한다"에서</a:t>
                       </a:r>
                     </a:p>
                   </a:txBody>
@@ -17887,7 +17887,7 @@
                 <a:latin typeface="맑은 고딕"/>
                 <a:ea typeface="맑은 고딕"/>
               </a:rPr>
-              <a:t>다섯 기준과 주문한다의 적용</a:t>
+              <a:t>다섯 기준과 "주문한다"의 적용</a:t>
             </a:r>
           </a:p>
         </p:txBody>
@@ -19396,7 +19396,7 @@
                 <a:latin typeface="맑은 고딕"/>
                 <a:ea typeface="맑은 고딕"/>
               </a:rPr>
-              <a:t>주문한다에 주는 도구는 </a:t>
+              <a:t>"주문한다"에 주는 도구는 </a:t>
             </a:r>
             <a:r>
               <a:rPr sz="1800" b="1">
@@ -19530,7 +19530,7 @@
                 <a:latin typeface="맑은 고딕"/>
                 <a:ea typeface="맑은 고딕"/>
               </a:rPr>
-              <a:t>주문한다의 도구</a:t>
+              <a:t>"주문한다"의 도구</a:t>
             </a:r>
           </a:p>
         </p:txBody>
@@ -21574,7 +21574,7 @@
                 <a:latin typeface="맑은 고딕"/>
                 <a:ea typeface="맑은 고딕"/>
               </a:rPr>
-              <a:t>주문한다의 권한</a:t>
+              <a:t>"주문한다"의 권한</a:t>
             </a:r>
           </a:p>
         </p:txBody>
@@ -22131,7 +22131,7 @@
                           <a:ea typeface="맑은 고딕" panose="020B0503020000020004" pitchFamily="34" charset="-127"/>
                           <a:cs typeface="맑은 고딕"/>
                         </a:rPr>
-                        <a:t>주문한다에서</a:t>
+                        <a:t>"주문한다"에서</a:t>
                       </a:r>
                     </a:p>
                   </a:txBody>

--- a/courses/ai-native/sessions/s06.pptx
+++ b/courses/ai-native/sessions/s06.pptx
@@ -27,6 +27,7 @@
     <p:sldId id="272" r:id="javaLecture17"/>
     <p:sldId id="273" r:id="javaLecture18"/>
     <p:sldId id="274" r:id="javaLecture19"/>
+    <p:sldId id="275" r:id="javaLecture20"/>
   </p:sldIdLst>
   <p:sldSz cx="9144000" cy="6858000" type="screen4x3"/>
   <p:notesSz cx="6858000" cy="9144000"/>
@@ -576,81 +577,6 @@
 </p:notes>
 </file>
 
-<file path=ppt/notesSlides/notesSlide11.xml><?xml version="1.0" encoding="utf-8"?>
-<p:notes xmlns:a="http://schemas.openxmlformats.org/drawingml/2006/main" xmlns:r="http://schemas.openxmlformats.org/officeDocument/2006/relationships" xmlns:p="http://schemas.openxmlformats.org/presentationml/2006/main">
-  <p:cSld>
-    <p:spTree>
-      <p:nvGrpSpPr>
-        <p:cNvPr id="1" name=""/>
-        <p:cNvGrpSpPr/>
-        <p:nvPr/>
-      </p:nvGrpSpPr>
-      <p:grpSpPr>
-        <a:xfrm>
-          <a:off x="0" y="0"/>
-          <a:ext cx="0" cy="0"/>
-          <a:chOff x="0" y="0"/>
-          <a:chExt cx="0" cy="0"/>
-        </a:xfrm>
-      </p:grpSpPr>
-      <p:sp>
-        <p:nvSpPr>
-          <p:cNvPr id="2" name="슬라이드 이미지 개체 틀"/>
-          <p:cNvSpPr/>
-          <p:nvPr>
-            <p:ph type="sldImg" idx="2"/>
-          </p:nvPr>
-        </p:nvSpPr>
-        <p:spPr/>
-        <p:txBody>
-          <a:bodyPr/>
-          <a:lstStyle/>
-          <a:p/>
-        </p:txBody>
-      </p:sp>
-      <p:sp>
-        <p:nvSpPr>
-          <p:cNvPr id="3" name="슬라이드 노트 개체 틀"/>
-          <p:cNvSpPr/>
-          <p:nvPr>
-            <p:ph type="body" idx="3"/>
-          </p:nvPr>
-        </p:nvSpPr>
-        <p:spPr/>
-        <p:txBody>
-          <a:bodyPr/>
-          <a:lstStyle/>
-          <a:p>
-            <a:pPr lvl="0"/>
-            <a:r>
-              <a:rPr lang="ko-KR" sz="1200"/>
-              <a:t>인용 근거: [Lopopolo 2026]은 복잡한 작업의 실행 계획을 진행·결정 기록과 함께 저장소에 커밋했다.</a:t>
-            </a:r>
-          </a:p>
-          <a:p>
-            <a:pPr lvl="0"/>
-            <a:r>
-              <a:rPr lang="ko-KR" sz="1200"/>
-              <a:t>기능 목록은 "세션 04. 수용 기준과 검증 가능한 작업 단위"의 「05. 작업 단위」의 「기능 목록과 점진적 진행」에서 만든 것이다.</a:t>
-            </a:r>
-          </a:p>
-          <a:p>
-            <a:pPr lvl="0"/>
-            <a:r>
-              <a:rPr lang="ko-KR" sz="1200"/>
-              <a:t>실패 뒤 어디로 되돌릴지의 판단은 "세션 10. 실패 대응·재시도·복구"가 맡는다. 여기서는 수단을 갖추는 것까지다.</a:t>
-            </a:r>
-          </a:p>
-        </p:txBody>
-      </p:sp>
-    </p:spTree>
-  </p:cSld>
-  <p:clrMapOvr>
-    <a:masterClrMapping/>
-  </p:clrMapOvr>
-</p:notes>
-</file>
-
 <file path=ppt/notesSlides/notesSlide12.xml><?xml version="1.0" encoding="utf-8"?>
 <p:notes xmlns:a="http://schemas.openxmlformats.org/drawingml/2006/main" xmlns:r="http://schemas.openxmlformats.org/officeDocument/2006/relationships" xmlns:p="http://schemas.openxmlformats.org/presentationml/2006/main">
   <p:cSld>
@@ -699,28 +625,21 @@
             <a:pPr lvl="0"/>
             <a:r>
               <a:rPr lang="ko-KR" sz="1200"/>
-              <a:t>계약이 한 장을 넘으면 읽히지 않는다. 읽히지 않는 계약은 맥락이 아니라는 점을 짚는다.</a:t>
+              <a:t>인용 근거: [Lopopolo 2026]은 복잡한 작업의 실행 계획을 진행·결정 기록과 함께 저장소에 커밋했다.</a:t>
             </a:r>
           </a:p>
           <a:p>
             <a:pPr lvl="0"/>
             <a:r>
               <a:rPr lang="ko-KR" sz="1200"/>
-              <a:t>인용 근거: [Anthropic 2024]의 에이전트 설명에서 중단 조건 문장을 확인했다.</a:t>
+              <a:t>기능 목록은 "세션 04. 수용 기준과 검증 가능한 작업 단위"의 「05. 작업 단위」의 「기능 목록과 점진적 진행」에서 만든 것이다.</a:t>
             </a:r>
           </a:p>
           <a:p>
             <a:pPr lvl="0"/>
             <a:r>
               <a:rPr lang="ko-KR" sz="1200"/>
-              <a:t>종료 조건은 "세션 04. 수용 기준과 검증 가능한 작업 단위"의 「06. 완료의 정의와 증거」에서 정한 완료의 정의를 가리킨다. 계약에 다시 적지 않는다.</a:t>
-            </a:r>
-          </a:p>
-          <a:p>
-            <a:pPr lvl="0"/>
-            <a:r>
-              <a:rPr lang="ko-KR" sz="1200"/>
-              <a:t>입력은 "세션 03. 요구의 구체화와 명세"·"세션 04. 수용 기준과 검증 가능한 작업 단위"·"세션 05. 도메인·설계 지식과 맥락 구성"의 산출물이다. 계약이 그 네 축 위에 얹히는 마지막 장이다.</a:t>
+              <a:t>실패 뒤 어디로 되돌릴지의 판단은 "세션 10. 실패 대응·재시도·복구"가 맡는다. 여기서는 수단을 갖추는 것까지다.</a:t>
             </a:r>
           </a:p>
         </p:txBody>
@@ -781,21 +700,28 @@
             <a:pPr lvl="0"/>
             <a:r>
               <a:rPr lang="ko-KR" sz="1200"/>
-              <a:t>계약은 저장소에 두고 맥락 파일이 가리킨다. 사람과 에이전트가 같은 문장을 읽어야 경계가 하나다.</a:t>
+              <a:t>계약이 한 장을 넘으면 읽히지 않는다. 읽히지 않는 계약은 맥락이 아니라는 점을 짚는다.</a:t>
             </a:r>
           </a:p>
           <a:p>
             <a:pPr lvl="0"/>
             <a:r>
               <a:rPr lang="ko-KR" sz="1200"/>
-              <a:t>3회라는 상한은 교육용 가정이다. 상한의 근거는 비용과 실패의 성격이며, 값 자체가 규칙은 아니다.</a:t>
+              <a:t>인용 근거: [Anthropic 2024]의 에이전트 설명에서 중단 조건 문장을 확인했다.</a:t>
             </a:r>
           </a:p>
           <a:p>
             <a:pPr lvl="0"/>
             <a:r>
               <a:rPr lang="ko-KR" sz="1200"/>
-              <a:t>세 번째 멈출 조건이 가장 중요하다. 첫 시도의 실패가 바로 이 지점에서 추측으로 채워졌다.</a:t>
+              <a:t>종료 조건은 "세션 04. 수용 기준과 검증 가능한 작업 단위"의 「06. 완료의 정의와 증거」에서 정한 완료의 정의를 가리킨다. 계약에 다시 적지 않는다.</a:t>
+            </a:r>
+          </a:p>
+          <a:p>
+            <a:pPr lvl="0"/>
+            <a:r>
+              <a:rPr lang="ko-KR" sz="1200"/>
+              <a:t>입력은 "세션 03. 요구의 구체화와 명세"·"세션 04. 수용 기준과 검증 가능한 작업 단위"·"세션 05. 도메인·설계 지식과 맥락 구성"의 산출물이다. 계약이 그 네 축 위에 얹히는 마지막 장이다.</a:t>
             </a:r>
           </a:p>
         </p:txBody>
@@ -856,21 +782,21 @@
             <a:pPr lvl="0"/>
             <a:r>
               <a:rPr lang="ko-KR" sz="1200"/>
-              <a:t>인용 근거: [Anthropic 2024]의 에이전트 논의에서 확인했다. 비용과 오류 누적은 "세션 02. 작업 특성에 따른 AI 활용 방식"의 「04. 작업 특성에 따른 선택」의 「자율성의 대가」에서 이미 다뤘다.</a:t>
+              <a:t>계약은 저장소에 두고 맥락 파일이 가리킨다. 사람과 에이전트가 같은 문장을 읽어야 경계가 하나다.</a:t>
             </a:r>
           </a:p>
           <a:p>
             <a:pPr lvl="0"/>
             <a:r>
               <a:rPr lang="ko-KR" sz="1200"/>
-              <a:t>전부 허용 모드는 시연이나 격리된 환경에서 쓰는 선택이다. 저장소와 자격이 실제 환경에 이어져 있으면 쓰지 않는다.</a:t>
+              <a:t>3회라는 상한은 교육용 가정이다. 상한의 근거는 비용과 실패의 성격이며, 값 자체가 규칙은 아니다.</a:t>
             </a:r>
           </a:p>
           <a:p>
             <a:pPr lvl="0"/>
             <a:r>
               <a:rPr lang="ko-KR" sz="1200"/>
-              <a:t>네 가지 모습 모두 "번거로움"이 원인이다. 번거로움을 도구의 문제로 되돌리는 것이 이 topic의 메시지다.</a:t>
+              <a:t>세 번째 멈출 조건이 가장 중요하다. 첫 시도의 실패가 바로 이 지점에서 추측으로 채워졌다.</a:t>
             </a:r>
           </a:p>
         </p:txBody>
@@ -931,21 +857,21 @@
             <a:pPr lvl="0"/>
             <a:r>
               <a:rPr lang="ko-KR" sz="1200"/>
-              <a:t>인용 근거: Thoughtworks Technology Radar Vol. 34에서 MCP by default가 Caution(Hold)에 있고, 두 문장을 원문에서 확인했다. 원문은 Simon Willison의 "CLI 하나로 대개 된다"는 말도 함께 인용한다.</a:t>
+              <a:t>인용 근거: [Anthropic 2024]의 에이전트 논의에서 확인했다. 비용과 오류 누적은 "세션 02. 작업 특성에 따른 AI 활용 방식"의 「04. 작업 특성에 따른 선택」의 「자율성의 대가」에서 이미 다뤘다.</a:t>
             </a:r>
           </a:p>
           <a:p>
             <a:pPr lvl="0"/>
             <a:r>
               <a:rPr lang="ko-KR" sz="1200"/>
-              <a:t>"abstraction tax"라는 이름이 원문에 있다. 추상 층마다 값을 치른다는 뜻으로 소개한다.</a:t>
+              <a:t>전부 허용 모드는 시연이나 격리된 환경에서 쓰는 선택이다. 저장소와 자격이 실제 환경에 이어져 있으면 쓰지 않는다.</a:t>
             </a:r>
           </a:p>
           <a:p>
             <a:pPr lvl="0"/>
             <a:r>
               <a:rPr lang="ko-KR" sz="1200"/>
-              <a:t>주문 사례가 MCP 서버를 두지 않은 이유가 오른쪽 열 세 가지다. 공개 형식을 쓰는 이득은 맥락 파일에서 이미 얻고 있다.</a:t>
+              <a:t>네 가지 모습 모두 "번거로움"이 원인이다. 번거로움을 도구의 문제로 되돌리는 것이 이 topic의 메시지다.</a:t>
             </a:r>
           </a:p>
         </p:txBody>
@@ -1006,21 +932,21 @@
             <a:pPr lvl="0"/>
             <a:r>
               <a:rPr lang="ko-KR" sz="1200"/>
-              <a:t>정기배송 모델 패키지와 맥락 파일은 code/s01/subscription/docs/에 있다.</a:t>
+              <a:t>인용 근거: Thoughtworks Technology Radar Vol. 34에서 MCP by default가 Caution(Hold)에 있고, 두 문장을 원문에서 확인했다. 원문은 Simon Willison의 "CLI 하나로 대개 된다"는 말도 함께 인용한다.</a:t>
             </a:r>
           </a:p>
           <a:p>
             <a:pPr lvl="0"/>
             <a:r>
               <a:rPr lang="ko-KR" sz="1200"/>
-              <a:t>LLM은 권한을 "저장소 쓰기 허용" 한 줄로 뭉개고, 금지 항목을 비워 둔다. 점검 2·3으로 좁히게 한다.</a:t>
+              <a:t>"abstraction tax"라는 이름이 원문에 있다. 추상 층마다 값을 치른다는 뜻으로 소개한다.</a:t>
             </a:r>
           </a:p>
           <a:p>
             <a:pPr lvl="0"/>
             <a:r>
               <a:rPr lang="ko-KR" sz="1200"/>
-              <a:t>점검 5의 공휴일은 실습 4에서 미정으로 남긴 질문이다. 미정이 멈출 조건으로 이어지는 것을 짚는다.</a:t>
+              <a:t>주문 사례가 MCP 서버를 두지 않은 이유가 오른쪽 열 세 가지다. 공개 형식을 쓰는 이득은 맥락 파일에서 이미 얻고 있다.</a:t>
             </a:r>
           </a:p>
         </p:txBody>
@@ -1081,14 +1007,21 @@
             <a:pPr lvl="0"/>
             <a:r>
               <a:rPr lang="ko-KR" sz="1200"/>
-              <a:t>계약의 권한을 실행 전에 강제하는 방법은 "세션 08. 실행 제약과 가드레일의 역할"이 맡는다. 요약에서 미리 말하지 않는다.</a:t>
+              <a:t>정기배송 모델 패키지와 맥락 파일은 code/s01/subscription/docs/에 있다.</a:t>
             </a:r>
           </a:p>
           <a:p>
             <a:pPr lvl="0"/>
             <a:r>
               <a:rPr lang="ko-KR" sz="1200"/>
-              <a:t>실습 6의 위임 계약이 실습 7의 실행 흐름의 입력이 된다.</a:t>
+              <a:t>LLM은 권한을 "저장소 쓰기 허용" 한 줄로 뭉개고, 금지 항목을 비워 둔다. 점검 2·3으로 좁히게 한다.</a:t>
+            </a:r>
+          </a:p>
+          <a:p>
+            <a:pPr lvl="0"/>
+            <a:r>
+              <a:rPr lang="ko-KR" sz="1200"/>
+              <a:t>점검 5의 공휴일은 실습 4에서 미정으로 남긴 질문이다. 미정이 멈출 조건으로 이어지는 것을 짚는다.</a:t>
             </a:r>
           </a:p>
         </p:txBody>
@@ -1149,21 +1082,14 @@
             <a:pPr lvl="0"/>
             <a:r>
               <a:rPr lang="ko-KR" sz="1200"/>
-              <a:t>도구는 강의 사례와 같다. 과제가 같은 모양(신규 개발, 외부 결제 하나)이기 때문이다.</a:t>
+              <a:t>계약의 권한을 실행 전에 강제하는 방법은 "세션 08. 실행 제약과 가드레일의 역할"이 맡는다. 요약에서 미리 말하지 않는다.</a:t>
             </a:r>
           </a:p>
           <a:p>
             <a:pPr lvl="0"/>
             <a:r>
               <a:rPr lang="ko-KR" sz="1200"/>
-              <a:t>배송 시스템을 금지에 더한 것이 강의 사례와 다른 점이다. "신청한다"는 회차만 예정으로 만들고 배송 요청은 하지 않는다.</a:t>
-            </a:r>
-          </a:p>
-          <a:p>
-            <a:pPr lvl="0"/>
-            <a:r>
-              <a:rPr lang="ko-KR" sz="1200"/>
-              <a:t>멈출 조건의 첫 줄은 수용 기준의 값(10,000원·7개·2월 2일)을 지키는 장치다.</a:t>
+              <a:t>실습 6의 위임 계약이 실습 7의 실행 흐름의 입력이 된다.</a:t>
             </a:r>
           </a:p>
         </p:txBody>
@@ -1224,14 +1150,21 @@
             <a:pPr lvl="0"/>
             <a:r>
               <a:rPr lang="ko-KR" sz="1200"/>
-              <a:t>같은 규칙이 맥락 파일과 계약에 두 번 있으면 둘이 어긋난다. 실습에서 중복을 찾아 한 곳으로 모으는 연습을 시킨다.</a:t>
+              <a:t>도구는 강의 사례와 같다. 과제가 같은 모양(신규 개발, 외부 결제 하나)이기 때문이다.</a:t>
             </a:r>
           </a:p>
           <a:p>
             <a:pPr lvl="0"/>
             <a:r>
               <a:rPr lang="ko-KR" sz="1200"/>
-              <a:t>미정을 없애지 않고 멈출 조건으로 옮기는 것이 이 보완의 핵심이다. 사람이 정할 결정은 사람에게 남긴다.</a:t>
+              <a:t>배송 시스템을 금지에 더한 것이 강의 사례와 다른 점이다. "신청한다"는 회차만 예정으로 만들고 배송 요청은 하지 않는다.</a:t>
+            </a:r>
+          </a:p>
+          <a:p>
+            <a:pPr lvl="0"/>
+            <a:r>
+              <a:rPr lang="ko-KR" sz="1200"/>
+              <a:t>멈출 조건의 첫 줄은 수용 기준의 값(10,000원·7개·2월 2일)을 지키는 장치다.</a:t>
             </a:r>
           </a:p>
         </p:txBody>
@@ -1307,6 +1240,74 @@
             <a:r>
               <a:rPr lang="ko-KR" sz="1200"/>
               <a:t>권한을 실행 전에 강제하는 방법은 "세션 08. 실행 제약과 가드레일의 역할"이 맡는다. 여기서 정한 권한을 거기서 다시 정하지 않는다.</a:t>
+            </a:r>
+          </a:p>
+        </p:txBody>
+      </p:sp>
+    </p:spTree>
+  </p:cSld>
+  <p:clrMapOvr>
+    <a:masterClrMapping/>
+  </p:clrMapOvr>
+</p:notes>
+</file>
+
+<file path=ppt/notesSlides/notesSlide20.xml><?xml version="1.0" encoding="utf-8"?>
+<p:notes xmlns:a="http://schemas.openxmlformats.org/drawingml/2006/main" xmlns:r="http://schemas.openxmlformats.org/officeDocument/2006/relationships" xmlns:p="http://schemas.openxmlformats.org/presentationml/2006/main">
+  <p:cSld>
+    <p:spTree>
+      <p:nvGrpSpPr>
+        <p:cNvPr id="1" name=""/>
+        <p:cNvGrpSpPr/>
+        <p:nvPr/>
+      </p:nvGrpSpPr>
+      <p:grpSpPr>
+        <a:xfrm>
+          <a:off x="0" y="0"/>
+          <a:ext cx="0" cy="0"/>
+          <a:chOff x="0" y="0"/>
+          <a:chExt cx="0" cy="0"/>
+        </a:xfrm>
+      </p:grpSpPr>
+      <p:sp>
+        <p:nvSpPr>
+          <p:cNvPr id="2" name="슬라이드 이미지 개체 틀"/>
+          <p:cNvSpPr/>
+          <p:nvPr>
+            <p:ph type="sldImg" idx="2"/>
+          </p:nvPr>
+        </p:nvSpPr>
+        <p:spPr/>
+        <p:txBody>
+          <a:bodyPr/>
+          <a:lstStyle/>
+          <a:p/>
+        </p:txBody>
+      </p:sp>
+      <p:sp>
+        <p:nvSpPr>
+          <p:cNvPr id="3" name="슬라이드 노트 개체 틀"/>
+          <p:cNvSpPr/>
+          <p:nvPr>
+            <p:ph type="body" idx="3"/>
+          </p:nvPr>
+        </p:nvSpPr>
+        <p:spPr/>
+        <p:txBody>
+          <a:bodyPr/>
+          <a:lstStyle/>
+          <a:p>
+            <a:pPr lvl="0"/>
+            <a:r>
+              <a:rPr lang="ko-KR" sz="1200"/>
+              <a:t>같은 규칙이 맥락 파일과 계약에 두 번 있으면 둘이 어긋난다. 실습에서 중복을 찾아 한 곳으로 모으는 연습을 시킨다.</a:t>
+            </a:r>
+          </a:p>
+          <a:p>
+            <a:pPr lvl="0"/>
+            <a:r>
+              <a:rPr lang="ko-KR" sz="1200"/>
+              <a:t>미정을 없애지 않고 멈출 조건으로 옮기는 것이 이 보완의 핵심이다. 사람이 정할 결정은 사람에게 남긴다.</a:t>
             </a:r>
           </a:p>
         </p:txBody>
@@ -3469,7 +3470,17 @@
                 <a:latin typeface="맑은 고딕"/>
                 <a:ea typeface="맑은 고딕"/>
               </a:rPr>
-              <a:t>변경마다 작업 공간</a:t>
+              <a:t>변경마다 작업 공간 </a:t>
+            </a:r>
+            <a:r>
+              <a:rPr sz="2000" b="1">
+                <a:solidFill>
+                  <a:srgbClr val="000000"/>
+                </a:solidFill>
+                <a:latin typeface="맑은 고딕"/>
+                <a:ea typeface="맑은 고딕"/>
+              </a:rPr>
+              <a:t>(1/2)</a:t>
             </a:r>
           </a:p>
           <a:p>
@@ -4004,6 +4015,236 @@
           </a:p>
         </p:txBody>
       </p:sp>
+    </p:spTree>
+    <p:extLst>
+      <p:ext uri="{BB962C8B-B14F-4D97-AF65-F5344CB8AC3E}">
+        <p14:creationId xmlns:p14="http://schemas.microsoft.com/office/powerpoint/2010/main" val="3555436673"/>
+      </p:ext>
+    </p:extLst>
+  </p:cSld>
+  <p:clrMapOvr>
+    <a:masterClrMapping/>
+  </p:clrMapOvr>
+</p:sld>
+</file>
+
+<file path=ppt/slides/slide11.xml><?xml version="1.0" encoding="utf-8"?>
+<p:sld xmlns:a="http://schemas.openxmlformats.org/drawingml/2006/main" xmlns:r="http://schemas.openxmlformats.org/officeDocument/2006/relationships" xmlns:p="http://schemas.openxmlformats.org/presentationml/2006/main">
+  <p:cSld>
+    <p:spTree>
+      <p:nvGrpSpPr>
+        <p:cNvPr id="1" name="">
+          <a:extLst>
+            <a:ext uri="{FF2B5EF4-FFF2-40B4-BE49-F238E27FC236}">
+              <a16:creationId xmlns:a16="http://schemas.microsoft.com/office/drawing/2014/main" id="{8E4F1F13-426B-086B-7D8C-9A58A0F879DB}"/>
+            </a:ext>
+          </a:extLst>
+        </p:cNvPr>
+        <p:cNvGrpSpPr/>
+        <p:nvPr/>
+      </p:nvGrpSpPr>
+      <p:grpSpPr>
+        <a:xfrm>
+          <a:off x="0" y="0"/>
+          <a:ext cx="0" cy="0"/>
+          <a:chOff x="0" y="0"/>
+          <a:chExt cx="0" cy="0"/>
+        </a:xfrm>
+      </p:grpSpPr>
+      <p:sp>
+        <p:nvSpPr>
+          <p:cNvPr id="2" name="제목 1">
+            <a:extLst>
+              <a:ext uri="{FF2B5EF4-FFF2-40B4-BE49-F238E27FC236}">
+                <a16:creationId xmlns:a16="http://schemas.microsoft.com/office/drawing/2014/main" id="{AA26A92D-924E-0575-9551-F8FD7BFD3FAD}"/>
+              </a:ext>
+            </a:extLst>
+          </p:cNvPr>
+          <p:cNvSpPr>
+            <a:spLocks noGrp="1"/>
+          </p:cNvSpPr>
+          <p:nvPr>
+            <p:ph type="title"/>
+          </p:nvPr>
+        </p:nvSpPr>
+        <p:spPr/>
+        <p:txBody>
+          <a:bodyPr/>
+          <a:lstStyle/>
+          <a:p>
+            <a:r>
+              <a:rPr sz="2400" b="1">
+                <a:solidFill>
+                  <a:srgbClr val="000000"/>
+                </a:solidFill>
+                <a:latin typeface="맑은 고딕"/>
+                <a:ea typeface="맑은 고딕"/>
+              </a:rPr>
+              <a:t>변경마다 작업 공간 </a:t>
+            </a:r>
+            <a:r>
+              <a:rPr sz="2000" b="1">
+                <a:solidFill>
+                  <a:srgbClr val="000000"/>
+                </a:solidFill>
+                <a:latin typeface="맑은 고딕"/>
+                <a:ea typeface="맑은 고딕"/>
+              </a:rPr>
+              <a:t>(2/2)</a:t>
+            </a:r>
+          </a:p>
+          <a:p>
+            <a:r>
+              <a:rPr sz="1100" b="1">
+                <a:solidFill>
+                  <a:srgbClr val="000000"/>
+                </a:solidFill>
+                <a:latin typeface="맑은 고딕"/>
+                <a:ea typeface="맑은 고딕"/>
+              </a:rPr>
+              <a:t>06. 상태와 되돌림</a:t>
+            </a:r>
+          </a:p>
+        </p:txBody>
+      </p:sp>
+      <p:sp>
+        <p:nvSpPr>
+          <p:cNvPr id="3" name="슬라이드 번호 개체 틀 2">
+            <a:extLst>
+              <a:ext uri="{FF2B5EF4-FFF2-40B4-BE49-F238E27FC236}">
+                <a16:creationId xmlns:a16="http://schemas.microsoft.com/office/drawing/2014/main" id="{12CF30EE-4DFD-8063-56B8-B8689E76DFCA}"/>
+              </a:ext>
+            </a:extLst>
+          </p:cNvPr>
+          <p:cNvSpPr>
+            <a:spLocks noGrp="1"/>
+          </p:cNvSpPr>
+          <p:nvPr>
+            <p:ph type="sldNum" sz="quarter" idx="10"/>
+          </p:nvPr>
+        </p:nvSpPr>
+        <p:spPr/>
+        <p:txBody>
+          <a:bodyPr/>
+          <a:lstStyle/>
+          <a:p>
+            <a:pPr>
+              <a:defRPr/>
+            </a:pPr>
+            <a:r>
+              <a:rPr lang="en-US" altLang="ko-KR">
+                <a:solidFill>
+                  <a:prstClr val="black"/>
+                </a:solidFill>
+              </a:rPr>
+              <a:t>- 11 -</a:t>
+            </a:r>
+          </a:p>
+        </p:txBody>
+      </p:sp>
+      <p:sp>
+        <p:nvSpPr>
+          <p:cNvPr id="5" name="텍스트 개체 틀 4">
+            <a:extLst>
+              <a:ext uri="{FF2B5EF4-FFF2-40B4-BE49-F238E27FC236}">
+                <a16:creationId xmlns:a16="http://schemas.microsoft.com/office/drawing/2014/main" id="{D66274C8-E16F-5AEB-614B-D8D32DA3E8C6}"/>
+              </a:ext>
+            </a:extLst>
+          </p:cNvPr>
+          <p:cNvSpPr>
+            <a:spLocks noGrp="1"/>
+          </p:cNvSpPr>
+          <p:nvPr>
+            <p:ph type="body" sz="quarter" idx="11"/>
+          </p:nvPr>
+        </p:nvSpPr>
+        <p:spPr/>
+        <p:txBody>
+          <a:bodyPr/>
+          <a:lstStyle/>
+          <a:p>
+            <a:r>
+              <a:rPr kumimoji="1" lang="en-US" altLang="ko-KR" sz="1400" dirty="0" err="1"/>
+              <a:t>06. 작업 위임과 도구·권한·상태의 경계</a:t>
+            </a:r>
+          </a:p>
+        </p:txBody>
+      </p:sp>
+      <p:sp>
+        <p:nvSpPr>
+          <p:cNvPr id="6" name="텍스트 개체 틀 5">
+            <a:extLst>
+              <a:ext uri="{FF2B5EF4-FFF2-40B4-BE49-F238E27FC236}">
+                <a16:creationId xmlns:a16="http://schemas.microsoft.com/office/drawing/2014/main" id="{A24E58E1-194B-A320-AEEE-24D08685BB67}"/>
+              </a:ext>
+            </a:extLst>
+          </p:cNvPr>
+          <p:cNvSpPr>
+            <a:spLocks noGrp="1"/>
+          </p:cNvSpPr>
+          <p:nvPr>
+            <p:ph type="body" sz="quarter" idx="12"/>
+          </p:nvPr>
+        </p:nvSpPr>
+        <p:spPr/>
+        <p:txBody>
+          <a:bodyPr/>
+          <a:lstStyle/>
+          <a:p>
+            <a:endParaRPr kumimoji="1" lang="ko-KR" altLang="en-US" dirty="0"/>
+          </a:p>
+        </p:txBody>
+      </p:sp>
+      <p:sp>
+        <p:nvSpPr>
+          <p:cNvPr id="7" name="텍스트 개체 틀 6">
+            <a:extLst>
+              <a:ext uri="{FF2B5EF4-FFF2-40B4-BE49-F238E27FC236}">
+                <a16:creationId xmlns:a16="http://schemas.microsoft.com/office/drawing/2014/main" id="{A219F420-613B-6234-45F6-0955A9A4505F}"/>
+              </a:ext>
+            </a:extLst>
+          </p:cNvPr>
+          <p:cNvSpPr>
+            <a:spLocks noGrp="1"/>
+          </p:cNvSpPr>
+          <p:nvPr>
+            <p:ph type="body" sz="quarter" idx="13"/>
+          </p:nvPr>
+        </p:nvSpPr>
+        <p:spPr/>
+        <p:txBody>
+          <a:bodyPr/>
+          <a:lstStyle/>
+          <a:p>
+            <a:endParaRPr kumimoji="1" lang="en-US" altLang="ko-KR" dirty="0"/>
+          </a:p>
+        </p:txBody>
+      </p:sp>
+      <p:sp>
+        <p:nvSpPr>
+          <p:cNvPr id="8" name="내용 개체 틀 7">
+            <a:extLst>
+              <a:ext uri="{FF2B5EF4-FFF2-40B4-BE49-F238E27FC236}">
+                <a16:creationId xmlns:a16="http://schemas.microsoft.com/office/drawing/2014/main" id="{BEBA2C4A-B0BF-F2E4-EA6E-614C99CBA184}"/>
+              </a:ext>
+            </a:extLst>
+          </p:cNvPr>
+          <p:cNvSpPr>
+            <a:spLocks noGrp="1"/>
+          </p:cNvSpPr>
+          <p:nvPr>
+            <p:ph idx="1"/>
+          </p:nvPr>
+        </p:nvSpPr>
+        <p:spPr/>
+        <p:txBody>
+          <a:bodyPr>
+            <a:normAutofit/>
+          </a:bodyPr>
+          <a:lstStyle/>
+          <a:p/>
+        </p:txBody>
+      </p:sp>
       <p:sp>
         <p:nvSpPr>
           <p:cNvPr id="9" name="TextBox 12">
@@ -4018,7 +4259,7 @@
         </p:nvSpPr>
         <p:spPr>
           <a:xfrm>
-            <a:off x="365760" y="4948567"/>
+            <a:off x="365760" y="2979581"/>
             <a:ext cx="8412480" cy="201168"/>
           </a:xfrm>
           <a:prstGeom prst="rect">
@@ -4062,8 +4303,8 @@
         </p:blipFill>
         <p:spPr>
           <a:xfrm>
-            <a:off x="1460500" y="5186311"/>
-            <a:ext cx="6223000" cy="1127125"/>
+            <a:off x="542330" y="3217325"/>
+            <a:ext cx="8059341" cy="1459728"/>
           </a:xfrm>
           <a:prstGeom prst="rect">
             <a:avLst/>
@@ -4083,7 +4324,7 @@
 </p:sld>
 </file>
 
-<file path=ppt/slides/slide11.xml><?xml version="1.0" encoding="utf-8"?>
+<file path=ppt/slides/slide12.xml><?xml version="1.0" encoding="utf-8"?>
 <p:sld xmlns:a="http://schemas.openxmlformats.org/drawingml/2006/main" xmlns:r="http://schemas.openxmlformats.org/officeDocument/2006/relationships" xmlns:p="http://schemas.openxmlformats.org/presentationml/2006/main">
   <p:cSld>
     <p:spTree>
@@ -5273,7 +5514,7 @@
                 <a:ea typeface="맑은 고딕" panose="020B0503020000020004" pitchFamily="34" charset="-127"/>
                 <a:cs typeface="+mn-cs"/>
               </a:rPr>
-              <a:t>- 11 -</a:t>
+              <a:t>- 12 -</a:t>
             </a:r>
           </a:p>
         </p:txBody>
@@ -5558,7 +5799,7 @@
 </p:sld>
 </file>
 
-<file path=ppt/slides/slide12.xml><?xml version="1.0" encoding="utf-8"?>
+<file path=ppt/slides/slide13.xml><?xml version="1.0" encoding="utf-8"?>
 <p:sld xmlns:a="http://schemas.openxmlformats.org/drawingml/2006/main" xmlns:r="http://schemas.openxmlformats.org/officeDocument/2006/relationships" xmlns:p="http://schemas.openxmlformats.org/presentationml/2006/main">
   <p:cSld>
     <p:spTree>
@@ -7084,7 +7325,7 @@
                 <a:ea typeface="맑은 고딕" panose="020B0503020000020004" pitchFamily="34" charset="-127"/>
                 <a:cs typeface="+mn-cs"/>
               </a:rPr>
-              <a:t>- 12 -</a:t>
+              <a:t>- 13 -</a:t>
             </a:r>
           </a:p>
         </p:txBody>
@@ -7306,7 +7547,7 @@
 </p:sld>
 </file>
 
-<file path=ppt/slides/slide13.xml><?xml version="1.0" encoding="utf-8"?>
+<file path=ppt/slides/slide14.xml><?xml version="1.0" encoding="utf-8"?>
 <p:sld xmlns:a="http://schemas.openxmlformats.org/drawingml/2006/main" xmlns:r="http://schemas.openxmlformats.org/officeDocument/2006/relationships" xmlns:p="http://schemas.openxmlformats.org/presentationml/2006/main">
   <p:cSld>
     <p:spTree>
@@ -7405,7 +7646,7 @@
                   <a:prstClr val="black"/>
                 </a:solidFill>
               </a:rPr>
-              <a:t>- 13 -</a:t>
+              <a:t>- 14 -</a:t>
             </a:r>
           </a:p>
         </p:txBody>
@@ -8334,7 +8575,7 @@
 </p:sld>
 </file>
 
-<file path=ppt/slides/slide14.xml><?xml version="1.0" encoding="utf-8"?>
+<file path=ppt/slides/slide15.xml><?xml version="1.0" encoding="utf-8"?>
 <p:sld xmlns:a="http://schemas.openxmlformats.org/drawingml/2006/main" xmlns:r="http://schemas.openxmlformats.org/officeDocument/2006/relationships" xmlns:p="http://schemas.openxmlformats.org/presentationml/2006/main">
   <p:cSld>
     <p:spTree>
@@ -9524,7 +9765,7 @@
                 <a:ea typeface="맑은 고딕" panose="020B0503020000020004" pitchFamily="34" charset="-127"/>
                 <a:cs typeface="+mn-cs"/>
               </a:rPr>
-              <a:t>- 14 -</a:t>
+              <a:t>- 15 -</a:t>
             </a:r>
           </a:p>
         </p:txBody>
@@ -9789,7 +10030,7 @@
 </p:sld>
 </file>
 
-<file path=ppt/slides/slide15.xml><?xml version="1.0" encoding="utf-8"?>
+<file path=ppt/slides/slide16.xml><?xml version="1.0" encoding="utf-8"?>
 <p:sld xmlns:a="http://schemas.openxmlformats.org/drawingml/2006/main" xmlns:r="http://schemas.openxmlformats.org/officeDocument/2006/relationships" xmlns:p="http://schemas.openxmlformats.org/presentationml/2006/main">
   <p:cSld>
     <p:spTree>
@@ -10688,7 +10929,7 @@
                 <a:ea typeface="맑은 고딕" panose="020B0503020000020004" pitchFamily="34" charset="-127"/>
                 <a:cs typeface="+mn-cs"/>
               </a:rPr>
-              <a:t>- 15 -</a:t>
+              <a:t>- 16 -</a:t>
             </a:r>
           </a:p>
         </p:txBody>
@@ -10901,869 +11142,6 @@
     <p:extLst>
       <p:ext uri="{BB962C8B-B14F-4D97-AF65-F5344CB8AC3E}">
         <p14:creationId xmlns:p14="http://schemas.microsoft.com/office/powerpoint/2010/main" val="2789569477"/>
-      </p:ext>
-    </p:extLst>
-  </p:cSld>
-  <p:clrMapOvr>
-    <a:masterClrMapping/>
-  </p:clrMapOvr>
-</p:sld>
-</file>
-
-<file path=ppt/slides/slide16.xml><?xml version="1.0" encoding="utf-8"?>
-<p:sld xmlns:a="http://schemas.openxmlformats.org/drawingml/2006/main" xmlns:r="http://schemas.openxmlformats.org/officeDocument/2006/relationships" xmlns:p="http://schemas.openxmlformats.org/presentationml/2006/main">
-  <p:cSld>
-    <p:spTree>
-      <p:nvGrpSpPr>
-        <p:cNvPr id="1" name="">
-          <a:extLst>
-            <a:ext uri="{FF2B5EF4-FFF2-40B4-BE49-F238E27FC236}">
-              <a16:creationId xmlns:a16="http://schemas.microsoft.com/office/drawing/2014/main" id="{8E4F1F13-426B-086B-7D8C-9A58A0F879DB}"/>
-            </a:ext>
-          </a:extLst>
-        </p:cNvPr>
-        <p:cNvGrpSpPr/>
-        <p:nvPr/>
-      </p:nvGrpSpPr>
-      <p:grpSpPr>
-        <a:xfrm>
-          <a:off x="0" y="0"/>
-          <a:ext cx="0" cy="0"/>
-          <a:chOff x="0" y="0"/>
-          <a:chExt cx="0" cy="0"/>
-        </a:xfrm>
-      </p:grpSpPr>
-      <p:sp>
-        <p:nvSpPr>
-          <p:cNvPr id="2" name="제목 1">
-            <a:extLst>
-              <a:ext uri="{FF2B5EF4-FFF2-40B4-BE49-F238E27FC236}">
-                <a16:creationId xmlns:a16="http://schemas.microsoft.com/office/drawing/2014/main" id="{AA26A92D-924E-0575-9551-F8FD7BFD3FAD}"/>
-              </a:ext>
-            </a:extLst>
-          </p:cNvPr>
-          <p:cNvSpPr>
-            <a:spLocks noGrp="1"/>
-          </p:cNvSpPr>
-          <p:nvPr>
-            <p:ph type="title"/>
-          </p:nvPr>
-        </p:nvSpPr>
-        <p:spPr/>
-        <p:txBody>
-          <a:bodyPr/>
-          <a:lstStyle/>
-          <a:p>
-            <a:r>
-              <a:rPr sz="2400" b="1">
-                <a:solidFill>
-                  <a:srgbClr val="000000"/>
-                </a:solidFill>
-                <a:latin typeface="맑은 고딕"/>
-                <a:ea typeface="맑은 고딕"/>
-              </a:rPr>
-              <a:t>09. 실습 — 위임 계약</a:t>
-            </a:r>
-          </a:p>
-        </p:txBody>
-      </p:sp>
-      <p:sp>
-        <p:nvSpPr>
-          <p:cNvPr id="3" name="슬라이드 번호 개체 틀 2">
-            <a:extLst>
-              <a:ext uri="{FF2B5EF4-FFF2-40B4-BE49-F238E27FC236}">
-                <a16:creationId xmlns:a16="http://schemas.microsoft.com/office/drawing/2014/main" id="{12CF30EE-4DFD-8063-56B8-B8689E76DFCA}"/>
-              </a:ext>
-            </a:extLst>
-          </p:cNvPr>
-          <p:cNvSpPr>
-            <a:spLocks noGrp="1"/>
-          </p:cNvSpPr>
-          <p:nvPr>
-            <p:ph type="sldNum" sz="quarter" idx="10"/>
-          </p:nvPr>
-        </p:nvSpPr>
-        <p:spPr/>
-        <p:txBody>
-          <a:bodyPr/>
-          <a:lstStyle/>
-          <a:p>
-            <a:pPr>
-              <a:defRPr/>
-            </a:pPr>
-            <a:r>
-              <a:rPr lang="en-US" altLang="ko-KR">
-                <a:solidFill>
-                  <a:prstClr val="black"/>
-                </a:solidFill>
-              </a:rPr>
-              <a:t>- 16 -</a:t>
-            </a:r>
-          </a:p>
-        </p:txBody>
-      </p:sp>
-      <p:sp>
-        <p:nvSpPr>
-          <p:cNvPr id="5" name="텍스트 개체 틀 4">
-            <a:extLst>
-              <a:ext uri="{FF2B5EF4-FFF2-40B4-BE49-F238E27FC236}">
-                <a16:creationId xmlns:a16="http://schemas.microsoft.com/office/drawing/2014/main" id="{D66274C8-E16F-5AEB-614B-D8D32DA3E8C6}"/>
-              </a:ext>
-            </a:extLst>
-          </p:cNvPr>
-          <p:cNvSpPr>
-            <a:spLocks noGrp="1"/>
-          </p:cNvSpPr>
-          <p:nvPr>
-            <p:ph type="body" sz="quarter" idx="11"/>
-          </p:nvPr>
-        </p:nvSpPr>
-        <p:spPr/>
-        <p:txBody>
-          <a:bodyPr/>
-          <a:lstStyle/>
-          <a:p>
-            <a:r>
-              <a:rPr kumimoji="1" lang="en-US" altLang="ko-KR" sz="1400" dirty="0" err="1"/>
-              <a:t>06. 작업 위임과 도구·권한·상태의 경계</a:t>
-            </a:r>
-          </a:p>
-        </p:txBody>
-      </p:sp>
-      <p:sp>
-        <p:nvSpPr>
-          <p:cNvPr id="6" name="텍스트 개체 틀 5">
-            <a:extLst>
-              <a:ext uri="{FF2B5EF4-FFF2-40B4-BE49-F238E27FC236}">
-                <a16:creationId xmlns:a16="http://schemas.microsoft.com/office/drawing/2014/main" id="{A24E58E1-194B-A320-AEEE-24D08685BB67}"/>
-              </a:ext>
-            </a:extLst>
-          </p:cNvPr>
-          <p:cNvSpPr>
-            <a:spLocks noGrp="1"/>
-          </p:cNvSpPr>
-          <p:nvPr>
-            <p:ph type="body" sz="quarter" idx="12"/>
-          </p:nvPr>
-        </p:nvSpPr>
-        <p:spPr/>
-        <p:txBody>
-          <a:bodyPr/>
-          <a:lstStyle/>
-          <a:p>
-            <a:endParaRPr kumimoji="1" lang="ko-KR" altLang="en-US" dirty="0"/>
-          </a:p>
-        </p:txBody>
-      </p:sp>
-      <p:sp>
-        <p:nvSpPr>
-          <p:cNvPr id="7" name="텍스트 개체 틀 6">
-            <a:extLst>
-              <a:ext uri="{FF2B5EF4-FFF2-40B4-BE49-F238E27FC236}">
-                <a16:creationId xmlns:a16="http://schemas.microsoft.com/office/drawing/2014/main" id="{A219F420-613B-6234-45F6-0955A9A4505F}"/>
-              </a:ext>
-            </a:extLst>
-          </p:cNvPr>
-          <p:cNvSpPr>
-            <a:spLocks noGrp="1"/>
-          </p:cNvSpPr>
-          <p:nvPr>
-            <p:ph type="body" sz="quarter" idx="13"/>
-          </p:nvPr>
-        </p:nvSpPr>
-        <p:spPr/>
-        <p:txBody>
-          <a:bodyPr/>
-          <a:lstStyle/>
-          <a:p>
-            <a:endParaRPr kumimoji="1" lang="en-US" altLang="ko-KR" dirty="0"/>
-          </a:p>
-        </p:txBody>
-      </p:sp>
-      <p:sp>
-        <p:nvSpPr>
-          <p:cNvPr id="8" name="내용 개체 틀 7">
-            <a:extLst>
-              <a:ext uri="{FF2B5EF4-FFF2-40B4-BE49-F238E27FC236}">
-                <a16:creationId xmlns:a16="http://schemas.microsoft.com/office/drawing/2014/main" id="{BEBA2C4A-B0BF-F2E4-EA6E-614C99CBA184}"/>
-              </a:ext>
-            </a:extLst>
-          </p:cNvPr>
-          <p:cNvSpPr>
-            <a:spLocks noGrp="1"/>
-          </p:cNvSpPr>
-          <p:nvPr>
-            <p:ph idx="1"/>
-          </p:nvPr>
-        </p:nvSpPr>
-        <p:spPr>
-          <a:xfrm>
-            <a:off x="365760" y="960120"/>
-            <a:ext cx="8622792" cy="5352345"/>
-          </a:xfrm>
-        </p:spPr>
-        <p:txBody>
-          <a:bodyPr>
-            <a:normAutofit/>
-          </a:bodyPr>
-          <a:lstStyle/>
-          <a:p>
-            <a:pPr marL="0" indent="0">
-              <a:spcBef>
-                <a:spcPts val="300"/>
-              </a:spcBef>
-              <a:spcAft>
-                <a:spcPts val="300"/>
-              </a:spcAft>
-              <a:buNone/>
-            </a:pPr>
-            <a:r>
-              <a:rPr sz="1600" b="0">
-                <a:solidFill>
-                  <a:srgbClr val="000000"/>
-                </a:solidFill>
-                <a:latin typeface="맑은 고딕"/>
-                <a:ea typeface="맑은 고딕"/>
-              </a:rPr>
-              <a:t>실습 5의 맥락 패키지와 실습 4의 수용 기준을 LLM에 제공하여 </a:t>
-            </a:r>
-            <a:r>
-              <a:rPr sz="1600" b="1">
-                <a:solidFill>
-                  <a:srgbClr val="000000"/>
-                </a:solidFill>
-                <a:latin typeface="맑은 고딕"/>
-                <a:ea typeface="맑은 고딕"/>
-              </a:rPr>
-              <a:t>"신청한다"의 위임 계약</a:t>
-            </a:r>
-            <a:r>
-              <a:rPr sz="1600" b="0">
-                <a:solidFill>
-                  <a:srgbClr val="000000"/>
-                </a:solidFill>
-                <a:latin typeface="맑은 고딕"/>
-                <a:ea typeface="맑은 고딕"/>
-              </a:rPr>
-              <a:t>을 만들고, 점검 항목으로 피드백하여 완성하십시오.</a:t>
-            </a:r>
-          </a:p>
-          <a:p>
-            <a:pPr lvl="2" marL="723900" indent="-368300">
-              <a:spcBef>
-                <a:spcPts val="300"/>
-              </a:spcBef>
-              <a:spcAft>
-                <a:spcPts val="300"/>
-              </a:spcAft>
-              <a:buSzPct val="90000"/>
-              <a:buFont typeface="Wingdings" pitchFamily="2" charset="2"/>
-              <a:buChar char=""/>
-            </a:pPr>
-            <a:r>
-              <a:rPr sz="1800" b="1">
-                <a:solidFill>
-                  <a:srgbClr val="000000"/>
-                </a:solidFill>
-                <a:latin typeface="맑은 고딕"/>
-                <a:ea typeface="맑은 고딕"/>
-              </a:rPr>
-              <a:t>투입물</a:t>
-            </a:r>
-          </a:p>
-          <a:p>
-            <a:pPr lvl="3" marL="723900" indent="0">
-              <a:spcBef>
-                <a:spcPts val="300"/>
-              </a:spcBef>
-              <a:spcAft>
-                <a:spcPts val="300"/>
-              </a:spcAft>
-              <a:buNone/>
-            </a:pPr>
-            <a:r>
-              <a:rPr sz="1600" b="0">
-                <a:solidFill>
-                  <a:srgbClr val="000000"/>
-                </a:solidFill>
-                <a:latin typeface="맑은 고딕"/>
-                <a:ea typeface="맑은 고딕"/>
-              </a:rPr>
-              <a:t>실습 3의 </a:t>
-            </a:r>
-            <a:r>
-              <a:rPr sz="1600" b="1">
-                <a:solidFill>
-                  <a:srgbClr val="000000"/>
-                </a:solidFill>
-                <a:latin typeface="맑은 고딕"/>
-                <a:ea typeface="맑은 고딕"/>
-              </a:rPr>
-              <a:t>작업 명세서</a:t>
-            </a:r>
-            <a:r>
-              <a:rPr sz="1600" b="0">
-                <a:solidFill>
-                  <a:srgbClr val="000000"/>
-                </a:solidFill>
-                <a:latin typeface="맑은 고딕"/>
-                <a:ea typeface="맑은 고딕"/>
-              </a:rPr>
-              <a:t>, 실습 4의 </a:t>
-            </a:r>
-            <a:r>
-              <a:rPr sz="1600" b="1">
-                <a:solidFill>
-                  <a:srgbClr val="000000"/>
-                </a:solidFill>
-                <a:latin typeface="맑은 고딕"/>
-                <a:ea typeface="맑은 고딕"/>
-              </a:rPr>
-              <a:t>수용 기준과 작업 단위</a:t>
-            </a:r>
-            <a:r>
-              <a:rPr sz="1600" b="0">
-                <a:solidFill>
-                  <a:srgbClr val="000000"/>
-                </a:solidFill>
-                <a:latin typeface="맑은 고딕"/>
-                <a:ea typeface="맑은 고딕"/>
-              </a:rPr>
-              <a:t>, 실습 5의 </a:t>
-            </a:r>
-            <a:r>
-              <a:rPr sz="1600" b="1">
-                <a:solidFill>
-                  <a:srgbClr val="000000"/>
-                </a:solidFill>
-                <a:latin typeface="맑은 고딕"/>
-                <a:ea typeface="맑은 고딕"/>
-              </a:rPr>
-              <a:t>맥락 패키지</a:t>
-            </a:r>
-          </a:p>
-          <a:p>
-            <a:pPr lvl="2" marL="723900" indent="-368300">
-              <a:spcBef>
-                <a:spcPts val="300"/>
-              </a:spcBef>
-              <a:spcAft>
-                <a:spcPts val="300"/>
-              </a:spcAft>
-              <a:buSzPct val="90000"/>
-              <a:buFont typeface="Wingdings" pitchFamily="2" charset="2"/>
-              <a:buChar char=""/>
-            </a:pPr>
-            <a:r>
-              <a:rPr sz="1800" b="1">
-                <a:solidFill>
-                  <a:srgbClr val="000000"/>
-                </a:solidFill>
-                <a:latin typeface="맑은 고딕"/>
-                <a:ea typeface="맑은 고딕"/>
-              </a:rPr>
-              <a:t>프롬프트</a:t>
-            </a:r>
-          </a:p>
-          <a:p>
-            <a:pPr lvl="3" marL="723900" indent="0">
-              <a:spcBef>
-                <a:spcPts val="300"/>
-              </a:spcBef>
-              <a:spcAft>
-                <a:spcPts val="300"/>
-              </a:spcAft>
-              <a:buNone/>
-            </a:pPr>
-            <a:r>
-              <a:rPr sz="1600" b="0">
-                <a:solidFill>
-                  <a:srgbClr val="000000"/>
-                </a:solidFill>
-                <a:latin typeface="맑은 고딕"/>
-                <a:ea typeface="맑은 고딕"/>
-              </a:rPr>
-              <a:t>"신청한다 과제의 </a:t>
-            </a:r>
-            <a:r>
-              <a:rPr sz="1600" b="1">
-                <a:solidFill>
-                  <a:srgbClr val="000000"/>
-                </a:solidFill>
-                <a:latin typeface="맑은 고딕"/>
-                <a:ea typeface="맑은 고딕"/>
-              </a:rPr>
-              <a:t>위임 계약</a:t>
-            </a:r>
-            <a:r>
-              <a:rPr sz="1600" b="0">
-                <a:solidFill>
-                  <a:srgbClr val="000000"/>
-                </a:solidFill>
-                <a:latin typeface="맑은 고딕"/>
-                <a:ea typeface="맑은 고딕"/>
-              </a:rPr>
-              <a:t>을 한 장으로 써줘. 입력·도구·권한·상태·종료 조건·멈출 조건의 여섯 항목으로 적고, 권한은 </a:t>
-            </a:r>
-            <a:r>
-              <a:rPr sz="1600" b="1">
-                <a:solidFill>
-                  <a:srgbClr val="000000"/>
-                </a:solidFill>
-                <a:latin typeface="맑은 고딕"/>
-                <a:ea typeface="맑은 고딕"/>
-              </a:rPr>
-              <a:t>읽기·쓰기·실행·외부 호출</a:t>
-            </a:r>
-            <a:r>
-              <a:rPr sz="1600" b="0">
-                <a:solidFill>
-                  <a:srgbClr val="000000"/>
-                </a:solidFill>
-                <a:latin typeface="맑은 고딕"/>
-                <a:ea typeface="맑은 고딕"/>
-              </a:rPr>
-              <a:t>로 나눠 금지한 것까지 적어줘."</a:t>
-            </a:r>
-          </a:p>
-          <a:p>
-            <a:pPr lvl="2" marL="723900" indent="-368300">
-              <a:spcBef>
-                <a:spcPts val="300"/>
-              </a:spcBef>
-              <a:spcAft>
-                <a:spcPts val="300"/>
-              </a:spcAft>
-              <a:buSzPct val="90000"/>
-              <a:buFont typeface="Wingdings" pitchFamily="2" charset="2"/>
-              <a:buChar char=""/>
-            </a:pPr>
-            <a:r>
-              <a:rPr sz="1800" b="1">
-                <a:solidFill>
-                  <a:srgbClr val="000000"/>
-                </a:solidFill>
-                <a:latin typeface="맑은 고딕"/>
-                <a:ea typeface="맑은 고딕"/>
-              </a:rPr>
-              <a:t>점검 항목</a:t>
-            </a:r>
-          </a:p>
-          <a:p>
-            <a:pPr lvl="3" marL="947420" indent="-223520">
-              <a:spcBef>
-                <a:spcPts val="300"/>
-              </a:spcBef>
-              <a:spcAft>
-                <a:spcPts val="300"/>
-              </a:spcAft>
-              <a:buNone/>
-            </a:pPr>
-            <a:r>
-              <a:rPr sz="1600" b="0">
-                <a:solidFill>
-                  <a:srgbClr val="000000"/>
-                </a:solidFill>
-                <a:latin typeface="맑은 고딕"/>
-                <a:ea typeface="맑은 고딕"/>
-              </a:rPr>
-              <a:t>1. </a:t>
-            </a:r>
-            <a:r>
-              <a:rPr sz="1600" b="1">
-                <a:solidFill>
-                  <a:srgbClr val="000000"/>
-                </a:solidFill>
-                <a:latin typeface="맑은 고딕"/>
-                <a:ea typeface="맑은 고딕"/>
-              </a:rPr>
-              <a:t>도구</a:t>
-            </a:r>
-            <a:r>
-              <a:rPr sz="1600" b="0">
-                <a:solidFill>
-                  <a:srgbClr val="000000"/>
-                </a:solidFill>
-                <a:latin typeface="맑은 고딕"/>
-                <a:ea typeface="맑은 고딕"/>
-              </a:rPr>
-              <a:t> —</a:t>
-            </a:r>
-            <a:r>
-              <a:rPr sz="1400" b="0">
-                <a:solidFill>
-                  <a:srgbClr val="000000"/>
-                </a:solidFill>
-                <a:latin typeface="맑은 고딕"/>
-                <a:ea typeface="맑은 고딕"/>
-              </a:rPr>
-              <a:t> "신청한다"에 필요한 도구만 있고, 주지 않은 도구가 경계가 되는가?</a:t>
-            </a:r>
-          </a:p>
-          <a:p>
-            <a:pPr lvl="3" marL="947420" indent="-223520">
-              <a:spcBef>
-                <a:spcPts val="300"/>
-              </a:spcBef>
-              <a:spcAft>
-                <a:spcPts val="300"/>
-              </a:spcAft>
-              <a:buNone/>
-            </a:pPr>
-            <a:r>
-              <a:rPr sz="1600" b="0">
-                <a:solidFill>
-                  <a:srgbClr val="000000"/>
-                </a:solidFill>
-                <a:latin typeface="맑은 고딕"/>
-                <a:ea typeface="맑은 고딕"/>
-              </a:rPr>
-              <a:t>2. </a:t>
-            </a:r>
-            <a:r>
-              <a:rPr sz="1600" b="1">
-                <a:solidFill>
-                  <a:srgbClr val="000000"/>
-                </a:solidFill>
-                <a:latin typeface="맑은 고딕"/>
-                <a:ea typeface="맑은 고딕"/>
-              </a:rPr>
-              <a:t>쓰기 범위</a:t>
-            </a:r>
-            <a:r>
-              <a:rPr sz="1600" b="0">
-                <a:solidFill>
-                  <a:srgbClr val="000000"/>
-                </a:solidFill>
-                <a:latin typeface="맑은 고딕"/>
-                <a:ea typeface="맑은 고딕"/>
-              </a:rPr>
-              <a:t> —</a:t>
-            </a:r>
-            <a:r>
-              <a:rPr sz="1400" b="0">
-                <a:solidFill>
-                  <a:srgbClr val="000000"/>
-                </a:solidFill>
-                <a:latin typeface="맑은 고딕"/>
-                <a:ea typeface="맑은 고딕"/>
-              </a:rPr>
-              <a:t> 쓰기를 </a:t>
-            </a:r>
-            <a:r>
-              <a:rPr sz="1400" b="0">
-                <a:solidFill>
-                  <a:srgbClr val="000000"/>
-                </a:solidFill>
-                <a:latin typeface="맑은 고딕"/>
-                <a:ea typeface="맑은 고딕"/>
-              </a:rPr>
-              <a:t>subscription</a:t>
-            </a:r>
-            <a:r>
-              <a:rPr sz="1400" b="0">
-                <a:solidFill>
-                  <a:srgbClr val="000000"/>
-                </a:solidFill>
-                <a:latin typeface="맑은 고딕"/>
-                <a:ea typeface="맑은 고딕"/>
-              </a:rPr>
-              <a:t> 패키지와 테스트로 묶었는가?</a:t>
-            </a:r>
-          </a:p>
-          <a:p>
-            <a:pPr lvl="3" marL="947420" indent="-223520">
-              <a:spcBef>
-                <a:spcPts val="300"/>
-              </a:spcBef>
-              <a:spcAft>
-                <a:spcPts val="300"/>
-              </a:spcAft>
-              <a:buNone/>
-            </a:pPr>
-            <a:r>
-              <a:rPr sz="1600" b="0">
-                <a:solidFill>
-                  <a:srgbClr val="000000"/>
-                </a:solidFill>
-                <a:latin typeface="맑은 고딕"/>
-                <a:ea typeface="맑은 고딕"/>
-              </a:rPr>
-              <a:t>3. </a:t>
-            </a:r>
-            <a:r>
-              <a:rPr sz="1600" b="1">
-                <a:solidFill>
-                  <a:srgbClr val="000000"/>
-                </a:solidFill>
-                <a:latin typeface="맑은 고딕"/>
-                <a:ea typeface="맑은 고딕"/>
-              </a:rPr>
-              <a:t>되돌릴 수 없는 일</a:t>
-            </a:r>
-            <a:r>
-              <a:rPr sz="1600" b="0">
-                <a:solidFill>
-                  <a:srgbClr val="000000"/>
-                </a:solidFill>
-                <a:latin typeface="맑은 고딕"/>
-                <a:ea typeface="맑은 고딕"/>
-              </a:rPr>
-              <a:t> —</a:t>
-            </a:r>
-            <a:r>
-              <a:rPr sz="1400" b="0">
-                <a:solidFill>
-                  <a:srgbClr val="000000"/>
-                </a:solidFill>
-                <a:latin typeface="맑은 고딕"/>
-                <a:ea typeface="맑은 고딕"/>
-              </a:rPr>
-              <a:t> 실제 결제·배송 호출과 원격 저장소 반영을 뺐는가?</a:t>
-            </a:r>
-          </a:p>
-          <a:p>
-            <a:pPr lvl="3" marL="947420" indent="-223520">
-              <a:spcBef>
-                <a:spcPts val="300"/>
-              </a:spcBef>
-              <a:spcAft>
-                <a:spcPts val="300"/>
-              </a:spcAft>
-              <a:buNone/>
-            </a:pPr>
-            <a:r>
-              <a:rPr sz="1600" b="0">
-                <a:solidFill>
-                  <a:srgbClr val="000000"/>
-                </a:solidFill>
-                <a:latin typeface="맑은 고딕"/>
-                <a:ea typeface="맑은 고딕"/>
-              </a:rPr>
-              <a:t>4. </a:t>
-            </a:r>
-            <a:r>
-              <a:rPr sz="1600" b="1">
-                <a:solidFill>
-                  <a:srgbClr val="000000"/>
-                </a:solidFill>
-                <a:latin typeface="맑은 고딕"/>
-                <a:ea typeface="맑은 고딕"/>
-              </a:rPr>
-              <a:t>종료 조건</a:t>
-            </a:r>
-            <a:r>
-              <a:rPr sz="1600" b="0">
-                <a:solidFill>
-                  <a:srgbClr val="000000"/>
-                </a:solidFill>
-                <a:latin typeface="맑은 고딕"/>
-                <a:ea typeface="맑은 고딕"/>
-              </a:rPr>
-              <a:t> —</a:t>
-            </a:r>
-            <a:r>
-              <a:rPr sz="1400" b="0">
-                <a:solidFill>
-                  <a:srgbClr val="000000"/>
-                </a:solidFill>
-                <a:latin typeface="맑은 고딕"/>
-                <a:ea typeface="맑은 고딕"/>
-              </a:rPr>
-              <a:t> 완료의 정의</a:t>
-            </a:r>
-            <a:r>
-              <a:rPr sz="1200" b="0">
-                <a:solidFill>
-                  <a:srgbClr val="000000"/>
-                </a:solidFill>
-                <a:latin typeface="맑은 고딕"/>
-                <a:ea typeface="맑은 고딕"/>
-              </a:rPr>
-              <a:t>(수용 테스트 5개)</a:t>
-            </a:r>
-            <a:r>
-              <a:rPr sz="1400" b="0">
-                <a:solidFill>
-                  <a:srgbClr val="000000"/>
-                </a:solidFill>
-                <a:latin typeface="맑은 고딕"/>
-                <a:ea typeface="맑은 고딕"/>
-              </a:rPr>
-              <a:t>로 끝을 정했는가?</a:t>
-            </a:r>
-          </a:p>
-          <a:p>
-            <a:pPr lvl="3" marL="947420" indent="-223520">
-              <a:spcBef>
-                <a:spcPts val="300"/>
-              </a:spcBef>
-              <a:spcAft>
-                <a:spcPts val="300"/>
-              </a:spcAft>
-              <a:buNone/>
-            </a:pPr>
-            <a:r>
-              <a:rPr sz="1600" b="0">
-                <a:solidFill>
-                  <a:srgbClr val="000000"/>
-                </a:solidFill>
-                <a:latin typeface="맑은 고딕"/>
-                <a:ea typeface="맑은 고딕"/>
-              </a:rPr>
-              <a:t>5. </a:t>
-            </a:r>
-            <a:r>
-              <a:rPr sz="1600" b="1">
-                <a:solidFill>
-                  <a:srgbClr val="000000"/>
-                </a:solidFill>
-                <a:latin typeface="맑은 고딕"/>
-                <a:ea typeface="맑은 고딕"/>
-              </a:rPr>
-              <a:t>멈출 조건</a:t>
-            </a:r>
-            <a:r>
-              <a:rPr sz="1600" b="0">
-                <a:solidFill>
-                  <a:srgbClr val="000000"/>
-                </a:solidFill>
-                <a:latin typeface="맑은 고딕"/>
-                <a:ea typeface="맑은 고딕"/>
-              </a:rPr>
-              <a:t> —</a:t>
-            </a:r>
-            <a:r>
-              <a:rPr sz="1400" b="0">
-                <a:solidFill>
-                  <a:srgbClr val="000000"/>
-                </a:solidFill>
-                <a:latin typeface="맑은 고딕"/>
-                <a:ea typeface="맑은 고딕"/>
-              </a:rPr>
-              <a:t> 사람이 정할 결정</a:t>
-            </a:r>
-            <a:r>
-              <a:rPr sz="1200" b="0">
-                <a:solidFill>
-                  <a:srgbClr val="000000"/>
-                </a:solidFill>
-                <a:latin typeface="맑은 고딕"/>
-                <a:ea typeface="맑은 고딕"/>
-              </a:rPr>
-              <a:t>(공휴일 규칙)</a:t>
-            </a:r>
-            <a:r>
-              <a:rPr sz="1400" b="0">
-                <a:solidFill>
-                  <a:srgbClr val="000000"/>
-                </a:solidFill>
-                <a:latin typeface="맑은 고딕"/>
-                <a:ea typeface="맑은 고딕"/>
-              </a:rPr>
-              <a:t>과 실패 상한이 있는가?</a:t>
-            </a:r>
-          </a:p>
-          <a:p>
-            <a:pPr lvl="3" marL="947420" indent="-223520">
-              <a:spcBef>
-                <a:spcPts val="300"/>
-              </a:spcBef>
-              <a:spcAft>
-                <a:spcPts val="300"/>
-              </a:spcAft>
-              <a:buNone/>
-            </a:pPr>
-            <a:r>
-              <a:rPr sz="1600" b="0">
-                <a:solidFill>
-                  <a:srgbClr val="000000"/>
-                </a:solidFill>
-                <a:latin typeface="맑은 고딕"/>
-                <a:ea typeface="맑은 고딕"/>
-              </a:rPr>
-              <a:t>6. </a:t>
-            </a:r>
-            <a:r>
-              <a:rPr sz="1600" b="1">
-                <a:solidFill>
-                  <a:srgbClr val="000000"/>
-                </a:solidFill>
-                <a:latin typeface="맑은 고딕"/>
-                <a:ea typeface="맑은 고딕"/>
-              </a:rPr>
-              <a:t>신원</a:t>
-            </a:r>
-            <a:r>
-              <a:rPr sz="1600" b="0">
-                <a:solidFill>
-                  <a:srgbClr val="000000"/>
-                </a:solidFill>
-                <a:latin typeface="맑은 고딕"/>
-                <a:ea typeface="맑은 고딕"/>
-              </a:rPr>
-              <a:t> —</a:t>
-            </a:r>
-            <a:r>
-              <a:rPr sz="1400" b="0">
-                <a:solidFill>
-                  <a:srgbClr val="000000"/>
-                </a:solidFill>
-                <a:latin typeface="맑은 고딕"/>
-                <a:ea typeface="맑은 고딕"/>
-              </a:rPr>
-              <a:t> 사람의 자격을 빌리지 않고 전용 신원과 수명을 정했는가?</a:t>
-            </a:r>
-          </a:p>
-          <a:p>
-            <a:pPr lvl="2" marL="723900" indent="-368300">
-              <a:spcBef>
-                <a:spcPts val="300"/>
-              </a:spcBef>
-              <a:spcAft>
-                <a:spcPts val="300"/>
-              </a:spcAft>
-              <a:buSzPct val="90000"/>
-              <a:buFont typeface="Wingdings" pitchFamily="2" charset="2"/>
-              <a:buChar char=""/>
-            </a:pPr>
-            <a:r>
-              <a:rPr sz="1800" b="1">
-                <a:solidFill>
-                  <a:srgbClr val="000000"/>
-                </a:solidFill>
-                <a:latin typeface="맑은 고딕"/>
-                <a:ea typeface="맑은 고딕"/>
-              </a:rPr>
-              <a:t>결과물</a:t>
-            </a:r>
-            <a:r>
-              <a:rPr sz="1800" b="0">
-                <a:solidFill>
-                  <a:srgbClr val="000000"/>
-                </a:solidFill>
-                <a:latin typeface="맑은 고딕"/>
-                <a:ea typeface="맑은 고딕"/>
-              </a:rPr>
-              <a:t> —</a:t>
-            </a:r>
-            <a:r>
-              <a:rPr sz="1600" b="0">
-                <a:solidFill>
-                  <a:srgbClr val="000000"/>
-                </a:solidFill>
-                <a:latin typeface="맑은 고딕"/>
-                <a:ea typeface="맑은 고딕"/>
-              </a:rPr>
-              <a:t> "신청한다"의 위임 계약. 실습 7의 입력이 됩니다.</a:t>
-            </a:r>
-          </a:p>
-        </p:txBody>
-      </p:sp>
-    </p:spTree>
-    <p:extLst>
-      <p:ext uri="{BB962C8B-B14F-4D97-AF65-F5344CB8AC3E}">
-        <p14:creationId xmlns:p14="http://schemas.microsoft.com/office/powerpoint/2010/main" val="3555436673"/>
       </p:ext>
     </p:extLst>
   </p:cSld>
@@ -11825,7 +11203,7 @@
                 <a:latin typeface="맑은 고딕"/>
                 <a:ea typeface="맑은 고딕"/>
               </a:rPr>
-              <a:t>10. 요약</a:t>
+              <a:t>09. 실습 — 위임 계약</a:t>
             </a:r>
           </a:p>
         </p:txBody>
@@ -11959,7 +11337,12 @@
             <p:ph idx="1"/>
           </p:nvPr>
         </p:nvSpPr>
-        <p:spPr/>
+        <p:spPr>
+          <a:xfrm>
+            <a:off x="365760" y="960120"/>
+            <a:ext cx="8622792" cy="5352345"/>
+          </a:xfrm>
+        </p:spPr>
         <p:txBody>
           <a:bodyPr>
             <a:normAutofit/>
@@ -11968,72 +11351,51 @@
           <a:p>
             <a:pPr marL="0" indent="0">
               <a:spcBef>
-                <a:spcPts val="600"/>
+                <a:spcPts val="300"/>
               </a:spcBef>
               <a:spcAft>
-                <a:spcPts val="600"/>
+                <a:spcPts val="300"/>
               </a:spcAft>
               <a:buNone/>
             </a:pPr>
             <a:r>
-              <a:rPr sz="1800" b="0">
-                <a:solidFill>
-                  <a:srgbClr val="000000"/>
-                </a:solidFill>
-                <a:latin typeface="맑은 고딕"/>
-                <a:ea typeface="맑은 고딕"/>
-              </a:rPr>
-              <a:t>자율성은 </a:t>
-            </a:r>
-            <a:r>
-              <a:rPr sz="1800" b="1">
-                <a:solidFill>
-                  <a:srgbClr val="000000"/>
-                </a:solidFill>
-                <a:latin typeface="맑은 고딕"/>
-                <a:ea typeface="맑은 고딕"/>
-              </a:rPr>
-              <a:t>권한과 되돌림 수단이 정한 경계</a:t>
-            </a:r>
-            <a:r>
-              <a:rPr sz="1800" b="0">
-                <a:solidFill>
-                  <a:srgbClr val="000000"/>
-                </a:solidFill>
-                <a:latin typeface="맑은 고딕"/>
-                <a:ea typeface="맑은 고딕"/>
-              </a:rPr>
-              <a:t> 안에서만 허용한다.</a:t>
-            </a:r>
-          </a:p>
-          <a:p>
-            <a:pPr marL="342900" indent="0">
+              <a:rPr sz="1600" b="0">
+                <a:solidFill>
+                  <a:srgbClr val="000000"/>
+                </a:solidFill>
+                <a:latin typeface="맑은 고딕"/>
+                <a:ea typeface="맑은 고딕"/>
+              </a:rPr>
+              <a:t>실습 5의 맥락 패키지와 실습 4의 수용 기준을 LLM에 제공하여 </a:t>
+            </a:r>
+            <a:r>
+              <a:rPr sz="1600" b="1">
+                <a:solidFill>
+                  <a:srgbClr val="000000"/>
+                </a:solidFill>
+                <a:latin typeface="맑은 고딕"/>
+                <a:ea typeface="맑은 고딕"/>
+              </a:rPr>
+              <a:t>"신청한다"의 위임 계약</a:t>
+            </a:r>
+            <a:r>
+              <a:rPr sz="1600" b="0">
+                <a:solidFill>
+                  <a:srgbClr val="000000"/>
+                </a:solidFill>
+                <a:latin typeface="맑은 고딕"/>
+                <a:ea typeface="맑은 고딕"/>
+              </a:rPr>
+              <a:t>을 만들고, 점검 항목으로 피드백하여 완성하십시오.</a:t>
+            </a:r>
+          </a:p>
+          <a:p>
+            <a:pPr lvl="2" marL="723900" indent="-368300">
               <a:spcBef>
-                <a:spcPts val="600"/>
+                <a:spcPts val="300"/>
               </a:spcBef>
               <a:spcAft>
-                <a:spcPts val="600"/>
-              </a:spcAft>
-              <a:buNone/>
-            </a:pPr>
-            <a:r>
-              <a:rPr sz="1800" b="1">
-                <a:solidFill>
-                  <a:srgbClr val="000000"/>
-                </a:solidFill>
-                <a:latin typeface="맑은 고딕"/>
-                <a:ea typeface="맑은 고딕"/>
-              </a:rPr>
-              <a:t>위임 경계의 핵심</a:t>
-            </a:r>
-          </a:p>
-          <a:p>
-            <a:pPr lvl="2" marL="723900" indent="-368300">
-              <a:spcBef>
-                <a:spcPts val="600"/>
-              </a:spcBef>
-              <a:spcAft>
-                <a:spcPts val="600"/>
+                <a:spcPts val="300"/>
               </a:spcAft>
               <a:buSzPct val="90000"/>
               <a:buFont typeface="Wingdings" pitchFamily="2" charset="2"/>
@@ -12047,18 +11409,19 @@
                 <a:latin typeface="맑은 고딕"/>
                 <a:ea typeface="맑은 고딕"/>
               </a:rPr>
-              <a:t>네 축</a:t>
-            </a:r>
-            <a:r>
-              <a:rPr sz="1800" b="0">
-                <a:solidFill>
-                  <a:srgbClr val="000000"/>
-                </a:solidFill>
-                <a:latin typeface="맑은 고딕"/>
-                <a:ea typeface="맑은 고딕"/>
-              </a:rPr>
-              <a:t> —</a:t>
-            </a:r>
+              <a:t>투입물</a:t>
+            </a:r>
+          </a:p>
+          <a:p>
+            <a:pPr lvl="3" marL="723900" indent="0">
+              <a:spcBef>
+                <a:spcPts val="300"/>
+              </a:spcBef>
+              <a:spcAft>
+                <a:spcPts val="300"/>
+              </a:spcAft>
+              <a:buNone/>
+            </a:pPr>
             <a:r>
               <a:rPr sz="1600" b="0">
                 <a:solidFill>
@@ -12067,16 +11430,66 @@
                 <a:latin typeface="맑은 고딕"/>
                 <a:ea typeface="맑은 고딕"/>
               </a:rPr>
-              <a:t> 도구·권한·상태·멈출 조건. 맥락을 준 뒤 남는 질문은 어디까지 맡기는가다</a:t>
+              <a:t>실습 3의 </a:t>
+            </a:r>
+            <a:r>
+              <a:rPr sz="1600" b="1">
+                <a:solidFill>
+                  <a:srgbClr val="000000"/>
+                </a:solidFill>
+                <a:latin typeface="맑은 고딕"/>
+                <a:ea typeface="맑은 고딕"/>
+              </a:rPr>
+              <a:t>작업 명세서</a:t>
+            </a:r>
+            <a:r>
+              <a:rPr sz="1600" b="0">
+                <a:solidFill>
+                  <a:srgbClr val="000000"/>
+                </a:solidFill>
+                <a:latin typeface="맑은 고딕"/>
+                <a:ea typeface="맑은 고딕"/>
+              </a:rPr>
+              <a:t>, 실습 4의 </a:t>
+            </a:r>
+            <a:r>
+              <a:rPr sz="1600" b="1">
+                <a:solidFill>
+                  <a:srgbClr val="000000"/>
+                </a:solidFill>
+                <a:latin typeface="맑은 고딕"/>
+                <a:ea typeface="맑은 고딕"/>
+              </a:rPr>
+              <a:t>수용 기준과 작업 단위</a:t>
+            </a:r>
+            <a:r>
+              <a:rPr sz="1600" b="0">
+                <a:solidFill>
+                  <a:srgbClr val="000000"/>
+                </a:solidFill>
+                <a:latin typeface="맑은 고딕"/>
+                <a:ea typeface="맑은 고딕"/>
+              </a:rPr>
+              <a:t>, 실습 5의 </a:t>
+            </a:r>
+            <a:r>
+              <a:rPr sz="1600" b="1">
+                <a:solidFill>
+                  <a:srgbClr val="000000"/>
+                </a:solidFill>
+                <a:latin typeface="맑은 고딕"/>
+                <a:ea typeface="맑은 고딕"/>
+              </a:rPr>
+              <a:t>맥락 패키지</a:t>
             </a:r>
           </a:p>
           <a:p>
             <a:pPr lvl="2" marL="723900" indent="-368300">
               <a:spcBef>
-                <a:spcPts val="600"/>
+                <a:spcPts val="300"/>
               </a:spcBef>
               <a:spcAft>
-                <a:spcPts val="600"/>
+                <a:spcPts val="300"/>
               </a:spcAft>
               <a:buSzPct val="90000"/>
               <a:buFont typeface="Wingdings" pitchFamily="2" charset="2"/>
@@ -12090,18 +11503,19 @@
                 <a:latin typeface="맑은 고딕"/>
                 <a:ea typeface="맑은 고딕"/>
               </a:rPr>
-              <a:t>도구</a:t>
-            </a:r>
-            <a:r>
-              <a:rPr sz="1800" b="0">
-                <a:solidFill>
-                  <a:srgbClr val="000000"/>
-                </a:solidFill>
-                <a:latin typeface="맑은 고딕"/>
-                <a:ea typeface="맑은 고딕"/>
-              </a:rPr>
-              <a:t> —</a:t>
-            </a:r>
+              <a:t>프롬프트</a:t>
+            </a:r>
+          </a:p>
+          <a:p>
+            <a:pPr lvl="3" marL="723900" indent="0">
+              <a:spcBef>
+                <a:spcPts val="300"/>
+              </a:spcBef>
+              <a:spcAft>
+                <a:spcPts val="300"/>
+              </a:spcAft>
+              <a:buNone/>
+            </a:pPr>
             <a:r>
               <a:rPr sz="1600" b="0">
                 <a:solidFill>
@@ -12110,16 +11524,56 @@
                 <a:latin typeface="맑은 고딕"/>
                 <a:ea typeface="맑은 고딕"/>
               </a:rPr>
-              <a:t> 할 수 있는 일의 목록이 경계다. 도구의 정의와 설명은 프롬프트만큼 다듬는다</a:t>
+              <a:t>"신청한다 과제의 </a:t>
+            </a:r>
+            <a:r>
+              <a:rPr sz="1600" b="1">
+                <a:solidFill>
+                  <a:srgbClr val="000000"/>
+                </a:solidFill>
+                <a:latin typeface="맑은 고딕"/>
+                <a:ea typeface="맑은 고딕"/>
+              </a:rPr>
+              <a:t>위임 계약</a:t>
+            </a:r>
+            <a:r>
+              <a:rPr sz="1600" b="0">
+                <a:solidFill>
+                  <a:srgbClr val="000000"/>
+                </a:solidFill>
+                <a:latin typeface="맑은 고딕"/>
+                <a:ea typeface="맑은 고딕"/>
+              </a:rPr>
+              <a:t>을 한 장으로 써줘. 입력·도구·권한·상태·종료 조건·멈출 조건의 여섯 항목으로 적고, 권한은 </a:t>
+            </a:r>
+            <a:r>
+              <a:rPr sz="1600" b="1">
+                <a:solidFill>
+                  <a:srgbClr val="000000"/>
+                </a:solidFill>
+                <a:latin typeface="맑은 고딕"/>
+                <a:ea typeface="맑은 고딕"/>
+              </a:rPr>
+              <a:t>읽기·쓰기·실행·외부 호출</a:t>
+            </a:r>
+            <a:r>
+              <a:rPr sz="1600" b="0">
+                <a:solidFill>
+                  <a:srgbClr val="000000"/>
+                </a:solidFill>
+                <a:latin typeface="맑은 고딕"/>
+                <a:ea typeface="맑은 고딕"/>
+              </a:rPr>
+              <a:t>로 나눠 금지한 것까지 적어줘."</a:t>
             </a:r>
           </a:p>
           <a:p>
             <a:pPr lvl="2" marL="723900" indent="-368300">
               <a:spcBef>
-                <a:spcPts val="600"/>
+                <a:spcPts val="300"/>
               </a:spcBef>
               <a:spcAft>
-                <a:spcPts val="600"/>
+                <a:spcPts val="300"/>
               </a:spcAft>
               <a:buSzPct val="90000"/>
               <a:buFont typeface="Wingdings" pitchFamily="2" charset="2"/>
@@ -12133,10 +11587,41 @@
                 <a:latin typeface="맑은 고딕"/>
                 <a:ea typeface="맑은 고딕"/>
               </a:rPr>
-              <a:t>MCP</a:t>
-            </a:r>
-            <a:r>
-              <a:rPr sz="1800" b="0">
+              <a:t>점검 항목</a:t>
+            </a:r>
+          </a:p>
+          <a:p>
+            <a:pPr lvl="3" marL="947420" indent="-223520">
+              <a:spcBef>
+                <a:spcPts val="300"/>
+              </a:spcBef>
+              <a:spcAft>
+                <a:spcPts val="300"/>
+              </a:spcAft>
+              <a:buNone/>
+            </a:pPr>
+            <a:r>
+              <a:rPr sz="1600" b="0">
+                <a:solidFill>
+                  <a:srgbClr val="000000"/>
+                </a:solidFill>
+                <a:latin typeface="맑은 고딕"/>
+                <a:ea typeface="맑은 고딕"/>
+              </a:rPr>
+              <a:t>1. </a:t>
+            </a:r>
+            <a:r>
+              <a:rPr sz="1600" b="1">
+                <a:solidFill>
+                  <a:srgbClr val="000000"/>
+                </a:solidFill>
+                <a:latin typeface="맑은 고딕"/>
+                <a:ea typeface="맑은 고딕"/>
+              </a:rPr>
+              <a:t>도구</a:t>
+            </a:r>
+            <a:r>
+              <a:rPr sz="1600" b="0">
                 <a:solidFill>
                   <a:srgbClr val="000000"/>
                 </a:solidFill>
@@ -12146,6 +11631,27 @@
               <a:t> —</a:t>
             </a:r>
             <a:r>
+              <a:rPr sz="1400" b="0">
+                <a:solidFill>
+                  <a:srgbClr val="000000"/>
+                </a:solidFill>
+                <a:latin typeface="맑은 고딕"/>
+                <a:ea typeface="맑은 고딕"/>
+              </a:rPr>
+              <a:t> "신청한다"에 필요한 도구만 있고, 주지 않은 도구가 경계가 되는가?</a:t>
+            </a:r>
+          </a:p>
+          <a:p>
+            <a:pPr lvl="3" marL="947420" indent="-223520">
+              <a:spcBef>
+                <a:spcPts val="300"/>
+              </a:spcBef>
+              <a:spcAft>
+                <a:spcPts val="300"/>
+              </a:spcAft>
+              <a:buNone/>
+            </a:pPr>
+            <a:r>
               <a:rPr sz="1600" b="0">
                 <a:solidFill>
                   <a:srgbClr val="000000"/>
@@ -12153,16 +11659,310 @@
                 <a:latin typeface="맑은 고딕"/>
                 <a:ea typeface="맑은 고딕"/>
               </a:rPr>
-              <a:t> 도구 연결의 공개 표준이지만 기본값은 아니다. 도구 호출은 임의 코드 실행이다</a:t>
+              <a:t>2. </a:t>
+            </a:r>
+            <a:r>
+              <a:rPr sz="1600" b="1">
+                <a:solidFill>
+                  <a:srgbClr val="000000"/>
+                </a:solidFill>
+                <a:latin typeface="맑은 고딕"/>
+                <a:ea typeface="맑은 고딕"/>
+              </a:rPr>
+              <a:t>쓰기 범위</a:t>
+            </a:r>
+            <a:r>
+              <a:rPr sz="1600" b="0">
+                <a:solidFill>
+                  <a:srgbClr val="000000"/>
+                </a:solidFill>
+                <a:latin typeface="맑은 고딕"/>
+                <a:ea typeface="맑은 고딕"/>
+              </a:rPr>
+              <a:t> —</a:t>
+            </a:r>
+            <a:r>
+              <a:rPr sz="1400" b="0">
+                <a:solidFill>
+                  <a:srgbClr val="000000"/>
+                </a:solidFill>
+                <a:latin typeface="맑은 고딕"/>
+                <a:ea typeface="맑은 고딕"/>
+              </a:rPr>
+              <a:t> 쓰기를 </a:t>
+            </a:r>
+            <a:r>
+              <a:rPr sz="1400" b="0">
+                <a:solidFill>
+                  <a:srgbClr val="000000"/>
+                </a:solidFill>
+                <a:latin typeface="맑은 고딕"/>
+                <a:ea typeface="맑은 고딕"/>
+              </a:rPr>
+              <a:t>subscription</a:t>
+            </a:r>
+            <a:r>
+              <a:rPr sz="1400" b="0">
+                <a:solidFill>
+                  <a:srgbClr val="000000"/>
+                </a:solidFill>
+                <a:latin typeface="맑은 고딕"/>
+                <a:ea typeface="맑은 고딕"/>
+              </a:rPr>
+              <a:t> 패키지와 테스트로 묶었는가?</a:t>
+            </a:r>
+          </a:p>
+          <a:p>
+            <a:pPr lvl="3" marL="947420" indent="-223520">
+              <a:spcBef>
+                <a:spcPts val="300"/>
+              </a:spcBef>
+              <a:spcAft>
+                <a:spcPts val="300"/>
+              </a:spcAft>
+              <a:buNone/>
+            </a:pPr>
+            <a:r>
+              <a:rPr sz="1600" b="0">
+                <a:solidFill>
+                  <a:srgbClr val="000000"/>
+                </a:solidFill>
+                <a:latin typeface="맑은 고딕"/>
+                <a:ea typeface="맑은 고딕"/>
+              </a:rPr>
+              <a:t>3. </a:t>
+            </a:r>
+            <a:r>
+              <a:rPr sz="1600" b="1">
+                <a:solidFill>
+                  <a:srgbClr val="000000"/>
+                </a:solidFill>
+                <a:latin typeface="맑은 고딕"/>
+                <a:ea typeface="맑은 고딕"/>
+              </a:rPr>
+              <a:t>되돌릴 수 없는 일</a:t>
+            </a:r>
+            <a:r>
+              <a:rPr sz="1600" b="0">
+                <a:solidFill>
+                  <a:srgbClr val="000000"/>
+                </a:solidFill>
+                <a:latin typeface="맑은 고딕"/>
+                <a:ea typeface="맑은 고딕"/>
+              </a:rPr>
+              <a:t> —</a:t>
+            </a:r>
+            <a:r>
+              <a:rPr sz="1400" b="0">
+                <a:solidFill>
+                  <a:srgbClr val="000000"/>
+                </a:solidFill>
+                <a:latin typeface="맑은 고딕"/>
+                <a:ea typeface="맑은 고딕"/>
+              </a:rPr>
+              <a:t> 실제 결제·배송 호출과 원격 저장소 반영을 뺐는가?</a:t>
+            </a:r>
+          </a:p>
+          <a:p>
+            <a:pPr lvl="3" marL="947420" indent="-223520">
+              <a:spcBef>
+                <a:spcPts val="300"/>
+              </a:spcBef>
+              <a:spcAft>
+                <a:spcPts val="300"/>
+              </a:spcAft>
+              <a:buNone/>
+            </a:pPr>
+            <a:r>
+              <a:rPr sz="1600" b="0">
+                <a:solidFill>
+                  <a:srgbClr val="000000"/>
+                </a:solidFill>
+                <a:latin typeface="맑은 고딕"/>
+                <a:ea typeface="맑은 고딕"/>
+              </a:rPr>
+              <a:t>4. </a:t>
+            </a:r>
+            <a:r>
+              <a:rPr sz="1600" b="1">
+                <a:solidFill>
+                  <a:srgbClr val="000000"/>
+                </a:solidFill>
+                <a:latin typeface="맑은 고딕"/>
+                <a:ea typeface="맑은 고딕"/>
+              </a:rPr>
+              <a:t>종료 조건</a:t>
+            </a:r>
+            <a:r>
+              <a:rPr sz="1600" b="0">
+                <a:solidFill>
+                  <a:srgbClr val="000000"/>
+                </a:solidFill>
+                <a:latin typeface="맑은 고딕"/>
+                <a:ea typeface="맑은 고딕"/>
+              </a:rPr>
+              <a:t> —</a:t>
+            </a:r>
+            <a:r>
+              <a:rPr sz="1400" b="0">
+                <a:solidFill>
+                  <a:srgbClr val="000000"/>
+                </a:solidFill>
+                <a:latin typeface="맑은 고딕"/>
+                <a:ea typeface="맑은 고딕"/>
+              </a:rPr>
+              <a:t> 완료의 정의</a:t>
+            </a:r>
+            <a:r>
+              <a:rPr sz="1200" b="0">
+                <a:solidFill>
+                  <a:srgbClr val="000000"/>
+                </a:solidFill>
+                <a:latin typeface="맑은 고딕"/>
+                <a:ea typeface="맑은 고딕"/>
+              </a:rPr>
+              <a:t>(수용 테스트 5개)</a:t>
+            </a:r>
+            <a:r>
+              <a:rPr sz="1400" b="0">
+                <a:solidFill>
+                  <a:srgbClr val="000000"/>
+                </a:solidFill>
+                <a:latin typeface="맑은 고딕"/>
+                <a:ea typeface="맑은 고딕"/>
+              </a:rPr>
+              <a:t>로 끝을 정했는가?</a:t>
+            </a:r>
+          </a:p>
+          <a:p>
+            <a:pPr lvl="3" marL="947420" indent="-223520">
+              <a:spcBef>
+                <a:spcPts val="300"/>
+              </a:spcBef>
+              <a:spcAft>
+                <a:spcPts val="300"/>
+              </a:spcAft>
+              <a:buNone/>
+            </a:pPr>
+            <a:r>
+              <a:rPr sz="1600" b="0">
+                <a:solidFill>
+                  <a:srgbClr val="000000"/>
+                </a:solidFill>
+                <a:latin typeface="맑은 고딕"/>
+                <a:ea typeface="맑은 고딕"/>
+              </a:rPr>
+              <a:t>5. </a:t>
+            </a:r>
+            <a:r>
+              <a:rPr sz="1600" b="1">
+                <a:solidFill>
+                  <a:srgbClr val="000000"/>
+                </a:solidFill>
+                <a:latin typeface="맑은 고딕"/>
+                <a:ea typeface="맑은 고딕"/>
+              </a:rPr>
+              <a:t>멈출 조건</a:t>
+            </a:r>
+            <a:r>
+              <a:rPr sz="1600" b="0">
+                <a:solidFill>
+                  <a:srgbClr val="000000"/>
+                </a:solidFill>
+                <a:latin typeface="맑은 고딕"/>
+                <a:ea typeface="맑은 고딕"/>
+              </a:rPr>
+              <a:t> —</a:t>
+            </a:r>
+            <a:r>
+              <a:rPr sz="1400" b="0">
+                <a:solidFill>
+                  <a:srgbClr val="000000"/>
+                </a:solidFill>
+                <a:latin typeface="맑은 고딕"/>
+                <a:ea typeface="맑은 고딕"/>
+              </a:rPr>
+              <a:t> 사람이 정할 결정</a:t>
+            </a:r>
+            <a:r>
+              <a:rPr sz="1200" b="0">
+                <a:solidFill>
+                  <a:srgbClr val="000000"/>
+                </a:solidFill>
+                <a:latin typeface="맑은 고딕"/>
+                <a:ea typeface="맑은 고딕"/>
+              </a:rPr>
+              <a:t>(공휴일 규칙)</a:t>
+            </a:r>
+            <a:r>
+              <a:rPr sz="1400" b="0">
+                <a:solidFill>
+                  <a:srgbClr val="000000"/>
+                </a:solidFill>
+                <a:latin typeface="맑은 고딕"/>
+                <a:ea typeface="맑은 고딕"/>
+              </a:rPr>
+              <a:t>과 실패 상한이 있는가?</a:t>
+            </a:r>
+          </a:p>
+          <a:p>
+            <a:pPr lvl="3" marL="947420" indent="-223520">
+              <a:spcBef>
+                <a:spcPts val="300"/>
+              </a:spcBef>
+              <a:spcAft>
+                <a:spcPts val="300"/>
+              </a:spcAft>
+              <a:buNone/>
+            </a:pPr>
+            <a:r>
+              <a:rPr sz="1600" b="0">
+                <a:solidFill>
+                  <a:srgbClr val="000000"/>
+                </a:solidFill>
+                <a:latin typeface="맑은 고딕"/>
+                <a:ea typeface="맑은 고딕"/>
+              </a:rPr>
+              <a:t>6. </a:t>
+            </a:r>
+            <a:r>
+              <a:rPr sz="1600" b="1">
+                <a:solidFill>
+                  <a:srgbClr val="000000"/>
+                </a:solidFill>
+                <a:latin typeface="맑은 고딕"/>
+                <a:ea typeface="맑은 고딕"/>
+              </a:rPr>
+              <a:t>신원</a:t>
+            </a:r>
+            <a:r>
+              <a:rPr sz="1600" b="0">
+                <a:solidFill>
+                  <a:srgbClr val="000000"/>
+                </a:solidFill>
+                <a:latin typeface="맑은 고딕"/>
+                <a:ea typeface="맑은 고딕"/>
+              </a:rPr>
+              <a:t> —</a:t>
+            </a:r>
+            <a:r>
+              <a:rPr sz="1400" b="0">
+                <a:solidFill>
+                  <a:srgbClr val="000000"/>
+                </a:solidFill>
+                <a:latin typeface="맑은 고딕"/>
+                <a:ea typeface="맑은 고딕"/>
+              </a:rPr>
+              <a:t> 사람의 자격을 빌리지 않고 전용 신원과 수명을 정했는가?</a:t>
             </a:r>
           </a:p>
           <a:p>
             <a:pPr lvl="2" marL="723900" indent="-368300">
               <a:spcBef>
-                <a:spcPts val="600"/>
+                <a:spcPts val="300"/>
               </a:spcBef>
               <a:spcAft>
-                <a:spcPts val="600"/>
+                <a:spcPts val="300"/>
               </a:spcAft>
               <a:buSzPct val="90000"/>
               <a:buFont typeface="Wingdings" pitchFamily="2" charset="2"/>
@@ -12176,7 +11976,7 @@
                 <a:latin typeface="맑은 고딕"/>
                 <a:ea typeface="맑은 고딕"/>
               </a:rPr>
-              <a:t>최소 권한</a:t>
+              <a:t>결과물</a:t>
             </a:r>
             <a:r>
               <a:rPr sz="1800" b="0">
@@ -12196,167 +11996,7 @@
                 <a:latin typeface="맑은 고딕"/>
                 <a:ea typeface="맑은 고딕"/>
               </a:rPr>
-              <a:t> 읽기·쓰기·실행·외부 호출을 따로 정하고, 에이전트의 신원을 사람과 나눈다</a:t>
-            </a:r>
-          </a:p>
-          <a:p>
-            <a:pPr lvl="2" marL="723900" indent="-368300">
-              <a:spcBef>
-                <a:spcPts val="600"/>
-              </a:spcBef>
-              <a:spcAft>
-                <a:spcPts val="600"/>
-              </a:spcAft>
-              <a:buSzPct val="90000"/>
-              <a:buFont typeface="Wingdings" pitchFamily="2" charset="2"/>
-              <a:buChar char=""/>
-            </a:pPr>
-            <a:r>
-              <a:rPr sz="1800" b="1">
-                <a:solidFill>
-                  <a:srgbClr val="000000"/>
-                </a:solidFill>
-                <a:latin typeface="맑은 고딕"/>
-                <a:ea typeface="맑은 고딕"/>
-              </a:rPr>
-              <a:t>상태</a:t>
-            </a:r>
-            <a:r>
-              <a:rPr sz="1800" b="0">
-                <a:solidFill>
-                  <a:srgbClr val="000000"/>
-                </a:solidFill>
-                <a:latin typeface="맑은 고딕"/>
-                <a:ea typeface="맑은 고딕"/>
-              </a:rPr>
-              <a:t> —</a:t>
-            </a:r>
-            <a:r>
-              <a:rPr sz="1600" b="0">
-                <a:solidFill>
-                  <a:srgbClr val="000000"/>
-                </a:solidFill>
-                <a:latin typeface="맑은 고딕"/>
-                <a:ea typeface="맑은 고딕"/>
-              </a:rPr>
-              <a:t> 변경마다 작업 공간을 두고, 되돌릴 수 없는 일은 권한에서 뺀다</a:t>
-            </a:r>
-          </a:p>
-          <a:p>
-            <a:pPr lvl="2" marL="723900" indent="-368300">
-              <a:spcBef>
-                <a:spcPts val="600"/>
-              </a:spcBef>
-              <a:spcAft>
-                <a:spcPts val="600"/>
-              </a:spcAft>
-              <a:buSzPct val="90000"/>
-              <a:buFont typeface="Wingdings" pitchFamily="2" charset="2"/>
-              <a:buChar char=""/>
-            </a:pPr>
-            <a:r>
-              <a:rPr sz="1800" b="1">
-                <a:solidFill>
-                  <a:srgbClr val="000000"/>
-                </a:solidFill>
-                <a:latin typeface="맑은 고딕"/>
-                <a:ea typeface="맑은 고딕"/>
-              </a:rPr>
-              <a:t>위임 계약</a:t>
-            </a:r>
-            <a:r>
-              <a:rPr sz="1800" b="0">
-                <a:solidFill>
-                  <a:srgbClr val="000000"/>
-                </a:solidFill>
-                <a:latin typeface="맑은 고딕"/>
-                <a:ea typeface="맑은 고딕"/>
-              </a:rPr>
-              <a:t> —</a:t>
-            </a:r>
-            <a:r>
-              <a:rPr sz="1600" b="0">
-                <a:solidFill>
-                  <a:srgbClr val="000000"/>
-                </a:solidFill>
-                <a:latin typeface="맑은 고딕"/>
-                <a:ea typeface="맑은 고딕"/>
-              </a:rPr>
-              <a:t> 입력·도구·권한·상태·종료 조건·멈출 조건을 한 장에 적는다</a:t>
-            </a:r>
-          </a:p>
-          <a:p>
-            <a:pPr marL="342900" indent="0">
-              <a:spcBef>
-                <a:spcPts val="600"/>
-              </a:spcBef>
-              <a:spcAft>
-                <a:spcPts val="600"/>
-              </a:spcAft>
-              <a:buNone/>
-            </a:pPr>
-            <a:r>
-              <a:rPr sz="1800" b="1">
-                <a:solidFill>
-                  <a:srgbClr val="000000"/>
-                </a:solidFill>
-                <a:latin typeface="맑은 고딕"/>
-                <a:ea typeface="맑은 고딕"/>
-              </a:rPr>
-              <a:t>다음 세션</a:t>
-            </a:r>
-          </a:p>
-          <a:p>
-            <a:pPr lvl="2" marL="723900" indent="-368300">
-              <a:spcBef>
-                <a:spcPts val="600"/>
-              </a:spcBef>
-              <a:spcAft>
-                <a:spcPts val="600"/>
-              </a:spcAft>
-              <a:buSzPct val="90000"/>
-              <a:buFont typeface="Wingdings" pitchFamily="2" charset="2"/>
-              <a:buChar char=""/>
-            </a:pPr>
-            <a:r>
-              <a:rPr sz="1800" b="0">
-                <a:solidFill>
-                  <a:srgbClr val="000000"/>
-                </a:solidFill>
-                <a:latin typeface="맑은 고딕"/>
-                <a:ea typeface="맑은 고딕"/>
-              </a:rPr>
-              <a:t>"</a:t>
-            </a:r>
-            <a:r>
-              <a:rPr sz="1800" b="1">
-                <a:solidFill>
-                  <a:srgbClr val="000000"/>
-                </a:solidFill>
-                <a:latin typeface="맑은 고딕"/>
-                <a:ea typeface="맑은 고딕"/>
-              </a:rPr>
-              <a:t>07. 워크플로·에이전트와 사람의 개입</a:t>
-            </a:r>
-            <a:r>
-              <a:rPr sz="1800" b="0">
-                <a:solidFill>
-                  <a:srgbClr val="000000"/>
-                </a:solidFill>
-                <a:latin typeface="맑은 고딕"/>
-                <a:ea typeface="맑은 고딕"/>
-              </a:rPr>
-              <a:t>" —</a:t>
-            </a:r>
-            <a:r>
-              <a:rPr sz="1600" b="0">
-                <a:solidFill>
-                  <a:srgbClr val="000000"/>
-                </a:solidFill>
-                <a:latin typeface="맑은 고딕"/>
-                <a:ea typeface="맑은 고딕"/>
-              </a:rPr>
-              <a:t> 경계를 정한 과제를 어떤 흐름으로 실행하고, 어디에 사람의 확인 지점을 둘지 정한다.</a:t>
+              <a:t> "신청한다"의 위임 계약. 실습 7의 입력이 됩니다.</a:t>
             </a:r>
           </a:p>
         </p:txBody>
@@ -12426,29 +12066,7 @@
                 <a:latin typeface="맑은 고딕"/>
                 <a:ea typeface="맑은 고딕"/>
               </a:rPr>
-              <a:t>위임 계약 </a:t>
-            </a:r>
-            <a:r>
-              <a:rPr sz="1800" b="1">
-                <a:solidFill>
-                  <a:srgbClr val="000000"/>
-                </a:solidFill>
-                <a:latin typeface="맑은 고딕"/>
-                <a:ea typeface="맑은 고딕"/>
-              </a:rPr>
-              <a:t>(안)</a:t>
-            </a:r>
-          </a:p>
-          <a:p>
-            <a:r>
-              <a:rPr sz="1100" b="1">
-                <a:solidFill>
-                  <a:srgbClr val="000000"/>
-                </a:solidFill>
-                <a:latin typeface="맑은 고딕"/>
-                <a:ea typeface="맑은 고딕"/>
-              </a:rPr>
-              <a:t>별첨. 실습 답</a:t>
+              <a:t>10. 요약</a:t>
             </a:r>
           </a:p>
         </p:txBody>
@@ -12510,8 +12128,8 @@
           <a:lstStyle/>
           <a:p>
             <a:r>
-              <a:rPr kumimoji="1" lang="en-US" altLang="ko-KR" sz="1250" dirty="0" err="1"/>
-              <a:t>별첨: 06. 작업 위임과 도구·권한·상태의 경계</a:t>
+              <a:rPr kumimoji="1" lang="en-US" altLang="ko-KR" sz="1400" dirty="0" err="1"/>
+              <a:t>06. 작업 위임과 도구·권한·상태의 경계</a:t>
             </a:r>
           </a:p>
         </p:txBody>
@@ -12582,41 +12200,98 @@
             <p:ph idx="1"/>
           </p:nvPr>
         </p:nvSpPr>
-        <p:spPr>
-          <a:xfrm>
-            <a:off x="233172" y="1616364"/>
-            <a:ext cx="4338828" cy="4696101"/>
-          </a:xfrm>
-        </p:spPr>
+        <p:spPr/>
         <p:txBody>
           <a:bodyPr>
             <a:normAutofit/>
           </a:bodyPr>
           <a:lstStyle/>
           <a:p>
-            <a:pPr lvl="2" marL="228600" indent="-182880">
+            <a:pPr marL="0" indent="0">
               <a:spcBef>
-                <a:spcPts val="300"/>
+                <a:spcPts val="600"/>
               </a:spcBef>
               <a:spcAft>
-                <a:spcPts val="300"/>
+                <a:spcPts val="600"/>
+              </a:spcAft>
+              <a:buNone/>
+            </a:pPr>
+            <a:r>
+              <a:rPr sz="1800" b="0">
+                <a:solidFill>
+                  <a:srgbClr val="000000"/>
+                </a:solidFill>
+                <a:latin typeface="맑은 고딕"/>
+                <a:ea typeface="맑은 고딕"/>
+              </a:rPr>
+              <a:t>자율성은 </a:t>
+            </a:r>
+            <a:r>
+              <a:rPr sz="1800" b="1">
+                <a:solidFill>
+                  <a:srgbClr val="000000"/>
+                </a:solidFill>
+                <a:latin typeface="맑은 고딕"/>
+                <a:ea typeface="맑은 고딕"/>
+              </a:rPr>
+              <a:t>권한과 되돌림 수단이 정한 경계</a:t>
+            </a:r>
+            <a:r>
+              <a:rPr sz="1800" b="0">
+                <a:solidFill>
+                  <a:srgbClr val="000000"/>
+                </a:solidFill>
+                <a:latin typeface="맑은 고딕"/>
+                <a:ea typeface="맑은 고딕"/>
+              </a:rPr>
+              <a:t> 안에서만 허용한다.</a:t>
+            </a:r>
+          </a:p>
+          <a:p>
+            <a:pPr marL="342900" indent="0">
+              <a:spcBef>
+                <a:spcPts val="600"/>
+              </a:spcBef>
+              <a:spcAft>
+                <a:spcPts val="600"/>
+              </a:spcAft>
+              <a:buNone/>
+            </a:pPr>
+            <a:r>
+              <a:rPr sz="1800" b="1">
+                <a:solidFill>
+                  <a:srgbClr val="000000"/>
+                </a:solidFill>
+                <a:latin typeface="맑은 고딕"/>
+                <a:ea typeface="맑은 고딕"/>
+              </a:rPr>
+              <a:t>위임 경계의 핵심</a:t>
+            </a:r>
+          </a:p>
+          <a:p>
+            <a:pPr lvl="2" marL="723900" indent="-368300">
+              <a:spcBef>
+                <a:spcPts val="600"/>
+              </a:spcBef>
+              <a:spcAft>
+                <a:spcPts val="600"/>
               </a:spcAft>
               <a:buSzPct val="90000"/>
               <a:buFont typeface="Wingdings" pitchFamily="2" charset="2"/>
               <a:buChar char=""/>
             </a:pPr>
             <a:r>
-              <a:rPr sz="1400" b="1">
-                <a:solidFill>
-                  <a:srgbClr val="000000"/>
-                </a:solidFill>
-                <a:latin typeface="맑은 고딕"/>
-                <a:ea typeface="맑은 고딕"/>
-              </a:rPr>
-              <a:t>위임 계약</a:t>
-            </a:r>
-            <a:r>
-              <a:rPr sz="1400" b="0">
+              <a:rPr sz="1800" b="1">
+                <a:solidFill>
+                  <a:srgbClr val="000000"/>
+                </a:solidFill>
+                <a:latin typeface="맑은 고딕"/>
+                <a:ea typeface="맑은 고딕"/>
+              </a:rPr>
+              <a:t>네 축</a:t>
+            </a:r>
+            <a:r>
+              <a:rPr sz="1800" b="0">
                 <a:solidFill>
                   <a:srgbClr val="000000"/>
                 </a:solidFill>
@@ -12626,795 +12301,303 @@
               <a:t> —</a:t>
             </a:r>
             <a:r>
-              <a:rPr sz="1200" b="0">
-                <a:solidFill>
-                  <a:srgbClr val="000000"/>
-                </a:solidFill>
-                <a:latin typeface="맑은 고딕"/>
-                <a:ea typeface="맑은 고딕"/>
-              </a:rPr>
-              <a:t> "신청한다"</a:t>
-            </a:r>
-          </a:p>
-          <a:p>
-            <a:pPr lvl="2" marL="228600" indent="0">
+              <a:rPr sz="1600" b="0">
+                <a:solidFill>
+                  <a:srgbClr val="000000"/>
+                </a:solidFill>
+                <a:latin typeface="맑은 고딕"/>
+                <a:ea typeface="맑은 고딕"/>
+              </a:rPr>
+              <a:t> 도구·권한·상태·멈출 조건. 맥락을 준 뒤 남는 질문은 어디까지 맡기는가다</a:t>
+            </a:r>
+          </a:p>
+          <a:p>
+            <a:pPr lvl="2" marL="723900" indent="-368300">
               <a:spcBef>
-                <a:spcPts val="300"/>
+                <a:spcPts val="600"/>
               </a:spcBef>
               <a:spcAft>
-                <a:spcPts val="300"/>
+                <a:spcPts val="600"/>
+              </a:spcAft>
+              <a:buSzPct val="90000"/>
+              <a:buFont typeface="Wingdings" pitchFamily="2" charset="2"/>
+              <a:buChar char=""/>
+            </a:pPr>
+            <a:r>
+              <a:rPr sz="1800" b="1">
+                <a:solidFill>
+                  <a:srgbClr val="000000"/>
+                </a:solidFill>
+                <a:latin typeface="맑은 고딕"/>
+                <a:ea typeface="맑은 고딕"/>
+              </a:rPr>
+              <a:t>도구</a:t>
+            </a:r>
+            <a:r>
+              <a:rPr sz="1800" b="0">
+                <a:solidFill>
+                  <a:srgbClr val="000000"/>
+                </a:solidFill>
+                <a:latin typeface="맑은 고딕"/>
+                <a:ea typeface="맑은 고딕"/>
+              </a:rPr>
+              <a:t> —</a:t>
+            </a:r>
+            <a:r>
+              <a:rPr sz="1600" b="0">
+                <a:solidFill>
+                  <a:srgbClr val="000000"/>
+                </a:solidFill>
+                <a:latin typeface="맑은 고딕"/>
+                <a:ea typeface="맑은 고딕"/>
+              </a:rPr>
+              <a:t> 할 수 있는 일의 목록이 경계다. 도구의 정의와 설명은 프롬프트만큼 다듬는다</a:t>
+            </a:r>
+          </a:p>
+          <a:p>
+            <a:pPr lvl="2" marL="723900" indent="-368300">
+              <a:spcBef>
+                <a:spcPts val="600"/>
+              </a:spcBef>
+              <a:spcAft>
+                <a:spcPts val="600"/>
+              </a:spcAft>
+              <a:buSzPct val="90000"/>
+              <a:buFont typeface="Wingdings" pitchFamily="2" charset="2"/>
+              <a:buChar char=""/>
+            </a:pPr>
+            <a:r>
+              <a:rPr sz="1800" b="1">
+                <a:solidFill>
+                  <a:srgbClr val="000000"/>
+                </a:solidFill>
+                <a:latin typeface="맑은 고딕"/>
+                <a:ea typeface="맑은 고딕"/>
+              </a:rPr>
+              <a:t>MCP</a:t>
+            </a:r>
+            <a:r>
+              <a:rPr sz="1800" b="0">
+                <a:solidFill>
+                  <a:srgbClr val="000000"/>
+                </a:solidFill>
+                <a:latin typeface="맑은 고딕"/>
+                <a:ea typeface="맑은 고딕"/>
+              </a:rPr>
+              <a:t> —</a:t>
+            </a:r>
+            <a:r>
+              <a:rPr sz="1600" b="0">
+                <a:solidFill>
+                  <a:srgbClr val="000000"/>
+                </a:solidFill>
+                <a:latin typeface="맑은 고딕"/>
+                <a:ea typeface="맑은 고딕"/>
+              </a:rPr>
+              <a:t> 도구 연결의 공개 표준이지만 기본값은 아니다. 도구 호출은 임의 코드 실행이다</a:t>
+            </a:r>
+          </a:p>
+          <a:p>
+            <a:pPr lvl="2" marL="723900" indent="-368300">
+              <a:spcBef>
+                <a:spcPts val="600"/>
+              </a:spcBef>
+              <a:spcAft>
+                <a:spcPts val="600"/>
+              </a:spcAft>
+              <a:buSzPct val="90000"/>
+              <a:buFont typeface="Wingdings" pitchFamily="2" charset="2"/>
+              <a:buChar char=""/>
+            </a:pPr>
+            <a:r>
+              <a:rPr sz="1800" b="1">
+                <a:solidFill>
+                  <a:srgbClr val="000000"/>
+                </a:solidFill>
+                <a:latin typeface="맑은 고딕"/>
+                <a:ea typeface="맑은 고딕"/>
+              </a:rPr>
+              <a:t>최소 권한</a:t>
+            </a:r>
+            <a:r>
+              <a:rPr sz="1800" b="0">
+                <a:solidFill>
+                  <a:srgbClr val="000000"/>
+                </a:solidFill>
+                <a:latin typeface="맑은 고딕"/>
+                <a:ea typeface="맑은 고딕"/>
+              </a:rPr>
+              <a:t> —</a:t>
+            </a:r>
+            <a:r>
+              <a:rPr sz="1600" b="0">
+                <a:solidFill>
+                  <a:srgbClr val="000000"/>
+                </a:solidFill>
+                <a:latin typeface="맑은 고딕"/>
+                <a:ea typeface="맑은 고딕"/>
+              </a:rPr>
+              <a:t> 읽기·쓰기·실행·외부 호출을 따로 정하고, 에이전트의 신원을 사람과 나눈다</a:t>
+            </a:r>
+          </a:p>
+          <a:p>
+            <a:pPr lvl="2" marL="723900" indent="-368300">
+              <a:spcBef>
+                <a:spcPts val="600"/>
+              </a:spcBef>
+              <a:spcAft>
+                <a:spcPts val="600"/>
+              </a:spcAft>
+              <a:buSzPct val="90000"/>
+              <a:buFont typeface="Wingdings" pitchFamily="2" charset="2"/>
+              <a:buChar char=""/>
+            </a:pPr>
+            <a:r>
+              <a:rPr sz="1800" b="1">
+                <a:solidFill>
+                  <a:srgbClr val="000000"/>
+                </a:solidFill>
+                <a:latin typeface="맑은 고딕"/>
+                <a:ea typeface="맑은 고딕"/>
+              </a:rPr>
+              <a:t>상태</a:t>
+            </a:r>
+            <a:r>
+              <a:rPr sz="1800" b="0">
+                <a:solidFill>
+                  <a:srgbClr val="000000"/>
+                </a:solidFill>
+                <a:latin typeface="맑은 고딕"/>
+                <a:ea typeface="맑은 고딕"/>
+              </a:rPr>
+              <a:t> —</a:t>
+            </a:r>
+            <a:r>
+              <a:rPr sz="1600" b="0">
+                <a:solidFill>
+                  <a:srgbClr val="000000"/>
+                </a:solidFill>
+                <a:latin typeface="맑은 고딕"/>
+                <a:ea typeface="맑은 고딕"/>
+              </a:rPr>
+              <a:t> 변경마다 작업 공간을 두고 되돌릴 수 없는 일은 뺀다</a:t>
+            </a:r>
+          </a:p>
+          <a:p>
+            <a:pPr lvl="2" marL="723900" indent="-368300">
+              <a:spcBef>
+                <a:spcPts val="600"/>
+              </a:spcBef>
+              <a:spcAft>
+                <a:spcPts val="600"/>
+              </a:spcAft>
+              <a:buSzPct val="90000"/>
+              <a:buFont typeface="Wingdings" pitchFamily="2" charset="2"/>
+              <a:buChar char=""/>
+            </a:pPr>
+            <a:r>
+              <a:rPr sz="1800" b="1">
+                <a:solidFill>
+                  <a:srgbClr val="000000"/>
+                </a:solidFill>
+                <a:latin typeface="맑은 고딕"/>
+                <a:ea typeface="맑은 고딕"/>
+              </a:rPr>
+              <a:t>위임 계약</a:t>
+            </a:r>
+            <a:r>
+              <a:rPr sz="1800" b="0">
+                <a:solidFill>
+                  <a:srgbClr val="000000"/>
+                </a:solidFill>
+                <a:latin typeface="맑은 고딕"/>
+                <a:ea typeface="맑은 고딕"/>
+              </a:rPr>
+              <a:t> —</a:t>
+            </a:r>
+            <a:r>
+              <a:rPr sz="1600" b="0">
+                <a:solidFill>
+                  <a:srgbClr val="000000"/>
+                </a:solidFill>
+                <a:latin typeface="맑은 고딕"/>
+                <a:ea typeface="맑은 고딕"/>
+              </a:rPr>
+              <a:t> 입력·도구·권한·상태·종료·멈출 조건을 한 장에 적는다</a:t>
+            </a:r>
+          </a:p>
+          <a:p>
+            <a:pPr marL="342900" indent="0">
+              <a:spcBef>
+                <a:spcPts val="600"/>
+              </a:spcBef>
+              <a:spcAft>
+                <a:spcPts val="600"/>
               </a:spcAft>
               <a:buNone/>
             </a:pPr>
             <a:r>
-              <a:rPr sz="1400" b="0">
-                <a:solidFill>
-                  <a:srgbClr val="000000"/>
-                </a:solidFill>
-                <a:latin typeface="맑은 고딕"/>
-                <a:ea typeface="맑은 고딕"/>
-              </a:rPr>
-              <a:t>1. 입력</a:t>
-            </a:r>
-          </a:p>
-          <a:p>
-            <a:pPr lvl="3" marL="457200" indent="-182880">
+              <a:rPr sz="1800" b="1">
+                <a:solidFill>
+                  <a:srgbClr val="000000"/>
+                </a:solidFill>
+                <a:latin typeface="맑은 고딕"/>
+                <a:ea typeface="맑은 고딕"/>
+              </a:rPr>
+              <a:t>다음 세션</a:t>
+            </a:r>
+          </a:p>
+          <a:p>
+            <a:pPr lvl="2" marL="723900" indent="-368300">
               <a:spcBef>
-                <a:spcPts val="300"/>
+                <a:spcPts val="600"/>
               </a:spcBef>
               <a:spcAft>
-                <a:spcPts val="300"/>
+                <a:spcPts val="600"/>
               </a:spcAft>
               <a:buSzPct val="90000"/>
               <a:buFont typeface="Wingdings" pitchFamily="2" charset="2"/>
-              <a:buChar char=""/>
+              <a:buChar char=""/>
             </a:pPr>
             <a:r>
-              <a:rPr sz="1200" b="1">
-                <a:solidFill>
-                  <a:srgbClr val="000000"/>
-                </a:solidFill>
-                <a:latin typeface="맑은 고딕"/>
-                <a:ea typeface="맑은 고딕"/>
-              </a:rPr>
-              <a:t>작업 명세서</a:t>
-            </a:r>
-            <a:r>
-              <a:rPr sz="1200" b="0">
-                <a:solidFill>
-                  <a:srgbClr val="000000"/>
-                </a:solidFill>
-                <a:latin typeface="맑은 고딕"/>
-                <a:ea typeface="맑은 고딕"/>
-              </a:rPr>
-              <a:t>와 수용 기준 5개, 맥락 파일 </a:t>
-            </a:r>
-            <a:r>
-              <a:rPr sz="1200" b="0">
-                <a:solidFill>
-                  <a:srgbClr val="000000"/>
-                </a:solidFill>
-                <a:latin typeface="맑은 고딕"/>
-                <a:ea typeface="맑은 고딕"/>
-              </a:rPr>
-              <a:t>AGENTS.md</a:t>
-            </a:r>
-            <a:r>
-              <a:rPr sz="1200" b="0">
-                <a:solidFill>
-                  <a:srgbClr val="000000"/>
-                </a:solidFill>
-                <a:latin typeface="맑은 고딕"/>
-                <a:ea typeface="맑은 고딕"/>
-              </a:rPr>
-              <a:t>와 </a:t>
-            </a:r>
-            <a:r>
-              <a:rPr sz="1200" b="0">
-                <a:solidFill>
-                  <a:srgbClr val="000000"/>
-                </a:solidFill>
-                <a:latin typeface="맑은 고딕"/>
-                <a:ea typeface="맑은 고딕"/>
-              </a:rPr>
-              <a:t>docs/</a:t>
-            </a:r>
-          </a:p>
-          <a:p>
-            <a:pPr lvl="2" marL="228600" indent="0">
-              <a:spcBef>
-                <a:spcPts val="300"/>
-              </a:spcBef>
-              <a:spcAft>
-                <a:spcPts val="300"/>
-              </a:spcAft>
-              <a:buNone/>
-            </a:pPr>
-            <a:r>
-              <a:rPr sz="1400" b="0">
-                <a:solidFill>
-                  <a:srgbClr val="000000"/>
-                </a:solidFill>
-                <a:latin typeface="맑은 고딕"/>
-                <a:ea typeface="맑은 고딕"/>
-              </a:rPr>
-              <a:t>2. 도구</a:t>
-            </a:r>
-          </a:p>
-          <a:p>
-            <a:pPr lvl="3" marL="457200" indent="-182880">
-              <a:spcBef>
-                <a:spcPts val="300"/>
-              </a:spcBef>
-              <a:spcAft>
-                <a:spcPts val="300"/>
-              </a:spcAft>
-              <a:buSzPct val="90000"/>
-              <a:buFont typeface="Wingdings" pitchFamily="2" charset="2"/>
-              <a:buChar char=""/>
-            </a:pPr>
-            <a:r>
-              <a:rPr sz="1200" b="1">
-                <a:solidFill>
-                  <a:srgbClr val="000000"/>
-                </a:solidFill>
-                <a:latin typeface="맑은 고딕"/>
-                <a:ea typeface="맑은 고딕"/>
-              </a:rPr>
-              <a:t>파일 읽기·쓰기</a:t>
-            </a:r>
-            <a:r>
-              <a:rPr sz="1200" b="0">
-                <a:solidFill>
-                  <a:srgbClr val="000000"/>
-                </a:solidFill>
-                <a:latin typeface="맑은 고딕"/>
-                <a:ea typeface="맑은 고딕"/>
-              </a:rPr>
-              <a:t>, 빌드·수용 테스트 실행, 결제 테스트 대역, 브랜치 커밋</a:t>
-            </a:r>
-          </a:p>
-          <a:p>
-            <a:pPr lvl="2" marL="228600" indent="0">
-              <a:spcBef>
-                <a:spcPts val="300"/>
-              </a:spcBef>
-              <a:spcAft>
-                <a:spcPts val="300"/>
-              </a:spcAft>
-              <a:buNone/>
-            </a:pPr>
-            <a:r>
-              <a:rPr sz="1400" b="0">
-                <a:solidFill>
-                  <a:srgbClr val="000000"/>
-                </a:solidFill>
-                <a:latin typeface="맑은 고딕"/>
-                <a:ea typeface="맑은 고딕"/>
-              </a:rPr>
-              <a:t>3. 권한</a:t>
-            </a:r>
-          </a:p>
-          <a:p>
-            <a:pPr lvl="3" marL="457200" indent="-182880">
-              <a:spcBef>
-                <a:spcPts val="300"/>
-              </a:spcBef>
-              <a:spcAft>
-                <a:spcPts val="300"/>
-              </a:spcAft>
-              <a:buSzPct val="90000"/>
-              <a:buFont typeface="Wingdings" pitchFamily="2" charset="2"/>
-              <a:buChar char=""/>
-            </a:pPr>
-            <a:r>
-              <a:rPr sz="1200" b="1">
-                <a:solidFill>
-                  <a:srgbClr val="000000"/>
-                </a:solidFill>
-                <a:latin typeface="맑은 고딕"/>
-                <a:ea typeface="맑은 고딕"/>
-              </a:rPr>
-              <a:t>읽기</a:t>
-            </a:r>
-            <a:r>
-              <a:rPr sz="1200" b="0">
-                <a:solidFill>
-                  <a:srgbClr val="000000"/>
-                </a:solidFill>
-                <a:latin typeface="맑은 고딕"/>
-                <a:ea typeface="맑은 고딕"/>
-              </a:rPr>
-              <a:t> —</a:t>
-            </a:r>
-            <a:r>
-              <a:rPr sz="1000" b="0">
-                <a:solidFill>
-                  <a:srgbClr val="000000"/>
-                </a:solidFill>
-                <a:latin typeface="맑은 고딕"/>
-                <a:ea typeface="맑은 고딕"/>
-              </a:rPr>
-              <a:t> 저장소의 코드와 </a:t>
-            </a:r>
-            <a:r>
-              <a:rPr sz="1000" b="0">
-                <a:solidFill>
-                  <a:srgbClr val="000000"/>
-                </a:solidFill>
-                <a:latin typeface="맑은 고딕"/>
-                <a:ea typeface="맑은 고딕"/>
-              </a:rPr>
-              <a:t>docs/</a:t>
-            </a:r>
-            <a:r>
-              <a:rPr sz="1000" b="0">
-                <a:solidFill>
-                  <a:srgbClr val="000000"/>
-                </a:solidFill>
-                <a:latin typeface="맑은 고딕"/>
-                <a:ea typeface="맑은 고딕"/>
-              </a:rPr>
-              <a:t>. 비밀 키와 연동 설정은 제외한다</a:t>
-            </a:r>
-          </a:p>
-          <a:p>
-            <a:pPr lvl="3" marL="457200" indent="-182880">
-              <a:spcBef>
-                <a:spcPts val="300"/>
-              </a:spcBef>
-              <a:spcAft>
-                <a:spcPts val="300"/>
-              </a:spcAft>
-              <a:buSzPct val="90000"/>
-              <a:buFont typeface="Wingdings" pitchFamily="2" charset="2"/>
-              <a:buChar char=""/>
-            </a:pPr>
-            <a:r>
-              <a:rPr sz="1200" b="1">
-                <a:solidFill>
-                  <a:srgbClr val="000000"/>
-                </a:solidFill>
-                <a:latin typeface="맑은 고딕"/>
-                <a:ea typeface="맑은 고딕"/>
-              </a:rPr>
-              <a:t>쓰기</a:t>
-            </a:r>
-            <a:r>
-              <a:rPr sz="1200" b="0">
-                <a:solidFill>
-                  <a:srgbClr val="000000"/>
-                </a:solidFill>
-                <a:latin typeface="맑은 고딕"/>
-                <a:ea typeface="맑은 고딕"/>
-              </a:rPr>
-              <a:t> —</a:t>
-            </a:r>
-            <a:r>
-              <a:rPr sz="1000" b="0">
-                <a:solidFill>
-                  <a:srgbClr val="000000"/>
-                </a:solidFill>
-                <a:latin typeface="맑은 고딕"/>
-                <a:ea typeface="맑은 고딕"/>
-              </a:rPr>
-              <a:t> </a:t>
-            </a:r>
-            <a:r>
-              <a:rPr sz="1000" b="0">
-                <a:solidFill>
-                  <a:srgbClr val="000000"/>
-                </a:solidFill>
-                <a:latin typeface="맑은 고딕"/>
-                <a:ea typeface="맑은 고딕"/>
-              </a:rPr>
-              <a:t>subscription</a:t>
-            </a:r>
-            <a:r>
-              <a:rPr sz="1000" b="0">
-                <a:solidFill>
-                  <a:srgbClr val="000000"/>
-                </a:solidFill>
-                <a:latin typeface="맑은 고딕"/>
-                <a:ea typeface="맑은 고딕"/>
-              </a:rPr>
-              <a:t> 패키지와 테스트 코드. 기대값과 의존 규칙은 제외한다</a:t>
-            </a:r>
-          </a:p>
-          <a:p>
-            <a:pPr lvl="3" marL="457200" indent="-182880">
-              <a:spcBef>
-                <a:spcPts val="300"/>
-              </a:spcBef>
-              <a:spcAft>
-                <a:spcPts val="300"/>
-              </a:spcAft>
-              <a:buSzPct val="90000"/>
-              <a:buFont typeface="Wingdings" pitchFamily="2" charset="2"/>
-              <a:buChar char=""/>
-            </a:pPr>
-            <a:r>
-              <a:rPr sz="1200" b="1">
-                <a:solidFill>
-                  <a:srgbClr val="000000"/>
-                </a:solidFill>
-                <a:latin typeface="맑은 고딕"/>
-                <a:ea typeface="맑은 고딕"/>
-              </a:rPr>
-              <a:t>실행</a:t>
-            </a:r>
-            <a:r>
-              <a:rPr sz="1200" b="0">
-                <a:solidFill>
-                  <a:srgbClr val="000000"/>
-                </a:solidFill>
-                <a:latin typeface="맑은 고딕"/>
-                <a:ea typeface="맑은 고딕"/>
-              </a:rPr>
-              <a:t> —</a:t>
-            </a:r>
-            <a:r>
-              <a:rPr sz="1000" b="0">
-                <a:solidFill>
-                  <a:srgbClr val="000000"/>
-                </a:solidFill>
-                <a:latin typeface="맑은 고딕"/>
-                <a:ea typeface="맑은 고딕"/>
-              </a:rPr>
-              <a:t> 빌드와 수용 테스트. 외부 네트워크 호출은 금지한다</a:t>
-            </a:r>
-          </a:p>
-          <a:p>
-            <a:pPr lvl="3" marL="457200" indent="-182880">
-              <a:spcBef>
-                <a:spcPts val="300"/>
-              </a:spcBef>
-              <a:spcAft>
-                <a:spcPts val="300"/>
-              </a:spcAft>
-              <a:buSzPct val="90000"/>
-              <a:buFont typeface="Wingdings" pitchFamily="2" charset="2"/>
-              <a:buChar char=""/>
-            </a:pPr>
-            <a:r>
-              <a:rPr sz="1200" b="1">
-                <a:solidFill>
-                  <a:srgbClr val="000000"/>
-                </a:solidFill>
-                <a:latin typeface="맑은 고딕"/>
-                <a:ea typeface="맑은 고딕"/>
-              </a:rPr>
-              <a:t>외부 호출</a:t>
-            </a:r>
-            <a:r>
-              <a:rPr sz="1200" b="0">
-                <a:solidFill>
-                  <a:srgbClr val="000000"/>
-                </a:solidFill>
-                <a:latin typeface="맑은 고딕"/>
-                <a:ea typeface="맑은 고딕"/>
-              </a:rPr>
-              <a:t> —</a:t>
-            </a:r>
-            <a:r>
-              <a:rPr sz="1000" b="0">
-                <a:solidFill>
-                  <a:srgbClr val="000000"/>
-                </a:solidFill>
-                <a:latin typeface="맑은 고딕"/>
-                <a:ea typeface="맑은 고딕"/>
-              </a:rPr>
-              <a:t> 결제 테스트 대역만. 실제 결제·배송 시스템은 금지한다</a:t>
-            </a:r>
-          </a:p>
-        </p:txBody>
-      </p:sp>
-      <p:sp>
-        <p:nvSpPr>
-          <p:cNvPr id="9" name="내용 개체 틀 7">
-            <a:extLst>
-              <a:ext uri="{FF2B5EF4-FFF2-40B4-BE49-F238E27FC236}">
-                <a16:creationId xmlns:a16="http://schemas.microsoft.com/office/drawing/2014/main" id="{BEBA2C4A-B0BF-F2E4-EA6E-614C99CBA184}"/>
-              </a:ext>
-            </a:extLst>
-          </p:cNvPr>
-          <p:cNvSpPr>
-            <a:spLocks noGrp="1"/>
-          </p:cNvSpPr>
-          <p:nvPr>
-            <p:ph idx="1"/>
-          </p:nvPr>
-        </p:nvSpPr>
-        <p:spPr>
-          <a:xfrm>
-            <a:off x="233172" y="960120"/>
-            <a:ext cx="8778240" cy="656244"/>
-          </a:xfrm>
-        </p:spPr>
-        <p:txBody>
-          <a:bodyPr>
-            <a:normAutofit/>
-          </a:bodyPr>
-          <a:lstStyle/>
-          <a:p>
-            <a:pPr marL="0" indent="0">
-              <a:spcBef>
-                <a:spcPts val="300"/>
-              </a:spcBef>
-              <a:spcAft>
-                <a:spcPts val="300"/>
-              </a:spcAft>
-              <a:buNone/>
-            </a:pPr>
-            <a:r>
-              <a:rPr sz="1400" b="0">
-                <a:solidFill>
-                  <a:srgbClr val="000000"/>
-                </a:solidFill>
-                <a:latin typeface="맑은 고딕"/>
-                <a:ea typeface="맑은 고딕"/>
-              </a:rPr>
-              <a:t>"신청한다"의 위임 계약은 쓰기를 </a:t>
-            </a:r>
-            <a:r>
-              <a:rPr sz="1400" b="0">
-                <a:solidFill>
-                  <a:srgbClr val="000000"/>
-                </a:solidFill>
-                <a:latin typeface="맑은 고딕"/>
-                <a:ea typeface="맑은 고딕"/>
-              </a:rPr>
-              <a:t>subscription</a:t>
-            </a:r>
-            <a:r>
-              <a:rPr sz="1400" b="0">
-                <a:solidFill>
-                  <a:srgbClr val="000000"/>
-                </a:solidFill>
-                <a:latin typeface="맑은 고딕"/>
-                <a:ea typeface="맑은 고딕"/>
-              </a:rPr>
-              <a:t>과 테스트로 묶고, </a:t>
-            </a:r>
-            <a:r>
-              <a:rPr sz="1400" b="1">
-                <a:solidFill>
-                  <a:srgbClr val="000000"/>
-                </a:solidFill>
-                <a:latin typeface="맑은 고딕"/>
-                <a:ea typeface="맑은 고딕"/>
-              </a:rPr>
-              <a:t>결제·배송의 실제 호출과 원격 반영을 뺀</a:t>
-            </a:r>
-            <a:r>
-              <a:rPr sz="1400" b="0">
-                <a:solidFill>
-                  <a:srgbClr val="000000"/>
-                </a:solidFill>
-                <a:latin typeface="맑은 고딕"/>
-                <a:ea typeface="맑은 고딕"/>
-              </a:rPr>
-              <a:t> 한 장이다.</a:t>
-            </a:r>
-          </a:p>
-        </p:txBody>
-      </p:sp>
-      <p:sp>
-        <p:nvSpPr>
-          <p:cNvPr id="10" name="내용 개체 틀 7">
-            <a:extLst>
-              <a:ext uri="{FF2B5EF4-FFF2-40B4-BE49-F238E27FC236}">
-                <a16:creationId xmlns:a16="http://schemas.microsoft.com/office/drawing/2014/main" id="{BEBA2C4A-B0BF-F2E4-EA6E-614C99CBA184}"/>
-              </a:ext>
-            </a:extLst>
-          </p:cNvPr>
-          <p:cNvSpPr>
-            <a:spLocks noGrp="1"/>
-          </p:cNvSpPr>
-          <p:nvPr>
-            <p:ph idx="1"/>
-          </p:nvPr>
-        </p:nvSpPr>
-        <p:spPr>
-          <a:xfrm>
-            <a:off x="4572000" y="1616364"/>
-            <a:ext cx="4439412" cy="4696101"/>
-          </a:xfrm>
-        </p:spPr>
-        <p:txBody>
-          <a:bodyPr>
-            <a:normAutofit/>
-          </a:bodyPr>
-          <a:lstStyle/>
-          <a:p>
-            <a:pPr lvl="2" marL="228600" indent="0">
-              <a:spcBef>
-                <a:spcPts val="300"/>
-              </a:spcBef>
-              <a:spcAft>
-                <a:spcPts val="300"/>
-              </a:spcAft>
-              <a:buNone/>
-            </a:pPr>
-            <a:r>
-              <a:rPr sz="1400" b="0">
-                <a:solidFill>
-                  <a:srgbClr val="000000"/>
-                </a:solidFill>
-                <a:latin typeface="맑은 고딕"/>
-                <a:ea typeface="맑은 고딕"/>
-              </a:rPr>
-              <a:t>4. 상태</a:t>
-            </a:r>
-          </a:p>
-          <a:p>
-            <a:pPr lvl="3" marL="457200" indent="-182880">
-              <a:spcBef>
-                <a:spcPts val="300"/>
-              </a:spcBef>
-              <a:spcAft>
-                <a:spcPts val="300"/>
-              </a:spcAft>
-              <a:buSzPct val="90000"/>
-              <a:buFont typeface="Wingdings" pitchFamily="2" charset="2"/>
-              <a:buChar char=""/>
-            </a:pPr>
-            <a:r>
-              <a:rPr sz="1200" b="1">
-                <a:solidFill>
-                  <a:srgbClr val="000000"/>
-                </a:solidFill>
-                <a:latin typeface="맑은 고딕"/>
-                <a:ea typeface="맑은 고딕"/>
-              </a:rPr>
-              <a:t>작업 공간</a:t>
-            </a:r>
-            <a:r>
-              <a:rPr sz="1200" b="0">
-                <a:solidFill>
-                  <a:srgbClr val="000000"/>
-                </a:solidFill>
-                <a:latin typeface="맑은 고딕"/>
-                <a:ea typeface="맑은 고딕"/>
-              </a:rPr>
-              <a:t> —</a:t>
-            </a:r>
-            <a:r>
-              <a:rPr sz="1000" b="0">
-                <a:solidFill>
-                  <a:srgbClr val="000000"/>
-                </a:solidFill>
-                <a:latin typeface="맑은 고딕"/>
-                <a:ea typeface="맑은 고딕"/>
-              </a:rPr>
-              <a:t> 과제마다 작업 브랜치. push와 병합은 사람이 한다</a:t>
-            </a:r>
-          </a:p>
-          <a:p>
-            <a:pPr lvl="3" marL="457200" indent="-182880">
-              <a:spcBef>
-                <a:spcPts val="300"/>
-              </a:spcBef>
-              <a:spcAft>
-                <a:spcPts val="300"/>
-              </a:spcAft>
-              <a:buSzPct val="90000"/>
-              <a:buFont typeface="Wingdings" pitchFamily="2" charset="2"/>
-              <a:buChar char=""/>
-            </a:pPr>
-            <a:r>
-              <a:rPr sz="1200" b="1">
-                <a:solidFill>
-                  <a:srgbClr val="000000"/>
-                </a:solidFill>
-                <a:latin typeface="맑은 고딕"/>
-                <a:ea typeface="맑은 고딕"/>
-              </a:rPr>
-              <a:t>진행 기록</a:t>
-            </a:r>
-            <a:r>
-              <a:rPr sz="1200" b="0">
-                <a:solidFill>
-                  <a:srgbClr val="000000"/>
-                </a:solidFill>
-                <a:latin typeface="맑은 고딕"/>
-                <a:ea typeface="맑은 고딕"/>
-              </a:rPr>
-              <a:t> —</a:t>
-            </a:r>
-            <a:r>
-              <a:rPr sz="1000" b="0">
-                <a:solidFill>
-                  <a:srgbClr val="000000"/>
-                </a:solidFill>
-                <a:latin typeface="맑은 고딕"/>
-                <a:ea typeface="맑은 고딕"/>
-              </a:rPr>
-              <a:t> 작업 단위 4개의 상태를 기능 목록에 남긴다</a:t>
-            </a:r>
-          </a:p>
-          <a:p>
-            <a:pPr lvl="2" marL="228600" indent="0">
-              <a:spcBef>
-                <a:spcPts val="300"/>
-              </a:spcBef>
-              <a:spcAft>
-                <a:spcPts val="300"/>
-              </a:spcAft>
-              <a:buNone/>
-            </a:pPr>
-            <a:r>
-              <a:rPr sz="1400" b="0">
-                <a:solidFill>
-                  <a:srgbClr val="000000"/>
-                </a:solidFill>
-                <a:latin typeface="맑은 고딕"/>
-                <a:ea typeface="맑은 고딕"/>
-              </a:rPr>
-              <a:t>5. 종료 조건</a:t>
-            </a:r>
-          </a:p>
-          <a:p>
-            <a:pPr lvl="3" marL="457200" indent="-182880">
-              <a:spcBef>
-                <a:spcPts val="300"/>
-              </a:spcBef>
-              <a:spcAft>
-                <a:spcPts val="300"/>
-              </a:spcAft>
-              <a:buSzPct val="90000"/>
-              <a:buFont typeface="Wingdings" pitchFamily="2" charset="2"/>
-              <a:buChar char=""/>
-            </a:pPr>
-            <a:r>
-              <a:rPr sz="1200" b="1">
-                <a:solidFill>
-                  <a:srgbClr val="000000"/>
-                </a:solidFill>
-                <a:latin typeface="맑은 고딕"/>
-                <a:ea typeface="맑은 고딕"/>
-              </a:rPr>
-              <a:t>완료의 정의</a:t>
-            </a:r>
-            <a:r>
-              <a:rPr sz="1200" b="0">
-                <a:solidFill>
-                  <a:srgbClr val="000000"/>
-                </a:solidFill>
-                <a:latin typeface="맑은 고딕"/>
-                <a:ea typeface="맑은 고딕"/>
-              </a:rPr>
-              <a:t>를 만족한다 —</a:t>
-            </a:r>
-            <a:r>
-              <a:rPr sz="1000" b="0">
-                <a:solidFill>
-                  <a:srgbClr val="000000"/>
-                </a:solidFill>
-                <a:latin typeface="맑은 고딕"/>
-                <a:ea typeface="맑은 고딕"/>
-              </a:rPr>
-              <a:t> 수용 테스트 5개 통과, 테스트 파일 변경 없음</a:t>
-            </a:r>
-          </a:p>
-          <a:p>
-            <a:pPr lvl="2" marL="228600" indent="0">
-              <a:spcBef>
-                <a:spcPts val="300"/>
-              </a:spcBef>
-              <a:spcAft>
-                <a:spcPts val="300"/>
-              </a:spcAft>
-              <a:buNone/>
-            </a:pPr>
-            <a:r>
-              <a:rPr sz="1400" b="0">
-                <a:solidFill>
-                  <a:srgbClr val="000000"/>
-                </a:solidFill>
-                <a:latin typeface="맑은 고딕"/>
-                <a:ea typeface="맑은 고딕"/>
-              </a:rPr>
-              <a:t>6. 멈출 조건</a:t>
-            </a:r>
-          </a:p>
-          <a:p>
-            <a:pPr lvl="3" marL="457200" indent="-182880">
-              <a:spcBef>
-                <a:spcPts val="300"/>
-              </a:spcBef>
-              <a:spcAft>
-                <a:spcPts val="300"/>
-              </a:spcAft>
-              <a:buSzPct val="90000"/>
-              <a:buFont typeface="Wingdings" pitchFamily="2" charset="2"/>
-              <a:buChar char=""/>
-            </a:pPr>
-            <a:r>
-              <a:rPr sz="1200" b="1">
-                <a:solidFill>
-                  <a:srgbClr val="000000"/>
-                </a:solidFill>
-                <a:latin typeface="맑은 고딕"/>
-                <a:ea typeface="맑은 고딕"/>
-              </a:rPr>
-              <a:t>회차 금액·회차 수·만료일</a:t>
-            </a:r>
-            <a:r>
-              <a:rPr sz="1200" b="0">
-                <a:solidFill>
-                  <a:srgbClr val="000000"/>
-                </a:solidFill>
-                <a:latin typeface="맑은 고딕"/>
-                <a:ea typeface="맑은 고딕"/>
-              </a:rPr>
-              <a:t>의 기대값을 바꿔야 할 때</a:t>
-            </a:r>
-          </a:p>
-          <a:p>
-            <a:pPr lvl="3" marL="457200" indent="-182880">
-              <a:spcBef>
-                <a:spcPts val="300"/>
-              </a:spcBef>
-              <a:spcAft>
-                <a:spcPts val="300"/>
-              </a:spcAft>
-              <a:buSzPct val="90000"/>
-              <a:buFont typeface="Wingdings" pitchFamily="2" charset="2"/>
-              <a:buChar char=""/>
-            </a:pPr>
-            <a:r>
-              <a:rPr sz="1200" b="1">
-                <a:solidFill>
-                  <a:srgbClr val="000000"/>
-                </a:solidFill>
-                <a:latin typeface="맑은 고딕"/>
-                <a:ea typeface="맑은 고딕"/>
-              </a:rPr>
-              <a:t>공휴일 규칙</a:t>
-            </a:r>
-            <a:r>
-              <a:rPr sz="1200" b="0">
-                <a:solidFill>
-                  <a:srgbClr val="000000"/>
-                </a:solidFill>
-                <a:latin typeface="맑은 고딕"/>
-                <a:ea typeface="맑은 고딕"/>
-              </a:rPr>
-              <a:t>처럼 미정인 업무 규칙을 정해야 할 때</a:t>
-            </a:r>
-          </a:p>
-          <a:p>
-            <a:pPr lvl="3" marL="457200" indent="-182880">
-              <a:spcBef>
-                <a:spcPts val="300"/>
-              </a:spcBef>
-              <a:spcAft>
-                <a:spcPts val="300"/>
-              </a:spcAft>
-              <a:buSzPct val="90000"/>
-              <a:buFont typeface="Wingdings" pitchFamily="2" charset="2"/>
-              <a:buChar char=""/>
-            </a:pPr>
-            <a:r>
-              <a:rPr sz="1200" b="1">
-                <a:solidFill>
-                  <a:srgbClr val="000000"/>
-                </a:solidFill>
-                <a:latin typeface="맑은 고딕"/>
-                <a:ea typeface="맑은 고딕"/>
-              </a:rPr>
-              <a:t>같은 테스트가 3회 연속</a:t>
-            </a:r>
-            <a:r>
-              <a:rPr sz="1200" b="0">
-                <a:solidFill>
-                  <a:srgbClr val="000000"/>
-                </a:solidFill>
-                <a:latin typeface="맑은 고딕"/>
-                <a:ea typeface="맑은 고딕"/>
-              </a:rPr>
-              <a:t> 실패할 때</a:t>
+              <a:rPr sz="1800" b="0">
+                <a:solidFill>
+                  <a:srgbClr val="000000"/>
+                </a:solidFill>
+                <a:latin typeface="맑은 고딕"/>
+                <a:ea typeface="맑은 고딕"/>
+              </a:rPr>
+              <a:t>"</a:t>
+            </a:r>
+            <a:r>
+              <a:rPr sz="1800" b="1">
+                <a:solidFill>
+                  <a:srgbClr val="000000"/>
+                </a:solidFill>
+                <a:latin typeface="맑은 고딕"/>
+                <a:ea typeface="맑은 고딕"/>
+              </a:rPr>
+              <a:t>07. 워크플로·에이전트와 사람의 개입</a:t>
+            </a:r>
+            <a:r>
+              <a:rPr sz="1800" b="0">
+                <a:solidFill>
+                  <a:srgbClr val="000000"/>
+                </a:solidFill>
+                <a:latin typeface="맑은 고딕"/>
+                <a:ea typeface="맑은 고딕"/>
+              </a:rPr>
+              <a:t>" —</a:t>
+            </a:r>
+            <a:r>
+              <a:rPr sz="1600" b="0">
+                <a:solidFill>
+                  <a:srgbClr val="000000"/>
+                </a:solidFill>
+                <a:latin typeface="맑은 고딕"/>
+                <a:ea typeface="맑은 고딕"/>
+              </a:rPr>
+              <a:t> 경계를 정한 과제를 어떤 흐름으로 실행하고, 어디에 사람의 확인 지점을 둘지 정한다.</a:t>
             </a:r>
           </a:p>
         </p:txBody>
@@ -13484,7 +12667,7 @@
                 <a:latin typeface="맑은 고딕"/>
                 <a:ea typeface="맑은 고딕"/>
               </a:rPr>
-              <a:t>보완 </a:t>
+              <a:t>위임 계약 </a:t>
             </a:r>
             <a:r>
               <a:rPr sz="1800" b="1">
@@ -13642,8 +12825,8 @@
         </p:nvSpPr>
         <p:spPr>
           <a:xfrm>
-            <a:off x="233172" y="1414318"/>
-            <a:ext cx="4338828" cy="4898147"/>
+            <a:off x="233172" y="1616364"/>
+            <a:ext cx="4338828" cy="4696101"/>
           </a:xfrm>
         </p:spPr>
         <p:txBody>
@@ -13671,17 +12854,48 @@
                 <a:latin typeface="맑은 고딕"/>
                 <a:ea typeface="맑은 고딕"/>
               </a:rPr>
-              <a:t>맥락 패키지</a:t>
-            </a:r>
-            <a:r>
-              <a:rPr sz="1000" b="0">
-                <a:solidFill>
-                  <a:srgbClr val="000000"/>
-                </a:solidFill>
-                <a:latin typeface="맑은 고딕"/>
-                <a:ea typeface="맑은 고딕"/>
-              </a:rPr>
-              <a:t>(실습 5)</a:t>
+              <a:t>위임 계약</a:t>
+            </a:r>
+            <a:r>
+              <a:rPr sz="1400" b="0">
+                <a:solidFill>
+                  <a:srgbClr val="000000"/>
+                </a:solidFill>
+                <a:latin typeface="맑은 고딕"/>
+                <a:ea typeface="맑은 고딕"/>
+              </a:rPr>
+              <a:t> —</a:t>
+            </a:r>
+            <a:r>
+              <a:rPr sz="1200" b="0">
+                <a:solidFill>
+                  <a:srgbClr val="000000"/>
+                </a:solidFill>
+                <a:latin typeface="맑은 고딕"/>
+                <a:ea typeface="맑은 고딕"/>
+              </a:rPr>
+              <a:t> "신청한다"</a:t>
+            </a:r>
+          </a:p>
+          <a:p>
+            <a:pPr lvl="2" marL="228600" indent="0">
+              <a:spcBef>
+                <a:spcPts val="300"/>
+              </a:spcBef>
+              <a:spcAft>
+                <a:spcPts val="300"/>
+              </a:spcAft>
+              <a:buNone/>
+            </a:pPr>
+            <a:r>
+              <a:rPr sz="1400" b="0">
+                <a:solidFill>
+                  <a:srgbClr val="000000"/>
+                </a:solidFill>
+                <a:latin typeface="맑은 고딕"/>
+                <a:ea typeface="맑은 고딕"/>
+              </a:rPr>
+              <a:t>1. 입력</a:t>
             </a:r>
           </a:p>
           <a:p>
@@ -13704,7 +12918,7 @@
                 <a:latin typeface="맑은 고딕"/>
                 <a:ea typeface="맑은 고딕"/>
               </a:rPr>
-              <a:t>멈출 조건을 옮긴다</a:t>
+              <a:t>작업 명세서</a:t>
             </a:r>
             <a:r>
               <a:rPr sz="1200" b="0">
@@ -13714,17 +12928,58 @@
                 <a:latin typeface="맑은 고딕"/>
                 <a:ea typeface="맑은 고딕"/>
               </a:rPr>
-              <a:t> —</a:t>
-            </a:r>
-            <a:r>
-              <a:rPr sz="1000" b="0">
-                <a:solidFill>
-                  <a:srgbClr val="000000"/>
-                </a:solidFill>
-                <a:latin typeface="맑은 고딕"/>
-                <a:ea typeface="맑은 고딕"/>
-              </a:rPr>
-              <a:t> 맥락 파일의 멈출 조건 한 줄을 지우고 위임 계약을 가리킨다. 경계는 한 곳에 있어야 한다.</a:t>
+              <a:t>와 수용 기준 5개, 맥락 파일 </a:t>
+            </a:r>
+            <a:r>
+              <a:rPr sz="1200" b="0">
+                <a:solidFill>
+                  <a:srgbClr val="000000"/>
+                </a:solidFill>
+                <a:latin typeface="맑은 고딕"/>
+                <a:ea typeface="맑은 고딕"/>
+              </a:rPr>
+              <a:t>AGENTS.md</a:t>
+            </a:r>
+            <a:r>
+              <a:rPr sz="1200" b="0">
+                <a:solidFill>
+                  <a:srgbClr val="000000"/>
+                </a:solidFill>
+                <a:latin typeface="맑은 고딕"/>
+                <a:ea typeface="맑은 고딕"/>
+              </a:rPr>
+              <a:t>와 </a:t>
+            </a:r>
+            <a:r>
+              <a:rPr sz="1200" b="0">
+                <a:solidFill>
+                  <a:srgbClr val="000000"/>
+                </a:solidFill>
+                <a:latin typeface="맑은 고딕"/>
+                <a:ea typeface="맑은 고딕"/>
+              </a:rPr>
+              <a:t>docs/</a:t>
+            </a:r>
+          </a:p>
+          <a:p>
+            <a:pPr lvl="2" marL="228600" indent="0">
+              <a:spcBef>
+                <a:spcPts val="300"/>
+              </a:spcBef>
+              <a:spcAft>
+                <a:spcPts val="300"/>
+              </a:spcAft>
+              <a:buNone/>
+            </a:pPr>
+            <a:r>
+              <a:rPr sz="1400" b="0">
+                <a:solidFill>
+                  <a:srgbClr val="000000"/>
+                </a:solidFill>
+                <a:latin typeface="맑은 고딕"/>
+                <a:ea typeface="맑은 고딕"/>
+              </a:rPr>
+              <a:t>2. 도구</a:t>
             </a:r>
           </a:p>
           <a:p>
@@ -13747,7 +13002,7 @@
                 <a:latin typeface="맑은 고딕"/>
                 <a:ea typeface="맑은 고딕"/>
               </a:rPr>
-              <a:t>대역을 적는다</a:t>
+              <a:t>파일 읽기·쓰기</a:t>
             </a:r>
             <a:r>
               <a:rPr sz="1200" b="0">
@@ -13757,6 +13012,60 @@
                 <a:latin typeface="맑은 고딕"/>
                 <a:ea typeface="맑은 고딕"/>
               </a:rPr>
+              <a:t>, 빌드·수용 테스트 실행, 결제 테스트 대역, 브랜치 커밋</a:t>
+            </a:r>
+          </a:p>
+          <a:p>
+            <a:pPr lvl="2" marL="228600" indent="0">
+              <a:spcBef>
+                <a:spcPts val="300"/>
+              </a:spcBef>
+              <a:spcAft>
+                <a:spcPts val="300"/>
+              </a:spcAft>
+              <a:buNone/>
+            </a:pPr>
+            <a:r>
+              <a:rPr sz="1400" b="0">
+                <a:solidFill>
+                  <a:srgbClr val="000000"/>
+                </a:solidFill>
+                <a:latin typeface="맑은 고딕"/>
+                <a:ea typeface="맑은 고딕"/>
+              </a:rPr>
+              <a:t>3. 권한</a:t>
+            </a:r>
+          </a:p>
+          <a:p>
+            <a:pPr lvl="3" marL="457200" indent="-182880">
+              <a:spcBef>
+                <a:spcPts val="300"/>
+              </a:spcBef>
+              <a:spcAft>
+                <a:spcPts val="300"/>
+              </a:spcAft>
+              <a:buSzPct val="90000"/>
+              <a:buFont typeface="Wingdings" pitchFamily="2" charset="2"/>
+              <a:buChar char=""/>
+            </a:pPr>
+            <a:r>
+              <a:rPr sz="1200" b="1">
+                <a:solidFill>
+                  <a:srgbClr val="000000"/>
+                </a:solidFill>
+                <a:latin typeface="맑은 고딕"/>
+                <a:ea typeface="맑은 고딕"/>
+              </a:rPr>
+              <a:t>읽기</a:t>
+            </a:r>
+            <a:r>
+              <a:rPr sz="1200" b="0">
+                <a:solidFill>
+                  <a:srgbClr val="000000"/>
+                </a:solidFill>
+                <a:latin typeface="맑은 고딕"/>
+                <a:ea typeface="맑은 고딕"/>
+              </a:rPr>
               <a:t> —</a:t>
             </a:r>
             <a:r>
@@ -13767,6 +13076,69 @@
                 <a:latin typeface="맑은 고딕"/>
                 <a:ea typeface="맑은 고딕"/>
               </a:rPr>
+              <a:t> 저장소의 코드와 </a:t>
+            </a:r>
+            <a:r>
+              <a:rPr sz="1000" b="0">
+                <a:solidFill>
+                  <a:srgbClr val="000000"/>
+                </a:solidFill>
+                <a:latin typeface="맑은 고딕"/>
+                <a:ea typeface="맑은 고딕"/>
+              </a:rPr>
+              <a:t>docs/</a:t>
+            </a:r>
+            <a:r>
+              <a:rPr sz="1000" b="0">
+                <a:solidFill>
+                  <a:srgbClr val="000000"/>
+                </a:solidFill>
+                <a:latin typeface="맑은 고딕"/>
+                <a:ea typeface="맑은 고딕"/>
+              </a:rPr>
+              <a:t>. 비밀 키와 연동 설정은 제외한다</a:t>
+            </a:r>
+          </a:p>
+          <a:p>
+            <a:pPr lvl="3" marL="457200" indent="-182880">
+              <a:spcBef>
+                <a:spcPts val="300"/>
+              </a:spcBef>
+              <a:spcAft>
+                <a:spcPts val="300"/>
+              </a:spcAft>
+              <a:buSzPct val="90000"/>
+              <a:buFont typeface="Wingdings" pitchFamily="2" charset="2"/>
+              <a:buChar char=""/>
+            </a:pPr>
+            <a:r>
+              <a:rPr sz="1200" b="1">
+                <a:solidFill>
+                  <a:srgbClr val="000000"/>
+                </a:solidFill>
+                <a:latin typeface="맑은 고딕"/>
+                <a:ea typeface="맑은 고딕"/>
+              </a:rPr>
+              <a:t>쓰기</a:t>
+            </a:r>
+            <a:r>
+              <a:rPr sz="1200" b="0">
+                <a:solidFill>
+                  <a:srgbClr val="000000"/>
+                </a:solidFill>
+                <a:latin typeface="맑은 고딕"/>
+                <a:ea typeface="맑은 고딕"/>
+              </a:rPr>
+              <a:t> —</a:t>
+            </a:r>
+            <a:r>
+              <a:rPr sz="1000" b="0">
+                <a:solidFill>
+                  <a:srgbClr val="000000"/>
+                </a:solidFill>
+                <a:latin typeface="맑은 고딕"/>
+                <a:ea typeface="맑은 고딕"/>
+              </a:rPr>
               <a:t> </a:t>
             </a:r>
             <a:r>
@@ -13777,7 +13149,7 @@
                 <a:latin typeface="맑은 고딕"/>
                 <a:ea typeface="맑은 고딕"/>
               </a:rPr>
-              <a:t>docs/external/payment-api.md</a:t>
+              <a:t>subscription</a:t>
             </a:r>
             <a:r>
               <a:rPr sz="1000" b="0">
@@ -13787,7 +13159,93 @@
                 <a:latin typeface="맑은 고딕"/>
                 <a:ea typeface="맑은 고딕"/>
               </a:rPr>
-              <a:t>는 대역의 응답 형식을 맞추는 데 쓴다는 것을 한 줄로 밝힌다.</a:t>
+              <a:t> 패키지와 테스트 코드. 기대값과 의존 규칙은 제외한다</a:t>
+            </a:r>
+          </a:p>
+          <a:p>
+            <a:pPr lvl="3" marL="457200" indent="-182880">
+              <a:spcBef>
+                <a:spcPts val="300"/>
+              </a:spcBef>
+              <a:spcAft>
+                <a:spcPts val="300"/>
+              </a:spcAft>
+              <a:buSzPct val="90000"/>
+              <a:buFont typeface="Wingdings" pitchFamily="2" charset="2"/>
+              <a:buChar char=""/>
+            </a:pPr>
+            <a:r>
+              <a:rPr sz="1200" b="1">
+                <a:solidFill>
+                  <a:srgbClr val="000000"/>
+                </a:solidFill>
+                <a:latin typeface="맑은 고딕"/>
+                <a:ea typeface="맑은 고딕"/>
+              </a:rPr>
+              <a:t>실행</a:t>
+            </a:r>
+            <a:r>
+              <a:rPr sz="1200" b="0">
+                <a:solidFill>
+                  <a:srgbClr val="000000"/>
+                </a:solidFill>
+                <a:latin typeface="맑은 고딕"/>
+                <a:ea typeface="맑은 고딕"/>
+              </a:rPr>
+              <a:t> —</a:t>
+            </a:r>
+            <a:r>
+              <a:rPr sz="1000" b="0">
+                <a:solidFill>
+                  <a:srgbClr val="000000"/>
+                </a:solidFill>
+                <a:latin typeface="맑은 고딕"/>
+                <a:ea typeface="맑은 고딕"/>
+              </a:rPr>
+              <a:t> 빌드와 수용 테스트. 외부 네트워크 호출은 금지한다</a:t>
+            </a:r>
+          </a:p>
+          <a:p>
+            <a:pPr lvl="3" marL="457200" indent="-182880">
+              <a:spcBef>
+                <a:spcPts val="300"/>
+              </a:spcBef>
+              <a:spcAft>
+                <a:spcPts val="300"/>
+              </a:spcAft>
+              <a:buSzPct val="90000"/>
+              <a:buFont typeface="Wingdings" pitchFamily="2" charset="2"/>
+              <a:buChar char=""/>
+            </a:pPr>
+            <a:r>
+              <a:rPr sz="1200" b="1">
+                <a:solidFill>
+                  <a:srgbClr val="000000"/>
+                </a:solidFill>
+                <a:latin typeface="맑은 고딕"/>
+                <a:ea typeface="맑은 고딕"/>
+              </a:rPr>
+              <a:t>외부 호출</a:t>
+            </a:r>
+            <a:r>
+              <a:rPr sz="1200" b="0">
+                <a:solidFill>
+                  <a:srgbClr val="000000"/>
+                </a:solidFill>
+                <a:latin typeface="맑은 고딕"/>
+                <a:ea typeface="맑은 고딕"/>
+              </a:rPr>
+              <a:t> —</a:t>
+            </a:r>
+            <a:r>
+              <a:rPr sz="1000" b="0">
+                <a:solidFill>
+                  <a:srgbClr val="000000"/>
+                </a:solidFill>
+                <a:latin typeface="맑은 고딕"/>
+                <a:ea typeface="맑은 고딕"/>
+              </a:rPr>
+              <a:t> 결제 테스트 대역만. 실제 결제·배송 시스템은 금지한다</a:t>
             </a:r>
           </a:p>
         </p:txBody>
@@ -13811,7 +13269,7 @@
         <p:spPr>
           <a:xfrm>
             <a:off x="233172" y="960120"/>
-            <a:ext cx="8778240" cy="454198"/>
+            <a:ext cx="8778240" cy="656244"/>
           </a:xfrm>
         </p:spPr>
         <p:txBody>
@@ -13837,7 +13295,27 @@
                 <a:latin typeface="맑은 고딕"/>
                 <a:ea typeface="맑은 고딕"/>
               </a:rPr>
-              <a:t>새로 발견한 것은 </a:t>
+              <a:t>"신청한다"의 위임 계약은 쓰기를 </a:t>
+            </a:r>
+            <a:r>
+              <a:rPr sz="1400" b="0">
+                <a:solidFill>
+                  <a:srgbClr val="000000"/>
+                </a:solidFill>
+                <a:latin typeface="맑은 고딕"/>
+                <a:ea typeface="맑은 고딕"/>
+              </a:rPr>
+              <a:t>subscription</a:t>
+            </a:r>
+            <a:r>
+              <a:rPr sz="1400" b="0">
+                <a:solidFill>
+                  <a:srgbClr val="000000"/>
+                </a:solidFill>
+                <a:latin typeface="맑은 고딕"/>
+                <a:ea typeface="맑은 고딕"/>
+              </a:rPr>
+              <a:t>과 테스트로 묶고, </a:t>
             </a:r>
             <a:r>
               <a:rPr sz="1400" b="1">
@@ -13847,7 +13325,7 @@
                 <a:latin typeface="맑은 고딕"/>
                 <a:ea typeface="맑은 고딕"/>
               </a:rPr>
-              <a:t>후속 작업에 영향을 미치는 경우에만</a:t>
+              <a:t>결제·배송의 실제 호출과 원격 반영을 뺀</a:t>
             </a:r>
             <a:r>
               <a:rPr sz="1400" b="0">
@@ -13857,7 +13335,7 @@
                 <a:latin typeface="맑은 고딕"/>
                 <a:ea typeface="맑은 고딕"/>
               </a:rPr>
-              <a:t> 이전 산출물에 반영한다.</a:t>
+              <a:t> 한 장이다.</a:t>
             </a:r>
           </a:p>
         </p:txBody>
@@ -13880,8 +13358,8 @@
         </p:nvSpPr>
         <p:spPr>
           <a:xfrm>
-            <a:off x="4572000" y="1414318"/>
-            <a:ext cx="4439412" cy="4898147"/>
+            <a:off x="4572000" y="1616364"/>
+            <a:ext cx="4439412" cy="4696101"/>
           </a:xfrm>
         </p:spPr>
         <p:txBody>
@@ -13890,36 +13368,24 @@
           </a:bodyPr>
           <a:lstStyle/>
           <a:p>
-            <a:pPr lvl="2" marL="228600" indent="-182880">
+            <a:pPr lvl="2" marL="228600" indent="0">
               <a:spcBef>
                 <a:spcPts val="300"/>
               </a:spcBef>
               <a:spcAft>
                 <a:spcPts val="300"/>
               </a:spcAft>
-              <a:buSzPct val="90000"/>
-              <a:buFont typeface="Wingdings" pitchFamily="2" charset="2"/>
-              <a:buChar char=""/>
+              <a:buNone/>
             </a:pPr>
             <a:r>
-              <a:rPr sz="1400" b="1">
-                <a:solidFill>
-                  <a:srgbClr val="000000"/>
-                </a:solidFill>
-                <a:latin typeface="맑은 고딕"/>
-                <a:ea typeface="맑은 고딕"/>
-              </a:rPr>
-              <a:t>수용 기준</a:t>
-            </a:r>
-            <a:r>
-              <a:rPr sz="1000" b="0">
-                <a:solidFill>
-                  <a:srgbClr val="000000"/>
-                </a:solidFill>
-                <a:latin typeface="맑은 고딕"/>
-                <a:ea typeface="맑은 고딕"/>
-              </a:rPr>
-              <a:t>(실습 4)</a:t>
+              <a:rPr sz="1400" b="0">
+                <a:solidFill>
+                  <a:srgbClr val="000000"/>
+                </a:solidFill>
+                <a:latin typeface="맑은 고딕"/>
+                <a:ea typeface="맑은 고딕"/>
+              </a:rPr>
+              <a:t>4. 상태</a:t>
             </a:r>
           </a:p>
           <a:p>
@@ -13942,7 +13408,7 @@
                 <a:latin typeface="맑은 고딕"/>
                 <a:ea typeface="맑은 고딕"/>
               </a:rPr>
-              <a:t>미정을 멈출 조건으로</a:t>
+              <a:t>작업 공간</a:t>
             </a:r>
             <a:r>
               <a:rPr sz="1200" b="0">
@@ -13962,30 +13428,7 @@
                 <a:latin typeface="맑은 고딕"/>
                 <a:ea typeface="맑은 고딕"/>
               </a:rPr>
-              <a:t> 공휴일 미정이 멈출 조건이 된다. 수용 기준에는 그대로 두지 않는다.</a:t>
-            </a:r>
-          </a:p>
-          <a:p>
-            <a:pPr lvl="2" marL="228600" indent="-182880">
-              <a:spcBef>
-                <a:spcPts val="300"/>
-              </a:spcBef>
-              <a:spcAft>
-                <a:spcPts val="300"/>
-              </a:spcAft>
-              <a:buSzPct val="90000"/>
-              <a:buFont typeface="Wingdings" pitchFamily="2" charset="2"/>
-              <a:buChar char=""/>
-            </a:pPr>
-            <a:r>
-              <a:rPr sz="1400" b="1">
-                <a:solidFill>
-                  <a:srgbClr val="000000"/>
-                </a:solidFill>
-                <a:latin typeface="맑은 고딕"/>
-                <a:ea typeface="맑은 고딕"/>
-              </a:rPr>
-              <a:t>※ 현행화 기준</a:t>
+              <a:t> 과제마다 작업 브랜치. push와 병합은 사람이 한다</a:t>
             </a:r>
           </a:p>
           <a:p>
@@ -14008,7 +13451,7 @@
                 <a:latin typeface="맑은 고딕"/>
                 <a:ea typeface="맑은 고딕"/>
               </a:rPr>
-              <a:t>반영</a:t>
+              <a:t>진행 기록</a:t>
             </a:r>
             <a:r>
               <a:rPr sz="1200" b="0">
@@ -14028,7 +13471,28 @@
                 <a:latin typeface="맑은 고딕"/>
                 <a:ea typeface="맑은 고딕"/>
               </a:rPr>
-              <a:t> 맥락 파일의 멈출 조건 제거와 계약 가리킴. 실습 7의 입력이 된다.</a:t>
+              <a:t> 작업 단위 4개의 상태를 기능 목록에 남긴다</a:t>
+            </a:r>
+          </a:p>
+          <a:p>
+            <a:pPr lvl="2" marL="228600" indent="0">
+              <a:spcBef>
+                <a:spcPts val="300"/>
+              </a:spcBef>
+              <a:spcAft>
+                <a:spcPts val="300"/>
+              </a:spcAft>
+              <a:buNone/>
+            </a:pPr>
+            <a:r>
+              <a:rPr sz="1400" b="0">
+                <a:solidFill>
+                  <a:srgbClr val="000000"/>
+                </a:solidFill>
+                <a:latin typeface="맑은 고딕"/>
+                <a:ea typeface="맑은 고딕"/>
+              </a:rPr>
+              <a:t>5. 종료 조건</a:t>
             </a:r>
           </a:p>
           <a:p>
@@ -14051,7 +13515,7 @@
                 <a:latin typeface="맑은 고딕"/>
                 <a:ea typeface="맑은 고딕"/>
               </a:rPr>
-              <a:t>기록만</a:t>
+              <a:t>완료의 정의</a:t>
             </a:r>
             <a:r>
               <a:rPr sz="1200" b="0">
@@ -14061,7 +13525,7 @@
                 <a:latin typeface="맑은 고딕"/>
                 <a:ea typeface="맑은 고딕"/>
               </a:rPr>
-              <a:t> —</a:t>
+              <a:t>를 만족한다 —</a:t>
             </a:r>
             <a:r>
               <a:rPr sz="1000" b="0">
@@ -14071,7 +13535,127 @@
                 <a:latin typeface="맑은 고딕"/>
                 <a:ea typeface="맑은 고딕"/>
               </a:rPr>
-              <a:t> 연동 규격의 용도 한 줄.</a:t>
+              <a:t> 수용 테스트 5개 통과, 테스트 파일 변경 없음</a:t>
+            </a:r>
+          </a:p>
+          <a:p>
+            <a:pPr lvl="2" marL="228600" indent="0">
+              <a:spcBef>
+                <a:spcPts val="300"/>
+              </a:spcBef>
+              <a:spcAft>
+                <a:spcPts val="300"/>
+              </a:spcAft>
+              <a:buNone/>
+            </a:pPr>
+            <a:r>
+              <a:rPr sz="1400" b="0">
+                <a:solidFill>
+                  <a:srgbClr val="000000"/>
+                </a:solidFill>
+                <a:latin typeface="맑은 고딕"/>
+                <a:ea typeface="맑은 고딕"/>
+              </a:rPr>
+              <a:t>6. 멈출 조건</a:t>
+            </a:r>
+          </a:p>
+          <a:p>
+            <a:pPr lvl="3" marL="457200" indent="-182880">
+              <a:spcBef>
+                <a:spcPts val="300"/>
+              </a:spcBef>
+              <a:spcAft>
+                <a:spcPts val="300"/>
+              </a:spcAft>
+              <a:buSzPct val="90000"/>
+              <a:buFont typeface="Wingdings" pitchFamily="2" charset="2"/>
+              <a:buChar char=""/>
+            </a:pPr>
+            <a:r>
+              <a:rPr sz="1200" b="1">
+                <a:solidFill>
+                  <a:srgbClr val="000000"/>
+                </a:solidFill>
+                <a:latin typeface="맑은 고딕"/>
+                <a:ea typeface="맑은 고딕"/>
+              </a:rPr>
+              <a:t>회차 금액·회차 수·만료일</a:t>
+            </a:r>
+            <a:r>
+              <a:rPr sz="1200" b="0">
+                <a:solidFill>
+                  <a:srgbClr val="000000"/>
+                </a:solidFill>
+                <a:latin typeface="맑은 고딕"/>
+                <a:ea typeface="맑은 고딕"/>
+              </a:rPr>
+              <a:t>의 기대값을 바꿔야 할 때</a:t>
+            </a:r>
+          </a:p>
+          <a:p>
+            <a:pPr lvl="3" marL="457200" indent="-182880">
+              <a:spcBef>
+                <a:spcPts val="300"/>
+              </a:spcBef>
+              <a:spcAft>
+                <a:spcPts val="300"/>
+              </a:spcAft>
+              <a:buSzPct val="90000"/>
+              <a:buFont typeface="Wingdings" pitchFamily="2" charset="2"/>
+              <a:buChar char=""/>
+            </a:pPr>
+            <a:r>
+              <a:rPr sz="1200" b="1">
+                <a:solidFill>
+                  <a:srgbClr val="000000"/>
+                </a:solidFill>
+                <a:latin typeface="맑은 고딕"/>
+                <a:ea typeface="맑은 고딕"/>
+              </a:rPr>
+              <a:t>공휴일 규칙</a:t>
+            </a:r>
+            <a:r>
+              <a:rPr sz="1200" b="0">
+                <a:solidFill>
+                  <a:srgbClr val="000000"/>
+                </a:solidFill>
+                <a:latin typeface="맑은 고딕"/>
+                <a:ea typeface="맑은 고딕"/>
+              </a:rPr>
+              <a:t>처럼 미정인 업무 규칙을 정해야 할 때</a:t>
+            </a:r>
+          </a:p>
+          <a:p>
+            <a:pPr lvl="3" marL="457200" indent="-182880">
+              <a:spcBef>
+                <a:spcPts val="300"/>
+              </a:spcBef>
+              <a:spcAft>
+                <a:spcPts val="300"/>
+              </a:spcAft>
+              <a:buSzPct val="90000"/>
+              <a:buFont typeface="Wingdings" pitchFamily="2" charset="2"/>
+              <a:buChar char=""/>
+            </a:pPr>
+            <a:r>
+              <a:rPr sz="1200" b="1">
+                <a:solidFill>
+                  <a:srgbClr val="000000"/>
+                </a:solidFill>
+                <a:latin typeface="맑은 고딕"/>
+                <a:ea typeface="맑은 고딕"/>
+              </a:rPr>
+              <a:t>같은 테스트가 3회 연속</a:t>
+            </a:r>
+            <a:r>
+              <a:rPr sz="1200" b="0">
+                <a:solidFill>
+                  <a:srgbClr val="000000"/>
+                </a:solidFill>
+                <a:latin typeface="맑은 고딕"/>
+                <a:ea typeface="맑은 고딕"/>
+              </a:rPr>
+              <a:t> 실패할 때</a:t>
             </a:r>
           </a:p>
         </p:txBody>
@@ -14595,6 +14179,663 @@
 </p:sld>
 </file>
 
+<file path=ppt/slides/slide20.xml><?xml version="1.0" encoding="utf-8"?>
+<p:sld xmlns:a="http://schemas.openxmlformats.org/drawingml/2006/main" xmlns:r="http://schemas.openxmlformats.org/officeDocument/2006/relationships" xmlns:p="http://schemas.openxmlformats.org/presentationml/2006/main">
+  <p:cSld>
+    <p:spTree>
+      <p:nvGrpSpPr>
+        <p:cNvPr id="1" name="">
+          <a:extLst>
+            <a:ext uri="{FF2B5EF4-FFF2-40B4-BE49-F238E27FC236}">
+              <a16:creationId xmlns:a16="http://schemas.microsoft.com/office/drawing/2014/main" id="{8E4F1F13-426B-086B-7D8C-9A58A0F879DB}"/>
+            </a:ext>
+          </a:extLst>
+        </p:cNvPr>
+        <p:cNvGrpSpPr/>
+        <p:nvPr/>
+      </p:nvGrpSpPr>
+      <p:grpSpPr>
+        <a:xfrm>
+          <a:off x="0" y="0"/>
+          <a:ext cx="0" cy="0"/>
+          <a:chOff x="0" y="0"/>
+          <a:chExt cx="0" cy="0"/>
+        </a:xfrm>
+      </p:grpSpPr>
+      <p:sp>
+        <p:nvSpPr>
+          <p:cNvPr id="2" name="제목 1">
+            <a:extLst>
+              <a:ext uri="{FF2B5EF4-FFF2-40B4-BE49-F238E27FC236}">
+                <a16:creationId xmlns:a16="http://schemas.microsoft.com/office/drawing/2014/main" id="{AA26A92D-924E-0575-9551-F8FD7BFD3FAD}"/>
+              </a:ext>
+            </a:extLst>
+          </p:cNvPr>
+          <p:cNvSpPr>
+            <a:spLocks noGrp="1"/>
+          </p:cNvSpPr>
+          <p:nvPr>
+            <p:ph type="title"/>
+          </p:nvPr>
+        </p:nvSpPr>
+        <p:spPr/>
+        <p:txBody>
+          <a:bodyPr/>
+          <a:lstStyle/>
+          <a:p>
+            <a:r>
+              <a:rPr sz="2400" b="1">
+                <a:solidFill>
+                  <a:srgbClr val="000000"/>
+                </a:solidFill>
+                <a:latin typeface="맑은 고딕"/>
+                <a:ea typeface="맑은 고딕"/>
+              </a:rPr>
+              <a:t>보완 </a:t>
+            </a:r>
+            <a:r>
+              <a:rPr sz="1800" b="1">
+                <a:solidFill>
+                  <a:srgbClr val="000000"/>
+                </a:solidFill>
+                <a:latin typeface="맑은 고딕"/>
+                <a:ea typeface="맑은 고딕"/>
+              </a:rPr>
+              <a:t>(안)</a:t>
+            </a:r>
+          </a:p>
+          <a:p>
+            <a:r>
+              <a:rPr sz="1100" b="1">
+                <a:solidFill>
+                  <a:srgbClr val="000000"/>
+                </a:solidFill>
+                <a:latin typeface="맑은 고딕"/>
+                <a:ea typeface="맑은 고딕"/>
+              </a:rPr>
+              <a:t>별첨. 실습 답</a:t>
+            </a:r>
+          </a:p>
+        </p:txBody>
+      </p:sp>
+      <p:sp>
+        <p:nvSpPr>
+          <p:cNvPr id="3" name="슬라이드 번호 개체 틀 2">
+            <a:extLst>
+              <a:ext uri="{FF2B5EF4-FFF2-40B4-BE49-F238E27FC236}">
+                <a16:creationId xmlns:a16="http://schemas.microsoft.com/office/drawing/2014/main" id="{12CF30EE-4DFD-8063-56B8-B8689E76DFCA}"/>
+              </a:ext>
+            </a:extLst>
+          </p:cNvPr>
+          <p:cNvSpPr>
+            <a:spLocks noGrp="1"/>
+          </p:cNvSpPr>
+          <p:nvPr>
+            <p:ph type="sldNum" sz="quarter" idx="10"/>
+          </p:nvPr>
+        </p:nvSpPr>
+        <p:spPr/>
+        <p:txBody>
+          <a:bodyPr/>
+          <a:lstStyle/>
+          <a:p>
+            <a:pPr>
+              <a:defRPr/>
+            </a:pPr>
+            <a:r>
+              <a:rPr lang="en-US" altLang="ko-KR">
+                <a:solidFill>
+                  <a:prstClr val="black"/>
+                </a:solidFill>
+              </a:rPr>
+              <a:t>- 20 -</a:t>
+            </a:r>
+          </a:p>
+        </p:txBody>
+      </p:sp>
+      <p:sp>
+        <p:nvSpPr>
+          <p:cNvPr id="5" name="텍스트 개체 틀 4">
+            <a:extLst>
+              <a:ext uri="{FF2B5EF4-FFF2-40B4-BE49-F238E27FC236}">
+                <a16:creationId xmlns:a16="http://schemas.microsoft.com/office/drawing/2014/main" id="{D66274C8-E16F-5AEB-614B-D8D32DA3E8C6}"/>
+              </a:ext>
+            </a:extLst>
+          </p:cNvPr>
+          <p:cNvSpPr>
+            <a:spLocks noGrp="1"/>
+          </p:cNvSpPr>
+          <p:nvPr>
+            <p:ph type="body" sz="quarter" idx="11"/>
+          </p:nvPr>
+        </p:nvSpPr>
+        <p:spPr/>
+        <p:txBody>
+          <a:bodyPr/>
+          <a:lstStyle/>
+          <a:p>
+            <a:r>
+              <a:rPr kumimoji="1" lang="en-US" altLang="ko-KR" sz="1250" dirty="0" err="1"/>
+              <a:t>별첨: 06. 작업 위임과 도구·권한·상태의 경계</a:t>
+            </a:r>
+          </a:p>
+        </p:txBody>
+      </p:sp>
+      <p:sp>
+        <p:nvSpPr>
+          <p:cNvPr id="6" name="텍스트 개체 틀 5">
+            <a:extLst>
+              <a:ext uri="{FF2B5EF4-FFF2-40B4-BE49-F238E27FC236}">
+                <a16:creationId xmlns:a16="http://schemas.microsoft.com/office/drawing/2014/main" id="{A24E58E1-194B-A320-AEEE-24D08685BB67}"/>
+              </a:ext>
+            </a:extLst>
+          </p:cNvPr>
+          <p:cNvSpPr>
+            <a:spLocks noGrp="1"/>
+          </p:cNvSpPr>
+          <p:nvPr>
+            <p:ph type="body" sz="quarter" idx="12"/>
+          </p:nvPr>
+        </p:nvSpPr>
+        <p:spPr/>
+        <p:txBody>
+          <a:bodyPr/>
+          <a:lstStyle/>
+          <a:p>
+            <a:endParaRPr kumimoji="1" lang="ko-KR" altLang="en-US" dirty="0"/>
+          </a:p>
+        </p:txBody>
+      </p:sp>
+      <p:sp>
+        <p:nvSpPr>
+          <p:cNvPr id="7" name="텍스트 개체 틀 6">
+            <a:extLst>
+              <a:ext uri="{FF2B5EF4-FFF2-40B4-BE49-F238E27FC236}">
+                <a16:creationId xmlns:a16="http://schemas.microsoft.com/office/drawing/2014/main" id="{A219F420-613B-6234-45F6-0955A9A4505F}"/>
+              </a:ext>
+            </a:extLst>
+          </p:cNvPr>
+          <p:cNvSpPr>
+            <a:spLocks noGrp="1"/>
+          </p:cNvSpPr>
+          <p:nvPr>
+            <p:ph type="body" sz="quarter" idx="13"/>
+          </p:nvPr>
+        </p:nvSpPr>
+        <p:spPr/>
+        <p:txBody>
+          <a:bodyPr/>
+          <a:lstStyle/>
+          <a:p>
+            <a:endParaRPr kumimoji="1" lang="en-US" altLang="ko-KR" dirty="0"/>
+          </a:p>
+        </p:txBody>
+      </p:sp>
+      <p:sp>
+        <p:nvSpPr>
+          <p:cNvPr id="8" name="내용 개체 틀 7">
+            <a:extLst>
+              <a:ext uri="{FF2B5EF4-FFF2-40B4-BE49-F238E27FC236}">
+                <a16:creationId xmlns:a16="http://schemas.microsoft.com/office/drawing/2014/main" id="{BEBA2C4A-B0BF-F2E4-EA6E-614C99CBA184}"/>
+              </a:ext>
+            </a:extLst>
+          </p:cNvPr>
+          <p:cNvSpPr>
+            <a:spLocks noGrp="1"/>
+          </p:cNvSpPr>
+          <p:nvPr>
+            <p:ph idx="1"/>
+          </p:nvPr>
+        </p:nvSpPr>
+        <p:spPr>
+          <a:xfrm>
+            <a:off x="233172" y="1414318"/>
+            <a:ext cx="4338828" cy="4898147"/>
+          </a:xfrm>
+        </p:spPr>
+        <p:txBody>
+          <a:bodyPr>
+            <a:normAutofit/>
+          </a:bodyPr>
+          <a:lstStyle/>
+          <a:p>
+            <a:pPr lvl="2" marL="228600" indent="-182880">
+              <a:spcBef>
+                <a:spcPts val="300"/>
+              </a:spcBef>
+              <a:spcAft>
+                <a:spcPts val="300"/>
+              </a:spcAft>
+              <a:buSzPct val="90000"/>
+              <a:buFont typeface="Wingdings" pitchFamily="2" charset="2"/>
+              <a:buChar char=""/>
+            </a:pPr>
+            <a:r>
+              <a:rPr sz="1400" b="1">
+                <a:solidFill>
+                  <a:srgbClr val="000000"/>
+                </a:solidFill>
+                <a:latin typeface="맑은 고딕"/>
+                <a:ea typeface="맑은 고딕"/>
+              </a:rPr>
+              <a:t>맥락 패키지</a:t>
+            </a:r>
+            <a:r>
+              <a:rPr sz="1000" b="0">
+                <a:solidFill>
+                  <a:srgbClr val="000000"/>
+                </a:solidFill>
+                <a:latin typeface="맑은 고딕"/>
+                <a:ea typeface="맑은 고딕"/>
+              </a:rPr>
+              <a:t>(실습 5)</a:t>
+            </a:r>
+          </a:p>
+          <a:p>
+            <a:pPr lvl="3" marL="457200" indent="-182880">
+              <a:spcBef>
+                <a:spcPts val="300"/>
+              </a:spcBef>
+              <a:spcAft>
+                <a:spcPts val="300"/>
+              </a:spcAft>
+              <a:buSzPct val="90000"/>
+              <a:buFont typeface="Wingdings" pitchFamily="2" charset="2"/>
+              <a:buChar char=""/>
+            </a:pPr>
+            <a:r>
+              <a:rPr sz="1200" b="1">
+                <a:solidFill>
+                  <a:srgbClr val="000000"/>
+                </a:solidFill>
+                <a:latin typeface="맑은 고딕"/>
+                <a:ea typeface="맑은 고딕"/>
+              </a:rPr>
+              <a:t>멈출 조건을 옮긴다</a:t>
+            </a:r>
+            <a:r>
+              <a:rPr sz="1200" b="0">
+                <a:solidFill>
+                  <a:srgbClr val="000000"/>
+                </a:solidFill>
+                <a:latin typeface="맑은 고딕"/>
+                <a:ea typeface="맑은 고딕"/>
+              </a:rPr>
+              <a:t> —</a:t>
+            </a:r>
+            <a:r>
+              <a:rPr sz="1000" b="0">
+                <a:solidFill>
+                  <a:srgbClr val="000000"/>
+                </a:solidFill>
+                <a:latin typeface="맑은 고딕"/>
+                <a:ea typeface="맑은 고딕"/>
+              </a:rPr>
+              <a:t> 맥락 파일의 멈출 조건 한 줄을 지우고 위임 계약을 가리킨다. 경계는 한 곳에 있어야 한다.</a:t>
+            </a:r>
+          </a:p>
+          <a:p>
+            <a:pPr lvl="3" marL="457200" indent="-182880">
+              <a:spcBef>
+                <a:spcPts val="300"/>
+              </a:spcBef>
+              <a:spcAft>
+                <a:spcPts val="300"/>
+              </a:spcAft>
+              <a:buSzPct val="90000"/>
+              <a:buFont typeface="Wingdings" pitchFamily="2" charset="2"/>
+              <a:buChar char=""/>
+            </a:pPr>
+            <a:r>
+              <a:rPr sz="1200" b="1">
+                <a:solidFill>
+                  <a:srgbClr val="000000"/>
+                </a:solidFill>
+                <a:latin typeface="맑은 고딕"/>
+                <a:ea typeface="맑은 고딕"/>
+              </a:rPr>
+              <a:t>대역을 적는다</a:t>
+            </a:r>
+            <a:r>
+              <a:rPr sz="1200" b="0">
+                <a:solidFill>
+                  <a:srgbClr val="000000"/>
+                </a:solidFill>
+                <a:latin typeface="맑은 고딕"/>
+                <a:ea typeface="맑은 고딕"/>
+              </a:rPr>
+              <a:t> —</a:t>
+            </a:r>
+            <a:r>
+              <a:rPr sz="1000" b="0">
+                <a:solidFill>
+                  <a:srgbClr val="000000"/>
+                </a:solidFill>
+                <a:latin typeface="맑은 고딕"/>
+                <a:ea typeface="맑은 고딕"/>
+              </a:rPr>
+              <a:t> </a:t>
+            </a:r>
+            <a:r>
+              <a:rPr sz="1000" b="0">
+                <a:solidFill>
+                  <a:srgbClr val="000000"/>
+                </a:solidFill>
+                <a:latin typeface="맑은 고딕"/>
+                <a:ea typeface="맑은 고딕"/>
+              </a:rPr>
+              <a:t>docs/external/payment-api.md</a:t>
+            </a:r>
+            <a:r>
+              <a:rPr sz="1000" b="0">
+                <a:solidFill>
+                  <a:srgbClr val="000000"/>
+                </a:solidFill>
+                <a:latin typeface="맑은 고딕"/>
+                <a:ea typeface="맑은 고딕"/>
+              </a:rPr>
+              <a:t>는 대역의 응답 형식을 맞추는 데 쓴다는 것을 한 줄로 밝힌다.</a:t>
+            </a:r>
+          </a:p>
+        </p:txBody>
+      </p:sp>
+      <p:sp>
+        <p:nvSpPr>
+          <p:cNvPr id="9" name="내용 개체 틀 7">
+            <a:extLst>
+              <a:ext uri="{FF2B5EF4-FFF2-40B4-BE49-F238E27FC236}">
+                <a16:creationId xmlns:a16="http://schemas.microsoft.com/office/drawing/2014/main" id="{BEBA2C4A-B0BF-F2E4-EA6E-614C99CBA184}"/>
+              </a:ext>
+            </a:extLst>
+          </p:cNvPr>
+          <p:cNvSpPr>
+            <a:spLocks noGrp="1"/>
+          </p:cNvSpPr>
+          <p:nvPr>
+            <p:ph idx="1"/>
+          </p:nvPr>
+        </p:nvSpPr>
+        <p:spPr>
+          <a:xfrm>
+            <a:off x="233172" y="960120"/>
+            <a:ext cx="8778240" cy="454198"/>
+          </a:xfrm>
+        </p:spPr>
+        <p:txBody>
+          <a:bodyPr>
+            <a:normAutofit/>
+          </a:bodyPr>
+          <a:lstStyle/>
+          <a:p>
+            <a:pPr marL="0" indent="0">
+              <a:spcBef>
+                <a:spcPts val="300"/>
+              </a:spcBef>
+              <a:spcAft>
+                <a:spcPts val="300"/>
+              </a:spcAft>
+              <a:buNone/>
+            </a:pPr>
+            <a:r>
+              <a:rPr sz="1400" b="0">
+                <a:solidFill>
+                  <a:srgbClr val="000000"/>
+                </a:solidFill>
+                <a:latin typeface="맑은 고딕"/>
+                <a:ea typeface="맑은 고딕"/>
+              </a:rPr>
+              <a:t>새로 발견한 것은 </a:t>
+            </a:r>
+            <a:r>
+              <a:rPr sz="1400" b="1">
+                <a:solidFill>
+                  <a:srgbClr val="000000"/>
+                </a:solidFill>
+                <a:latin typeface="맑은 고딕"/>
+                <a:ea typeface="맑은 고딕"/>
+              </a:rPr>
+              <a:t>후속 작업에 영향을 미치는 경우에만</a:t>
+            </a:r>
+            <a:r>
+              <a:rPr sz="1400" b="0">
+                <a:solidFill>
+                  <a:srgbClr val="000000"/>
+                </a:solidFill>
+                <a:latin typeface="맑은 고딕"/>
+                <a:ea typeface="맑은 고딕"/>
+              </a:rPr>
+              <a:t> 이전 산출물에 반영한다.</a:t>
+            </a:r>
+          </a:p>
+        </p:txBody>
+      </p:sp>
+      <p:sp>
+        <p:nvSpPr>
+          <p:cNvPr id="10" name="내용 개체 틀 7">
+            <a:extLst>
+              <a:ext uri="{FF2B5EF4-FFF2-40B4-BE49-F238E27FC236}">
+                <a16:creationId xmlns:a16="http://schemas.microsoft.com/office/drawing/2014/main" id="{BEBA2C4A-B0BF-F2E4-EA6E-614C99CBA184}"/>
+              </a:ext>
+            </a:extLst>
+          </p:cNvPr>
+          <p:cNvSpPr>
+            <a:spLocks noGrp="1"/>
+          </p:cNvSpPr>
+          <p:nvPr>
+            <p:ph idx="1"/>
+          </p:nvPr>
+        </p:nvSpPr>
+        <p:spPr>
+          <a:xfrm>
+            <a:off x="4572000" y="1414318"/>
+            <a:ext cx="4439412" cy="4898147"/>
+          </a:xfrm>
+        </p:spPr>
+        <p:txBody>
+          <a:bodyPr>
+            <a:normAutofit/>
+          </a:bodyPr>
+          <a:lstStyle/>
+          <a:p>
+            <a:pPr lvl="2" marL="228600" indent="-182880">
+              <a:spcBef>
+                <a:spcPts val="300"/>
+              </a:spcBef>
+              <a:spcAft>
+                <a:spcPts val="300"/>
+              </a:spcAft>
+              <a:buSzPct val="90000"/>
+              <a:buFont typeface="Wingdings" pitchFamily="2" charset="2"/>
+              <a:buChar char=""/>
+            </a:pPr>
+            <a:r>
+              <a:rPr sz="1400" b="1">
+                <a:solidFill>
+                  <a:srgbClr val="000000"/>
+                </a:solidFill>
+                <a:latin typeface="맑은 고딕"/>
+                <a:ea typeface="맑은 고딕"/>
+              </a:rPr>
+              <a:t>수용 기준</a:t>
+            </a:r>
+            <a:r>
+              <a:rPr sz="1000" b="0">
+                <a:solidFill>
+                  <a:srgbClr val="000000"/>
+                </a:solidFill>
+                <a:latin typeface="맑은 고딕"/>
+                <a:ea typeface="맑은 고딕"/>
+              </a:rPr>
+              <a:t>(실습 4)</a:t>
+            </a:r>
+          </a:p>
+          <a:p>
+            <a:pPr lvl="3" marL="457200" indent="-182880">
+              <a:spcBef>
+                <a:spcPts val="300"/>
+              </a:spcBef>
+              <a:spcAft>
+                <a:spcPts val="300"/>
+              </a:spcAft>
+              <a:buSzPct val="90000"/>
+              <a:buFont typeface="Wingdings" pitchFamily="2" charset="2"/>
+              <a:buChar char=""/>
+            </a:pPr>
+            <a:r>
+              <a:rPr sz="1200" b="1">
+                <a:solidFill>
+                  <a:srgbClr val="000000"/>
+                </a:solidFill>
+                <a:latin typeface="맑은 고딕"/>
+                <a:ea typeface="맑은 고딕"/>
+              </a:rPr>
+              <a:t>미정을 멈출 조건으로</a:t>
+            </a:r>
+            <a:r>
+              <a:rPr sz="1200" b="0">
+                <a:solidFill>
+                  <a:srgbClr val="000000"/>
+                </a:solidFill>
+                <a:latin typeface="맑은 고딕"/>
+                <a:ea typeface="맑은 고딕"/>
+              </a:rPr>
+              <a:t> —</a:t>
+            </a:r>
+            <a:r>
+              <a:rPr sz="1000" b="0">
+                <a:solidFill>
+                  <a:srgbClr val="000000"/>
+                </a:solidFill>
+                <a:latin typeface="맑은 고딕"/>
+                <a:ea typeface="맑은 고딕"/>
+              </a:rPr>
+              <a:t> 공휴일 미정이 멈출 조건이 된다. 수용 기준에는 그대로 두지 않는다.</a:t>
+            </a:r>
+          </a:p>
+          <a:p>
+            <a:pPr lvl="2" marL="228600" indent="-182880">
+              <a:spcBef>
+                <a:spcPts val="300"/>
+              </a:spcBef>
+              <a:spcAft>
+                <a:spcPts val="300"/>
+              </a:spcAft>
+              <a:buSzPct val="90000"/>
+              <a:buFont typeface="Wingdings" pitchFamily="2" charset="2"/>
+              <a:buChar char=""/>
+            </a:pPr>
+            <a:r>
+              <a:rPr sz="1400" b="1">
+                <a:solidFill>
+                  <a:srgbClr val="000000"/>
+                </a:solidFill>
+                <a:latin typeface="맑은 고딕"/>
+                <a:ea typeface="맑은 고딕"/>
+              </a:rPr>
+              <a:t>※ 현행화 기준</a:t>
+            </a:r>
+          </a:p>
+          <a:p>
+            <a:pPr lvl="3" marL="457200" indent="-182880">
+              <a:spcBef>
+                <a:spcPts val="300"/>
+              </a:spcBef>
+              <a:spcAft>
+                <a:spcPts val="300"/>
+              </a:spcAft>
+              <a:buSzPct val="90000"/>
+              <a:buFont typeface="Wingdings" pitchFamily="2" charset="2"/>
+              <a:buChar char=""/>
+            </a:pPr>
+            <a:r>
+              <a:rPr sz="1200" b="1">
+                <a:solidFill>
+                  <a:srgbClr val="000000"/>
+                </a:solidFill>
+                <a:latin typeface="맑은 고딕"/>
+                <a:ea typeface="맑은 고딕"/>
+              </a:rPr>
+              <a:t>반영</a:t>
+            </a:r>
+            <a:r>
+              <a:rPr sz="1200" b="0">
+                <a:solidFill>
+                  <a:srgbClr val="000000"/>
+                </a:solidFill>
+                <a:latin typeface="맑은 고딕"/>
+                <a:ea typeface="맑은 고딕"/>
+              </a:rPr>
+              <a:t> —</a:t>
+            </a:r>
+            <a:r>
+              <a:rPr sz="1000" b="0">
+                <a:solidFill>
+                  <a:srgbClr val="000000"/>
+                </a:solidFill>
+                <a:latin typeface="맑은 고딕"/>
+                <a:ea typeface="맑은 고딕"/>
+              </a:rPr>
+              <a:t> 맥락 파일의 멈출 조건 제거와 계약 가리킴. 실습 7의 입력이 된다.</a:t>
+            </a:r>
+          </a:p>
+          <a:p>
+            <a:pPr lvl="3" marL="457200" indent="-182880">
+              <a:spcBef>
+                <a:spcPts val="300"/>
+              </a:spcBef>
+              <a:spcAft>
+                <a:spcPts val="300"/>
+              </a:spcAft>
+              <a:buSzPct val="90000"/>
+              <a:buFont typeface="Wingdings" pitchFamily="2" charset="2"/>
+              <a:buChar char=""/>
+            </a:pPr>
+            <a:r>
+              <a:rPr sz="1200" b="1">
+                <a:solidFill>
+                  <a:srgbClr val="000000"/>
+                </a:solidFill>
+                <a:latin typeface="맑은 고딕"/>
+                <a:ea typeface="맑은 고딕"/>
+              </a:rPr>
+              <a:t>기록만</a:t>
+            </a:r>
+            <a:r>
+              <a:rPr sz="1200" b="0">
+                <a:solidFill>
+                  <a:srgbClr val="000000"/>
+                </a:solidFill>
+                <a:latin typeface="맑은 고딕"/>
+                <a:ea typeface="맑은 고딕"/>
+              </a:rPr>
+              <a:t> —</a:t>
+            </a:r>
+            <a:r>
+              <a:rPr sz="1000" b="0">
+                <a:solidFill>
+                  <a:srgbClr val="000000"/>
+                </a:solidFill>
+                <a:latin typeface="맑은 고딕"/>
+                <a:ea typeface="맑은 고딕"/>
+              </a:rPr>
+              <a:t> 연동 규격의 용도 한 줄.</a:t>
+            </a:r>
+          </a:p>
+        </p:txBody>
+      </p:sp>
+    </p:spTree>
+    <p:extLst>
+      <p:ext uri="{BB962C8B-B14F-4D97-AF65-F5344CB8AC3E}">
+        <p14:creationId xmlns:p14="http://schemas.microsoft.com/office/powerpoint/2010/main" val="3555436673"/>
+      </p:ext>
+    </p:extLst>
+  </p:cSld>
+  <p:clrMapOvr>
+    <a:masterClrMapping/>
+  </p:clrMapOvr>
+</p:sld>
+</file>
+
 <file path=ppt/slides/slide3.xml><?xml version="1.0" encoding="utf-8"?>
 <p:sld xmlns:a="http://schemas.openxmlformats.org/drawingml/2006/main" xmlns:r="http://schemas.openxmlformats.org/officeDocument/2006/relationships" xmlns:p="http://schemas.openxmlformats.org/presentationml/2006/main">
   <p:cSld>
@@ -14784,7 +15025,7 @@
         <p:spPr>
           <a:xfrm>
             <a:off x="365760" y="960120"/>
-            <a:ext cx="8412480" cy="2926080"/>
+            <a:ext cx="8412480" cy="2575560"/>
           </a:xfrm>
         </p:spPr>
         <p:txBody>
@@ -14959,7 +15200,7 @@
                 <a:latin typeface="맑은 고딕"/>
                 <a:ea typeface="맑은 고딕"/>
               </a:rPr>
-              <a:t>상태</a:t>
+              <a:t>상태와 멈출 조건</a:t>
             </a:r>
             <a:r>
               <a:rPr sz="1800" b="0">
@@ -14979,7 +15220,7 @@
                 <a:latin typeface="맑은 고딕"/>
                 <a:ea typeface="맑은 고딕"/>
               </a:rPr>
-              <a:t> 무엇을 바꾸고 </a:t>
+              <a:t> 되돌릴 수 없는 변경은 맡기지 않고, 사람이 정할 결정에 닿으면 </a:t>
             </a:r>
             <a:r>
               <a:rPr sz="1600" b="1">
@@ -14989,7 +15230,7 @@
                 <a:latin typeface="맑은 고딕"/>
                 <a:ea typeface="맑은 고딕"/>
               </a:rPr>
-              <a:t>어떻게 되돌리는가</a:t>
+              <a:t>멈추고 묻는다</a:t>
             </a:r>
             <a:r>
               <a:rPr sz="1600" b="0">
@@ -14999,7 +15240,7 @@
                 <a:latin typeface="맑은 고딕"/>
                 <a:ea typeface="맑은 고딕"/>
               </a:rPr>
-              <a:t>. 되돌릴 수 없는 변경은 맡기지 않는다.</a:t>
+              <a:t>.</a:t>
             </a:r>
           </a:p>
           <a:p>
@@ -15022,70 +15263,7 @@
                 <a:latin typeface="맑은 고딕"/>
                 <a:ea typeface="맑은 고딕"/>
               </a:rPr>
-              <a:t>멈출 조건</a:t>
-            </a:r>
-            <a:r>
-              <a:rPr sz="1800" b="0">
-                <a:solidFill>
-                  <a:srgbClr val="000000"/>
-                </a:solidFill>
-                <a:latin typeface="맑은 고딕"/>
-                <a:ea typeface="맑은 고딕"/>
-              </a:rPr>
-              <a:t> —</a:t>
-            </a:r>
-            <a:r>
-              <a:rPr sz="1600" b="0">
-                <a:solidFill>
-                  <a:srgbClr val="000000"/>
-                </a:solidFill>
-                <a:latin typeface="맑은 고딕"/>
-                <a:ea typeface="맑은 고딕"/>
-              </a:rPr>
-              <a:t> 사람이 정할 결정에 닿으면 추측하지 않고 </a:t>
-            </a:r>
-            <a:r>
-              <a:rPr sz="1600" b="1">
-                <a:solidFill>
-                  <a:srgbClr val="000000"/>
-                </a:solidFill>
-                <a:latin typeface="맑은 고딕"/>
-                <a:ea typeface="맑은 고딕"/>
-              </a:rPr>
-              <a:t>멈추고 묻는다</a:t>
-            </a:r>
-            <a:r>
-              <a:rPr sz="1600" b="0">
-                <a:solidFill>
-                  <a:srgbClr val="000000"/>
-                </a:solidFill>
-                <a:latin typeface="맑은 고딕"/>
-                <a:ea typeface="맑은 고딕"/>
-              </a:rPr>
-              <a:t>.</a:t>
-            </a:r>
-          </a:p>
-          <a:p>
-            <a:pPr lvl="2" marL="723900" indent="-368300">
-              <a:spcBef>
-                <a:spcPts val="600"/>
-              </a:spcBef>
-              <a:spcAft>
-                <a:spcPts val="600"/>
-              </a:spcAft>
-              <a:buSzPct val="90000"/>
-              <a:buFont typeface="Wingdings" pitchFamily="2" charset="2"/>
-              <a:buChar char=""/>
-            </a:pPr>
-            <a:r>
-              <a:rPr sz="1800" b="1">
-                <a:solidFill>
-                  <a:srgbClr val="000000"/>
-                </a:solidFill>
-                <a:latin typeface="맑은 고딕"/>
-                <a:ea typeface="맑은 고딕"/>
-              </a:rPr>
-              <a:t>경계 밖에 둔 이유는 셋이다</a:t>
+              <a:t>경계 밖의 셋</a:t>
             </a:r>
             <a:r>
               <a:rPr sz="1800" b="0">
@@ -15144,7 +15322,7 @@
         </p:nvSpPr>
         <p:spPr>
           <a:xfrm>
-            <a:off x="365760" y="4187952"/>
+            <a:off x="365760" y="3837432"/>
             <a:ext cx="8412480" cy="201168"/>
           </a:xfrm>
           <a:prstGeom prst="rect">
@@ -15188,8 +15366,8 @@
         </p:blipFill>
         <p:spPr>
           <a:xfrm>
-            <a:off x="1750212" y="4425696"/>
-            <a:ext cx="5643576" cy="1950777"/>
+            <a:off x="1243187" y="4075176"/>
+            <a:ext cx="6657627" cy="2301297"/>
           </a:xfrm>
           <a:prstGeom prst="rect">
             <a:avLst/>
@@ -19935,7 +20113,7 @@
         <p:spPr>
           <a:xfrm>
             <a:off x="365760" y="960120"/>
-            <a:ext cx="8412480" cy="2387138"/>
+            <a:ext cx="8412480" cy="2112818"/>
           </a:xfrm>
         </p:spPr>
         <p:txBody>
@@ -19981,10 +20159,20 @@
                 <a:latin typeface="맑은 고딕"/>
                 <a:ea typeface="맑은 고딕"/>
               </a:rPr>
-              <a:t>다. </a:t>
-            </a:r>
-            <a:r>
-              <a:rPr sz="1800" b="1">
+              <a:t>다 —</a:t>
+            </a:r>
+            <a:r>
+              <a:rPr sz="1600" b="0">
+                <a:solidFill>
+                  <a:srgbClr val="000000"/>
+                </a:solidFill>
+                <a:latin typeface="맑은 고딕"/>
+                <a:ea typeface="맑은 고딕"/>
+              </a:rPr>
+              <a:t> </a:t>
+            </a:r>
+            <a:r>
+              <a:rPr sz="1600" b="1">
                 <a:solidFill>
                   <a:srgbClr val="000000"/>
                 </a:solidFill>
@@ -19994,14 +20182,14 @@
               <a:t>호스트·클라이언트·서버</a:t>
             </a:r>
             <a:r>
-              <a:rPr sz="1800" b="0">
-                <a:solidFill>
-                  <a:srgbClr val="000000"/>
-                </a:solidFill>
-                <a:latin typeface="맑은 고딕"/>
-                <a:ea typeface="맑은 고딕"/>
-              </a:rPr>
-              <a:t>로 나누고, 서버가 리소스·프롬프트·도구를 제공한다.</a:t>
+              <a:rPr sz="1600" b="0">
+                <a:solidFill>
+                  <a:srgbClr val="000000"/>
+                </a:solidFill>
+                <a:latin typeface="맑은 고딕"/>
+                <a:ea typeface="맑은 고딕"/>
+              </a:rPr>
+              <a:t>로 나누고 서버가 리소스·프롬프트·도구를 준다.</a:t>
             </a:r>
           </a:p>
           <a:p>
@@ -20044,7 +20232,7 @@
                 <a:latin typeface="맑은 고딕"/>
                 <a:ea typeface="맑은 고딕"/>
               </a:rPr>
-              <a:t> 도구를 한 번 만들면 </a:t>
+              <a:t> 한 번 만든 도구를 </a:t>
             </a:r>
             <a:r>
               <a:rPr sz="1600" b="1">
@@ -20054,7 +20242,7 @@
                 <a:latin typeface="맑은 고딕"/>
                 <a:ea typeface="맑은 고딕"/>
               </a:rPr>
-              <a:t>도구나 모델이 바뀌어도</a:t>
+              <a:t>모델이 바뀌어도</a:t>
             </a:r>
             <a:r>
               <a:rPr sz="1600" b="0">
@@ -20064,7 +20252,7 @@
                 <a:latin typeface="맑은 고딕"/>
                 <a:ea typeface="맑은 고딕"/>
               </a:rPr>
-              <a:t> 같은 방식으로 쓴다.</a:t>
+              <a:t> 그대로 쓴다.</a:t>
             </a:r>
           </a:p>
           <a:p>
@@ -20127,7 +20315,7 @@
                 <a:latin typeface="맑은 고딕"/>
                 <a:ea typeface="맑은 고딕"/>
               </a:rPr>
-              <a:t>이다. 프로토콜은 권한을 </a:t>
+              <a:t>이고, 프로토콜은 권한을 </a:t>
             </a:r>
             <a:r>
               <a:rPr sz="1600" b="1">
@@ -20137,7 +20325,7 @@
                 <a:latin typeface="맑은 고딕"/>
                 <a:ea typeface="맑은 고딕"/>
               </a:rPr>
-              <a:t>강제하지 않으므로</a:t>
+              <a:t>강제하지 않는다</a:t>
             </a:r>
             <a:r>
               <a:rPr sz="1600" b="0">
@@ -20147,7 +20335,7 @@
                 <a:latin typeface="맑은 고딕"/>
                 <a:ea typeface="맑은 고딕"/>
               </a:rPr>
-              <a:t> 경계는 도구와 신원이 정한다.</a:t>
+              <a:t>.</a:t>
             </a:r>
           </a:p>
           <a:p>
@@ -20270,7 +20458,7 @@
         </p:nvSpPr>
         <p:spPr>
           <a:xfrm>
-            <a:off x="365760" y="3649010"/>
+            <a:off x="365760" y="3374690"/>
             <a:ext cx="8412480" cy="201168"/>
           </a:xfrm>
           <a:prstGeom prst="rect">
@@ -20314,8 +20502,8 @@
         </p:blipFill>
         <p:spPr>
           <a:xfrm>
-            <a:off x="1771650" y="3886754"/>
-            <a:ext cx="5600700" cy="2343150"/>
+            <a:off x="2107406" y="3612434"/>
+            <a:ext cx="4929188" cy="2500313"/>
           </a:xfrm>
           <a:prstGeom prst="rect">
             <a:avLst/>

--- a/courses/ai-native/sessions/s06.pptx
+++ b/courses/ai-native/sessions/s06.pptx
@@ -3718,7 +3718,7 @@
                 <a:latin typeface="맑은 고딕"/>
                 <a:ea typeface="맑은 고딕"/>
               </a:rPr>
-              <a:t> 만들어</a:t>
+              <a:t> 만들어 변경마다 한 벌을 띄우고 조작하게 했다</a:t>
             </a:r>
             <a:r>
               <a:rPr sz="1000" b="0">
@@ -3738,7 +3738,7 @@
                 <a:latin typeface="맑은 고딕"/>
                 <a:ea typeface="맑은 고딕"/>
               </a:rPr>
-              <a:t>변경마다 한 벌을 띄우고 조작하게 했다, "we made the app bootable per git worktree, so Codex could launch and drive one instance per change", [Lopopolo 2026]</a:t>
+              <a:t>"we made the app bootable per git worktree, so Codex could launch and drive one instance per change", [Lopopolo 2026]</a:t>
             </a:r>
           </a:p>
           <a:p>
@@ -3754,6 +3754,16 @@
               <a:buChar char=""/>
             </a:pPr>
             <a:r>
+              <a:rPr sz="1600" b="1">
+                <a:solidFill>
+                  <a:srgbClr val="000000"/>
+                </a:solidFill>
+                <a:latin typeface="맑은 고딕"/>
+                <a:ea typeface="맑은 고딕"/>
+              </a:rPr>
+              <a:t>완전히 분리된 사본</a:t>
+            </a:r>
+            <a:r>
               <a:rPr sz="1600" b="0">
                 <a:solidFill>
                   <a:srgbClr val="000000"/>
@@ -3761,7 +3771,7 @@
                 <a:latin typeface="맑은 고딕"/>
                 <a:ea typeface="맑은 고딕"/>
               </a:rPr>
-              <a:t>"완전히 분리된 사본에서 일하고, 과제가 끝나면 그 사본은 지워진다"</a:t>
+              <a:t>에서 일하고 과제가 끝나면 그 사본은 지워진다</a:t>
             </a:r>
             <a:r>
               <a:rPr sz="1000" b="0">
@@ -7426,7 +7436,27 @@
                 <a:latin typeface="맑은 고딕"/>
                 <a:ea typeface="맑은 고딕"/>
               </a:rPr>
-              <a:t>과제는 끝나면 멈추지만</a:t>
+              <a:t>과제가 끝나면 멈추지만 통제를 유지하려고 </a:t>
+            </a:r>
+            <a:r>
+              <a:rPr sz="1800" b="1">
+                <a:solidFill>
+                  <a:srgbClr val="000000"/>
+                </a:solidFill>
+                <a:latin typeface="맑은 고딕"/>
+                <a:ea typeface="맑은 고딕"/>
+              </a:rPr>
+              <a:t>반복 상한 같은 중단 조건</a:t>
+            </a:r>
+            <a:r>
+              <a:rPr sz="1800" b="0">
+                <a:solidFill>
+                  <a:srgbClr val="000000"/>
+                </a:solidFill>
+                <a:latin typeface="맑은 고딕"/>
+                <a:ea typeface="맑은 고딕"/>
+              </a:rPr>
+              <a:t>을 함께 두는 일이 흔하다</a:t>
             </a:r>
             <a:r>
               <a:rPr sz="1000" b="0">
@@ -7446,7 +7476,7 @@
                 <a:latin typeface="맑은 고딕"/>
                 <a:ea typeface="맑은 고딕"/>
               </a:rPr>
-              <a:t>통제를 유지하려고 반복 상한 같은 중단 조건을 함께 두는 일이 흔하다, "it's also common to include stopping conditions (such as a maximum number of iterations) to maintain control", [Anthropic 2024]</a:t>
+              <a:t>"it's also common to include stopping conditions (such as a maximum number of iterations) to maintain control", [Anthropic 2024]</a:t>
             </a:r>
           </a:p>
           <a:p>
@@ -9834,7 +9864,7 @@
         <p:spPr>
           <a:xfrm>
             <a:off x="365760" y="3780610"/>
-            <a:ext cx="8412480" cy="2241719"/>
+            <a:ext cx="8412480" cy="2136568"/>
           </a:xfrm>
           <a:prstGeom prst="rect">
             <a:avLst/>
@@ -9859,6 +9889,16 @@
               <a:buChar char=""/>
             </a:pPr>
             <a:r>
+              <a:rPr sz="1800" b="1">
+                <a:solidFill>
+                  <a:srgbClr val="000000"/>
+                </a:solidFill>
+                <a:latin typeface="맑은 고딕"/>
+                <a:ea typeface="맑은 고딕"/>
+              </a:rPr>
+              <a:t>샌드박스에서 충분히 시험하고</a:t>
+            </a:r>
+            <a:r>
               <a:rPr sz="1800" b="0">
                 <a:solidFill>
                   <a:srgbClr val="000000"/>
@@ -9866,7 +9906,7 @@
                 <a:latin typeface="맑은 고딕"/>
                 <a:ea typeface="맑은 고딕"/>
               </a:rPr>
-              <a:t>자율성은 </a:t>
+              <a:t> 알맞은 </a:t>
             </a:r>
             <a:r>
               <a:rPr sz="1800" b="1">
@@ -9876,7 +9916,7 @@
                 <a:latin typeface="맑은 고딕"/>
                 <a:ea typeface="맑은 고딕"/>
               </a:rPr>
-              <a:t>비용과 오류 누적</a:t>
+              <a:t>가드레일</a:t>
             </a:r>
             <a:r>
               <a:rPr sz="1800" b="0">
@@ -9886,7 +9926,7 @@
                 <a:latin typeface="맑은 고딕"/>
                 <a:ea typeface="맑은 고딕"/>
               </a:rPr>
-              <a:t>을 뜻하므로</a:t>
+              <a:t>을 함께 두기를 권한다</a:t>
             </a:r>
             <a:r>
               <a:rPr sz="1000" b="0">
@@ -9906,7 +9946,7 @@
                 <a:latin typeface="맑은 고딕"/>
                 <a:ea typeface="맑은 고딕"/>
               </a:rPr>
-              <a:t>샌드박스에서 충분히 시험하고 알맞은 가드레일을 함께 두기를 권한다, "We recommend extensive testing in sandboxed environments, along with the appropriate guardrails.", [Anthropic 2024]</a:t>
+              <a:t>"We recommend extensive testing in sandboxed environments, along with the appropriate guardrails.", [Anthropic 2024]</a:t>
             </a:r>
           </a:p>
           <a:p>
@@ -10824,7 +10864,27 @@
                 <a:latin typeface="맑은 고딕"/>
                 <a:ea typeface="맑은 고딕"/>
               </a:rPr>
-              <a:t>"에이전트와 API 사이의 모든 프로토콜 층은 충실도를 잃고, 복잡한 API에서는 그 손실이 누적된다"</a:t>
+              <a:t>에이전트와 API 사이의 </a:t>
+            </a:r>
+            <a:r>
+              <a:rPr sz="1600" b="1">
+                <a:solidFill>
+                  <a:srgbClr val="000000"/>
+                </a:solidFill>
+                <a:latin typeface="맑은 고딕"/>
+                <a:ea typeface="맑은 고딕"/>
+              </a:rPr>
+              <a:t>모든 프로토콜 층은 충실도를 잃고</a:t>
+            </a:r>
+            <a:r>
+              <a:rPr sz="1600" b="0">
+                <a:solidFill>
+                  <a:srgbClr val="000000"/>
+                </a:solidFill>
+                <a:latin typeface="맑은 고딕"/>
+                <a:ea typeface="맑은 고딕"/>
+              </a:rPr>
+              <a:t> 복잡한 API에서는 그 손실이 누적된다</a:t>
             </a:r>
             <a:r>
               <a:rPr sz="1000" b="0">
@@ -16323,7 +16383,27 @@
                 <a:latin typeface="맑은 고딕"/>
                 <a:ea typeface="맑은 고딕"/>
               </a:rPr>
-              <a:t>"도구를 포카요케하라 — 틀리기 어렵게 인자를 바꾼다"</a:t>
+              <a:t>도구를 </a:t>
+            </a:r>
+            <a:r>
+              <a:rPr sz="1600" b="1">
+                <a:solidFill>
+                  <a:srgbClr val="000000"/>
+                </a:solidFill>
+                <a:latin typeface="맑은 고딕"/>
+                <a:ea typeface="맑은 고딕"/>
+              </a:rPr>
+              <a:t>포카요케</a:t>
+            </a:r>
+            <a:r>
+              <a:rPr sz="1600" b="0">
+                <a:solidFill>
+                  <a:srgbClr val="000000"/>
+                </a:solidFill>
+                <a:latin typeface="맑은 고딕"/>
+                <a:ea typeface="맑은 고딕"/>
+              </a:rPr>
+              <a:t>한다 — 틀리기 어렵게 인자를 바꾼다</a:t>
             </a:r>
             <a:r>
               <a:rPr sz="1000" b="0">
@@ -18180,7 +18260,27 @@
                 <a:latin typeface="맑은 고딕"/>
                 <a:ea typeface="맑은 고딕"/>
               </a:rPr>
-              <a:t>"도구는 고신호 정보만 돌려주어야 한다"</a:t>
+              <a:t>도구는 </a:t>
+            </a:r>
+            <a:r>
+              <a:rPr sz="1600" b="1">
+                <a:solidFill>
+                  <a:srgbClr val="000000"/>
+                </a:solidFill>
+                <a:latin typeface="맑은 고딕"/>
+                <a:ea typeface="맑은 고딕"/>
+              </a:rPr>
+              <a:t>고신호 정보만</a:t>
+            </a:r>
+            <a:r>
+              <a:rPr sz="1600" b="0">
+                <a:solidFill>
+                  <a:srgbClr val="000000"/>
+                </a:solidFill>
+                <a:latin typeface="맑은 고딕"/>
+                <a:ea typeface="맑은 고딕"/>
+              </a:rPr>
+              <a:t> 에이전트에게 돌려주어야 한다</a:t>
             </a:r>
             <a:r>
               <a:rPr sz="1000" b="0">
@@ -20358,7 +20458,27 @@
                 <a:latin typeface="맑은 고딕"/>
                 <a:ea typeface="맑은 고딕"/>
               </a:rPr>
-              <a:t>"도구는 임의 코드 실행이므로 알맞은 주의로 다뤄야 한다"</a:t>
+              <a:t>도구는 </a:t>
+            </a:r>
+            <a:r>
+              <a:rPr sz="1600" b="1">
+                <a:solidFill>
+                  <a:srgbClr val="000000"/>
+                </a:solidFill>
+                <a:latin typeface="맑은 고딕"/>
+                <a:ea typeface="맑은 고딕"/>
+              </a:rPr>
+              <a:t>임의 코드 실행</a:t>
+            </a:r>
+            <a:r>
+              <a:rPr sz="1600" b="0">
+                <a:solidFill>
+                  <a:srgbClr val="000000"/>
+                </a:solidFill>
+                <a:latin typeface="맑은 고딕"/>
+                <a:ea typeface="맑은 고딕"/>
+              </a:rPr>
+              <a:t>이므로 알맞은 주의로 다뤄야 한다</a:t>
             </a:r>
             <a:r>
               <a:rPr sz="1000" b="0">
@@ -21827,6 +21947,26 @@
               <a:t>중앙에서 강제하고</a:t>
             </a:r>
             <a:r>
+              <a:rPr sz="1800" b="0">
+                <a:solidFill>
+                  <a:srgbClr val="000000"/>
+                </a:solidFill>
+                <a:latin typeface="맑은 고딕"/>
+                <a:ea typeface="맑은 고딕"/>
+              </a:rPr>
+              <a:t> 그 안에서는 </a:t>
+            </a:r>
+            <a:r>
+              <a:rPr sz="1800" b="1">
+                <a:solidFill>
+                  <a:srgbClr val="000000"/>
+                </a:solidFill>
+                <a:latin typeface="맑은 고딕"/>
+                <a:ea typeface="맑은 고딕"/>
+              </a:rPr>
+              <a:t>자율을 허용한다</a:t>
+            </a:r>
+            <a:r>
               <a:rPr sz="1000" b="0">
                 <a:solidFill>
                   <a:srgbClr val="000000"/>
@@ -21844,7 +21984,7 @@
                 <a:latin typeface="맑은 고딕"/>
                 <a:ea typeface="맑은 고딕"/>
               </a:rPr>
-              <a:t>그 안에서는 자율을 허용한다, "enforce boundaries centrally, allow autonomy locally", [Lopopolo 2026]</a:t>
+              <a:t>"enforce boundaries centrally, allow autonomy locally", [Lopopolo 2026]</a:t>
             </a:r>
           </a:p>
           <a:p>

--- a/courses/ai-native/sessions/s06.pptx
+++ b/courses/ai-native/sessions/s06.pptx
@@ -3655,7 +3655,7 @@
                 <a:latin typeface="맑은 고딕"/>
                 <a:ea typeface="맑은 고딕"/>
               </a:rPr>
-              <a:t>에이전트가 바꾸는 것은 </a:t>
+              <a:t>에이전트가 바꾸는 것은 모두 </a:t>
             </a:r>
             <a:r>
               <a:rPr sz="1800" b="1">
@@ -3665,7 +3665,7 @@
                 <a:latin typeface="맑은 고딕"/>
                 <a:ea typeface="맑은 고딕"/>
               </a:rPr>
-              <a:t>한 작업 공간 안에</a:t>
+              <a:t>하나의 작업 공간 안에서만</a:t>
             </a:r>
             <a:r>
               <a:rPr sz="1800" b="0">
@@ -3675,7 +3675,7 @@
                 <a:latin typeface="맑은 고딕"/>
                 <a:ea typeface="맑은 고딕"/>
               </a:rPr>
-              <a:t> 둔다. 변경 하나에 작업 공간 하나다.</a:t>
+              <a:t> 일어나게 한다. 변경 하나에 작업 공간 하나다.</a:t>
             </a:r>
           </a:p>
           <a:p>
@@ -3738,7 +3738,27 @@
                 <a:latin typeface="맑은 고딕"/>
                 <a:ea typeface="맑은 고딕"/>
               </a:rPr>
-              <a:t>"we made the app bootable per git worktree, so Codex could launch and drive one instance per change", [Lopopolo 2026]</a:t>
+              <a:t>"we made the app bootable per git worktree, so Codex could launch and drive one instance per change"</a:t>
+            </a:r>
+            <a:r>
+              <a:rPr sz="1000" b="0">
+                <a:solidFill>
+                  <a:srgbClr val="000000"/>
+                </a:solidFill>
+                <a:latin typeface="맑은 고딕"/>
+                <a:ea typeface="맑은 고딕"/>
+              </a:rPr>
+              <a:t>, </a:t>
+            </a:r>
+            <a:r>
+              <a:rPr sz="1000" b="0">
+                <a:solidFill>
+                  <a:srgbClr val="000000"/>
+                </a:solidFill>
+                <a:latin typeface="맑은 고딕"/>
+                <a:ea typeface="맑은 고딕"/>
+              </a:rPr>
+              <a:t>[Lopopolo 2026]</a:t>
             </a:r>
           </a:p>
           <a:p>
@@ -3960,27 +3980,7 @@
                 <a:latin typeface="맑은 고딕"/>
                 <a:ea typeface="맑은 고딕"/>
               </a:rPr>
-              <a:t>프레임</a:t>
-            </a:r>
-            <a:r>
-              <a:rPr sz="1400" b="1">
-                <a:solidFill>
-                  <a:srgbClr val="000000"/>
-                </a:solidFill>
-                <a:latin typeface="맑은 고딕"/>
-                <a:ea typeface="맑은 고딕"/>
-              </a:rPr>
-              <a:t>(frame)</a:t>
-            </a:r>
-            <a:r>
-              <a:rPr sz="1800" b="1">
-                <a:solidFill>
-                  <a:srgbClr val="000000"/>
-                </a:solidFill>
-                <a:latin typeface="맑은 고딕"/>
-                <a:ea typeface="맑은 고딕"/>
-              </a:rPr>
-              <a:t>이 아니라 사본</a:t>
+              <a:t>브랜치가 아니라 사본</a:t>
             </a:r>
             <a:r>
               <a:rPr sz="1800" b="0">
@@ -4000,7 +4000,7 @@
                 <a:latin typeface="맑은 고딕"/>
                 <a:ea typeface="맑은 고딕"/>
               </a:rPr>
-              <a:t> 브랜치만 바꾸는 것과 달리 </a:t>
+              <a:t> 브랜치만 바꾸는 것과 달리 코드와 </a:t>
             </a:r>
             <a:r>
               <a:rPr sz="1600" b="1">
@@ -5665,7 +5665,27 @@
                 <a:latin typeface="맑은 고딕"/>
                 <a:ea typeface="맑은 고딕"/>
               </a:rPr>
-              <a:t>"Plans are treated as first-class artifacts", [Lopopolo 2026]</a:t>
+              <a:t>"Plans are treated as first-class artifacts"</a:t>
+            </a:r>
+            <a:r>
+              <a:rPr sz="1000" b="0">
+                <a:solidFill>
+                  <a:srgbClr val="000000"/>
+                </a:solidFill>
+                <a:latin typeface="맑은 고딕"/>
+                <a:ea typeface="맑은 고딕"/>
+              </a:rPr>
+              <a:t>, </a:t>
+            </a:r>
+            <a:r>
+              <a:rPr sz="1000" b="0">
+                <a:solidFill>
+                  <a:srgbClr val="000000"/>
+                </a:solidFill>
+                <a:latin typeface="맑은 고딕"/>
+                <a:ea typeface="맑은 고딕"/>
+              </a:rPr>
+              <a:t>[Lopopolo 2026]</a:t>
             </a:r>
           </a:p>
           <a:p>
@@ -7250,7 +7270,7 @@
                 <a:latin typeface="맑은 고딕"/>
                 <a:ea typeface="맑은 고딕"/>
               </a:rPr>
-              <a:t>위임 계약은 과제 하나를 맡기며 정한 </a:t>
+              <a:t>위임 계약은 과제 하나를 맡기면서 정하는 여섯 항목을 한 장에 적은 것이다. 사람과 에이전트가 </a:t>
             </a:r>
             <a:r>
               <a:rPr sz="1800" b="1">
@@ -7260,7 +7280,7 @@
                 <a:latin typeface="맑은 고딕"/>
                 <a:ea typeface="맑은 고딕"/>
               </a:rPr>
-              <a:t>여섯 항목</a:t>
+              <a:t>같은 문서를 보고 일한다</a:t>
             </a:r>
             <a:r>
               <a:rPr sz="1800" b="0">
@@ -7270,7 +7290,7 @@
                 <a:latin typeface="맑은 고딕"/>
                 <a:ea typeface="맑은 고딕"/>
               </a:rPr>
-              <a:t>이다. 사람과 에이전트가 같은 한 장을 본다.</a:t>
+              <a:t>.</a:t>
             </a:r>
           </a:p>
         </p:txBody>
@@ -7476,7 +7496,27 @@
                 <a:latin typeface="맑은 고딕"/>
                 <a:ea typeface="맑은 고딕"/>
               </a:rPr>
-              <a:t>"it's also common to include stopping conditions (such as a maximum number of iterations) to maintain control", [Anthropic 2024]</a:t>
+              <a:t>"it's also common to include stopping conditions (such as a maximum number of iterations) to maintain control"</a:t>
+            </a:r>
+            <a:r>
+              <a:rPr sz="1000" b="0">
+                <a:solidFill>
+                  <a:srgbClr val="000000"/>
+                </a:solidFill>
+                <a:latin typeface="맑은 고딕"/>
+                <a:ea typeface="맑은 고딕"/>
+              </a:rPr>
+              <a:t>, </a:t>
+            </a:r>
+            <a:r>
+              <a:rPr sz="1000" b="0">
+                <a:solidFill>
+                  <a:srgbClr val="000000"/>
+                </a:solidFill>
+                <a:latin typeface="맑은 고딕"/>
+                <a:ea typeface="맑은 고딕"/>
+              </a:rPr>
+              <a:t>[Anthropic 2024]</a:t>
             </a:r>
           </a:p>
           <a:p>
@@ -9946,7 +9986,27 @@
                 <a:latin typeface="맑은 고딕"/>
                 <a:ea typeface="맑은 고딕"/>
               </a:rPr>
-              <a:t>"We recommend extensive testing in sandboxed environments, along with the appropriate guardrails.", [Anthropic 2024]</a:t>
+              <a:t>"We recommend extensive testing in sandboxed environments, along with the appropriate guardrails."</a:t>
+            </a:r>
+            <a:r>
+              <a:rPr sz="1000" b="0">
+                <a:solidFill>
+                  <a:srgbClr val="000000"/>
+                </a:solidFill>
+                <a:latin typeface="맑은 고딕"/>
+                <a:ea typeface="맑은 고딕"/>
+              </a:rPr>
+              <a:t>, </a:t>
+            </a:r>
+            <a:r>
+              <a:rPr sz="1000" b="0">
+                <a:solidFill>
+                  <a:srgbClr val="000000"/>
+                </a:solidFill>
+                <a:latin typeface="맑은 고딕"/>
+                <a:ea typeface="맑은 고딕"/>
+              </a:rPr>
+              <a:t>[Anthropic 2024]</a:t>
             </a:r>
           </a:p>
           <a:p>
@@ -10841,7 +10901,27 @@
                 <a:latin typeface="맑은 고딕"/>
                 <a:ea typeface="맑은 고딕"/>
               </a:rPr>
-              <a:t>"We caution against using MCP by default", [Thoughtworks 2026]</a:t>
+              <a:t>"We caution against using MCP by default"</a:t>
+            </a:r>
+            <a:r>
+              <a:rPr sz="1000" b="0">
+                <a:solidFill>
+                  <a:srgbClr val="000000"/>
+                </a:solidFill>
+                <a:latin typeface="맑은 고딕"/>
+                <a:ea typeface="맑은 고딕"/>
+              </a:rPr>
+              <a:t>, </a:t>
+            </a:r>
+            <a:r>
+              <a:rPr sz="1000" b="0">
+                <a:solidFill>
+                  <a:srgbClr val="000000"/>
+                </a:solidFill>
+                <a:latin typeface="맑은 고딕"/>
+                <a:ea typeface="맑은 고딕"/>
+              </a:rPr>
+              <a:t>[Thoughtworks 2026]</a:t>
             </a:r>
           </a:p>
           <a:p>
@@ -13943,7 +14023,7 @@
                 <a:latin typeface="맑은 고딕"/>
                 <a:ea typeface="맑은 고딕"/>
               </a:rPr>
-              <a:t>자율성은 </a:t>
+              <a:t>에이전트의 자율성은 </a:t>
             </a:r>
             <a:r>
               <a:rPr sz="1800" b="1">
@@ -13953,7 +14033,7 @@
                 <a:latin typeface="맑은 고딕"/>
                 <a:ea typeface="맑은 고딕"/>
               </a:rPr>
-              <a:t>권한과 되돌림 수단이 정한 경계</a:t>
+              <a:t>권한과 되돌릴 수단이 허락하는 범위</a:t>
             </a:r>
             <a:r>
               <a:rPr sz="1800" b="0">
@@ -15111,7 +15191,7 @@
                 <a:latin typeface="맑은 고딕"/>
                 <a:ea typeface="맑은 고딕"/>
               </a:rPr>
-              <a:t>맥락을 받은 에이전트에게 남은 질문은 </a:t>
+              <a:t>맥락까지 받은 에이전트에게 남은 질문은 하나다. </a:t>
             </a:r>
             <a:r>
               <a:rPr sz="1800" b="1">
@@ -15121,17 +15201,7 @@
                 <a:latin typeface="맑은 고딕"/>
                 <a:ea typeface="맑은 고딕"/>
               </a:rPr>
-              <a:t>무엇을 쓰고 어디까지 바꿀 수 있는가</a:t>
-            </a:r>
-            <a:r>
-              <a:rPr sz="1800" b="0">
-                <a:solidFill>
-                  <a:srgbClr val="000000"/>
-                </a:solidFill>
-                <a:latin typeface="맑은 고딕"/>
-                <a:ea typeface="맑은 고딕"/>
-              </a:rPr>
-              <a:t>다.</a:t>
+              <a:t>무엇을 쓸 수 있고 어디까지 바꿔도 되는가.</a:t>
             </a:r>
           </a:p>
           <a:p>
@@ -15323,7 +15393,7 @@
                 <a:latin typeface="맑은 고딕"/>
                 <a:ea typeface="맑은 고딕"/>
               </a:rPr>
-              <a:t>경계 밖의 셋</a:t>
+              <a:t>경계 밖에 두는 것</a:t>
             </a:r>
             <a:r>
               <a:rPr sz="1800" b="0">
@@ -15353,7 +15423,7 @@
                 <a:latin typeface="맑은 고딕"/>
                 <a:ea typeface="맑은 고딕"/>
               </a:rPr>
-              <a:t>사람이 질 책임</a:t>
+              <a:t>사람이 책임져야 하는 결정</a:t>
             </a:r>
             <a:r>
               <a:rPr sz="1600" b="0">
@@ -15615,7 +15685,7 @@
           </p:nvPr>
         </p:nvGraphicFramePr>
         <p:xfrm>
-          <a:off x="1997266" y="3411566"/>
+          <a:off x="1997266" y="3685886"/>
           <a:ext cx="5135880" cy="3873500"/>
         </p:xfrm>
         <a:graphic>
@@ -16227,7 +16297,7 @@
         <p:spPr>
           <a:xfrm>
             <a:off x="365760" y="960120"/>
-            <a:ext cx="8412480" cy="2136568"/>
+            <a:ext cx="8412480" cy="2393605"/>
           </a:xfrm>
           <a:prstGeom prst="rect">
             <a:avLst/>
@@ -16267,7 +16337,7 @@
                 <a:latin typeface="맑은 고딕"/>
                 <a:ea typeface="맑은 고딕"/>
               </a:rPr>
-              <a:t>주어진 도구가 정한다</a:t>
+              <a:t>어떤 도구를 주었는지로 정해진다</a:t>
             </a:r>
             <a:r>
               <a:rPr sz="1800" b="0">
@@ -16277,7 +16347,7 @@
                 <a:latin typeface="맑은 고딕"/>
                 <a:ea typeface="맑은 고딕"/>
               </a:rPr>
-              <a:t>. 사람이 쓰는 화면을 다듬는 만큼 에이전트가 쓰는 인터페이스</a:t>
+              <a:t>. 사람이 쓰는 화면을 다듬듯이 에이전트가 쓰는 인터페이스</a:t>
             </a:r>
             <a:r>
               <a:rPr sz="1400" b="0">
@@ -16297,7 +16367,7 @@
                 <a:latin typeface="맑은 고딕"/>
                 <a:ea typeface="맑은 고딕"/>
               </a:rPr>
-              <a:t>를 다듬는다.</a:t>
+              <a:t>도 다듬어야 한다.</a:t>
             </a:r>
           </a:p>
           <a:p>
@@ -16360,7 +16430,27 @@
                 <a:latin typeface="맑은 고딕"/>
                 <a:ea typeface="맑은 고딕"/>
               </a:rPr>
-              <a:t>"Tool definitions and specifications should be given just as much prompt engineering attention as your overall prompts.", [Anthropic 2024]</a:t>
+              <a:t>"Tool definitions and specifications should be given just as much prompt engineering attention as your overall prompts."</a:t>
+            </a:r>
+            <a:r>
+              <a:rPr sz="1000" b="0">
+                <a:solidFill>
+                  <a:srgbClr val="000000"/>
+                </a:solidFill>
+                <a:latin typeface="맑은 고딕"/>
+                <a:ea typeface="맑은 고딕"/>
+              </a:rPr>
+              <a:t>, </a:t>
+            </a:r>
+            <a:r>
+              <a:rPr sz="1000" b="0">
+                <a:solidFill>
+                  <a:srgbClr val="000000"/>
+                </a:solidFill>
+                <a:latin typeface="맑은 고딕"/>
+                <a:ea typeface="맑은 고딕"/>
+              </a:rPr>
+              <a:t>[Anthropic 2024]</a:t>
             </a:r>
           </a:p>
           <a:p>
@@ -16527,7 +16617,7 @@
         </p:nvSpPr>
         <p:spPr>
           <a:xfrm>
-            <a:off x="365760" y="3113116"/>
+            <a:off x="365760" y="3387436"/>
             <a:ext cx="8412480" cy="222250"/>
           </a:xfrm>
           <a:prstGeom prst="rect">
@@ -16576,7 +16666,7 @@
         </p:nvSpPr>
         <p:spPr>
           <a:xfrm>
-            <a:off x="365760" y="5080166"/>
+            <a:off x="365760" y="5354486"/>
             <a:ext cx="8412480" cy="781278"/>
           </a:xfrm>
           <a:prstGeom prst="rect">
@@ -18031,7 +18121,27 @@
                 <a:latin typeface="맑은 고딕"/>
                 <a:ea typeface="맑은 고딕"/>
               </a:rPr>
-              <a:t>"Tools are a new kind of software which reflects a contract between deterministic systems and non-deterministic agents.", [Anthropic 2025b]</a:t>
+              <a:t>"Tools are a new kind of software which reflects a contract between deterministic systems and non-deterministic agents."</a:t>
+            </a:r>
+            <a:r>
+              <a:rPr sz="1000" b="0">
+                <a:solidFill>
+                  <a:srgbClr val="000000"/>
+                </a:solidFill>
+                <a:latin typeface="맑은 고딕"/>
+                <a:ea typeface="맑은 고딕"/>
+              </a:rPr>
+              <a:t>, </a:t>
+            </a:r>
+            <a:r>
+              <a:rPr sz="1000" b="0">
+                <a:solidFill>
+                  <a:srgbClr val="000000"/>
+                </a:solidFill>
+                <a:latin typeface="맑은 고딕"/>
+                <a:ea typeface="맑은 고딕"/>
+              </a:rPr>
+              <a:t>[Anthropic 2025b]</a:t>
             </a:r>
           </a:p>
         </p:txBody>
@@ -18197,7 +18307,7 @@
                 <a:latin typeface="맑은 고딕"/>
                 <a:ea typeface="맑은 고딕"/>
               </a:rPr>
-              <a:t>반환도 맥락이다</a:t>
+              <a:t>도구가 돌려준 값도 맥락이다</a:t>
             </a:r>
             <a:r>
               <a:rPr sz="1800" b="0">
@@ -18217,27 +18327,7 @@
                 <a:latin typeface="맑은 고딕"/>
                 <a:ea typeface="맑은 고딕"/>
               </a:rPr>
-              <a:t> 도구가 돌려준 것은 그대로 창에 올라가 </a:t>
-            </a:r>
-            <a:r>
-              <a:rPr sz="1600" b="1">
-                <a:solidFill>
-                  <a:srgbClr val="000000"/>
-                </a:solidFill>
-                <a:latin typeface="맑은 고딕"/>
-                <a:ea typeface="맑은 고딕"/>
-              </a:rPr>
-              <a:t>주의 예산을 깎는다</a:t>
-            </a:r>
-            <a:r>
-              <a:rPr sz="1600" b="0">
-                <a:solidFill>
-                  <a:srgbClr val="000000"/>
-                </a:solidFill>
-                <a:latin typeface="맑은 고딕"/>
-                <a:ea typeface="맑은 고딕"/>
-              </a:rPr>
-              <a:t>.</a:t>
+              <a:t> 반환된 내용은 그대로 맥락 창에 쌓여 모델이 읽어야 할 양을 늘린다.</a:t>
             </a:r>
           </a:p>
           <a:p>
@@ -19674,7 +19764,7 @@
                 <a:latin typeface="맑은 고딕"/>
                 <a:ea typeface="맑은 고딕"/>
               </a:rPr>
-              <a:t>"주문한다"에 주는 도구는 </a:t>
+              <a:t>"주문한다"에서 에이전트에게 주는 도구는 다섯이다. 이 </a:t>
             </a:r>
             <a:r>
               <a:rPr sz="1800" b="1">
@@ -19684,7 +19774,7 @@
                 <a:latin typeface="맑은 고딕"/>
                 <a:ea typeface="맑은 고딕"/>
               </a:rPr>
-              <a:t>다섯 개</a:t>
+              <a:t>목록이 곧 에이전트가 할 수 있는 일의 경계</a:t>
             </a:r>
             <a:r>
               <a:rPr sz="1800" b="0">
@@ -19694,7 +19784,7 @@
                 <a:latin typeface="맑은 고딕"/>
                 <a:ea typeface="맑은 고딕"/>
               </a:rPr>
-              <a:t>다. 할 수 있는 일의 목록이 그대로 경계가 된다.</a:t>
+              <a:t>가 된다.</a:t>
             </a:r>
           </a:p>
         </p:txBody>
@@ -19860,7 +19950,7 @@
                 <a:latin typeface="맑은 고딕"/>
                 <a:ea typeface="맑은 고딕"/>
               </a:rPr>
-              <a:t>없는 도구가 경계다</a:t>
+              <a:t>주지 않은 도구가 경계를 만든다</a:t>
             </a:r>
             <a:r>
               <a:rPr sz="1800" b="0">
@@ -19880,7 +19970,7 @@
                 <a:latin typeface="맑은 고딕"/>
                 <a:ea typeface="맑은 고딕"/>
               </a:rPr>
-              <a:t> 실제 결제 시스템을 부르는 도구가 없으므로 그 호출은 </a:t>
+              <a:t> 실제 결제 시스템을 부르는 도구가 목록에 없으므로 그 호출은 </a:t>
             </a:r>
             <a:r>
               <a:rPr sz="1600" b="1">
@@ -19923,7 +20013,7 @@
                 <a:latin typeface="맑은 고딕"/>
                 <a:ea typeface="맑은 고딕"/>
               </a:rPr>
-              <a:t>대역을 주는 이유</a:t>
+              <a:t>테스트 대역을 주는 이유</a:t>
             </a:r>
             <a:r>
               <a:rPr sz="1800" b="0">
@@ -19943,7 +20033,7 @@
                 <a:latin typeface="맑은 고딕"/>
                 <a:ea typeface="맑은 고딕"/>
               </a:rPr>
-              <a:t> 거절 경로를 재현할 수 있어야 수용 기준 4개를 </a:t>
+              <a:t> 결제 거절 상황을 재현할 수 있어야 수용 기준 넷을 </a:t>
             </a:r>
             <a:r>
               <a:rPr sz="1600" b="1">
@@ -19963,7 +20053,7 @@
                 <a:latin typeface="맑은 고딕"/>
                 <a:ea typeface="맑은 고딕"/>
               </a:rPr>
-              <a:t> 확인한다.</a:t>
+              <a:t> 확인할 수 있다.</a:t>
             </a:r>
           </a:p>
           <a:p>
@@ -20006,7 +20096,7 @@
                 <a:latin typeface="맑은 고딕"/>
                 <a:ea typeface="맑은 고딕"/>
               </a:rPr>
-              <a:t> 도구가 늘면 고를 때 헷갈리고, 반환이 창을 차지한다.</a:t>
+              <a:t> 도구가 늘면 에이전트가 무엇을 쓸지 헷갈리고, 반환된 내용이 맥락을 차지한다.</a:t>
             </a:r>
           </a:p>
         </p:txBody>
@@ -21768,7 +21858,7 @@
                 <a:latin typeface="맑은 고딕"/>
                 <a:ea typeface="맑은 고딕"/>
               </a:rPr>
-              <a:t>을 따로 정한다. "모두 허용"과 "아무것도 못 함" 사이를 네 가지로 가른다.</a:t>
+              <a:t>을 따로 정한다. 모두 허용하거나 아무것도 못 하게 하는 대신, 네 가지를 나누어 필요한 만큼만 연다.</a:t>
             </a:r>
           </a:p>
         </p:txBody>
@@ -21984,7 +22074,27 @@
                 <a:latin typeface="맑은 고딕"/>
                 <a:ea typeface="맑은 고딕"/>
               </a:rPr>
-              <a:t>"enforce boundaries centrally, allow autonomy locally", [Lopopolo 2026]</a:t>
+              <a:t>"enforce boundaries centrally, allow autonomy locally"</a:t>
+            </a:r>
+            <a:r>
+              <a:rPr sz="1000" b="0">
+                <a:solidFill>
+                  <a:srgbClr val="000000"/>
+                </a:solidFill>
+                <a:latin typeface="맑은 고딕"/>
+                <a:ea typeface="맑은 고딕"/>
+              </a:rPr>
+              <a:t>, </a:t>
+            </a:r>
+            <a:r>
+              <a:rPr sz="1000" b="0">
+                <a:solidFill>
+                  <a:srgbClr val="000000"/>
+                </a:solidFill>
+                <a:latin typeface="맑은 고딕"/>
+                <a:ea typeface="맑은 고딕"/>
+              </a:rPr>
+              <a:t>[Lopopolo 2026]</a:t>
             </a:r>
           </a:p>
           <a:p>
@@ -22007,7 +22117,7 @@
                 <a:latin typeface="맑은 고딕"/>
                 <a:ea typeface="맑은 고딕"/>
               </a:rPr>
-              <a:t>쓰기가 가장 좁다</a:t>
+              <a:t>쓰기를 가장 좁게 연다</a:t>
             </a:r>
             <a:r>
               <a:rPr sz="1800" b="0">
@@ -22027,7 +22137,7 @@
                 <a:latin typeface="맑은 고딕"/>
                 <a:ea typeface="맑은 고딕"/>
               </a:rPr>
-              <a:t> 범위를 패키지로 적으면 경계를 넘는 변경이 </a:t>
+              <a:t> 쓸 수 있는 범위를 패키지로 적어 두면 경계를 넘는 변경이 </a:t>
             </a:r>
             <a:r>
               <a:rPr sz="1600" b="1">
@@ -23075,7 +23185,7 @@
                 <a:latin typeface="맑은 고딕"/>
                 <a:ea typeface="맑은 고딕"/>
               </a:rPr>
-              <a:t>사람의 자격으로</a:t>
+              <a:t>사람의 계정과 자격으로</a:t>
             </a:r>
             <a:r>
               <a:rPr sz="1800" b="0">
@@ -23085,7 +23195,7 @@
                 <a:latin typeface="맑은 고딕"/>
                 <a:ea typeface="맑은 고딕"/>
               </a:rPr>
-              <a:t> 움직이면 권한도 사람만큼 커진다. 신원을 따로 두고 범위와 수명을 좁힌다.</a:t>
+              <a:t> 움직이면 그 사람이 가진 권한을 그대로 쓰게 된다. 에이전트의 신원을 따로 두고 범위와 수명을 좁힌다.</a:t>
             </a:r>
           </a:p>
         </p:txBody>

--- a/courses/ai-native/sessions/s06.pptx
+++ b/courses/ai-native/sessions/s06.pptx
@@ -35,7 +35,6 @@
     <p:sldId id="280" r:id="javaLecture25"/>
     <p:sldId id="281" r:id="javaLecture26"/>
     <p:sldId id="282" r:id="javaLecture27"/>
-    <p:sldId id="283" r:id="javaLecture28"/>
   </p:sldIdLst>
   <p:sldSz cx="9144000" cy="6858000" type="screen4x3"/>
   <p:notesSz cx="6858000" cy="9144000"/>
@@ -565,7 +564,7 @@
             <a:pPr lvl="0"/>
             <a:r>
               <a:rPr lang="ko-KR" sz="1200"/>
-              <a:t>코드는 code/s06/architecture/src/payment/PaymentGateway.java의 전문이다. 인터페이스가 업무의 말(금액·결제 수단)로만 쓰여 있다는 점을 짚는다.</a:t>
+              <a:t>코드는 code/s06/architecture/src/payment/PaymentGateway.java의 전문이다. 인터페이스가 업무의 말(금액·결제 수단·결제 결과)로만 쓰여 있다는 점을 짚는다. 반환이 PaymentDecision(승인·거절·확정 불가)인 것은 「04. 업무 패키지와 외부 시스템」의 「외부 연동 규격」이 정한 셋을 담기 위해서다 — 그 선택의 근거는 "세션 07. 설계 — 책임과 협력"이 다룬다.</a:t>
             </a:r>
           </a:p>
           <a:p>
@@ -1636,143 +1635,28 @@
             <a:pPr lvl="0"/>
             <a:r>
               <a:rPr lang="ko-KR" sz="1200"/>
-              <a:t>최종 응답의 스타일과 근거 전문이다. 다음 별첨들과 합하면 원본 문서 전체이며 제목 단계만 변환했다.</a:t>
+              <a:t>실제 최종 응답의 전문이다. 원본은 code/s06/exercise-conversation/order/주문한다-아키텍처결정.md이며 문장·도식·강조는 편집하지 않았다. 제목 단계만 변환했다.</a:t>
             </a:r>
           </a:p>
           <a:p>
             <a:pPr lvl="0"/>
             <a:r>
               <a:rPr lang="ko-KR" sz="1200"/>
-              <a:t>원본: code/s06/exercise-conversation/order/주문한다-아키텍처결정.md. 문장·도식·강조는 편집하지 않았다.</a:t>
-            </a:r>
-          </a:p>
-        </p:txBody>
-      </p:sp>
-    </p:spTree>
-  </p:cSld>
-  <p:clrMapOvr>
-    <a:masterClrMapping/>
-  </p:clrMapOvr>
-</p:notes>
-</file>
-
-<file path=ppt/notesSlides/notesSlide24.xml><?xml version="1.0" encoding="utf-8"?>
-<p:notes xmlns:a="http://schemas.openxmlformats.org/drawingml/2006/main" xmlns:r="http://schemas.openxmlformats.org/officeDocument/2006/relationships" xmlns:p="http://schemas.openxmlformats.org/presentationml/2006/main">
-  <p:cSld>
-    <p:spTree>
-      <p:nvGrpSpPr>
-        <p:cNvPr id="1" name=""/>
-        <p:cNvGrpSpPr/>
-        <p:nvPr/>
-      </p:nvGrpSpPr>
-      <p:grpSpPr>
-        <a:xfrm>
-          <a:off x="0" y="0"/>
-          <a:ext cx="0" cy="0"/>
-          <a:chOff x="0" y="0"/>
-          <a:chExt cx="0" cy="0"/>
-        </a:xfrm>
-      </p:grpSpPr>
-      <p:sp>
-        <p:nvSpPr>
-          <p:cNvPr id="2" name="슬라이드 이미지 개체 틀"/>
-          <p:cNvSpPr/>
-          <p:nvPr>
-            <p:ph type="sldImg" idx="2"/>
-          </p:nvPr>
-        </p:nvSpPr>
-        <p:spPr/>
-        <p:txBody>
-          <a:bodyPr/>
-          <a:lstStyle/>
-          <a:p/>
-        </p:txBody>
-      </p:sp>
-      <p:sp>
-        <p:nvSpPr>
-          <p:cNvPr id="3" name="슬라이드 노트 개체 틀"/>
-          <p:cNvSpPr/>
-          <p:nvPr>
-            <p:ph type="body" idx="3"/>
-          </p:nvPr>
-        </p:nvSpPr>
-        <p:spPr/>
-        <p:txBody>
-          <a:bodyPr/>
-          <a:lstStyle/>
+              <a:t>사용자 검토에 따라 같은 요소·관계를 SVG로 재배치하고 범례를 상위·하위 목록으로 보완한 응답을 받았다. SVG 원본은 저자가 제공했으며 AI가 배치까지 새로 고안한 것으로 소개하지 않는다. 실선은 업무 연관, 점선 화살표는 패키지 의존이다.</a:t>
+            </a:r>
+          </a:p>
           <a:p>
             <a:pPr lvl="0"/>
             <a:r>
               <a:rPr lang="ko-KR" sz="1200"/>
-              <a:t>실제 응답의 업무 경계 전문이다. 사용자 검토에 따라 같은 요소·관계를 SVG로 재배치하고 범례를 상위·하위 목록으로 보완한 응답을 받았다. SVG 원본은 저자가 제공했으며 AI가 배치까지 새로 고안한 것으로 소개하지 않는다. 실선은 업무 연관, 점선 화살표는 패키지 의존이다.</a:t>
+              <a:t>앞 그림과 표기를 맞추라는 사용자 검토에 따라 같은 요소·관계를 같은 방식의 SVG로 재배치한 응답을 받았다. SVG 원본은 저자가 제공했으며 AI가 배치까지 새로 고안한 것으로 소개하지 않는다.</a:t>
             </a:r>
           </a:p>
           <a:p>
             <a:pPr lvl="0"/>
             <a:r>
               <a:rPr lang="ko-KR" sz="1200"/>
-              <a:t>원본: code/s06/exercise-conversation/order/주문한다-아키텍처결정.md. 문장·도식·강조는 편집하지 않았다.</a:t>
-            </a:r>
-          </a:p>
-        </p:txBody>
-      </p:sp>
-    </p:spTree>
-  </p:cSld>
-  <p:clrMapOvr>
-    <a:masterClrMapping/>
-  </p:clrMapOvr>
-</p:notes>
-</file>
-
-<file path=ppt/notesSlides/notesSlide25.xml><?xml version="1.0" encoding="utf-8"?>
-<p:notes xmlns:a="http://schemas.openxmlformats.org/drawingml/2006/main" xmlns:r="http://schemas.openxmlformats.org/officeDocument/2006/relationships" xmlns:p="http://schemas.openxmlformats.org/presentationml/2006/main">
-  <p:cSld>
-    <p:spTree>
-      <p:nvGrpSpPr>
-        <p:cNvPr id="1" name=""/>
-        <p:cNvGrpSpPr/>
-        <p:nvPr/>
-      </p:nvGrpSpPr>
-      <p:grpSpPr>
-        <a:xfrm>
-          <a:off x="0" y="0"/>
-          <a:ext cx="0" cy="0"/>
-          <a:chOff x="0" y="0"/>
-          <a:chExt cx="0" cy="0"/>
-        </a:xfrm>
-      </p:grpSpPr>
-      <p:sp>
-        <p:nvSpPr>
-          <p:cNvPr id="2" name="슬라이드 이미지 개체 틀"/>
-          <p:cNvSpPr/>
-          <p:nvPr>
-            <p:ph type="sldImg" idx="2"/>
-          </p:nvPr>
-        </p:nvSpPr>
-        <p:spPr/>
-        <p:txBody>
-          <a:bodyPr/>
-          <a:lstStyle/>
-          <a:p/>
-        </p:txBody>
-      </p:sp>
-      <p:sp>
-        <p:nvSpPr>
-          <p:cNvPr id="3" name="슬라이드 노트 개체 틀"/>
-          <p:cNvSpPr/>
-          <p:nvPr>
-            <p:ph type="body" idx="3"/>
-          </p:nvPr>
-        </p:nvSpPr>
-        <p:spPr/>
-        <p:txBody>
-          <a:bodyPr/>
-          <a:lstStyle/>
-          <a:p>
-            <a:pPr lvl="0"/>
-            <a:r>
-              <a:rPr lang="ko-KR" sz="1200"/>
-              <a:t>실제 응답의 포트 구현 전문이다. 앞 그림과 표기를 맞추라는 사용자 검토에 따라 같은 요소·관계를 같은 방식의 SVG로 재배치한 응답을 받았다. SVG 원본은 저자가 제공했으며 AI가 배치까지 새로 고안한 것으로 소개하지 않는다.</a:t>
+              <a:t>패키지별 배치는 앞 두 그림의 배치를 글로 대조한다. 의존 규칙은 순환 없는 허용 목록 위반도 별도 검사한다. 결제 포트 규격에서 확정 불가 이후 처리는 미정이며 새 주문 상태로 만들지 않는다.</a:t>
             </a:r>
           </a:p>
           <a:p>
@@ -1780,217 +1664,6 @@
             <a:r>
               <a:rPr lang="ko-KR" sz="1200"/>
               <a:t>업무 패키지에서 연동·영속으로 가는 화살표가 하나도 없는 것이 의존 규칙의 금지와 같은 말이다. 외부 제공자와 저장소는 패키지가 아니므로 패키지 바깥에 둔다.</a:t>
-            </a:r>
-          </a:p>
-          <a:p>
-            <a:pPr lvl="0"/>
-            <a:r>
-              <a:rPr lang="ko-KR" sz="1200"/>
-              <a:t>원본: code/s06/exercise-conversation/order/주문한다-아키텍처결정.md. 문장·도식·강조는 편집하지 않았다.</a:t>
-            </a:r>
-          </a:p>
-        </p:txBody>
-      </p:sp>
-    </p:spTree>
-  </p:cSld>
-  <p:clrMapOvr>
-    <a:masterClrMapping/>
-  </p:clrMapOvr>
-</p:notes>
-</file>
-
-<file path=ppt/notesSlides/notesSlide26.xml><?xml version="1.0" encoding="utf-8"?>
-<p:notes xmlns:a="http://schemas.openxmlformats.org/drawingml/2006/main" xmlns:r="http://schemas.openxmlformats.org/officeDocument/2006/relationships" xmlns:p="http://schemas.openxmlformats.org/presentationml/2006/main">
-  <p:cSld>
-    <p:spTree>
-      <p:nvGrpSpPr>
-        <p:cNvPr id="1" name=""/>
-        <p:cNvGrpSpPr/>
-        <p:nvPr/>
-      </p:nvGrpSpPr>
-      <p:grpSpPr>
-        <a:xfrm>
-          <a:off x="0" y="0"/>
-          <a:ext cx="0" cy="0"/>
-          <a:chOff x="0" y="0"/>
-          <a:chExt cx="0" cy="0"/>
-        </a:xfrm>
-      </p:grpSpPr>
-      <p:sp>
-        <p:nvSpPr>
-          <p:cNvPr id="2" name="슬라이드 이미지 개체 틀"/>
-          <p:cNvSpPr/>
-          <p:nvPr>
-            <p:ph type="sldImg" idx="2"/>
-          </p:nvPr>
-        </p:nvSpPr>
-        <p:spPr/>
-        <p:txBody>
-          <a:bodyPr/>
-          <a:lstStyle/>
-          <a:p/>
-        </p:txBody>
-      </p:sp>
-      <p:sp>
-        <p:nvSpPr>
-          <p:cNvPr id="3" name="슬라이드 노트 개체 틀"/>
-          <p:cNvSpPr/>
-          <p:nvPr>
-            <p:ph type="body" idx="3"/>
-          </p:nvPr>
-        </p:nvSpPr>
-        <p:spPr/>
-        <p:txBody>
-          <a:bodyPr/>
-          <a:lstStyle/>
-          <a:p>
-            <a:pPr lvl="0"/>
-            <a:r>
-              <a:rPr lang="ko-KR" sz="1200"/>
-              <a:t>실제 응답의 패키지별 목록 전문이다. 앞 두 그림의 배치를 글로 대조한다.</a:t>
-            </a:r>
-          </a:p>
-          <a:p>
-            <a:pPr lvl="0"/>
-            <a:r>
-              <a:rPr lang="ko-KR" sz="1200"/>
-              <a:t>원본: code/s06/exercise-conversation/order/주문한다-아키텍처결정.md. 문장·도식·강조는 편집하지 않았다.</a:t>
-            </a:r>
-          </a:p>
-        </p:txBody>
-      </p:sp>
-    </p:spTree>
-  </p:cSld>
-  <p:clrMapOvr>
-    <a:masterClrMapping/>
-  </p:clrMapOvr>
-</p:notes>
-</file>
-
-<file path=ppt/notesSlides/notesSlide27.xml><?xml version="1.0" encoding="utf-8"?>
-<p:notes xmlns:a="http://schemas.openxmlformats.org/drawingml/2006/main" xmlns:r="http://schemas.openxmlformats.org/officeDocument/2006/relationships" xmlns:p="http://schemas.openxmlformats.org/presentationml/2006/main">
-  <p:cSld>
-    <p:spTree>
-      <p:nvGrpSpPr>
-        <p:cNvPr id="1" name=""/>
-        <p:cNvGrpSpPr/>
-        <p:nvPr/>
-      </p:nvGrpSpPr>
-      <p:grpSpPr>
-        <a:xfrm>
-          <a:off x="0" y="0"/>
-          <a:ext cx="0" cy="0"/>
-          <a:chOff x="0" y="0"/>
-          <a:chExt cx="0" cy="0"/>
-        </a:xfrm>
-      </p:grpSpPr>
-      <p:sp>
-        <p:nvSpPr>
-          <p:cNvPr id="2" name="슬라이드 이미지 개체 틀"/>
-          <p:cNvSpPr/>
-          <p:nvPr>
-            <p:ph type="sldImg" idx="2"/>
-          </p:nvPr>
-        </p:nvSpPr>
-        <p:spPr/>
-        <p:txBody>
-          <a:bodyPr/>
-          <a:lstStyle/>
-          <a:p/>
-        </p:txBody>
-      </p:sp>
-      <p:sp>
-        <p:nvSpPr>
-          <p:cNvPr id="3" name="슬라이드 노트 개체 틀"/>
-          <p:cNvSpPr/>
-          <p:nvPr>
-            <p:ph type="body" idx="3"/>
-          </p:nvPr>
-        </p:nvSpPr>
-        <p:spPr/>
-        <p:txBody>
-          <a:bodyPr/>
-          <a:lstStyle/>
-          <a:p>
-            <a:pPr lvl="0"/>
-            <a:r>
-              <a:rPr lang="ko-KR" sz="1200"/>
-              <a:t>실제 응답의 의존 규칙 전문이다. 순환 없는 허용 목록 위반도 별도 검사한다.</a:t>
-            </a:r>
-          </a:p>
-          <a:p>
-            <a:pPr lvl="0"/>
-            <a:r>
-              <a:rPr lang="ko-KR" sz="1200"/>
-              <a:t>원본: code/s06/exercise-conversation/order/주문한다-아키텍처결정.md. 문장·도식·강조는 편집하지 않았다.</a:t>
-            </a:r>
-          </a:p>
-        </p:txBody>
-      </p:sp>
-    </p:spTree>
-  </p:cSld>
-  <p:clrMapOvr>
-    <a:masterClrMapping/>
-  </p:clrMapOvr>
-</p:notes>
-</file>
-
-<file path=ppt/notesSlides/notesSlide28.xml><?xml version="1.0" encoding="utf-8"?>
-<p:notes xmlns:a="http://schemas.openxmlformats.org/drawingml/2006/main" xmlns:r="http://schemas.openxmlformats.org/officeDocument/2006/relationships" xmlns:p="http://schemas.openxmlformats.org/presentationml/2006/main">
-  <p:cSld>
-    <p:spTree>
-      <p:nvGrpSpPr>
-        <p:cNvPr id="1" name=""/>
-        <p:cNvGrpSpPr/>
-        <p:nvPr/>
-      </p:nvGrpSpPr>
-      <p:grpSpPr>
-        <a:xfrm>
-          <a:off x="0" y="0"/>
-          <a:ext cx="0" cy="0"/>
-          <a:chOff x="0" y="0"/>
-          <a:chExt cx="0" cy="0"/>
-        </a:xfrm>
-      </p:grpSpPr>
-      <p:sp>
-        <p:nvSpPr>
-          <p:cNvPr id="2" name="슬라이드 이미지 개체 틀"/>
-          <p:cNvSpPr/>
-          <p:nvPr>
-            <p:ph type="sldImg" idx="2"/>
-          </p:nvPr>
-        </p:nvSpPr>
-        <p:spPr/>
-        <p:txBody>
-          <a:bodyPr/>
-          <a:lstStyle/>
-          <a:p/>
-        </p:txBody>
-      </p:sp>
-      <p:sp>
-        <p:nvSpPr>
-          <p:cNvPr id="3" name="슬라이드 노트 개체 틀"/>
-          <p:cNvSpPr/>
-          <p:nvPr>
-            <p:ph type="body" idx="3"/>
-          </p:nvPr>
-        </p:nvSpPr>
-        <p:spPr/>
-        <p:txBody>
-          <a:bodyPr/>
-          <a:lstStyle/>
-          <a:p>
-            <a:pPr lvl="0"/>
-            <a:r>
-              <a:rPr lang="ko-KR" sz="1200"/>
-              <a:t>실제 응답의 결제 포트 규격 전문이다. 확정 불가 이후 처리는 미정이며 새 주문 상태로 만들지 않는다.</a:t>
-            </a:r>
-          </a:p>
-          <a:p>
-            <a:pPr lvl="0"/>
-            <a:r>
-              <a:rPr lang="ko-KR" sz="1200"/>
-              <a:t>원본: code/s06/exercise-conversation/order/주문한다-아키텍처결정.md. 문장·도식·강조는 편집하지 않았다.</a:t>
             </a:r>
           </a:p>
         </p:txBody>
@@ -4392,7 +4065,7 @@
                 <a:latin typeface="Consolas"/>
                 <a:ea typeface="맑은 고딕"/>
               </a:rPr>
-              <a:t>    boolean </a:t>
+              <a:t>    PaymentDecision </a:t>
             </a:r>
             <a:r>
               <a:rPr sz="1000" b="1">
@@ -5700,7 +5373,7 @@
                 <a:latin typeface="Consolas"/>
                 <a:ea typeface="맑은 고딕"/>
               </a:rPr>
-              <a:t>        if (payment.requestApproval(order.totalAmount(), method)) {</a:t>
+              <a:t>        if (payment.requestApproval(order.totalAmount(), method) == PaymentDecision.APPROVED) {</a:t>
             </a:r>
           </a:p>
           <a:p>
@@ -18153,7 +17826,17 @@
                 <a:latin typeface="맑은 고딕"/>
                 <a:ea typeface="맑은 고딕"/>
               </a:rPr>
-              <a:t>“주문한다” 아키텍처 결정</a:t>
+              <a:t>“주문한다” 아키텍처 결정 </a:t>
+            </a:r>
+            <a:r>
+              <a:rPr sz="2000" b="1">
+                <a:solidFill>
+                  <a:srgbClr val="000000"/>
+                </a:solidFill>
+                <a:latin typeface="맑은 고딕"/>
+                <a:ea typeface="맑은 고딕"/>
+              </a:rPr>
+              <a:t>(1/5)</a:t>
             </a:r>
           </a:p>
           <a:p>
@@ -18301,8 +17984,8 @@
         </p:nvSpPr>
         <p:spPr>
           <a:xfrm>
-            <a:off x="233172" y="1404056"/>
-            <a:ext cx="4338828" cy="4908409"/>
+            <a:off x="365760" y="960120"/>
+            <a:ext cx="8412480" cy="2514600"/>
           </a:xfrm>
         </p:spPr>
         <p:txBody>
@@ -18310,6 +17993,58 @@
             <a:normAutofit/>
           </a:bodyPr>
           <a:lstStyle/>
+          <a:p>
+            <a:pPr marL="322580" indent="-139700">
+              <a:spcBef>
+                <a:spcPts val="300"/>
+              </a:spcBef>
+              <a:spcAft>
+                <a:spcPts val="300"/>
+              </a:spcAft>
+              <a:buNone/>
+            </a:pPr>
+            <a:r>
+              <a:rPr sz="1000" b="1">
+                <a:solidFill>
+                  <a:srgbClr val="000000"/>
+                </a:solidFill>
+                <a:latin typeface="맑은 고딕"/>
+                <a:ea typeface="맑은 고딕"/>
+              </a:rPr>
+              <a:t>1. 아키텍처 스타일과 근거</a:t>
+            </a:r>
+          </a:p>
+          <a:p>
+            <a:pPr marL="182880" indent="0">
+              <a:spcBef>
+                <a:spcPts val="300"/>
+              </a:spcBef>
+              <a:spcAft>
+                <a:spcPts val="300"/>
+              </a:spcAft>
+              <a:buNone/>
+            </a:pPr>
+            <a:r>
+              <a:rPr sz="1000" b="1">
+                <a:solidFill>
+                  <a:srgbClr val="000000"/>
+                </a:solidFill>
+                <a:latin typeface="맑은 고딕"/>
+                <a:ea typeface="맑은 고딕"/>
+              </a:rPr>
+              <a:t>포트와 어댑터 구조를 적용한 모듈러 모놀리스</a:t>
+            </a:r>
+            <a:r>
+              <a:rPr sz="1000" b="0">
+                <a:solidFill>
+                  <a:srgbClr val="000000"/>
+                </a:solidFill>
+                <a:latin typeface="맑은 고딕"/>
+                <a:ea typeface="맑은 고딕"/>
+              </a:rPr>
+              <a:t>를 선택한다.</a:t>
+            </a:r>
+          </a:p>
           <a:p>
             <a:pPr lvl="2" marL="411480" indent="-137160">
               <a:spcBef>
@@ -18409,35 +18144,27 @@
               <a:t> 주문 규칙과 외부 시스템의 변경 이유가 다르므로 업무 패키지가 출력 포트를 소유하고 연동·영속 패키지가 구현한다.</a:t>
             </a:r>
           </a:p>
-        </p:txBody>
-      </p:sp>
-      <p:sp>
-        <p:nvSpPr>
-          <p:cNvPr id="9" name="내용 개체 틀 7">
-            <a:extLst>
-              <a:ext uri="{FF2B5EF4-FFF2-40B4-BE49-F238E27FC236}">
-                <a16:creationId xmlns:a16="http://schemas.microsoft.com/office/drawing/2014/main" id="{BEBA2C4A-B0BF-F2E4-EA6E-614C99CBA184}"/>
-              </a:ext>
-            </a:extLst>
-          </p:cNvPr>
-          <p:cNvSpPr>
-            <a:spLocks noGrp="1"/>
-          </p:cNvSpPr>
-          <p:nvPr>
-            <p:ph idx="1"/>
-          </p:nvPr>
-        </p:nvSpPr>
-        <p:spPr>
-          <a:xfrm>
-            <a:off x="233172" y="960120"/>
-            <a:ext cx="8778240" cy="443936"/>
-          </a:xfrm>
-        </p:spPr>
-        <p:txBody>
-          <a:bodyPr>
-            <a:normAutofit/>
-          </a:bodyPr>
-          <a:lstStyle/>
+          <a:p>
+            <a:pPr marL="322580" indent="-139700">
+              <a:spcBef>
+                <a:spcPts val="300"/>
+              </a:spcBef>
+              <a:spcAft>
+                <a:spcPts val="300"/>
+              </a:spcAft>
+              <a:buNone/>
+            </a:pPr>
+            <a:r>
+              <a:rPr sz="1000" b="1">
+                <a:solidFill>
+                  <a:srgbClr val="000000"/>
+                </a:solidFill>
+                <a:latin typeface="맑은 고딕"/>
+                <a:ea typeface="맑은 고딕"/>
+              </a:rPr>
+              <a:t>2. 패키지 다이어그램과 포트 배치</a:t>
+            </a:r>
+          </a:p>
           <a:p>
             <a:pPr marL="182880" indent="0">
               <a:spcBef>
@@ -18456,8 +18183,21 @@
                 <a:latin typeface="맑은 고딕"/>
                 <a:ea typeface="맑은 고딕"/>
               </a:rPr>
-              <a:t>포트와 어댑터 구조를 적용한 모듈러 모놀리스</a:t>
-            </a:r>
+              <a:t>2.1 업무 경계</a:t>
+            </a:r>
+          </a:p>
+          <a:p>
+            <a:pPr lvl="2" marL="411480" indent="-137160">
+              <a:spcBef>
+                <a:spcPts val="300"/>
+              </a:spcBef>
+              <a:spcAft>
+                <a:spcPts val="300"/>
+              </a:spcAft>
+              <a:buSzPct val="90000"/>
+              <a:buFont typeface="Wingdings" pitchFamily="2" charset="2"/>
+              <a:buChar char=""/>
+            </a:pPr>
             <a:r>
               <a:rPr sz="1000" b="0">
                 <a:solidFill>
@@ -18466,11 +18206,35 @@
                 <a:latin typeface="맑은 고딕"/>
                 <a:ea typeface="맑은 고딕"/>
               </a:rPr>
-              <a:t>를 선택한다.</a:t>
+              <a:t>이 그림은 도메인 모델을 입력으로 삼아 업무 개념과 출력 포트가 어느 패키지 경계에 속하는지 보여 준다.</a:t>
             </a:r>
           </a:p>
         </p:txBody>
       </p:sp>
+      <p:pic>
+        <p:nvPicPr>
+          <p:cNvPr id="9" name="svg Diagram 1"/>
+          <p:cNvPicPr>
+            <a:picLocks noChangeAspect="1"/>
+          </p:cNvPicPr>
+          <p:nvPr/>
+        </p:nvPicPr>
+        <p:blipFill>
+          <a:blip r:embed="svgImage1"/>
+          <a:stretch>
+            <a:fillRect/>
+          </a:stretch>
+        </p:blipFill>
+        <p:spPr>
+          <a:xfrm>
+            <a:off x="1306286" y="2830062"/>
+            <a:ext cx="6531429" cy="2551339"/>
+          </a:xfrm>
+          <a:prstGeom prst="rect">
+            <a:avLst/>
+          </a:prstGeom>
+        </p:spPr>
+      </p:pic>
     </p:spTree>
     <p:extLst>
       <p:ext uri="{BB962C8B-B14F-4D97-AF65-F5344CB8AC3E}">
@@ -18536,7 +18300,17 @@
                 <a:latin typeface="맑은 고딕"/>
                 <a:ea typeface="맑은 고딕"/>
               </a:rPr>
-              <a:t>패키지 다이어그램 — 업무 경계</a:t>
+              <a:t>“주문한다” 아키텍처 결정 </a:t>
+            </a:r>
+            <a:r>
+              <a:rPr sz="2000" b="1">
+                <a:solidFill>
+                  <a:srgbClr val="000000"/>
+                </a:solidFill>
+                <a:latin typeface="맑은 고딕"/>
+                <a:ea typeface="맑은 고딕"/>
+              </a:rPr>
+              <a:t>(2/5)</a:t>
             </a:r>
           </a:p>
           <a:p>
@@ -18682,85 +18456,10 @@
             <p:ph idx="1"/>
           </p:nvPr>
         </p:nvSpPr>
-        <p:spPr/>
-        <p:txBody>
-          <a:bodyPr>
-            <a:normAutofit/>
-          </a:bodyPr>
-          <a:lstStyle/>
-          <a:p/>
-        </p:txBody>
-      </p:sp>
-      <p:sp>
-        <p:nvSpPr>
-          <p:cNvPr id="9" name="내용 개체 틀 7">
-            <a:extLst>
-              <a:ext uri="{FF2B5EF4-FFF2-40B4-BE49-F238E27FC236}">
-                <a16:creationId xmlns:a16="http://schemas.microsoft.com/office/drawing/2014/main" id="{BEBA2C4A-B0BF-F2E4-EA6E-614C99CBA184}"/>
-              </a:ext>
-            </a:extLst>
-          </p:cNvPr>
-          <p:cNvSpPr>
-            <a:spLocks noGrp="1"/>
-          </p:cNvSpPr>
-          <p:nvPr>
-            <p:ph idx="1"/>
-          </p:nvPr>
-        </p:nvSpPr>
         <p:spPr>
           <a:xfrm>
             <a:off x="365760" y="960120"/>
-            <a:ext cx="8412480" cy="261056"/>
-          </a:xfrm>
-        </p:spPr>
-        <p:txBody>
-          <a:bodyPr>
-            <a:normAutofit/>
-          </a:bodyPr>
-          <a:lstStyle/>
-          <a:p>
-            <a:pPr marL="182880" indent="0">
-              <a:spcBef>
-                <a:spcPts val="300"/>
-              </a:spcBef>
-              <a:spcAft>
-                <a:spcPts val="300"/>
-              </a:spcAft>
-              <a:buNone/>
-            </a:pPr>
-            <a:r>
-              <a:rPr sz="1000" b="0">
-                <a:solidFill>
-                  <a:srgbClr val="000000"/>
-                </a:solidFill>
-                <a:latin typeface="맑은 고딕"/>
-                <a:ea typeface="맑은 고딕"/>
-              </a:rPr>
-              <a:t>이 그림은 도메인 모델을 입력으로 삼아 업무 개념과 출력 포트가 어느 패키지 경계에 속하는지 보여 준다.</a:t>
-            </a:r>
-          </a:p>
-        </p:txBody>
-      </p:sp>
-      <p:sp>
-        <p:nvSpPr>
-          <p:cNvPr id="10" name="내용 개체 틀 7">
-            <a:extLst>
-              <a:ext uri="{FF2B5EF4-FFF2-40B4-BE49-F238E27FC236}">
-                <a16:creationId xmlns:a16="http://schemas.microsoft.com/office/drawing/2014/main" id="{BEBA2C4A-B0BF-F2E4-EA6E-614C99CBA184}"/>
-              </a:ext>
-            </a:extLst>
-          </p:cNvPr>
-          <p:cNvSpPr>
-            <a:spLocks noGrp="1"/>
-          </p:cNvSpPr>
-          <p:nvPr>
-            <p:ph idx="1"/>
-          </p:nvPr>
-        </p:nvSpPr>
-        <p:spPr>
-          <a:xfrm>
-            <a:off x="365760" y="4229715"/>
-            <a:ext cx="8412480" cy="1481667"/>
+            <a:ext cx="8412480" cy="2514600"/>
           </a:xfrm>
         </p:spPr>
         <p:txBody>
@@ -19103,26 +18802,70 @@
               <a:t>그림에 배치한 클래스와 포트는 패키지 경계를 보여 주기 위한 대표 요소이며 도메인 모델 전체를 대체하지 않는다.</a:t>
             </a:r>
           </a:p>
+          <a:p>
+            <a:pPr marL="182880" indent="0">
+              <a:spcBef>
+                <a:spcPts val="300"/>
+              </a:spcBef>
+              <a:spcAft>
+                <a:spcPts val="300"/>
+              </a:spcAft>
+              <a:buNone/>
+            </a:pPr>
+            <a:r>
+              <a:rPr sz="1000" b="1">
+                <a:solidFill>
+                  <a:srgbClr val="000000"/>
+                </a:solidFill>
+                <a:latin typeface="맑은 고딕"/>
+                <a:ea typeface="맑은 고딕"/>
+              </a:rPr>
+              <a:t>2.2 포트의 구현</a:t>
+            </a:r>
+          </a:p>
+          <a:p>
+            <a:pPr lvl="2" marL="411480" indent="-137160">
+              <a:spcBef>
+                <a:spcPts val="300"/>
+              </a:spcBef>
+              <a:spcAft>
+                <a:spcPts val="300"/>
+              </a:spcAft>
+              <a:buSzPct val="90000"/>
+              <a:buFont typeface="Wingdings" pitchFamily="2" charset="2"/>
+              <a:buChar char=""/>
+            </a:pPr>
+            <a:r>
+              <a:rPr sz="1000" b="0">
+                <a:solidFill>
+                  <a:srgbClr val="000000"/>
+                </a:solidFill>
+                <a:latin typeface="맑은 고딕"/>
+                <a:ea typeface="맑은 고딕"/>
+              </a:rPr>
+              <a:t>이 그림은 업무 패키지가 소유한 포트를 어느 연동·영속 클래스가 구현하는지 보여 준다.</a:t>
+            </a:r>
+          </a:p>
         </p:txBody>
       </p:sp>
       <p:pic>
         <p:nvPicPr>
-          <p:cNvPr id="11" name="svg Diagram 1"/>
+          <p:cNvPr id="9" name="svg Diagram 2"/>
           <p:cNvPicPr>
             <a:picLocks noChangeAspect="1"/>
           </p:cNvPicPr>
           <p:nvPr/>
         </p:nvPicPr>
         <p:blipFill>
-          <a:blip r:embed="svgImage1"/>
+          <a:blip r:embed="svgImage2"/>
           <a:stretch>
             <a:fillRect/>
           </a:stretch>
         </p:blipFill>
         <p:spPr>
           <a:xfrm>
-            <a:off x="1306286" y="1449776"/>
-            <a:ext cx="6531429" cy="2551339"/>
+            <a:off x="1306286" y="2813135"/>
+            <a:ext cx="6531429" cy="2925536"/>
           </a:xfrm>
           <a:prstGeom prst="rect">
             <a:avLst/>
@@ -19194,7 +18937,17 @@
                 <a:latin typeface="맑은 고딕"/>
                 <a:ea typeface="맑은 고딕"/>
               </a:rPr>
-              <a:t>패키지 다이어그램 — 포트의 구현</a:t>
+              <a:t>“주문한다” 아키텍처 결정 </a:t>
+            </a:r>
+            <a:r>
+              <a:rPr sz="2000" b="1">
+                <a:solidFill>
+                  <a:srgbClr val="000000"/>
+                </a:solidFill>
+                <a:latin typeface="맑은 고딕"/>
+                <a:ea typeface="맑은 고딕"/>
+              </a:rPr>
+              <a:t>(3/5)</a:t>
             </a:r>
           </a:p>
           <a:p>
@@ -19346,86 +19099,6 @@
             <a:normAutofit/>
           </a:bodyPr>
           <a:lstStyle/>
-          <a:p/>
-        </p:txBody>
-      </p:sp>
-      <p:sp>
-        <p:nvSpPr>
-          <p:cNvPr id="9" name="내용 개체 틀 7">
-            <a:extLst>
-              <a:ext uri="{FF2B5EF4-FFF2-40B4-BE49-F238E27FC236}">
-                <a16:creationId xmlns:a16="http://schemas.microsoft.com/office/drawing/2014/main" id="{BEBA2C4A-B0BF-F2E4-EA6E-614C99CBA184}"/>
-              </a:ext>
-            </a:extLst>
-          </p:cNvPr>
-          <p:cNvSpPr>
-            <a:spLocks noGrp="1"/>
-          </p:cNvSpPr>
-          <p:nvPr>
-            <p:ph idx="1"/>
-          </p:nvPr>
-        </p:nvSpPr>
-        <p:spPr>
-          <a:xfrm>
-            <a:off x="365760" y="960120"/>
-            <a:ext cx="8412480" cy="261056"/>
-          </a:xfrm>
-        </p:spPr>
-        <p:txBody>
-          <a:bodyPr>
-            <a:normAutofit/>
-          </a:bodyPr>
-          <a:lstStyle/>
-          <a:p>
-            <a:pPr marL="182880" indent="0">
-              <a:spcBef>
-                <a:spcPts val="300"/>
-              </a:spcBef>
-              <a:spcAft>
-                <a:spcPts val="300"/>
-              </a:spcAft>
-              <a:buNone/>
-            </a:pPr>
-            <a:r>
-              <a:rPr sz="1000" b="0">
-                <a:solidFill>
-                  <a:srgbClr val="000000"/>
-                </a:solidFill>
-                <a:latin typeface="맑은 고딕"/>
-                <a:ea typeface="맑은 고딕"/>
-              </a:rPr>
-              <a:t>이 그림은 업무 패키지가 소유한 포트를 어느 연동·영속 클래스가 구현하는지 보여 준다.</a:t>
-            </a:r>
-          </a:p>
-        </p:txBody>
-      </p:sp>
-      <p:sp>
-        <p:nvSpPr>
-          <p:cNvPr id="10" name="내용 개체 틀 7">
-            <a:extLst>
-              <a:ext uri="{FF2B5EF4-FFF2-40B4-BE49-F238E27FC236}">
-                <a16:creationId xmlns:a16="http://schemas.microsoft.com/office/drawing/2014/main" id="{BEBA2C4A-B0BF-F2E4-EA6E-614C99CBA184}"/>
-              </a:ext>
-            </a:extLst>
-          </p:cNvPr>
-          <p:cNvSpPr>
-            <a:spLocks noGrp="1"/>
-          </p:cNvSpPr>
-          <p:nvPr>
-            <p:ph idx="1"/>
-          </p:nvPr>
-        </p:nvSpPr>
-        <p:spPr>
-          <a:xfrm>
-            <a:off x="365760" y="4603911"/>
-            <a:ext cx="8412480" cy="959556"/>
-          </a:xfrm>
-        </p:spPr>
-        <p:txBody>
-          <a:bodyPr>
-            <a:normAutofit/>
-          </a:bodyPr>
-          <a:lstStyle/>
           <a:p>
             <a:pPr lvl="2" marL="411480" indent="-137160">
               <a:spcBef>
@@ -19505,32 +19178,987 @@
               <a:t>의 소유 경계는 첫 그림에 나타냈다. 외부 상품 시스템 연동 구현은 이번 범위 밖이므로 둘째 그림에는 넣지 않는다.</a:t>
             </a:r>
           </a:p>
+          <a:p>
+            <a:pPr marL="182880" indent="0">
+              <a:spcBef>
+                <a:spcPts val="300"/>
+              </a:spcBef>
+              <a:spcAft>
+                <a:spcPts val="300"/>
+              </a:spcAft>
+              <a:buNone/>
+            </a:pPr>
+            <a:r>
+              <a:rPr sz="1000" b="1">
+                <a:solidFill>
+                  <a:srgbClr val="000000"/>
+                </a:solidFill>
+                <a:latin typeface="맑은 고딕"/>
+                <a:ea typeface="맑은 고딕"/>
+              </a:rPr>
+              <a:t>2.3 패키지별 배치</a:t>
+            </a:r>
+          </a:p>
+          <a:p>
+            <a:pPr lvl="2" marL="411480" indent="-137160">
+              <a:spcBef>
+                <a:spcPts val="300"/>
+              </a:spcBef>
+              <a:spcAft>
+                <a:spcPts val="300"/>
+              </a:spcAft>
+              <a:buSzPct val="90000"/>
+              <a:buFont typeface="Wingdings" pitchFamily="2" charset="2"/>
+              <a:buChar char=""/>
+            </a:pPr>
+            <a:r>
+              <a:rPr sz="1000" b="0">
+                <a:solidFill>
+                  <a:srgbClr val="000000"/>
+                </a:solidFill>
+                <a:latin typeface="맑은 고딕"/>
+                <a:ea typeface="맑은 고딕"/>
+              </a:rPr>
+              <a:t>order</a:t>
+            </a:r>
+            <a:r>
+              <a:rPr sz="1000" b="0">
+                <a:solidFill>
+                  <a:srgbClr val="000000"/>
+                </a:solidFill>
+                <a:latin typeface="맑은 고딕"/>
+                <a:ea typeface="맑은 고딕"/>
+              </a:rPr>
+              <a:t>: </a:t>
+            </a:r>
+            <a:r>
+              <a:rPr sz="1000" b="0">
+                <a:solidFill>
+                  <a:srgbClr val="000000"/>
+                </a:solidFill>
+                <a:latin typeface="맑은 고딕"/>
+                <a:ea typeface="맑은 고딕"/>
+              </a:rPr>
+              <a:t>Order</a:t>
+            </a:r>
+            <a:r>
+              <a:rPr sz="1000" b="0">
+                <a:solidFill>
+                  <a:srgbClr val="000000"/>
+                </a:solidFill>
+                <a:latin typeface="맑은 고딕"/>
+                <a:ea typeface="맑은 고딕"/>
+              </a:rPr>
+              <a:t>, </a:t>
+            </a:r>
+            <a:r>
+              <a:rPr sz="1000" b="0">
+                <a:solidFill>
+                  <a:srgbClr val="000000"/>
+                </a:solidFill>
+                <a:latin typeface="맑은 고딕"/>
+                <a:ea typeface="맑은 고딕"/>
+              </a:rPr>
+              <a:t>OrderItem</a:t>
+            </a:r>
+            <a:r>
+              <a:rPr sz="1000" b="0">
+                <a:solidFill>
+                  <a:srgbClr val="000000"/>
+                </a:solidFill>
+                <a:latin typeface="맑은 고딕"/>
+                <a:ea typeface="맑은 고딕"/>
+              </a:rPr>
+              <a:t>, </a:t>
+            </a:r>
+            <a:r>
+              <a:rPr sz="1000" b="0">
+                <a:solidFill>
+                  <a:srgbClr val="000000"/>
+                </a:solidFill>
+                <a:latin typeface="맑은 고딕"/>
+                <a:ea typeface="맑은 고딕"/>
+              </a:rPr>
+              <a:t>OrderStatus</a:t>
+            </a:r>
+            <a:r>
+              <a:rPr sz="1000" b="0">
+                <a:solidFill>
+                  <a:srgbClr val="000000"/>
+                </a:solidFill>
+                <a:latin typeface="맑은 고딕"/>
+                <a:ea typeface="맑은 고딕"/>
+              </a:rPr>
+              <a:t>를 소유하고 </a:t>
+            </a:r>
+            <a:r>
+              <a:rPr sz="1000" b="0">
+                <a:solidFill>
+                  <a:srgbClr val="000000"/>
+                </a:solidFill>
+                <a:latin typeface="맑은 고딕"/>
+                <a:ea typeface="맑은 고딕"/>
+              </a:rPr>
+              <a:t>OrderRepository</a:t>
+            </a:r>
+            <a:r>
+              <a:rPr sz="1000" b="0">
+                <a:solidFill>
+                  <a:srgbClr val="000000"/>
+                </a:solidFill>
+                <a:latin typeface="맑은 고딕"/>
+                <a:ea typeface="맑은 고딕"/>
+              </a:rPr>
+              <a:t>를 선언하며 </a:t>
+            </a:r>
+            <a:r>
+              <a:rPr sz="1000" b="0">
+                <a:solidFill>
+                  <a:srgbClr val="000000"/>
+                </a:solidFill>
+                <a:latin typeface="맑은 고딕"/>
+                <a:ea typeface="맑은 고딕"/>
+              </a:rPr>
+              <a:t>payment</a:t>
+            </a:r>
+            <a:r>
+              <a:rPr sz="1000" b="0">
+                <a:solidFill>
+                  <a:srgbClr val="000000"/>
+                </a:solidFill>
+                <a:latin typeface="맑은 고딕"/>
+                <a:ea typeface="맑은 고딕"/>
+              </a:rPr>
+              <a:t>, </a:t>
+            </a:r>
+            <a:r>
+              <a:rPr sz="1000" b="0">
+                <a:solidFill>
+                  <a:srgbClr val="000000"/>
+                </a:solidFill>
+                <a:latin typeface="맑은 고딕"/>
+                <a:ea typeface="맑은 고딕"/>
+              </a:rPr>
+              <a:t>delivery</a:t>
+            </a:r>
+            <a:r>
+              <a:rPr sz="1000" b="0">
+                <a:solidFill>
+                  <a:srgbClr val="000000"/>
+                </a:solidFill>
+                <a:latin typeface="맑은 고딕"/>
+                <a:ea typeface="맑은 고딕"/>
+              </a:rPr>
+              <a:t>, </a:t>
+            </a:r>
+            <a:r>
+              <a:rPr sz="1000" b="0">
+                <a:solidFill>
+                  <a:srgbClr val="000000"/>
+                </a:solidFill>
+                <a:latin typeface="맑은 고딕"/>
+                <a:ea typeface="맑은 고딕"/>
+              </a:rPr>
+              <a:t>product</a:t>
+            </a:r>
+            <a:r>
+              <a:rPr sz="1000" b="0">
+                <a:solidFill>
+                  <a:srgbClr val="000000"/>
+                </a:solidFill>
+                <a:latin typeface="맑은 고딕"/>
+                <a:ea typeface="맑은 고딕"/>
+              </a:rPr>
+              <a:t>에 의존한다.</a:t>
+            </a:r>
+          </a:p>
+          <a:p>
+            <a:pPr lvl="2" marL="411480" indent="-137160">
+              <a:spcBef>
+                <a:spcPts val="300"/>
+              </a:spcBef>
+              <a:spcAft>
+                <a:spcPts val="300"/>
+              </a:spcAft>
+              <a:buSzPct val="90000"/>
+              <a:buFont typeface="Wingdings" pitchFamily="2" charset="2"/>
+              <a:buChar char=""/>
+            </a:pPr>
+            <a:r>
+              <a:rPr sz="1000" b="0">
+                <a:solidFill>
+                  <a:srgbClr val="000000"/>
+                </a:solidFill>
+                <a:latin typeface="맑은 고딕"/>
+                <a:ea typeface="맑은 고딕"/>
+              </a:rPr>
+              <a:t>payment</a:t>
+            </a:r>
+            <a:r>
+              <a:rPr sz="1000" b="0">
+                <a:solidFill>
+                  <a:srgbClr val="000000"/>
+                </a:solidFill>
+                <a:latin typeface="맑은 고딕"/>
+                <a:ea typeface="맑은 고딕"/>
+              </a:rPr>
+              <a:t>: </a:t>
+            </a:r>
+            <a:r>
+              <a:rPr sz="1000" b="0">
+                <a:solidFill>
+                  <a:srgbClr val="000000"/>
+                </a:solidFill>
+                <a:latin typeface="맑은 고딕"/>
+                <a:ea typeface="맑은 고딕"/>
+              </a:rPr>
+              <a:t>CardApprovalRequest</a:t>
+            </a:r>
+            <a:r>
+              <a:rPr sz="1000" b="0">
+                <a:solidFill>
+                  <a:srgbClr val="000000"/>
+                </a:solidFill>
+                <a:latin typeface="맑은 고딕"/>
+                <a:ea typeface="맑은 고딕"/>
+              </a:rPr>
+              <a:t>, </a:t>
+            </a:r>
+            <a:r>
+              <a:rPr sz="1000" b="0">
+                <a:solidFill>
+                  <a:srgbClr val="000000"/>
+                </a:solidFill>
+                <a:latin typeface="맑은 고딕"/>
+                <a:ea typeface="맑은 고딕"/>
+              </a:rPr>
+              <a:t>CardApprovalResult</a:t>
+            </a:r>
+            <a:r>
+              <a:rPr sz="1000" b="0">
+                <a:solidFill>
+                  <a:srgbClr val="000000"/>
+                </a:solidFill>
+                <a:latin typeface="맑은 고딕"/>
+                <a:ea typeface="맑은 고딕"/>
+              </a:rPr>
+              <a:t>와 </a:t>
+            </a:r>
+            <a:r>
+              <a:rPr sz="1000" b="0">
+                <a:solidFill>
+                  <a:srgbClr val="000000"/>
+                </a:solidFill>
+                <a:latin typeface="맑은 고딕"/>
+                <a:ea typeface="맑은 고딕"/>
+              </a:rPr>
+              <a:t>PaymentGateway</a:t>
+            </a:r>
+            <a:r>
+              <a:rPr sz="1000" b="0">
+                <a:solidFill>
+                  <a:srgbClr val="000000"/>
+                </a:solidFill>
+                <a:latin typeface="맑은 고딕"/>
+                <a:ea typeface="맑은 고딕"/>
+              </a:rPr>
+              <a:t>를 소유한다.</a:t>
+            </a:r>
+          </a:p>
+          <a:p>
+            <a:pPr lvl="2" marL="411480" indent="-137160">
+              <a:spcBef>
+                <a:spcPts val="300"/>
+              </a:spcBef>
+              <a:spcAft>
+                <a:spcPts val="300"/>
+              </a:spcAft>
+              <a:buSzPct val="90000"/>
+              <a:buFont typeface="Wingdings" pitchFamily="2" charset="2"/>
+              <a:buChar char=""/>
+            </a:pPr>
+            <a:r>
+              <a:rPr sz="1000" b="0">
+                <a:solidFill>
+                  <a:srgbClr val="000000"/>
+                </a:solidFill>
+                <a:latin typeface="맑은 고딕"/>
+                <a:ea typeface="맑은 고딕"/>
+              </a:rPr>
+              <a:t>delivery</a:t>
+            </a:r>
+            <a:r>
+              <a:rPr sz="1000" b="0">
+                <a:solidFill>
+                  <a:srgbClr val="000000"/>
+                </a:solidFill>
+                <a:latin typeface="맑은 고딕"/>
+                <a:ea typeface="맑은 고딕"/>
+              </a:rPr>
+              <a:t>: </a:t>
+            </a:r>
+            <a:r>
+              <a:rPr sz="1000" b="0">
+                <a:solidFill>
+                  <a:srgbClr val="000000"/>
+                </a:solidFill>
+                <a:latin typeface="맑은 고딕"/>
+                <a:ea typeface="맑은 고딕"/>
+              </a:rPr>
+              <a:t>DeliveryRequest</a:t>
+            </a:r>
+            <a:r>
+              <a:rPr sz="1000" b="0">
+                <a:solidFill>
+                  <a:srgbClr val="000000"/>
+                </a:solidFill>
+                <a:latin typeface="맑은 고딕"/>
+                <a:ea typeface="맑은 고딕"/>
+              </a:rPr>
+              <a:t>와 </a:t>
+            </a:r>
+            <a:r>
+              <a:rPr sz="1000" b="0">
+                <a:solidFill>
+                  <a:srgbClr val="000000"/>
+                </a:solidFill>
+                <a:latin typeface="맑은 고딕"/>
+                <a:ea typeface="맑은 고딕"/>
+              </a:rPr>
+              <a:t>DeliveryGateway</a:t>
+            </a:r>
+            <a:r>
+              <a:rPr sz="1000" b="0">
+                <a:solidFill>
+                  <a:srgbClr val="000000"/>
+                </a:solidFill>
+                <a:latin typeface="맑은 고딕"/>
+                <a:ea typeface="맑은 고딕"/>
+              </a:rPr>
+              <a:t>를 소유한다. 배송 실패가 </a:t>
+            </a:r>
+            <a:r>
+              <a:rPr sz="1000" b="0">
+                <a:solidFill>
+                  <a:srgbClr val="000000"/>
+                </a:solidFill>
+                <a:latin typeface="맑은 고딕"/>
+                <a:ea typeface="맑은 고딕"/>
+              </a:rPr>
+              <a:t>PAID</a:t>
+            </a:r>
+            <a:r>
+              <a:rPr sz="1000" b="0">
+                <a:solidFill>
+                  <a:srgbClr val="000000"/>
+                </a:solidFill>
+                <a:latin typeface="맑은 고딕"/>
+                <a:ea typeface="맑은 고딕"/>
+              </a:rPr>
+              <a:t>에 미치는 영향, 재시도 기준과 담당 주체, 중복 처리 방식 및 응답 시간 초과 처리는 정하지 않는다.</a:t>
+            </a:r>
+          </a:p>
+          <a:p>
+            <a:pPr lvl="2" marL="411480" indent="-137160">
+              <a:spcBef>
+                <a:spcPts val="300"/>
+              </a:spcBef>
+              <a:spcAft>
+                <a:spcPts val="300"/>
+              </a:spcAft>
+              <a:buSzPct val="90000"/>
+              <a:buFont typeface="Wingdings" pitchFamily="2" charset="2"/>
+              <a:buChar char=""/>
+            </a:pPr>
+            <a:r>
+              <a:rPr sz="1000" b="0">
+                <a:solidFill>
+                  <a:srgbClr val="000000"/>
+                </a:solidFill>
+                <a:latin typeface="맑은 고딕"/>
+                <a:ea typeface="맑은 고딕"/>
+              </a:rPr>
+              <a:t>product</a:t>
+            </a:r>
+            <a:r>
+              <a:rPr sz="1000" b="0">
+                <a:solidFill>
+                  <a:srgbClr val="000000"/>
+                </a:solidFill>
+                <a:latin typeface="맑은 고딕"/>
+                <a:ea typeface="맑은 고딕"/>
+              </a:rPr>
+              <a:t>: </a:t>
+            </a:r>
+            <a:r>
+              <a:rPr sz="1000" b="0">
+                <a:solidFill>
+                  <a:srgbClr val="000000"/>
+                </a:solidFill>
+                <a:latin typeface="맑은 고딕"/>
+                <a:ea typeface="맑은 고딕"/>
+              </a:rPr>
+              <a:t>Product</a:t>
+            </a:r>
+            <a:r>
+              <a:rPr sz="1000" b="0">
+                <a:solidFill>
+                  <a:srgbClr val="000000"/>
+                </a:solidFill>
+                <a:latin typeface="맑은 고딕"/>
+                <a:ea typeface="맑은 고딕"/>
+              </a:rPr>
+              <a:t>와 </a:t>
+            </a:r>
+            <a:r>
+              <a:rPr sz="1000" b="0">
+                <a:solidFill>
+                  <a:srgbClr val="000000"/>
+                </a:solidFill>
+                <a:latin typeface="맑은 고딕"/>
+                <a:ea typeface="맑은 고딕"/>
+              </a:rPr>
+              <a:t>ProductGateway</a:t>
+            </a:r>
+            <a:r>
+              <a:rPr sz="1000" b="0">
+                <a:solidFill>
+                  <a:srgbClr val="000000"/>
+                </a:solidFill>
+                <a:latin typeface="맑은 고딕"/>
+                <a:ea typeface="맑은 고딕"/>
+              </a:rPr>
+              <a:t>를 소유한다. 동일 상품 항목의 병합 여부와 재고 관련 규격은 정하지 않으며 외부 상품 시스템 연동 구현은 이번 범위에서 만들지 않는다.</a:t>
+            </a:r>
+          </a:p>
+          <a:p>
+            <a:pPr lvl="2" marL="411480" indent="-137160">
+              <a:spcBef>
+                <a:spcPts val="300"/>
+              </a:spcBef>
+              <a:spcAft>
+                <a:spcPts val="300"/>
+              </a:spcAft>
+              <a:buSzPct val="90000"/>
+              <a:buFont typeface="Wingdings" pitchFamily="2" charset="2"/>
+              <a:buChar char=""/>
+            </a:pPr>
+            <a:r>
+              <a:rPr sz="1000" b="0">
+                <a:solidFill>
+                  <a:srgbClr val="000000"/>
+                </a:solidFill>
+                <a:latin typeface="맑은 고딕"/>
+                <a:ea typeface="맑은 고딕"/>
+              </a:rPr>
+              <a:t>paymentadapter</a:t>
+            </a:r>
+            <a:r>
+              <a:rPr sz="1000" b="0">
+                <a:solidFill>
+                  <a:srgbClr val="000000"/>
+                </a:solidFill>
+                <a:latin typeface="맑은 고딕"/>
+                <a:ea typeface="맑은 고딕"/>
+              </a:rPr>
+              <a:t>: </a:t>
+            </a:r>
+            <a:r>
+              <a:rPr sz="1000" b="0">
+                <a:solidFill>
+                  <a:srgbClr val="000000"/>
+                </a:solidFill>
+                <a:latin typeface="맑은 고딕"/>
+                <a:ea typeface="맑은 고딕"/>
+              </a:rPr>
+              <a:t>PaymentAdapter</a:t>
+            </a:r>
+            <a:r>
+              <a:rPr sz="1000" b="0">
+                <a:solidFill>
+                  <a:srgbClr val="000000"/>
+                </a:solidFill>
+                <a:latin typeface="맑은 고딕"/>
+                <a:ea typeface="맑은 고딕"/>
+              </a:rPr>
+              <a:t>가 </a:t>
+            </a:r>
+            <a:r>
+              <a:rPr sz="1000" b="0">
+                <a:solidFill>
+                  <a:srgbClr val="000000"/>
+                </a:solidFill>
+                <a:latin typeface="맑은 고딕"/>
+                <a:ea typeface="맑은 고딕"/>
+              </a:rPr>
+              <a:t>PaymentGateway</a:t>
+            </a:r>
+            <a:r>
+              <a:rPr sz="1000" b="0">
+                <a:solidFill>
+                  <a:srgbClr val="000000"/>
+                </a:solidFill>
+                <a:latin typeface="맑은 고딕"/>
+                <a:ea typeface="맑은 고딕"/>
+              </a:rPr>
+              <a:t>를 구현하고 외부 결제 제공자의 전문을 업무 의미로 변환한다.</a:t>
+            </a:r>
+          </a:p>
+          <a:p>
+            <a:pPr lvl="2" marL="411480" indent="-137160">
+              <a:spcBef>
+                <a:spcPts val="300"/>
+              </a:spcBef>
+              <a:spcAft>
+                <a:spcPts val="300"/>
+              </a:spcAft>
+              <a:buSzPct val="90000"/>
+              <a:buFont typeface="Wingdings" pitchFamily="2" charset="2"/>
+              <a:buChar char=""/>
+            </a:pPr>
+            <a:r>
+              <a:rPr sz="1000" b="0">
+                <a:solidFill>
+                  <a:srgbClr val="000000"/>
+                </a:solidFill>
+                <a:latin typeface="맑은 고딕"/>
+                <a:ea typeface="맑은 고딕"/>
+              </a:rPr>
+              <a:t>deliveryadapter</a:t>
+            </a:r>
+            <a:r>
+              <a:rPr sz="1000" b="0">
+                <a:solidFill>
+                  <a:srgbClr val="000000"/>
+                </a:solidFill>
+                <a:latin typeface="맑은 고딕"/>
+                <a:ea typeface="맑은 고딕"/>
+              </a:rPr>
+              <a:t>: </a:t>
+            </a:r>
+            <a:r>
+              <a:rPr sz="1000" b="0">
+                <a:solidFill>
+                  <a:srgbClr val="000000"/>
+                </a:solidFill>
+                <a:latin typeface="맑은 고딕"/>
+                <a:ea typeface="맑은 고딕"/>
+              </a:rPr>
+              <a:t>DeliveryAdapter</a:t>
+            </a:r>
+            <a:r>
+              <a:rPr sz="1000" b="0">
+                <a:solidFill>
+                  <a:srgbClr val="000000"/>
+                </a:solidFill>
+                <a:latin typeface="맑은 고딕"/>
+                <a:ea typeface="맑은 고딕"/>
+              </a:rPr>
+              <a:t>가 </a:t>
+            </a:r>
+            <a:r>
+              <a:rPr sz="1000" b="0">
+                <a:solidFill>
+                  <a:srgbClr val="000000"/>
+                </a:solidFill>
+                <a:latin typeface="맑은 고딕"/>
+                <a:ea typeface="맑은 고딕"/>
+              </a:rPr>
+              <a:t>DeliveryGateway</a:t>
+            </a:r>
+            <a:r>
+              <a:rPr sz="1000" b="0">
+                <a:solidFill>
+                  <a:srgbClr val="000000"/>
+                </a:solidFill>
+                <a:latin typeface="맑은 고딕"/>
+                <a:ea typeface="맑은 고딕"/>
+              </a:rPr>
+              <a:t>를 구현하고 업무의 배송 요청을 외부 배송 제공자의 전문으로 변환한다.</a:t>
+            </a:r>
+          </a:p>
+          <a:p>
+            <a:pPr lvl="2" marL="411480" indent="-137160">
+              <a:spcBef>
+                <a:spcPts val="300"/>
+              </a:spcBef>
+              <a:spcAft>
+                <a:spcPts val="300"/>
+              </a:spcAft>
+              <a:buSzPct val="90000"/>
+              <a:buFont typeface="Wingdings" pitchFamily="2" charset="2"/>
+              <a:buChar char=""/>
+            </a:pPr>
+            <a:r>
+              <a:rPr sz="1000" b="0">
+                <a:solidFill>
+                  <a:srgbClr val="000000"/>
+                </a:solidFill>
+                <a:latin typeface="맑은 고딕"/>
+                <a:ea typeface="맑은 고딕"/>
+              </a:rPr>
+              <a:t>persistence</a:t>
+            </a:r>
+            <a:r>
+              <a:rPr sz="1000" b="0">
+                <a:solidFill>
+                  <a:srgbClr val="000000"/>
+                </a:solidFill>
+                <a:latin typeface="맑은 고딕"/>
+                <a:ea typeface="맑은 고딕"/>
+              </a:rPr>
+              <a:t>: </a:t>
+            </a:r>
+            <a:r>
+              <a:rPr sz="1000" b="0">
+                <a:solidFill>
+                  <a:srgbClr val="000000"/>
+                </a:solidFill>
+                <a:latin typeface="맑은 고딕"/>
+                <a:ea typeface="맑은 고딕"/>
+              </a:rPr>
+              <a:t>OrderPersistenceAdapter</a:t>
+            </a:r>
+            <a:r>
+              <a:rPr sz="1000" b="0">
+                <a:solidFill>
+                  <a:srgbClr val="000000"/>
+                </a:solidFill>
+                <a:latin typeface="맑은 고딕"/>
+                <a:ea typeface="맑은 고딕"/>
+              </a:rPr>
+              <a:t>가 </a:t>
+            </a:r>
+            <a:r>
+              <a:rPr sz="1000" b="0">
+                <a:solidFill>
+                  <a:srgbClr val="000000"/>
+                </a:solidFill>
+                <a:latin typeface="맑은 고딕"/>
+                <a:ea typeface="맑은 고딕"/>
+              </a:rPr>
+              <a:t>OrderRepository</a:t>
+            </a:r>
+            <a:r>
+              <a:rPr sz="1000" b="0">
+                <a:solidFill>
+                  <a:srgbClr val="000000"/>
+                </a:solidFill>
+                <a:latin typeface="맑은 고딕"/>
+                <a:ea typeface="맑은 고딕"/>
+              </a:rPr>
+              <a:t>를 구현하고 주문 저장소와 통신한다.</a:t>
+            </a:r>
+          </a:p>
+          <a:p>
+            <a:pPr lvl="2" marL="411480" indent="-137160">
+              <a:spcBef>
+                <a:spcPts val="300"/>
+              </a:spcBef>
+              <a:spcAft>
+                <a:spcPts val="300"/>
+              </a:spcAft>
+              <a:buSzPct val="90000"/>
+              <a:buFont typeface="Wingdings" pitchFamily="2" charset="2"/>
+              <a:buChar char=""/>
+            </a:pPr>
+            <a:r>
+              <a:rPr sz="1000" b="0">
+                <a:solidFill>
+                  <a:srgbClr val="000000"/>
+                </a:solidFill>
+                <a:latin typeface="맑은 고딕"/>
+                <a:ea typeface="맑은 고딕"/>
+              </a:rPr>
+              <a:t>호출자가 들어오는 쪽과 입력 포트 및 유스케이스 인터페이스의 배치는 이번 범위 밖이다.</a:t>
+            </a:r>
+          </a:p>
+          <a:p>
+            <a:pPr marL="322580" indent="-139700">
+              <a:spcBef>
+                <a:spcPts val="300"/>
+              </a:spcBef>
+              <a:spcAft>
+                <a:spcPts val="300"/>
+              </a:spcAft>
+              <a:buNone/>
+            </a:pPr>
+            <a:r>
+              <a:rPr sz="1000" b="1">
+                <a:solidFill>
+                  <a:srgbClr val="000000"/>
+                </a:solidFill>
+                <a:latin typeface="맑은 고딕"/>
+                <a:ea typeface="맑은 고딕"/>
+              </a:rPr>
+              <a:t>3. 의존 규칙</a:t>
+            </a:r>
+          </a:p>
+          <a:p>
+            <a:pPr marL="182880" indent="0">
+              <a:spcBef>
+                <a:spcPts val="300"/>
+              </a:spcBef>
+              <a:spcAft>
+                <a:spcPts val="300"/>
+              </a:spcAft>
+              <a:buNone/>
+            </a:pPr>
+            <a:r>
+              <a:rPr sz="1000" b="1">
+                <a:solidFill>
+                  <a:srgbClr val="000000"/>
+                </a:solidFill>
+                <a:latin typeface="맑은 고딕"/>
+                <a:ea typeface="맑은 고딕"/>
+              </a:rPr>
+              <a:t>허용</a:t>
+            </a:r>
+          </a:p>
+          <a:p>
+            <a:pPr lvl="2" marL="411480" indent="-137160">
+              <a:spcBef>
+                <a:spcPts val="300"/>
+              </a:spcBef>
+              <a:spcAft>
+                <a:spcPts val="300"/>
+              </a:spcAft>
+              <a:buSzPct val="90000"/>
+              <a:buFont typeface="Wingdings" pitchFamily="2" charset="2"/>
+              <a:buChar char=""/>
+            </a:pPr>
+            <a:r>
+              <a:rPr sz="1000" b="0">
+                <a:solidFill>
+                  <a:srgbClr val="000000"/>
+                </a:solidFill>
+                <a:latin typeface="맑은 고딕"/>
+                <a:ea typeface="맑은 고딕"/>
+              </a:rPr>
+              <a:t>order</a:t>
+            </a:r>
+            <a:r>
+              <a:rPr sz="1000" b="0">
+                <a:solidFill>
+                  <a:srgbClr val="000000"/>
+                </a:solidFill>
+                <a:latin typeface="맑은 고딕"/>
+                <a:ea typeface="맑은 고딕"/>
+              </a:rPr>
+              <a:t> → </a:t>
+            </a:r>
+            <a:r>
+              <a:rPr sz="1000" b="0">
+                <a:solidFill>
+                  <a:srgbClr val="000000"/>
+                </a:solidFill>
+                <a:latin typeface="맑은 고딕"/>
+                <a:ea typeface="맑은 고딕"/>
+              </a:rPr>
+              <a:t>payment</a:t>
+            </a:r>
+            <a:r>
+              <a:rPr sz="1000" b="0">
+                <a:solidFill>
+                  <a:srgbClr val="000000"/>
+                </a:solidFill>
+                <a:latin typeface="맑은 고딕"/>
+                <a:ea typeface="맑은 고딕"/>
+              </a:rPr>
+              <a:t>, </a:t>
+            </a:r>
+            <a:r>
+              <a:rPr sz="1000" b="0">
+                <a:solidFill>
+                  <a:srgbClr val="000000"/>
+                </a:solidFill>
+                <a:latin typeface="맑은 고딕"/>
+                <a:ea typeface="맑은 고딕"/>
+              </a:rPr>
+              <a:t>delivery</a:t>
+            </a:r>
+            <a:r>
+              <a:rPr sz="1000" b="0">
+                <a:solidFill>
+                  <a:srgbClr val="000000"/>
+                </a:solidFill>
+                <a:latin typeface="맑은 고딕"/>
+                <a:ea typeface="맑은 고딕"/>
+              </a:rPr>
+              <a:t>, </a:t>
+            </a:r>
+            <a:r>
+              <a:rPr sz="1000" b="0">
+                <a:solidFill>
+                  <a:srgbClr val="000000"/>
+                </a:solidFill>
+                <a:latin typeface="맑은 고딕"/>
+                <a:ea typeface="맑은 고딕"/>
+              </a:rPr>
+              <a:t>product</a:t>
+            </a:r>
+          </a:p>
+          <a:p>
+            <a:pPr lvl="2" marL="411480" indent="-137160">
+              <a:spcBef>
+                <a:spcPts val="300"/>
+              </a:spcBef>
+              <a:spcAft>
+                <a:spcPts val="300"/>
+              </a:spcAft>
+              <a:buSzPct val="90000"/>
+              <a:buFont typeface="Wingdings" pitchFamily="2" charset="2"/>
+              <a:buChar char=""/>
+            </a:pPr>
+            <a:r>
+              <a:rPr sz="1000" b="0">
+                <a:solidFill>
+                  <a:srgbClr val="000000"/>
+                </a:solidFill>
+                <a:latin typeface="맑은 고딕"/>
+                <a:ea typeface="맑은 고딕"/>
+              </a:rPr>
+              <a:t>paymentadapter</a:t>
+            </a:r>
+            <a:r>
+              <a:rPr sz="1000" b="0">
+                <a:solidFill>
+                  <a:srgbClr val="000000"/>
+                </a:solidFill>
+                <a:latin typeface="맑은 고딕"/>
+                <a:ea typeface="맑은 고딕"/>
+              </a:rPr>
+              <a:t> → </a:t>
+            </a:r>
+            <a:r>
+              <a:rPr sz="1000" b="0">
+                <a:solidFill>
+                  <a:srgbClr val="000000"/>
+                </a:solidFill>
+                <a:latin typeface="맑은 고딕"/>
+                <a:ea typeface="맑은 고딕"/>
+              </a:rPr>
+              <a:t>payment</a:t>
+            </a:r>
+            <a:r>
+              <a:rPr sz="1000" b="0">
+                <a:solidFill>
+                  <a:srgbClr val="000000"/>
+                </a:solidFill>
+                <a:latin typeface="맑은 고딕"/>
+                <a:ea typeface="맑은 고딕"/>
+              </a:rPr>
+              <a:t>, 외부 결제 라이브러리</a:t>
+            </a:r>
+          </a:p>
+          <a:p>
+            <a:pPr lvl="2" marL="411480" indent="-137160">
+              <a:spcBef>
+                <a:spcPts val="300"/>
+              </a:spcBef>
+              <a:spcAft>
+                <a:spcPts val="300"/>
+              </a:spcAft>
+              <a:buSzPct val="90000"/>
+              <a:buFont typeface="Wingdings" pitchFamily="2" charset="2"/>
+              <a:buChar char=""/>
+            </a:pPr>
+            <a:r>
+              <a:rPr sz="1000" b="0">
+                <a:solidFill>
+                  <a:srgbClr val="000000"/>
+                </a:solidFill>
+                <a:latin typeface="맑은 고딕"/>
+                <a:ea typeface="맑은 고딕"/>
+              </a:rPr>
+              <a:t>deliveryadapter</a:t>
+            </a:r>
+            <a:r>
+              <a:rPr sz="1000" b="0">
+                <a:solidFill>
+                  <a:srgbClr val="000000"/>
+                </a:solidFill>
+                <a:latin typeface="맑은 고딕"/>
+                <a:ea typeface="맑은 고딕"/>
+              </a:rPr>
+              <a:t> → </a:t>
+            </a:r>
+            <a:r>
+              <a:rPr sz="1000" b="0">
+                <a:solidFill>
+                  <a:srgbClr val="000000"/>
+                </a:solidFill>
+                <a:latin typeface="맑은 고딕"/>
+                <a:ea typeface="맑은 고딕"/>
+              </a:rPr>
+              <a:t>delivery</a:t>
+            </a:r>
+            <a:r>
+              <a:rPr sz="1000" b="0">
+                <a:solidFill>
+                  <a:srgbClr val="000000"/>
+                </a:solidFill>
+                <a:latin typeface="맑은 고딕"/>
+                <a:ea typeface="맑은 고딕"/>
+              </a:rPr>
+              <a:t>, 외부 배송 라이브러리</a:t>
+            </a:r>
+          </a:p>
+          <a:p>
+            <a:pPr lvl="2" marL="411480" indent="-137160">
+              <a:spcBef>
+                <a:spcPts val="300"/>
+              </a:spcBef>
+              <a:spcAft>
+                <a:spcPts val="300"/>
+              </a:spcAft>
+              <a:buSzPct val="90000"/>
+              <a:buFont typeface="Wingdings" pitchFamily="2" charset="2"/>
+              <a:buChar char=""/>
+            </a:pPr>
+            <a:r>
+              <a:rPr sz="1000" b="0">
+                <a:solidFill>
+                  <a:srgbClr val="000000"/>
+                </a:solidFill>
+                <a:latin typeface="맑은 고딕"/>
+                <a:ea typeface="맑은 고딕"/>
+              </a:rPr>
+              <a:t>persistence</a:t>
+            </a:r>
+            <a:r>
+              <a:rPr sz="1000" b="0">
+                <a:solidFill>
+                  <a:srgbClr val="000000"/>
+                </a:solidFill>
+                <a:latin typeface="맑은 고딕"/>
+                <a:ea typeface="맑은 고딕"/>
+              </a:rPr>
+              <a:t> → </a:t>
+            </a:r>
+            <a:r>
+              <a:rPr sz="1000" b="0">
+                <a:solidFill>
+                  <a:srgbClr val="000000"/>
+                </a:solidFill>
+                <a:latin typeface="맑은 고딕"/>
+                <a:ea typeface="맑은 고딕"/>
+              </a:rPr>
+              <a:t>order</a:t>
+            </a:r>
+            <a:r>
+              <a:rPr sz="1000" b="0">
+                <a:solidFill>
+                  <a:srgbClr val="000000"/>
+                </a:solidFill>
+                <a:latin typeface="맑은 고딕"/>
+                <a:ea typeface="맑은 고딕"/>
+              </a:rPr>
+              <a:t>, 데이터베이스 및 영속 기술 라이브러리</a:t>
+            </a:r>
+          </a:p>
         </p:txBody>
       </p:sp>
-      <p:pic>
-        <p:nvPicPr>
-          <p:cNvPr id="11" name="svg Diagram 2"/>
-          <p:cNvPicPr>
-            <a:picLocks noChangeAspect="1"/>
-          </p:cNvPicPr>
-          <p:nvPr/>
-        </p:nvPicPr>
-        <p:blipFill>
-          <a:blip r:embed="svgImage2"/>
-          <a:stretch>
-            <a:fillRect/>
-          </a:stretch>
-        </p:blipFill>
-        <p:spPr>
-          <a:xfrm>
-            <a:off x="1306286" y="1449776"/>
-            <a:ext cx="6531429" cy="2925536"/>
-          </a:xfrm>
-          <a:prstGeom prst="rect">
-            <a:avLst/>
-          </a:prstGeom>
-        </p:spPr>
-      </p:pic>
     </p:spTree>
     <p:extLst>
       <p:ext uri="{BB962C8B-B14F-4D97-AF65-F5344CB8AC3E}">
@@ -19596,7 +20224,17 @@
                 <a:latin typeface="맑은 고딕"/>
                 <a:ea typeface="맑은 고딕"/>
               </a:rPr>
-              <a:t>패키지별 배치</a:t>
+              <a:t>“주문한다” 아키텍처 결정 </a:t>
+            </a:r>
+            <a:r>
+              <a:rPr sz="2000" b="1">
+                <a:solidFill>
+                  <a:srgbClr val="000000"/>
+                </a:solidFill>
+                <a:latin typeface="맑은 고딕"/>
+                <a:ea typeface="맑은 고딕"/>
+              </a:rPr>
+              <a:t>(4/5)</a:t>
             </a:r>
           </a:p>
           <a:p>
@@ -19742,17 +20380,33 @@
             <p:ph idx="1"/>
           </p:nvPr>
         </p:nvSpPr>
-        <p:spPr>
-          <a:xfrm>
-            <a:off x="233172" y="960120"/>
-            <a:ext cx="4338828" cy="5352345"/>
-          </a:xfrm>
-        </p:spPr>
+        <p:spPr/>
         <p:txBody>
           <a:bodyPr>
             <a:normAutofit/>
           </a:bodyPr>
           <a:lstStyle/>
+          <a:p>
+            <a:pPr marL="182880" indent="0">
+              <a:spcBef>
+                <a:spcPts val="300"/>
+              </a:spcBef>
+              <a:spcAft>
+                <a:spcPts val="300"/>
+              </a:spcAft>
+              <a:buNone/>
+            </a:pPr>
+            <a:r>
+              <a:rPr sz="1000" b="1">
+                <a:solidFill>
+                  <a:srgbClr val="000000"/>
+                </a:solidFill>
+                <a:latin typeface="맑은 고딕"/>
+                <a:ea typeface="맑은 고딕"/>
+              </a:rPr>
+              <a:t>검사 가능한 금지</a:t>
+            </a:r>
+          </a:p>
           <a:p>
             <a:pPr lvl="2" marL="411480" indent="-137160">
               <a:spcBef>
@@ -19773,6 +20427,16 @@
                 <a:latin typeface="맑은 고딕"/>
                 <a:ea typeface="맑은 고딕"/>
               </a:rPr>
+              <a:t>업무 패키지 </a:t>
+            </a:r>
+            <a:r>
+              <a:rPr sz="1000" b="0">
+                <a:solidFill>
+                  <a:srgbClr val="000000"/>
+                </a:solidFill>
+                <a:latin typeface="맑은 고딕"/>
+                <a:ea typeface="맑은 고딕"/>
+              </a:rPr>
               <a:t>order</a:t>
             </a:r>
             <a:r>
@@ -19783,7 +20447,7 @@
                 <a:latin typeface="맑은 고딕"/>
                 <a:ea typeface="맑은 고딕"/>
               </a:rPr>
-              <a:t>: </a:t>
+              <a:t>, </a:t>
             </a:r>
             <a:r>
               <a:rPr sz="1000" b="0">
@@ -19793,7 +20457,7 @@
                 <a:latin typeface="맑은 고딕"/>
                 <a:ea typeface="맑은 고딕"/>
               </a:rPr>
-              <a:t>Order</a:t>
+              <a:t>payment</a:t>
             </a:r>
             <a:r>
               <a:rPr sz="1000" b="0">
@@ -19813,7 +20477,7 @@
                 <a:latin typeface="맑은 고딕"/>
                 <a:ea typeface="맑은 고딕"/>
               </a:rPr>
-              <a:t>OrderItem</a:t>
+              <a:t>delivery</a:t>
             </a:r>
             <a:r>
               <a:rPr sz="1000" b="0">
@@ -19833,7 +20497,7 @@
                 <a:latin typeface="맑은 고딕"/>
                 <a:ea typeface="맑은 고딕"/>
               </a:rPr>
-              <a:t>OrderStatus</a:t>
+              <a:t>product</a:t>
             </a:r>
             <a:r>
               <a:rPr sz="1000" b="0">
@@ -19843,7 +20507,7 @@
                 <a:latin typeface="맑은 고딕"/>
                 <a:ea typeface="맑은 고딕"/>
               </a:rPr>
-              <a:t>를 소유하고 </a:t>
+              <a:t>에서 연동·영속 패키지 </a:t>
             </a:r>
             <a:r>
               <a:rPr sz="1000" b="0">
@@ -19853,7 +20517,7 @@
                 <a:latin typeface="맑은 고딕"/>
                 <a:ea typeface="맑은 고딕"/>
               </a:rPr>
-              <a:t>OrderRepository</a:t>
+              <a:t>paymentadapter</a:t>
             </a:r>
             <a:r>
               <a:rPr sz="1000" b="0">
@@ -19863,7 +20527,7 @@
                 <a:latin typeface="맑은 고딕"/>
                 <a:ea typeface="맑은 고딕"/>
               </a:rPr>
-              <a:t>를 선언하며 </a:t>
+              <a:t>, </a:t>
             </a:r>
             <a:r>
               <a:rPr sz="1000" b="0">
@@ -19873,7 +20537,7 @@
                 <a:latin typeface="맑은 고딕"/>
                 <a:ea typeface="맑은 고딕"/>
               </a:rPr>
-              <a:t>payment</a:t>
+              <a:t>deliveryadapter</a:t>
             </a:r>
             <a:r>
               <a:rPr sz="1000" b="0">
@@ -19893,7 +20557,7 @@
                 <a:latin typeface="맑은 고딕"/>
                 <a:ea typeface="맑은 고딕"/>
               </a:rPr>
-              <a:t>delivery</a:t>
+              <a:t>persistence</a:t>
             </a:r>
             <a:r>
               <a:rPr sz="1000" b="0">
@@ -19903,27 +20567,7 @@
                 <a:latin typeface="맑은 고딕"/>
                 <a:ea typeface="맑은 고딕"/>
               </a:rPr>
-              <a:t>, </a:t>
-            </a:r>
-            <a:r>
-              <a:rPr sz="1000" b="0">
-                <a:solidFill>
-                  <a:srgbClr val="000000"/>
-                </a:solidFill>
-                <a:latin typeface="맑은 고딕"/>
-                <a:ea typeface="맑은 고딕"/>
-              </a:rPr>
-              <a:t>product</a:t>
-            </a:r>
-            <a:r>
-              <a:rPr sz="1000" b="0">
-                <a:solidFill>
-                  <a:srgbClr val="000000"/>
-                </a:solidFill>
-                <a:latin typeface="맑은 고딕"/>
-                <a:ea typeface="맑은 고딕"/>
-              </a:rPr>
-              <a:t>에 의존한다.</a:t>
+              <a:t>로 향하는 의존을 금지한다.</a:t>
             </a:r>
           </a:p>
           <a:p>
@@ -19946,7 +20590,7 @@
                 <a:latin typeface="맑은 고딕"/>
                 <a:ea typeface="맑은 고딕"/>
               </a:rPr>
-              <a:t>payment</a:t>
+              <a:t>업무 패키지 사이에서는 허용 목록에 없는 의존을 금지한다. 따라서 순환 여부와 관계없이 </a:t>
             </a:r>
             <a:r>
               <a:rPr sz="1000" b="0">
@@ -19956,7 +20600,7 @@
                 <a:latin typeface="맑은 고딕"/>
                 <a:ea typeface="맑은 고딕"/>
               </a:rPr>
-              <a:t>: </a:t>
+              <a:t>payment → delivery</a:t>
             </a:r>
             <a:r>
               <a:rPr sz="1000" b="0">
@@ -19966,57 +20610,7 @@
                 <a:latin typeface="맑은 고딕"/>
                 <a:ea typeface="맑은 고딕"/>
               </a:rPr>
-              <a:t>CardApprovalRequest</a:t>
-            </a:r>
-            <a:r>
-              <a:rPr sz="1000" b="0">
-                <a:solidFill>
-                  <a:srgbClr val="000000"/>
-                </a:solidFill>
-                <a:latin typeface="맑은 고딕"/>
-                <a:ea typeface="맑은 고딕"/>
-              </a:rPr>
-              <a:t>, </a:t>
-            </a:r>
-            <a:r>
-              <a:rPr sz="1000" b="0">
-                <a:solidFill>
-                  <a:srgbClr val="000000"/>
-                </a:solidFill>
-                <a:latin typeface="맑은 고딕"/>
-                <a:ea typeface="맑은 고딕"/>
-              </a:rPr>
-              <a:t>CardApprovalResult</a:t>
-            </a:r>
-            <a:r>
-              <a:rPr sz="1000" b="0">
-                <a:solidFill>
-                  <a:srgbClr val="000000"/>
-                </a:solidFill>
-                <a:latin typeface="맑은 고딕"/>
-                <a:ea typeface="맑은 고딕"/>
-              </a:rPr>
-              <a:t>와 </a:t>
-            </a:r>
-            <a:r>
-              <a:rPr sz="1000" b="0">
-                <a:solidFill>
-                  <a:srgbClr val="000000"/>
-                </a:solidFill>
-                <a:latin typeface="맑은 고딕"/>
-                <a:ea typeface="맑은 고딕"/>
-              </a:rPr>
-              <a:t>PaymentGateway</a:t>
-            </a:r>
-            <a:r>
-              <a:rPr sz="1000" b="0">
-                <a:solidFill>
-                  <a:srgbClr val="000000"/>
-                </a:solidFill>
-                <a:latin typeface="맑은 고딕"/>
-                <a:ea typeface="맑은 고딕"/>
-              </a:rPr>
-              <a:t>를 소유한다.</a:t>
+              <a:t> 같은 의존은 금지한다.</a:t>
             </a:r>
           </a:p>
           <a:p>
@@ -20039,77 +20633,28 @@
                 <a:latin typeface="맑은 고딕"/>
                 <a:ea typeface="맑은 고딕"/>
               </a:rPr>
-              <a:t>delivery</a:t>
-            </a:r>
-            <a:r>
-              <a:rPr sz="1000" b="0">
-                <a:solidFill>
-                  <a:srgbClr val="000000"/>
-                </a:solidFill>
-                <a:latin typeface="맑은 고딕"/>
-                <a:ea typeface="맑은 고딕"/>
-              </a:rPr>
-              <a:t>: </a:t>
-            </a:r>
-            <a:r>
-              <a:rPr sz="1000" b="0">
-                <a:solidFill>
-                  <a:srgbClr val="000000"/>
-                </a:solidFill>
-                <a:latin typeface="맑은 고딕"/>
-                <a:ea typeface="맑은 고딕"/>
-              </a:rPr>
-              <a:t>DeliveryRequest</a:t>
-            </a:r>
-            <a:r>
-              <a:rPr sz="1000" b="0">
-                <a:solidFill>
-                  <a:srgbClr val="000000"/>
-                </a:solidFill>
-                <a:latin typeface="맑은 고딕"/>
-                <a:ea typeface="맑은 고딕"/>
-              </a:rPr>
-              <a:t>와 </a:t>
-            </a:r>
-            <a:r>
-              <a:rPr sz="1000" b="0">
-                <a:solidFill>
-                  <a:srgbClr val="000000"/>
-                </a:solidFill>
-                <a:latin typeface="맑은 고딕"/>
-                <a:ea typeface="맑은 고딕"/>
-              </a:rPr>
-              <a:t>DeliveryGateway</a:t>
-            </a:r>
-            <a:r>
-              <a:rPr sz="1000" b="0">
-                <a:solidFill>
-                  <a:srgbClr val="000000"/>
-                </a:solidFill>
-                <a:latin typeface="맑은 고딕"/>
-                <a:ea typeface="맑은 고딕"/>
-              </a:rPr>
-              <a:t>를 소유한다. 배송 실패가 </a:t>
-            </a:r>
-            <a:r>
-              <a:rPr sz="1000" b="0">
-                <a:solidFill>
-                  <a:srgbClr val="000000"/>
-                </a:solidFill>
-                <a:latin typeface="맑은 고딕"/>
-                <a:ea typeface="맑은 고딕"/>
-              </a:rPr>
-              <a:t>PAID</a:t>
-            </a:r>
-            <a:r>
-              <a:rPr sz="1000" b="0">
-                <a:solidFill>
-                  <a:srgbClr val="000000"/>
-                </a:solidFill>
-                <a:latin typeface="맑은 고딕"/>
-                <a:ea typeface="맑은 고딕"/>
-              </a:rPr>
-              <a:t>에 미치는 영향, 재시도 기준과 담당 주체, 중복 처리 방식 및 응답 시간 초과 처리는 정하지 않는다.</a:t>
+              <a:t>위 일곱 패키지 사이의 직·간접 의존 순환을 금지한다.</a:t>
+            </a:r>
+          </a:p>
+          <a:p>
+            <a:pPr marL="182880" indent="0">
+              <a:spcBef>
+                <a:spcPts val="300"/>
+              </a:spcBef>
+              <a:spcAft>
+                <a:spcPts val="300"/>
+              </a:spcAft>
+              <a:buNone/>
+            </a:pPr>
+            <a:r>
+              <a:rPr sz="1000" b="1">
+                <a:solidFill>
+                  <a:srgbClr val="000000"/>
+                </a:solidFill>
+                <a:latin typeface="맑은 고딕"/>
+                <a:ea typeface="맑은 고딕"/>
+              </a:rPr>
+              <a:t>검사로 판정하지 못하는 책임의 약속</a:t>
             </a:r>
           </a:p>
           <a:p>
@@ -20132,7 +20677,7 @@
                 <a:latin typeface="맑은 고딕"/>
                 <a:ea typeface="맑은 고딕"/>
               </a:rPr>
-              <a:t>product</a:t>
+              <a:t>paymentadapter</a:t>
             </a:r>
             <a:r>
               <a:rPr sz="1000" b="0">
@@ -20142,47 +20687,7 @@
                 <a:latin typeface="맑은 고딕"/>
                 <a:ea typeface="맑은 고딕"/>
               </a:rPr>
-              <a:t>: </a:t>
-            </a:r>
-            <a:r>
-              <a:rPr sz="1000" b="0">
-                <a:solidFill>
-                  <a:srgbClr val="000000"/>
-                </a:solidFill>
-                <a:latin typeface="맑은 고딕"/>
-                <a:ea typeface="맑은 고딕"/>
-              </a:rPr>
-              <a:t>Product</a:t>
-            </a:r>
-            <a:r>
-              <a:rPr sz="1000" b="0">
-                <a:solidFill>
-                  <a:srgbClr val="000000"/>
-                </a:solidFill>
-                <a:latin typeface="맑은 고딕"/>
-                <a:ea typeface="맑은 고딕"/>
-              </a:rPr>
-              <a:t>와 </a:t>
-            </a:r>
-            <a:r>
-              <a:rPr sz="1000" b="0">
-                <a:solidFill>
-                  <a:srgbClr val="000000"/>
-                </a:solidFill>
-                <a:latin typeface="맑은 고딕"/>
-                <a:ea typeface="맑은 고딕"/>
-              </a:rPr>
-              <a:t>ProductGateway</a:t>
-            </a:r>
-            <a:r>
-              <a:rPr sz="1000" b="0">
-                <a:solidFill>
-                  <a:srgbClr val="000000"/>
-                </a:solidFill>
-                <a:latin typeface="맑은 고딕"/>
-                <a:ea typeface="맑은 고딕"/>
-              </a:rPr>
-              <a:t>를 소유한다. 동일 상품 항목의 병합 여부와 재고 관련 규격은 정하지 않으며 외부 상품 시스템 연동 구현은 이번 범위에서 만들지 않는다.</a:t>
+              <a:t>는 제공자 전문을 승인·거절·확정 불가로 변환하며, 제공자의 필드·참조 값·코드를 업무 패키지에 노출하지 않고 주문 상태를 변경하지 않는다.</a:t>
             </a:r>
           </a:p>
           <a:p>
@@ -20205,7 +20710,7 @@
                 <a:latin typeface="맑은 고딕"/>
                 <a:ea typeface="맑은 고딕"/>
               </a:rPr>
-              <a:t>paymentadapter</a:t>
+              <a:t>deliveryadapter</a:t>
             </a:r>
             <a:r>
               <a:rPr sz="1000" b="0">
@@ -20215,47 +20720,7 @@
                 <a:latin typeface="맑은 고딕"/>
                 <a:ea typeface="맑은 고딕"/>
               </a:rPr>
-              <a:t>: </a:t>
-            </a:r>
-            <a:r>
-              <a:rPr sz="1000" b="0">
-                <a:solidFill>
-                  <a:srgbClr val="000000"/>
-                </a:solidFill>
-                <a:latin typeface="맑은 고딕"/>
-                <a:ea typeface="맑은 고딕"/>
-              </a:rPr>
-              <a:t>PaymentAdapter</a:t>
-            </a:r>
-            <a:r>
-              <a:rPr sz="1000" b="0">
-                <a:solidFill>
-                  <a:srgbClr val="000000"/>
-                </a:solidFill>
-                <a:latin typeface="맑은 고딕"/>
-                <a:ea typeface="맑은 고딕"/>
-              </a:rPr>
-              <a:t>가 </a:t>
-            </a:r>
-            <a:r>
-              <a:rPr sz="1000" b="0">
-                <a:solidFill>
-                  <a:srgbClr val="000000"/>
-                </a:solidFill>
-                <a:latin typeface="맑은 고딕"/>
-                <a:ea typeface="맑은 고딕"/>
-              </a:rPr>
-              <a:t>PaymentGateway</a:t>
-            </a:r>
-            <a:r>
-              <a:rPr sz="1000" b="0">
-                <a:solidFill>
-                  <a:srgbClr val="000000"/>
-                </a:solidFill>
-                <a:latin typeface="맑은 고딕"/>
-                <a:ea typeface="맑은 고딕"/>
-              </a:rPr>
-              <a:t>를 구현하고 외부 결제 제공자의 전문을 업무 의미로 변환한다.</a:t>
+              <a:t>는 업무의 배송 요청만 전달하며, 제공자의 필드·참조 값·코드를 노출하거나 독자적으로 배송 요청을 만들지 않는다.</a:t>
             </a:r>
           </a:p>
           <a:p>
@@ -20278,7 +20743,7 @@
                 <a:latin typeface="맑은 고딕"/>
                 <a:ea typeface="맑은 고딕"/>
               </a:rPr>
-              <a:t>deliveryadapter</a:t>
+              <a:t>persistence</a:t>
             </a:r>
             <a:r>
               <a:rPr sz="1000" b="0">
@@ -20288,47 +20753,7 @@
                 <a:latin typeface="맑은 고딕"/>
                 <a:ea typeface="맑은 고딕"/>
               </a:rPr>
-              <a:t>: </a:t>
-            </a:r>
-            <a:r>
-              <a:rPr sz="1000" b="0">
-                <a:solidFill>
-                  <a:srgbClr val="000000"/>
-                </a:solidFill>
-                <a:latin typeface="맑은 고딕"/>
-                <a:ea typeface="맑은 고딕"/>
-              </a:rPr>
-              <a:t>DeliveryAdapter</a:t>
-            </a:r>
-            <a:r>
-              <a:rPr sz="1000" b="0">
-                <a:solidFill>
-                  <a:srgbClr val="000000"/>
-                </a:solidFill>
-                <a:latin typeface="맑은 고딕"/>
-                <a:ea typeface="맑은 고딕"/>
-              </a:rPr>
-              <a:t>가 </a:t>
-            </a:r>
-            <a:r>
-              <a:rPr sz="1000" b="0">
-                <a:solidFill>
-                  <a:srgbClr val="000000"/>
-                </a:solidFill>
-                <a:latin typeface="맑은 고딕"/>
-                <a:ea typeface="맑은 고딕"/>
-              </a:rPr>
-              <a:t>DeliveryGateway</a:t>
-            </a:r>
-            <a:r>
-              <a:rPr sz="1000" b="0">
-                <a:solidFill>
-                  <a:srgbClr val="000000"/>
-                </a:solidFill>
-                <a:latin typeface="맑은 고딕"/>
-                <a:ea typeface="맑은 고딕"/>
-              </a:rPr>
-              <a:t>를 구현하고 업무의 배송 요청을 외부 배송 제공자의 전문으로 변환한다.</a:t>
+              <a:t>는 주문을 저장·조회할 뿐 주문 상태 전이나 주문 금액을 결정하지 않는다.</a:t>
             </a:r>
           </a:p>
           <a:p>
@@ -20351,7 +20776,7 @@
                 <a:latin typeface="맑은 고딕"/>
                 <a:ea typeface="맑은 고딕"/>
               </a:rPr>
-              <a:t>persistence</a:t>
+              <a:t>product</a:t>
             </a:r>
             <a:r>
               <a:rPr sz="1000" b="0">
@@ -20361,8 +20786,21 @@
                 <a:latin typeface="맑은 고딕"/>
                 <a:ea typeface="맑은 고딕"/>
               </a:rPr>
-              <a:t>: </a:t>
-            </a:r>
+              <a:t>와 이후 구현은 미정인 재고 판단 시점과 부족 처리 정책을 추가하지 않는다.</a:t>
+            </a:r>
+          </a:p>
+          <a:p>
+            <a:pPr lvl="2" marL="411480" indent="-137160">
+              <a:spcBef>
+                <a:spcPts val="300"/>
+              </a:spcBef>
+              <a:spcAft>
+                <a:spcPts val="300"/>
+              </a:spcAft>
+              <a:buSzPct val="90000"/>
+              <a:buFont typeface="Wingdings" pitchFamily="2" charset="2"/>
+              <a:buChar char=""/>
+            </a:pPr>
             <a:r>
               <a:rPr sz="1000" b="0">
                 <a:solidFill>
@@ -20371,8 +20809,42 @@
                 <a:latin typeface="맑은 고딕"/>
                 <a:ea typeface="맑은 고딕"/>
               </a:rPr>
-              <a:t>OrderPersistenceAdapter</a:t>
-            </a:r>
+              <a:t>어느 패키지도 미정인 만료, 결제 응답 미확정 후속 처리, 배송 실패·재시도 정책을 임의로 구현하지 않는다.</a:t>
+            </a:r>
+          </a:p>
+          <a:p>
+            <a:pPr marL="322580" indent="-139700">
+              <a:spcBef>
+                <a:spcPts val="300"/>
+              </a:spcBef>
+              <a:spcAft>
+                <a:spcPts val="300"/>
+              </a:spcAft>
+              <a:buNone/>
+            </a:pPr>
+            <a:r>
+              <a:rPr sz="1000" b="1">
+                <a:solidFill>
+                  <a:srgbClr val="000000"/>
+                </a:solidFill>
+                <a:latin typeface="맑은 고딕"/>
+                <a:ea typeface="맑은 고딕"/>
+              </a:rPr>
+              <a:t>4. 결제 포트 연동 규격</a:t>
+            </a:r>
+          </a:p>
+          <a:p>
+            <a:pPr lvl="2" marL="411480" indent="-137160">
+              <a:spcBef>
+                <a:spcPts val="300"/>
+              </a:spcBef>
+              <a:spcAft>
+                <a:spcPts val="300"/>
+              </a:spcAft>
+              <a:buSzPct val="90000"/>
+              <a:buFont typeface="Wingdings" pitchFamily="2" charset="2"/>
+              <a:buChar char=""/>
+            </a:pPr>
             <a:r>
               <a:rPr sz="1000" b="0">
                 <a:solidFill>
@@ -20381,7 +20853,7 @@
                 <a:latin typeface="맑은 고딕"/>
                 <a:ea typeface="맑은 고딕"/>
               </a:rPr>
-              <a:t>가 </a:t>
+              <a:t>PaymentGateway</a:t>
             </a:r>
             <a:r>
               <a:rPr sz="1000" b="0">
@@ -20391,7 +20863,7 @@
                 <a:latin typeface="맑은 고딕"/>
                 <a:ea typeface="맑은 고딕"/>
               </a:rPr>
-              <a:t>OrderRepository</a:t>
+              <a:t>에는 업무의 말만 둔다. 전송 방식과 결제 제공자의 전문·필드·참조 값·코드는 확정하지 않으며 </a:t>
             </a:r>
             <a:r>
               <a:rPr sz="1000" b="0">
@@ -20401,7 +20873,103 @@
                 <a:latin typeface="맑은 고딕"/>
                 <a:ea typeface="맑은 고딕"/>
               </a:rPr>
-              <a:t>를 구현하고 주문 저장소와 통신한다.</a:t>
+              <a:t>paymentadapter</a:t>
+            </a:r>
+            <a:r>
+              <a:rPr sz="1000" b="0">
+                <a:solidFill>
+                  <a:srgbClr val="000000"/>
+                </a:solidFill>
+                <a:latin typeface="맑은 고딕"/>
+                <a:ea typeface="맑은 고딕"/>
+              </a:rPr>
+              <a:t>가 변환한다.</a:t>
+            </a:r>
+          </a:p>
+          <a:p>
+            <a:pPr lvl="2" marL="411480" indent="-137160">
+              <a:spcBef>
+                <a:spcPts val="300"/>
+              </a:spcBef>
+              <a:spcAft>
+                <a:spcPts val="300"/>
+              </a:spcAft>
+              <a:buSzPct val="90000"/>
+              <a:buFont typeface="Wingdings" pitchFamily="2" charset="2"/>
+              <a:buChar char=""/>
+            </a:pPr>
+            <a:r>
+              <a:rPr sz="1000" b="1">
+                <a:solidFill>
+                  <a:srgbClr val="000000"/>
+                </a:solidFill>
+                <a:latin typeface="맑은 고딕"/>
+                <a:ea typeface="맑은 고딕"/>
+              </a:rPr>
+              <a:t>업무가 보냄:</a:t>
+            </a:r>
+            <a:r>
+              <a:rPr sz="1000" b="0">
+                <a:solidFill>
+                  <a:srgbClr val="000000"/>
+                </a:solidFill>
+                <a:latin typeface="맑은 고딕"/>
+                <a:ea typeface="맑은 고딕"/>
+              </a:rPr>
+              <a:t> </a:t>
+            </a:r>
+            <a:r>
+              <a:rPr sz="1000" b="0">
+                <a:solidFill>
+                  <a:srgbClr val="000000"/>
+                </a:solidFill>
+                <a:latin typeface="맑은 고딕"/>
+                <a:ea typeface="맑은 고딕"/>
+              </a:rPr>
+              <a:t>CardApprovalRequest(orderNumber, amount, cardApprovalData)</a:t>
+            </a:r>
+          </a:p>
+          <a:p>
+            <a:pPr lvl="2" marL="411480" indent="-137160">
+              <a:spcBef>
+                <a:spcPts val="300"/>
+              </a:spcBef>
+              <a:spcAft>
+                <a:spcPts val="300"/>
+              </a:spcAft>
+              <a:buSzPct val="90000"/>
+              <a:buFont typeface="Wingdings" pitchFamily="2" charset="2"/>
+              <a:buChar char=""/>
+            </a:pPr>
+            <a:r>
+              <a:rPr sz="1000" b="1">
+                <a:solidFill>
+                  <a:srgbClr val="000000"/>
+                </a:solidFill>
+                <a:latin typeface="맑은 고딕"/>
+                <a:ea typeface="맑은 고딕"/>
+              </a:rPr>
+              <a:t>업무가 받음:</a:t>
+            </a:r>
+            <a:r>
+              <a:rPr sz="1000" b="0">
+                <a:solidFill>
+                  <a:srgbClr val="000000"/>
+                </a:solidFill>
+                <a:latin typeface="맑은 고딕"/>
+                <a:ea typeface="맑은 고딕"/>
+              </a:rPr>
+              <a:t> </a:t>
+            </a:r>
+            <a:r>
+              <a:rPr sz="1000" b="0">
+                <a:solidFill>
+                  <a:srgbClr val="000000"/>
+                </a:solidFill>
+                <a:latin typeface="맑은 고딕"/>
+                <a:ea typeface="맑은 고딕"/>
+              </a:rPr>
+              <a:t>CardApprovalResult(APPROVED | DECLINED | UNCONFIRMED)</a:t>
             </a:r>
           </a:p>
           <a:p>
@@ -20415,6 +20983,29 @@
               <a:buNone/>
             </a:pPr>
             <a:r>
+              <a:rPr sz="1000" b="1">
+                <a:solidFill>
+                  <a:srgbClr val="000000"/>
+                </a:solidFill>
+                <a:latin typeface="맑은 고딕"/>
+                <a:ea typeface="맑은 고딕"/>
+              </a:rPr>
+              <a:t>필수 규칙</a:t>
+            </a:r>
+          </a:p>
+          <a:p>
+            <a:pPr lvl="2" marL="411480" indent="-137160">
+              <a:spcBef>
+                <a:spcPts val="300"/>
+              </a:spcBef>
+              <a:spcAft>
+                <a:spcPts val="300"/>
+              </a:spcAft>
+              <a:buSzPct val="90000"/>
+              <a:buFont typeface="Wingdings" pitchFamily="2" charset="2"/>
+              <a:buChar char=""/>
+            </a:pPr>
+            <a:r>
               <a:rPr sz="1000" b="0">
                 <a:solidFill>
                   <a:srgbClr val="000000"/>
@@ -20422,7 +21013,93 @@
                 <a:latin typeface="맑은 고딕"/>
                 <a:ea typeface="맑은 고딕"/>
               </a:rPr>
-              <a:t>호출자가 들어오는 쪽과 입력 포트 및 유스케이스 인터페이스의 배치는 이번 범위 밖이다.</a:t>
+              <a:t>amount</a:t>
+            </a:r>
+            <a:r>
+              <a:rPr sz="1000" b="0">
+                <a:solidFill>
+                  <a:srgbClr val="000000"/>
+                </a:solidFill>
+                <a:latin typeface="맑은 고딕"/>
+                <a:ea typeface="맑은 고딕"/>
+              </a:rPr>
+              <a:t>는 원 단위의 0 이상 정수이며 저장된 주문 총액과 같아야 한다.</a:t>
+            </a:r>
+          </a:p>
+          <a:p>
+            <a:pPr lvl="2" marL="411480" indent="-137160">
+              <a:spcBef>
+                <a:spcPts val="300"/>
+              </a:spcBef>
+              <a:spcAft>
+                <a:spcPts val="300"/>
+              </a:spcAft>
+              <a:buSzPct val="90000"/>
+              <a:buFont typeface="Wingdings" pitchFamily="2" charset="2"/>
+              <a:buChar char=""/>
+            </a:pPr>
+            <a:r>
+              <a:rPr sz="1000" b="0">
+                <a:solidFill>
+                  <a:srgbClr val="000000"/>
+                </a:solidFill>
+                <a:latin typeface="맑은 고딕"/>
+                <a:ea typeface="맑은 고딕"/>
+              </a:rPr>
+              <a:t>승인 시 현재 상품 판매가를 다시 조회하지 않는다.</a:t>
+            </a:r>
+          </a:p>
+          <a:p>
+            <a:pPr lvl="2" marL="411480" indent="-137160">
+              <a:spcBef>
+                <a:spcPts val="300"/>
+              </a:spcBef>
+              <a:spcAft>
+                <a:spcPts val="300"/>
+              </a:spcAft>
+              <a:buSzPct val="90000"/>
+              <a:buFont typeface="Wingdings" pitchFamily="2" charset="2"/>
+              <a:buChar char=""/>
+            </a:pPr>
+            <a:r>
+              <a:rPr sz="1000" b="0">
+                <a:solidFill>
+                  <a:srgbClr val="000000"/>
+                </a:solidFill>
+                <a:latin typeface="맑은 고딕"/>
+                <a:ea typeface="맑은 고딕"/>
+              </a:rPr>
+              <a:t>APPROVED</a:t>
+            </a:r>
+            <a:r>
+              <a:rPr sz="1000" b="0">
+                <a:solidFill>
+                  <a:srgbClr val="000000"/>
+                </a:solidFill>
+                <a:latin typeface="맑은 고딕"/>
+                <a:ea typeface="맑은 고딕"/>
+              </a:rPr>
+              <a:t>만 주문을 </a:t>
+            </a:r>
+            <a:r>
+              <a:rPr sz="1000" b="0">
+                <a:solidFill>
+                  <a:srgbClr val="000000"/>
+                </a:solidFill>
+                <a:latin typeface="맑은 고딕"/>
+                <a:ea typeface="맑은 고딕"/>
+              </a:rPr>
+              <a:t>PAID</a:t>
+            </a:r>
+            <a:r>
+              <a:rPr sz="1000" b="0">
+                <a:solidFill>
+                  <a:srgbClr val="000000"/>
+                </a:solidFill>
+                <a:latin typeface="맑은 고딕"/>
+                <a:ea typeface="맑은 고딕"/>
+              </a:rPr>
+              <a:t>로 전이시킨다.</a:t>
             </a:r>
           </a:p>
         </p:txBody>
@@ -20492,7 +21169,17 @@
                 <a:latin typeface="맑은 고딕"/>
                 <a:ea typeface="맑은 고딕"/>
               </a:rPr>
-              <a:t>의존 규칙</a:t>
+              <a:t>“주문한다” 아키텍처 결정 </a:t>
+            </a:r>
+            <a:r>
+              <a:rPr sz="2000" b="1">
+                <a:solidFill>
+                  <a:srgbClr val="000000"/>
+                </a:solidFill>
+                <a:latin typeface="맑은 고딕"/>
+                <a:ea typeface="맑은 고딕"/>
+              </a:rPr>
+              <a:t>(5/5)</a:t>
             </a:r>
           </a:p>
           <a:p>
@@ -20638,38 +21325,12 @@
             <p:ph idx="1"/>
           </p:nvPr>
         </p:nvSpPr>
-        <p:spPr>
-          <a:xfrm>
-            <a:off x="233172" y="960120"/>
-            <a:ext cx="4338828" cy="5352345"/>
-          </a:xfrm>
-        </p:spPr>
+        <p:spPr/>
         <p:txBody>
           <a:bodyPr>
             <a:normAutofit/>
           </a:bodyPr>
           <a:lstStyle/>
-          <a:p>
-            <a:pPr marL="182880" indent="0">
-              <a:spcBef>
-                <a:spcPts val="300"/>
-              </a:spcBef>
-              <a:spcAft>
-                <a:spcPts val="300"/>
-              </a:spcAft>
-              <a:buNone/>
-            </a:pPr>
-            <a:r>
-              <a:rPr sz="1000" b="1">
-                <a:solidFill>
-                  <a:srgbClr val="000000"/>
-                </a:solidFill>
-                <a:latin typeface="맑은 고딕"/>
-                <a:ea typeface="맑은 고딕"/>
-              </a:rPr>
-              <a:t>허용</a:t>
-            </a:r>
-          </a:p>
           <a:p>
             <a:pPr lvl="2" marL="411480" indent="-137160">
               <a:spcBef>
@@ -20690,7 +21351,7 @@
                 <a:latin typeface="맑은 고딕"/>
                 <a:ea typeface="맑은 고딕"/>
               </a:rPr>
-              <a:t>order</a:t>
+              <a:t>DECLINED</a:t>
             </a:r>
             <a:r>
               <a:rPr sz="1000" b="0">
@@ -20700,7 +21361,7 @@
                 <a:latin typeface="맑은 고딕"/>
                 <a:ea typeface="맑은 고딕"/>
               </a:rPr>
-              <a:t> → </a:t>
+              <a:t>는 주문을 </a:t>
             </a:r>
             <a:r>
               <a:rPr sz="1000" b="0">
@@ -20710,7 +21371,7 @@
                 <a:latin typeface="맑은 고딕"/>
                 <a:ea typeface="맑은 고딕"/>
               </a:rPr>
-              <a:t>payment</a:t>
+              <a:t>PENDING_PAYMENT</a:t>
             </a:r>
             <a:r>
               <a:rPr sz="1000" b="0">
@@ -20720,37 +21381,7 @@
                 <a:latin typeface="맑은 고딕"/>
                 <a:ea typeface="맑은 고딕"/>
               </a:rPr>
-              <a:t>, </a:t>
-            </a:r>
-            <a:r>
-              <a:rPr sz="1000" b="0">
-                <a:solidFill>
-                  <a:srgbClr val="000000"/>
-                </a:solidFill>
-                <a:latin typeface="맑은 고딕"/>
-                <a:ea typeface="맑은 고딕"/>
-              </a:rPr>
-              <a:t>delivery</a:t>
-            </a:r>
-            <a:r>
-              <a:rPr sz="1000" b="0">
-                <a:solidFill>
-                  <a:srgbClr val="000000"/>
-                </a:solidFill>
-                <a:latin typeface="맑은 고딕"/>
-                <a:ea typeface="맑은 고딕"/>
-              </a:rPr>
-              <a:t>, </a:t>
-            </a:r>
-            <a:r>
-              <a:rPr sz="1000" b="0">
-                <a:solidFill>
-                  <a:srgbClr val="000000"/>
-                </a:solidFill>
-                <a:latin typeface="맑은 고딕"/>
-                <a:ea typeface="맑은 고딕"/>
-              </a:rPr>
-              <a:t>product</a:t>
+              <a:t>로 유지한다.</a:t>
             </a:r>
           </a:p>
           <a:p>
@@ -20773,7 +21404,7 @@
                 <a:latin typeface="맑은 고딕"/>
                 <a:ea typeface="맑은 고딕"/>
               </a:rPr>
-              <a:t>paymentadapter</a:t>
+              <a:t>UNCONFIRMED</a:t>
             </a:r>
             <a:r>
               <a:rPr sz="1000" b="0">
@@ -20783,27 +21414,7 @@
                 <a:latin typeface="맑은 고딕"/>
                 <a:ea typeface="맑은 고딕"/>
               </a:rPr>
-              <a:t> → </a:t>
-            </a:r>
-            <a:r>
-              <a:rPr sz="1000" b="0">
-                <a:solidFill>
-                  <a:srgbClr val="000000"/>
-                </a:solidFill>
-                <a:latin typeface="맑은 고딕"/>
-                <a:ea typeface="맑은 고딕"/>
-              </a:rPr>
-              <a:t>payment</a:t>
-            </a:r>
-            <a:r>
-              <a:rPr sz="1000" b="0">
-                <a:solidFill>
-                  <a:srgbClr val="000000"/>
-                </a:solidFill>
-                <a:latin typeface="맑은 고딕"/>
-                <a:ea typeface="맑은 고딕"/>
-              </a:rPr>
-              <a:t>, 외부 결제 라이브러리</a:t>
+              <a:t>는 승인 또는 거절로 해석하지 않는다.</a:t>
             </a:r>
           </a:p>
           <a:p>
@@ -20826,7 +21437,7 @@
                 <a:latin typeface="맑은 고딕"/>
                 <a:ea typeface="맑은 고딕"/>
               </a:rPr>
-              <a:t>deliveryadapter</a:t>
+              <a:t>APPROVED</a:t>
             </a:r>
             <a:r>
               <a:rPr sz="1000" b="0">
@@ -20836,7 +21447,7 @@
                 <a:latin typeface="맑은 고딕"/>
                 <a:ea typeface="맑은 고딕"/>
               </a:rPr>
-              <a:t> → </a:t>
+              <a:t>, </a:t>
             </a:r>
             <a:r>
               <a:rPr sz="1000" b="0">
@@ -20846,7 +21457,7 @@
                 <a:latin typeface="맑은 고딕"/>
                 <a:ea typeface="맑은 고딕"/>
               </a:rPr>
-              <a:t>delivery</a:t>
+              <a:t>DECLINED</a:t>
             </a:r>
             <a:r>
               <a:rPr sz="1000" b="0">
@@ -20856,7 +21467,47 @@
                 <a:latin typeface="맑은 고딕"/>
                 <a:ea typeface="맑은 고딕"/>
               </a:rPr>
-              <a:t>, 외부 배송 라이브러리</a:t>
+              <a:t>, </a:t>
+            </a:r>
+            <a:r>
+              <a:rPr sz="1000" b="0">
+                <a:solidFill>
+                  <a:srgbClr val="000000"/>
+                </a:solidFill>
+                <a:latin typeface="맑은 고딕"/>
+                <a:ea typeface="맑은 고딕"/>
+              </a:rPr>
+              <a:t>UNCONFIRMED</a:t>
+            </a:r>
+            <a:r>
+              <a:rPr sz="1000" b="0">
+                <a:solidFill>
+                  <a:srgbClr val="000000"/>
+                </a:solidFill>
+                <a:latin typeface="맑은 고딕"/>
+                <a:ea typeface="맑은 고딕"/>
+              </a:rPr>
+              <a:t>는 </a:t>
+            </a:r>
+            <a:r>
+              <a:rPr sz="1000" b="0">
+                <a:solidFill>
+                  <a:srgbClr val="000000"/>
+                </a:solidFill>
+                <a:latin typeface="맑은 고딕"/>
+                <a:ea typeface="맑은 고딕"/>
+              </a:rPr>
+              <a:t>payment</a:t>
+            </a:r>
+            <a:r>
+              <a:rPr sz="1000" b="0">
+                <a:solidFill>
+                  <a:srgbClr val="000000"/>
+                </a:solidFill>
+                <a:latin typeface="맑은 고딕"/>
+                <a:ea typeface="맑은 고딕"/>
+              </a:rPr>
+              <a:t>가 사용하는 결제 업무 결과이며 주문 상태가 아니다.</a:t>
             </a:r>
           </a:p>
           <a:p>
@@ -20879,7 +21530,7 @@
                 <a:latin typeface="맑은 고딕"/>
                 <a:ea typeface="맑은 고딕"/>
               </a:rPr>
-              <a:t>persistence</a:t>
+              <a:t>UNCONFIRMED</a:t>
             </a:r>
             <a:r>
               <a:rPr sz="1000" b="0">
@@ -20889,27 +21540,7 @@
                 <a:latin typeface="맑은 고딕"/>
                 <a:ea typeface="맑은 고딕"/>
               </a:rPr>
-              <a:t> → </a:t>
-            </a:r>
-            <a:r>
-              <a:rPr sz="1000" b="0">
-                <a:solidFill>
-                  <a:srgbClr val="000000"/>
-                </a:solidFill>
-                <a:latin typeface="맑은 고딕"/>
-                <a:ea typeface="맑은 고딕"/>
-              </a:rPr>
-              <a:t>order</a:t>
-            </a:r>
-            <a:r>
-              <a:rPr sz="1000" b="0">
-                <a:solidFill>
-                  <a:srgbClr val="000000"/>
-                </a:solidFill>
-                <a:latin typeface="맑은 고딕"/>
-                <a:ea typeface="맑은 고딕"/>
-              </a:rPr>
-              <a:t>, 데이터베이스 및 영속 기술 라이브러리</a:t>
+              <a:t>는 결제 응답을 확정할 수 없다는 업무 결과다.</a:t>
             </a:r>
           </a:p>
           <a:p>
@@ -20930,7 +21561,7 @@
                 <a:latin typeface="맑은 고딕"/>
                 <a:ea typeface="맑은 고딕"/>
               </a:rPr>
-              <a:t>검사 가능한 금지</a:t>
+              <a:t>정하지 않는 것</a:t>
             </a:r>
           </a:p>
           <a:p>
@@ -20953,147 +21584,7 @@
                 <a:latin typeface="맑은 고딕"/>
                 <a:ea typeface="맑은 고딕"/>
               </a:rPr>
-              <a:t>업무 패키지 </a:t>
-            </a:r>
-            <a:r>
-              <a:rPr sz="1000" b="0">
-                <a:solidFill>
-                  <a:srgbClr val="000000"/>
-                </a:solidFill>
-                <a:latin typeface="맑은 고딕"/>
-                <a:ea typeface="맑은 고딕"/>
-              </a:rPr>
-              <a:t>order</a:t>
-            </a:r>
-            <a:r>
-              <a:rPr sz="1000" b="0">
-                <a:solidFill>
-                  <a:srgbClr val="000000"/>
-                </a:solidFill>
-                <a:latin typeface="맑은 고딕"/>
-                <a:ea typeface="맑은 고딕"/>
-              </a:rPr>
-              <a:t>, </a:t>
-            </a:r>
-            <a:r>
-              <a:rPr sz="1000" b="0">
-                <a:solidFill>
-                  <a:srgbClr val="000000"/>
-                </a:solidFill>
-                <a:latin typeface="맑은 고딕"/>
-                <a:ea typeface="맑은 고딕"/>
-              </a:rPr>
-              <a:t>payment</a:t>
-            </a:r>
-            <a:r>
-              <a:rPr sz="1000" b="0">
-                <a:solidFill>
-                  <a:srgbClr val="000000"/>
-                </a:solidFill>
-                <a:latin typeface="맑은 고딕"/>
-                <a:ea typeface="맑은 고딕"/>
-              </a:rPr>
-              <a:t>, </a:t>
-            </a:r>
-            <a:r>
-              <a:rPr sz="1000" b="0">
-                <a:solidFill>
-                  <a:srgbClr val="000000"/>
-                </a:solidFill>
-                <a:latin typeface="맑은 고딕"/>
-                <a:ea typeface="맑은 고딕"/>
-              </a:rPr>
-              <a:t>delivery</a:t>
-            </a:r>
-            <a:r>
-              <a:rPr sz="1000" b="0">
-                <a:solidFill>
-                  <a:srgbClr val="000000"/>
-                </a:solidFill>
-                <a:latin typeface="맑은 고딕"/>
-                <a:ea typeface="맑은 고딕"/>
-              </a:rPr>
-              <a:t>, </a:t>
-            </a:r>
-            <a:r>
-              <a:rPr sz="1000" b="0">
-                <a:solidFill>
-                  <a:srgbClr val="000000"/>
-                </a:solidFill>
-                <a:latin typeface="맑은 고딕"/>
-                <a:ea typeface="맑은 고딕"/>
-              </a:rPr>
-              <a:t>product</a:t>
-            </a:r>
-            <a:r>
-              <a:rPr sz="1000" b="0">
-                <a:solidFill>
-                  <a:srgbClr val="000000"/>
-                </a:solidFill>
-                <a:latin typeface="맑은 고딕"/>
-                <a:ea typeface="맑은 고딕"/>
-              </a:rPr>
-              <a:t>에서 연동·영속 패키지 </a:t>
-            </a:r>
-            <a:r>
-              <a:rPr sz="1000" b="0">
-                <a:solidFill>
-                  <a:srgbClr val="000000"/>
-                </a:solidFill>
-                <a:latin typeface="맑은 고딕"/>
-                <a:ea typeface="맑은 고딕"/>
-              </a:rPr>
-              <a:t>paymentadapter</a:t>
-            </a:r>
-            <a:r>
-              <a:rPr sz="1000" b="0">
-                <a:solidFill>
-                  <a:srgbClr val="000000"/>
-                </a:solidFill>
-                <a:latin typeface="맑은 고딕"/>
-                <a:ea typeface="맑은 고딕"/>
-              </a:rPr>
-              <a:t>, </a:t>
-            </a:r>
-            <a:r>
-              <a:rPr sz="1000" b="0">
-                <a:solidFill>
-                  <a:srgbClr val="000000"/>
-                </a:solidFill>
-                <a:latin typeface="맑은 고딕"/>
-                <a:ea typeface="맑은 고딕"/>
-              </a:rPr>
-              <a:t>deliveryadapter</a:t>
-            </a:r>
-            <a:r>
-              <a:rPr sz="1000" b="0">
-                <a:solidFill>
-                  <a:srgbClr val="000000"/>
-                </a:solidFill>
-                <a:latin typeface="맑은 고딕"/>
-                <a:ea typeface="맑은 고딕"/>
-              </a:rPr>
-              <a:t>, </a:t>
-            </a:r>
-            <a:r>
-              <a:rPr sz="1000" b="0">
-                <a:solidFill>
-                  <a:srgbClr val="000000"/>
-                </a:solidFill>
-                <a:latin typeface="맑은 고딕"/>
-                <a:ea typeface="맑은 고딕"/>
-              </a:rPr>
-              <a:t>persistence</a:t>
-            </a:r>
-            <a:r>
-              <a:rPr sz="1000" b="0">
-                <a:solidFill>
-                  <a:srgbClr val="000000"/>
-                </a:solidFill>
-                <a:latin typeface="맑은 고딕"/>
-                <a:ea typeface="맑은 고딕"/>
-              </a:rPr>
-              <a:t>로 향하는 의존을 금지한다.</a:t>
+              <a:t>카드 원문 정보를 주문 도메인에 저장할지 정하지 않는다.</a:t>
             </a:r>
           </a:p>
           <a:p>
@@ -21116,27 +21607,7 @@
                 <a:latin typeface="맑은 고딕"/>
                 <a:ea typeface="맑은 고딕"/>
               </a:rPr>
-              <a:t>업무 패키지 사이에서는 허용 목록에 없는 의존을 금지한다. 따라서 순환 여부와 관계없이 </a:t>
-            </a:r>
-            <a:r>
-              <a:rPr sz="1000" b="0">
-                <a:solidFill>
-                  <a:srgbClr val="000000"/>
-                </a:solidFill>
-                <a:latin typeface="맑은 고딕"/>
-                <a:ea typeface="맑은 고딕"/>
-              </a:rPr>
-              <a:t>payment → delivery</a:t>
-            </a:r>
-            <a:r>
-              <a:rPr sz="1000" b="0">
-                <a:solidFill>
-                  <a:srgbClr val="000000"/>
-                </a:solidFill>
-                <a:latin typeface="맑은 고딕"/>
-                <a:ea typeface="맑은 고딕"/>
-              </a:rPr>
-              <a:t> 같은 의존은 금지한다.</a:t>
+              <a:t>외부 참조 값의 보존 여부를 정하지 않는다.</a:t>
             </a:r>
           </a:p>
           <a:p>
@@ -21159,28 +21630,7 @@
                 <a:latin typeface="맑은 고딕"/>
                 <a:ea typeface="맑은 고딕"/>
               </a:rPr>
-              <a:t>위 일곱 패키지 사이의 직·간접 의존 순환을 금지한다.</a:t>
-            </a:r>
-          </a:p>
-          <a:p>
-            <a:pPr marL="182880" indent="0">
-              <a:spcBef>
-                <a:spcPts val="300"/>
-              </a:spcBef>
-              <a:spcAft>
-                <a:spcPts val="300"/>
-              </a:spcAft>
-              <a:buNone/>
-            </a:pPr>
-            <a:r>
-              <a:rPr sz="1000" b="1">
-                <a:solidFill>
-                  <a:srgbClr val="000000"/>
-                </a:solidFill>
-                <a:latin typeface="맑은 고딕"/>
-                <a:ea typeface="맑은 고딕"/>
-              </a:rPr>
-              <a:t>검사로 판정하지 못하는 책임의 약속</a:t>
+              <a:t>중복 요청의 식별과 처리 계약을 정하지 않는다.</a:t>
             </a:r>
           </a:p>
           <a:p>
@@ -21203,7 +21653,7 @@
                 <a:latin typeface="맑은 고딕"/>
                 <a:ea typeface="맑은 고딕"/>
               </a:rPr>
-              <a:t>paymentadapter</a:t>
+              <a:t>UNCONFIRMED</a:t>
             </a:r>
             <a:r>
               <a:rPr sz="1000" b="0">
@@ -21213,7 +21663,7 @@
                 <a:latin typeface="맑은 고딕"/>
                 <a:ea typeface="맑은 고딕"/>
               </a:rPr>
-              <a:t>는 제공자 전문을 승인·거절·확정 불가로 변환하며, 제공자의 필드·참조 값·코드를 업무 패키지에 노출하지 않고 주문 상태를 변경하지 않는다.</a:t>
+              <a:t> 이후의 처리와 재결제 허용 여부를 정하지 않는다.</a:t>
             </a:r>
           </a:p>
           <a:p>
@@ -21236,1044 +21686,9 @@
                 <a:latin typeface="맑은 고딕"/>
                 <a:ea typeface="맑은 고딕"/>
               </a:rPr>
-              <a:t>deliveryadapter</a:t>
-            </a:r>
-            <a:r>
-              <a:rPr sz="1000" b="0">
-                <a:solidFill>
-                  <a:srgbClr val="000000"/>
-                </a:solidFill>
-                <a:latin typeface="맑은 고딕"/>
-                <a:ea typeface="맑은 고딕"/>
-              </a:rPr>
-              <a:t>는 업무의 배송 요청만 전달하며, 제공자의 필드·참조 값·코드를 노출하거나 독자적으로 배송 요청을 만들지 않는다.</a:t>
-            </a:r>
-          </a:p>
-          <a:p>
-            <a:pPr lvl="2" marL="411480" indent="-137160">
-              <a:spcBef>
-                <a:spcPts val="300"/>
-              </a:spcBef>
-              <a:spcAft>
-                <a:spcPts val="300"/>
-              </a:spcAft>
-              <a:buSzPct val="90000"/>
-              <a:buFont typeface="Wingdings" pitchFamily="2" charset="2"/>
-              <a:buChar char=""/>
-            </a:pPr>
-            <a:r>
-              <a:rPr sz="1000" b="0">
-                <a:solidFill>
-                  <a:srgbClr val="000000"/>
-                </a:solidFill>
-                <a:latin typeface="맑은 고딕"/>
-                <a:ea typeface="맑은 고딕"/>
-              </a:rPr>
-              <a:t>persistence</a:t>
-            </a:r>
-            <a:r>
-              <a:rPr sz="1000" b="0">
-                <a:solidFill>
-                  <a:srgbClr val="000000"/>
-                </a:solidFill>
-                <a:latin typeface="맑은 고딕"/>
-                <a:ea typeface="맑은 고딕"/>
-              </a:rPr>
-              <a:t>는 주문을 저장·조회할 뿐 주문 상태 전이나 주문 금액을 결정하지 않는다.</a:t>
-            </a:r>
-          </a:p>
-          <a:p>
-            <a:pPr lvl="2" marL="411480" indent="-137160">
-              <a:spcBef>
-                <a:spcPts val="300"/>
-              </a:spcBef>
-              <a:spcAft>
-                <a:spcPts val="300"/>
-              </a:spcAft>
-              <a:buSzPct val="90000"/>
-              <a:buFont typeface="Wingdings" pitchFamily="2" charset="2"/>
-              <a:buChar char=""/>
-            </a:pPr>
-            <a:r>
-              <a:rPr sz="1000" b="0">
-                <a:solidFill>
-                  <a:srgbClr val="000000"/>
-                </a:solidFill>
-                <a:latin typeface="맑은 고딕"/>
-                <a:ea typeface="맑은 고딕"/>
-              </a:rPr>
-              <a:t>product</a:t>
-            </a:r>
-            <a:r>
-              <a:rPr sz="1000" b="0">
-                <a:solidFill>
-                  <a:srgbClr val="000000"/>
-                </a:solidFill>
-                <a:latin typeface="맑은 고딕"/>
-                <a:ea typeface="맑은 고딕"/>
-              </a:rPr>
-              <a:t>와 이후 구현은 미정인 재고 판단 시점과 부족 처리 정책을 추가하지 않는다.</a:t>
-            </a:r>
-          </a:p>
-        </p:txBody>
-      </p:sp>
-      <p:sp>
-        <p:nvSpPr>
-          <p:cNvPr id="9" name="내용 개체 틀 7">
-            <a:extLst>
-              <a:ext uri="{FF2B5EF4-FFF2-40B4-BE49-F238E27FC236}">
-                <a16:creationId xmlns:a16="http://schemas.microsoft.com/office/drawing/2014/main" id="{BEBA2C4A-B0BF-F2E4-EA6E-614C99CBA184}"/>
-              </a:ext>
-            </a:extLst>
-          </p:cNvPr>
-          <p:cNvSpPr>
-            <a:spLocks noGrp="1"/>
-          </p:cNvSpPr>
-          <p:nvPr>
-            <p:ph idx="1"/>
-          </p:nvPr>
-        </p:nvSpPr>
-        <p:spPr>
-          <a:xfrm>
-            <a:off x="4572000" y="960120"/>
-            <a:ext cx="4439412" cy="5352345"/>
-          </a:xfrm>
-        </p:spPr>
-        <p:txBody>
-          <a:bodyPr>
-            <a:normAutofit/>
-          </a:bodyPr>
-          <a:lstStyle/>
-          <a:p>
-            <a:pPr lvl="2" marL="411480" indent="-137160">
-              <a:spcBef>
-                <a:spcPts val="300"/>
-              </a:spcBef>
-              <a:spcAft>
-                <a:spcPts val="300"/>
-              </a:spcAft>
-              <a:buSzPct val="90000"/>
-              <a:buFont typeface="Wingdings" pitchFamily="2" charset="2"/>
-              <a:buChar char=""/>
-            </a:pPr>
-            <a:r>
-              <a:rPr sz="1000" b="0">
-                <a:solidFill>
-                  <a:srgbClr val="000000"/>
-                </a:solidFill>
-                <a:latin typeface="맑은 고딕"/>
-                <a:ea typeface="맑은 고딕"/>
-              </a:rPr>
-              <a:t>어느 패키지도 미정인 만료, 결제 응답 미확정 후속 처리, 배송 실패·재시도 정책을 임의로 구현하지 않는다.</a:t>
-            </a:r>
-          </a:p>
-        </p:txBody>
-      </p:sp>
-    </p:spTree>
-    <p:extLst>
-      <p:ext uri="{BB962C8B-B14F-4D97-AF65-F5344CB8AC3E}">
-        <p14:creationId xmlns:p14="http://schemas.microsoft.com/office/powerpoint/2010/main" val="3555436673"/>
-      </p:ext>
-    </p:extLst>
-  </p:cSld>
-  <p:clrMapOvr>
-    <a:masterClrMapping/>
-  </p:clrMapOvr>
-</p:sld>
-</file>
-
-<file path=ppt/slides/slide28.xml><?xml version="1.0" encoding="utf-8"?>
-<p:sld xmlns:a="http://schemas.openxmlformats.org/drawingml/2006/main" xmlns:r="http://schemas.openxmlformats.org/officeDocument/2006/relationships" xmlns:p="http://schemas.openxmlformats.org/presentationml/2006/main">
-  <p:cSld>
-    <p:spTree>
-      <p:nvGrpSpPr>
-        <p:cNvPr id="1" name="">
-          <a:extLst>
-            <a:ext uri="{FF2B5EF4-FFF2-40B4-BE49-F238E27FC236}">
-              <a16:creationId xmlns:a16="http://schemas.microsoft.com/office/drawing/2014/main" id="{8E4F1F13-426B-086B-7D8C-9A58A0F879DB}"/>
-            </a:ext>
-          </a:extLst>
-        </p:cNvPr>
-        <p:cNvGrpSpPr/>
-        <p:nvPr/>
-      </p:nvGrpSpPr>
-      <p:grpSpPr>
-        <a:xfrm>
-          <a:off x="0" y="0"/>
-          <a:ext cx="0" cy="0"/>
-          <a:chOff x="0" y="0"/>
-          <a:chExt cx="0" cy="0"/>
-        </a:xfrm>
-      </p:grpSpPr>
-      <p:sp>
-        <p:nvSpPr>
-          <p:cNvPr id="2" name="제목 1">
-            <a:extLst>
-              <a:ext uri="{FF2B5EF4-FFF2-40B4-BE49-F238E27FC236}">
-                <a16:creationId xmlns:a16="http://schemas.microsoft.com/office/drawing/2014/main" id="{AA26A92D-924E-0575-9551-F8FD7BFD3FAD}"/>
-              </a:ext>
-            </a:extLst>
-          </p:cNvPr>
-          <p:cNvSpPr>
-            <a:spLocks noGrp="1"/>
-          </p:cNvSpPr>
-          <p:nvPr>
-            <p:ph type="title"/>
-          </p:nvPr>
-        </p:nvSpPr>
-        <p:spPr/>
-        <p:txBody>
-          <a:bodyPr/>
-          <a:lstStyle/>
-          <a:p>
-            <a:r>
-              <a:rPr sz="2400" b="1">
-                <a:solidFill>
-                  <a:srgbClr val="000000"/>
-                </a:solidFill>
-                <a:latin typeface="맑은 고딕"/>
-                <a:ea typeface="맑은 고딕"/>
-              </a:rPr>
-              <a:t>결제 포트 연동 규격</a:t>
-            </a:r>
-          </a:p>
-          <a:p>
-            <a:r>
-              <a:rPr sz="1100" b="1">
-                <a:solidFill>
-                  <a:srgbClr val="000000"/>
-                </a:solidFill>
-                <a:latin typeface="맑은 고딕"/>
-                <a:ea typeface="맑은 고딕"/>
-              </a:rPr>
-              <a:t>별첨. 실습 답</a:t>
-            </a:r>
-          </a:p>
-        </p:txBody>
-      </p:sp>
-      <p:sp>
-        <p:nvSpPr>
-          <p:cNvPr id="3" name="슬라이드 번호 개체 틀 2">
-            <a:extLst>
-              <a:ext uri="{FF2B5EF4-FFF2-40B4-BE49-F238E27FC236}">
-                <a16:creationId xmlns:a16="http://schemas.microsoft.com/office/drawing/2014/main" id="{12CF30EE-4DFD-8063-56B8-B8689E76DFCA}"/>
-              </a:ext>
-            </a:extLst>
-          </p:cNvPr>
-          <p:cNvSpPr>
-            <a:spLocks noGrp="1"/>
-          </p:cNvSpPr>
-          <p:nvPr>
-            <p:ph type="sldNum" sz="quarter" idx="10"/>
-          </p:nvPr>
-        </p:nvSpPr>
-        <p:spPr/>
-        <p:txBody>
-          <a:bodyPr/>
-          <a:lstStyle/>
-          <a:p>
-            <a:pPr>
-              <a:defRPr/>
-            </a:pPr>
-            <a:r>
-              <a:rPr lang="en-US" altLang="ko-KR">
-                <a:solidFill>
-                  <a:prstClr val="black"/>
-                </a:solidFill>
-              </a:rPr>
-              <a:t>- 28 -</a:t>
-            </a:r>
-          </a:p>
-        </p:txBody>
-      </p:sp>
-      <p:sp>
-        <p:nvSpPr>
-          <p:cNvPr id="5" name="텍스트 개체 틀 4">
-            <a:extLst>
-              <a:ext uri="{FF2B5EF4-FFF2-40B4-BE49-F238E27FC236}">
-                <a16:creationId xmlns:a16="http://schemas.microsoft.com/office/drawing/2014/main" id="{D66274C8-E16F-5AEB-614B-D8D32DA3E8C6}"/>
-              </a:ext>
-            </a:extLst>
-          </p:cNvPr>
-          <p:cNvSpPr>
-            <a:spLocks noGrp="1"/>
-          </p:cNvSpPr>
-          <p:nvPr>
-            <p:ph type="body" sz="quarter" idx="11"/>
-          </p:nvPr>
-        </p:nvSpPr>
-        <p:spPr/>
-        <p:txBody>
-          <a:bodyPr/>
-          <a:lstStyle/>
-          <a:p>
-            <a:r>
-              <a:rPr kumimoji="1" lang="en-US" altLang="ko-KR" sz="1400" dirty="0" err="1"/>
-              <a:t>별첨: 06. 아키텍처</a:t>
-            </a:r>
-          </a:p>
-        </p:txBody>
-      </p:sp>
-      <p:sp>
-        <p:nvSpPr>
-          <p:cNvPr id="6" name="텍스트 개체 틀 5">
-            <a:extLst>
-              <a:ext uri="{FF2B5EF4-FFF2-40B4-BE49-F238E27FC236}">
-                <a16:creationId xmlns:a16="http://schemas.microsoft.com/office/drawing/2014/main" id="{A24E58E1-194B-A320-AEEE-24D08685BB67}"/>
-              </a:ext>
-            </a:extLst>
-          </p:cNvPr>
-          <p:cNvSpPr>
-            <a:spLocks noGrp="1"/>
-          </p:cNvSpPr>
-          <p:nvPr>
-            <p:ph type="body" sz="quarter" idx="12"/>
-          </p:nvPr>
-        </p:nvSpPr>
-        <p:spPr/>
-        <p:txBody>
-          <a:bodyPr/>
-          <a:lstStyle/>
-          <a:p>
-            <a:endParaRPr kumimoji="1" lang="ko-KR" altLang="en-US" dirty="0"/>
-          </a:p>
-        </p:txBody>
-      </p:sp>
-      <p:sp>
-        <p:nvSpPr>
-          <p:cNvPr id="7" name="텍스트 개체 틀 6">
-            <a:extLst>
-              <a:ext uri="{FF2B5EF4-FFF2-40B4-BE49-F238E27FC236}">
-                <a16:creationId xmlns:a16="http://schemas.microsoft.com/office/drawing/2014/main" id="{A219F420-613B-6234-45F6-0955A9A4505F}"/>
-              </a:ext>
-            </a:extLst>
-          </p:cNvPr>
-          <p:cNvSpPr>
-            <a:spLocks noGrp="1"/>
-          </p:cNvSpPr>
-          <p:nvPr>
-            <p:ph type="body" sz="quarter" idx="13"/>
-          </p:nvPr>
-        </p:nvSpPr>
-        <p:spPr/>
-        <p:txBody>
-          <a:bodyPr/>
-          <a:lstStyle/>
-          <a:p>
-            <a:endParaRPr kumimoji="1" lang="en-US" altLang="ko-KR" dirty="0"/>
-          </a:p>
-        </p:txBody>
-      </p:sp>
-      <p:sp>
-        <p:nvSpPr>
-          <p:cNvPr id="8" name="내용 개체 틀 7">
-            <a:extLst>
-              <a:ext uri="{FF2B5EF4-FFF2-40B4-BE49-F238E27FC236}">
-                <a16:creationId xmlns:a16="http://schemas.microsoft.com/office/drawing/2014/main" id="{BEBA2C4A-B0BF-F2E4-EA6E-614C99CBA184}"/>
-              </a:ext>
-            </a:extLst>
-          </p:cNvPr>
-          <p:cNvSpPr>
-            <a:spLocks noGrp="1"/>
-          </p:cNvSpPr>
-          <p:nvPr>
-            <p:ph idx="1"/>
-          </p:nvPr>
-        </p:nvSpPr>
-        <p:spPr>
-          <a:xfrm>
-            <a:off x="233172" y="1404056"/>
-            <a:ext cx="4338828" cy="4908409"/>
-          </a:xfrm>
-        </p:spPr>
-        <p:txBody>
-          <a:bodyPr>
-            <a:normAutofit/>
-          </a:bodyPr>
-          <a:lstStyle/>
-          <a:p>
-            <a:pPr lvl="2" marL="411480" indent="-137160">
-              <a:spcBef>
-                <a:spcPts val="300"/>
-              </a:spcBef>
-              <a:spcAft>
-                <a:spcPts val="300"/>
-              </a:spcAft>
-              <a:buSzPct val="90000"/>
-              <a:buFont typeface="Wingdings" pitchFamily="2" charset="2"/>
-              <a:buChar char=""/>
-            </a:pPr>
-            <a:r>
-              <a:rPr sz="1000" b="1">
-                <a:solidFill>
-                  <a:srgbClr val="000000"/>
-                </a:solidFill>
-                <a:latin typeface="맑은 고딕"/>
-                <a:ea typeface="맑은 고딕"/>
-              </a:rPr>
-              <a:t>업무가 보냄:</a:t>
-            </a:r>
-            <a:r>
-              <a:rPr sz="1000" b="0">
-                <a:solidFill>
-                  <a:srgbClr val="000000"/>
-                </a:solidFill>
-                <a:latin typeface="맑은 고딕"/>
-                <a:ea typeface="맑은 고딕"/>
-              </a:rPr>
-              <a:t> </a:t>
-            </a:r>
-            <a:r>
-              <a:rPr sz="1000" b="0">
-                <a:solidFill>
-                  <a:srgbClr val="000000"/>
-                </a:solidFill>
-                <a:latin typeface="맑은 고딕"/>
-                <a:ea typeface="맑은 고딕"/>
-              </a:rPr>
-              <a:t>CardApprovalRequest(orderNumber, amount, cardApprovalData)</a:t>
-            </a:r>
-          </a:p>
-          <a:p>
-            <a:pPr lvl="2" marL="411480" indent="-137160">
-              <a:spcBef>
-                <a:spcPts val="300"/>
-              </a:spcBef>
-              <a:spcAft>
-                <a:spcPts val="300"/>
-              </a:spcAft>
-              <a:buSzPct val="90000"/>
-              <a:buFont typeface="Wingdings" pitchFamily="2" charset="2"/>
-              <a:buChar char=""/>
-            </a:pPr>
-            <a:r>
-              <a:rPr sz="1000" b="1">
-                <a:solidFill>
-                  <a:srgbClr val="000000"/>
-                </a:solidFill>
-                <a:latin typeface="맑은 고딕"/>
-                <a:ea typeface="맑은 고딕"/>
-              </a:rPr>
-              <a:t>업무가 받음:</a:t>
-            </a:r>
-            <a:r>
-              <a:rPr sz="1000" b="0">
-                <a:solidFill>
-                  <a:srgbClr val="000000"/>
-                </a:solidFill>
-                <a:latin typeface="맑은 고딕"/>
-                <a:ea typeface="맑은 고딕"/>
-              </a:rPr>
-              <a:t> </a:t>
-            </a:r>
-            <a:r>
-              <a:rPr sz="1000" b="0">
-                <a:solidFill>
-                  <a:srgbClr val="000000"/>
-                </a:solidFill>
-                <a:latin typeface="맑은 고딕"/>
-                <a:ea typeface="맑은 고딕"/>
-              </a:rPr>
-              <a:t>CardApprovalResult(APPROVED | DECLINED | UNCONFIRMED)</a:t>
-            </a:r>
-          </a:p>
-          <a:p>
-            <a:pPr marL="182880" indent="0">
-              <a:spcBef>
-                <a:spcPts val="300"/>
-              </a:spcBef>
-              <a:spcAft>
-                <a:spcPts val="300"/>
-              </a:spcAft>
-              <a:buNone/>
-            </a:pPr>
-            <a:r>
-              <a:rPr sz="1000" b="1">
-                <a:solidFill>
-                  <a:srgbClr val="000000"/>
-                </a:solidFill>
-                <a:latin typeface="맑은 고딕"/>
-                <a:ea typeface="맑은 고딕"/>
-              </a:rPr>
-              <a:t>필수 규칙</a:t>
-            </a:r>
-          </a:p>
-          <a:p>
-            <a:pPr lvl="2" marL="411480" indent="-137160">
-              <a:spcBef>
-                <a:spcPts val="300"/>
-              </a:spcBef>
-              <a:spcAft>
-                <a:spcPts val="300"/>
-              </a:spcAft>
-              <a:buSzPct val="90000"/>
-              <a:buFont typeface="Wingdings" pitchFamily="2" charset="2"/>
-              <a:buChar char=""/>
-            </a:pPr>
-            <a:r>
-              <a:rPr sz="1000" b="0">
-                <a:solidFill>
-                  <a:srgbClr val="000000"/>
-                </a:solidFill>
-                <a:latin typeface="맑은 고딕"/>
-                <a:ea typeface="맑은 고딕"/>
-              </a:rPr>
-              <a:t>amount</a:t>
-            </a:r>
-            <a:r>
-              <a:rPr sz="1000" b="0">
-                <a:solidFill>
-                  <a:srgbClr val="000000"/>
-                </a:solidFill>
-                <a:latin typeface="맑은 고딕"/>
-                <a:ea typeface="맑은 고딕"/>
-              </a:rPr>
-              <a:t>는 원 단위의 0 이상 정수이며 저장된 주문 총액과 같아야 한다.</a:t>
-            </a:r>
-          </a:p>
-          <a:p>
-            <a:pPr lvl="2" marL="411480" indent="-137160">
-              <a:spcBef>
-                <a:spcPts val="300"/>
-              </a:spcBef>
-              <a:spcAft>
-                <a:spcPts val="300"/>
-              </a:spcAft>
-              <a:buSzPct val="90000"/>
-              <a:buFont typeface="Wingdings" pitchFamily="2" charset="2"/>
-              <a:buChar char=""/>
-            </a:pPr>
-            <a:r>
-              <a:rPr sz="1000" b="0">
-                <a:solidFill>
-                  <a:srgbClr val="000000"/>
-                </a:solidFill>
-                <a:latin typeface="맑은 고딕"/>
-                <a:ea typeface="맑은 고딕"/>
-              </a:rPr>
-              <a:t>승인 시 현재 상품 판매가를 다시 조회하지 않는다.</a:t>
-            </a:r>
-          </a:p>
-          <a:p>
-            <a:pPr lvl="2" marL="411480" indent="-137160">
-              <a:spcBef>
-                <a:spcPts val="300"/>
-              </a:spcBef>
-              <a:spcAft>
-                <a:spcPts val="300"/>
-              </a:spcAft>
-              <a:buSzPct val="90000"/>
-              <a:buFont typeface="Wingdings" pitchFamily="2" charset="2"/>
-              <a:buChar char=""/>
-            </a:pPr>
-            <a:r>
-              <a:rPr sz="1000" b="0">
-                <a:solidFill>
-                  <a:srgbClr val="000000"/>
-                </a:solidFill>
-                <a:latin typeface="맑은 고딕"/>
-                <a:ea typeface="맑은 고딕"/>
-              </a:rPr>
-              <a:t>APPROVED</a:t>
-            </a:r>
-            <a:r>
-              <a:rPr sz="1000" b="0">
-                <a:solidFill>
-                  <a:srgbClr val="000000"/>
-                </a:solidFill>
-                <a:latin typeface="맑은 고딕"/>
-                <a:ea typeface="맑은 고딕"/>
-              </a:rPr>
-              <a:t>만 주문을 </a:t>
-            </a:r>
-            <a:r>
-              <a:rPr sz="1000" b="0">
-                <a:solidFill>
-                  <a:srgbClr val="000000"/>
-                </a:solidFill>
-                <a:latin typeface="맑은 고딕"/>
-                <a:ea typeface="맑은 고딕"/>
-              </a:rPr>
-              <a:t>PAID</a:t>
-            </a:r>
-            <a:r>
-              <a:rPr sz="1000" b="0">
-                <a:solidFill>
-                  <a:srgbClr val="000000"/>
-                </a:solidFill>
-                <a:latin typeface="맑은 고딕"/>
-                <a:ea typeface="맑은 고딕"/>
-              </a:rPr>
-              <a:t>로 전이시킨다.</a:t>
-            </a:r>
-          </a:p>
-          <a:p>
-            <a:pPr lvl="2" marL="411480" indent="-137160">
-              <a:spcBef>
-                <a:spcPts val="300"/>
-              </a:spcBef>
-              <a:spcAft>
-                <a:spcPts val="300"/>
-              </a:spcAft>
-              <a:buSzPct val="90000"/>
-              <a:buFont typeface="Wingdings" pitchFamily="2" charset="2"/>
-              <a:buChar char=""/>
-            </a:pPr>
-            <a:r>
-              <a:rPr sz="1000" b="0">
-                <a:solidFill>
-                  <a:srgbClr val="000000"/>
-                </a:solidFill>
-                <a:latin typeface="맑은 고딕"/>
-                <a:ea typeface="맑은 고딕"/>
-              </a:rPr>
-              <a:t>DECLINED</a:t>
-            </a:r>
-            <a:r>
-              <a:rPr sz="1000" b="0">
-                <a:solidFill>
-                  <a:srgbClr val="000000"/>
-                </a:solidFill>
-                <a:latin typeface="맑은 고딕"/>
-                <a:ea typeface="맑은 고딕"/>
-              </a:rPr>
-              <a:t>는 주문을 </a:t>
-            </a:r>
-            <a:r>
-              <a:rPr sz="1000" b="0">
-                <a:solidFill>
-                  <a:srgbClr val="000000"/>
-                </a:solidFill>
-                <a:latin typeface="맑은 고딕"/>
-                <a:ea typeface="맑은 고딕"/>
-              </a:rPr>
-              <a:t>PENDING_PAYMENT</a:t>
-            </a:r>
-            <a:r>
-              <a:rPr sz="1000" b="0">
-                <a:solidFill>
-                  <a:srgbClr val="000000"/>
-                </a:solidFill>
-                <a:latin typeface="맑은 고딕"/>
-                <a:ea typeface="맑은 고딕"/>
-              </a:rPr>
-              <a:t>로 유지한다.</a:t>
-            </a:r>
-          </a:p>
-          <a:p>
-            <a:pPr lvl="2" marL="411480" indent="-137160">
-              <a:spcBef>
-                <a:spcPts val="300"/>
-              </a:spcBef>
-              <a:spcAft>
-                <a:spcPts val="300"/>
-              </a:spcAft>
-              <a:buSzPct val="90000"/>
-              <a:buFont typeface="Wingdings" pitchFamily="2" charset="2"/>
-              <a:buChar char=""/>
-            </a:pPr>
-            <a:r>
-              <a:rPr sz="1000" b="0">
-                <a:solidFill>
-                  <a:srgbClr val="000000"/>
-                </a:solidFill>
-                <a:latin typeface="맑은 고딕"/>
-                <a:ea typeface="맑은 고딕"/>
-              </a:rPr>
-              <a:t>UNCONFIRMED</a:t>
-            </a:r>
-            <a:r>
-              <a:rPr sz="1000" b="0">
-                <a:solidFill>
-                  <a:srgbClr val="000000"/>
-                </a:solidFill>
-                <a:latin typeface="맑은 고딕"/>
-                <a:ea typeface="맑은 고딕"/>
-              </a:rPr>
-              <a:t>는 승인 또는 거절로 해석하지 않는다.</a:t>
-            </a:r>
-          </a:p>
-          <a:p>
-            <a:pPr lvl="2" marL="411480" indent="-137160">
-              <a:spcBef>
-                <a:spcPts val="300"/>
-              </a:spcBef>
-              <a:spcAft>
-                <a:spcPts val="300"/>
-              </a:spcAft>
-              <a:buSzPct val="90000"/>
-              <a:buFont typeface="Wingdings" pitchFamily="2" charset="2"/>
-              <a:buChar char=""/>
-            </a:pPr>
-            <a:r>
-              <a:rPr sz="1000" b="0">
-                <a:solidFill>
-                  <a:srgbClr val="000000"/>
-                </a:solidFill>
-                <a:latin typeface="맑은 고딕"/>
-                <a:ea typeface="맑은 고딕"/>
-              </a:rPr>
-              <a:t>APPROVED</a:t>
-            </a:r>
-            <a:r>
-              <a:rPr sz="1000" b="0">
-                <a:solidFill>
-                  <a:srgbClr val="000000"/>
-                </a:solidFill>
-                <a:latin typeface="맑은 고딕"/>
-                <a:ea typeface="맑은 고딕"/>
-              </a:rPr>
-              <a:t>, </a:t>
-            </a:r>
-            <a:r>
-              <a:rPr sz="1000" b="0">
-                <a:solidFill>
-                  <a:srgbClr val="000000"/>
-                </a:solidFill>
-                <a:latin typeface="맑은 고딕"/>
-                <a:ea typeface="맑은 고딕"/>
-              </a:rPr>
-              <a:t>DECLINED</a:t>
-            </a:r>
-            <a:r>
-              <a:rPr sz="1000" b="0">
-                <a:solidFill>
-                  <a:srgbClr val="000000"/>
-                </a:solidFill>
-                <a:latin typeface="맑은 고딕"/>
-                <a:ea typeface="맑은 고딕"/>
-              </a:rPr>
-              <a:t>, </a:t>
-            </a:r>
-            <a:r>
-              <a:rPr sz="1000" b="0">
-                <a:solidFill>
-                  <a:srgbClr val="000000"/>
-                </a:solidFill>
-                <a:latin typeface="맑은 고딕"/>
-                <a:ea typeface="맑은 고딕"/>
-              </a:rPr>
-              <a:t>UNCONFIRMED</a:t>
-            </a:r>
-            <a:r>
-              <a:rPr sz="1000" b="0">
-                <a:solidFill>
-                  <a:srgbClr val="000000"/>
-                </a:solidFill>
-                <a:latin typeface="맑은 고딕"/>
-                <a:ea typeface="맑은 고딕"/>
-              </a:rPr>
-              <a:t>는 </a:t>
-            </a:r>
-            <a:r>
-              <a:rPr sz="1000" b="0">
-                <a:solidFill>
-                  <a:srgbClr val="000000"/>
-                </a:solidFill>
-                <a:latin typeface="맑은 고딕"/>
-                <a:ea typeface="맑은 고딕"/>
-              </a:rPr>
-              <a:t>payment</a:t>
-            </a:r>
-            <a:r>
-              <a:rPr sz="1000" b="0">
-                <a:solidFill>
-                  <a:srgbClr val="000000"/>
-                </a:solidFill>
-                <a:latin typeface="맑은 고딕"/>
-                <a:ea typeface="맑은 고딕"/>
-              </a:rPr>
-              <a:t>가 사용하는 결제 업무 결과이며 주문 상태가 아니다.</a:t>
-            </a:r>
-          </a:p>
-          <a:p>
-            <a:pPr lvl="2" marL="411480" indent="-137160">
-              <a:spcBef>
-                <a:spcPts val="300"/>
-              </a:spcBef>
-              <a:spcAft>
-                <a:spcPts val="300"/>
-              </a:spcAft>
-              <a:buSzPct val="90000"/>
-              <a:buFont typeface="Wingdings" pitchFamily="2" charset="2"/>
-              <a:buChar char=""/>
-            </a:pPr>
-            <a:r>
-              <a:rPr sz="1000" b="0">
-                <a:solidFill>
-                  <a:srgbClr val="000000"/>
-                </a:solidFill>
-                <a:latin typeface="맑은 고딕"/>
-                <a:ea typeface="맑은 고딕"/>
-              </a:rPr>
-              <a:t>UNCONFIRMED</a:t>
-            </a:r>
-            <a:r>
-              <a:rPr sz="1000" b="0">
-                <a:solidFill>
-                  <a:srgbClr val="000000"/>
-                </a:solidFill>
-                <a:latin typeface="맑은 고딕"/>
-                <a:ea typeface="맑은 고딕"/>
-              </a:rPr>
-              <a:t>는 결제 응답을 확정할 수 없다는 업무 결과다.</a:t>
-            </a:r>
-          </a:p>
-          <a:p>
-            <a:pPr marL="182880" indent="0">
-              <a:spcBef>
-                <a:spcPts val="300"/>
-              </a:spcBef>
-              <a:spcAft>
-                <a:spcPts val="300"/>
-              </a:spcAft>
-              <a:buNone/>
-            </a:pPr>
-            <a:r>
-              <a:rPr sz="1000" b="1">
-                <a:solidFill>
-                  <a:srgbClr val="000000"/>
-                </a:solidFill>
-                <a:latin typeface="맑은 고딕"/>
-                <a:ea typeface="맑은 고딕"/>
-              </a:rPr>
-              <a:t>정하지 않는 것</a:t>
-            </a:r>
-          </a:p>
-          <a:p>
-            <a:pPr lvl="2" marL="411480" indent="-137160">
-              <a:spcBef>
-                <a:spcPts val="300"/>
-              </a:spcBef>
-              <a:spcAft>
-                <a:spcPts val="300"/>
-              </a:spcAft>
-              <a:buSzPct val="90000"/>
-              <a:buFont typeface="Wingdings" pitchFamily="2" charset="2"/>
-              <a:buChar char=""/>
-            </a:pPr>
-            <a:r>
-              <a:rPr sz="1000" b="0">
-                <a:solidFill>
-                  <a:srgbClr val="000000"/>
-                </a:solidFill>
-                <a:latin typeface="맑은 고딕"/>
-                <a:ea typeface="맑은 고딕"/>
-              </a:rPr>
-              <a:t>카드 원문 정보를 주문 도메인에 저장할지 정하지 않는다.</a:t>
-            </a:r>
-          </a:p>
-          <a:p>
-            <a:pPr lvl="2" marL="411480" indent="-137160">
-              <a:spcBef>
-                <a:spcPts val="300"/>
-              </a:spcBef>
-              <a:spcAft>
-                <a:spcPts val="300"/>
-              </a:spcAft>
-              <a:buSzPct val="90000"/>
-              <a:buFont typeface="Wingdings" pitchFamily="2" charset="2"/>
-              <a:buChar char=""/>
-            </a:pPr>
-            <a:r>
-              <a:rPr sz="1000" b="0">
-                <a:solidFill>
-                  <a:srgbClr val="000000"/>
-                </a:solidFill>
-                <a:latin typeface="맑은 고딕"/>
-                <a:ea typeface="맑은 고딕"/>
-              </a:rPr>
-              <a:t>외부 참조 값의 보존 여부를 정하지 않는다.</a:t>
-            </a:r>
-          </a:p>
-          <a:p>
-            <a:pPr lvl="2" marL="411480" indent="-137160">
-              <a:spcBef>
-                <a:spcPts val="300"/>
-              </a:spcBef>
-              <a:spcAft>
-                <a:spcPts val="300"/>
-              </a:spcAft>
-              <a:buSzPct val="90000"/>
-              <a:buFont typeface="Wingdings" pitchFamily="2" charset="2"/>
-              <a:buChar char=""/>
-            </a:pPr>
-            <a:r>
-              <a:rPr sz="1000" b="0">
-                <a:solidFill>
-                  <a:srgbClr val="000000"/>
-                </a:solidFill>
-                <a:latin typeface="맑은 고딕"/>
-                <a:ea typeface="맑은 고딕"/>
-              </a:rPr>
-              <a:t>중복 요청의 식별과 처리 계약을 정하지 않는다.</a:t>
-            </a:r>
-          </a:p>
-          <a:p>
-            <a:pPr lvl="2" marL="411480" indent="-137160">
-              <a:spcBef>
-                <a:spcPts val="300"/>
-              </a:spcBef>
-              <a:spcAft>
-                <a:spcPts val="300"/>
-              </a:spcAft>
-              <a:buSzPct val="90000"/>
-              <a:buFont typeface="Wingdings" pitchFamily="2" charset="2"/>
-              <a:buChar char=""/>
-            </a:pPr>
-            <a:r>
-              <a:rPr sz="1000" b="0">
-                <a:solidFill>
-                  <a:srgbClr val="000000"/>
-                </a:solidFill>
-                <a:latin typeface="맑은 고딕"/>
-                <a:ea typeface="맑은 고딕"/>
-              </a:rPr>
-              <a:t>UNCONFIRMED</a:t>
-            </a:r>
-            <a:r>
-              <a:rPr sz="1000" b="0">
-                <a:solidFill>
-                  <a:srgbClr val="000000"/>
-                </a:solidFill>
-                <a:latin typeface="맑은 고딕"/>
-                <a:ea typeface="맑은 고딕"/>
-              </a:rPr>
-              <a:t> 이후의 처리와 재결제 허용 여부를 정하지 않는다.</a:t>
-            </a:r>
-          </a:p>
-          <a:p>
-            <a:pPr lvl="2" marL="411480" indent="-137160">
-              <a:spcBef>
-                <a:spcPts val="300"/>
-              </a:spcBef>
-              <a:spcAft>
-                <a:spcPts val="300"/>
-              </a:spcAft>
-              <a:buSzPct val="90000"/>
-              <a:buFont typeface="Wingdings" pitchFamily="2" charset="2"/>
-              <a:buChar char=""/>
-            </a:pPr>
-            <a:r>
-              <a:rPr sz="1000" b="0">
-                <a:solidFill>
-                  <a:srgbClr val="000000"/>
-                </a:solidFill>
-                <a:latin typeface="맑은 고딕"/>
-                <a:ea typeface="맑은 고딕"/>
-              </a:rPr>
               <a:t>결제 시스템이 확정 불가 결과의 조회 기능을 제공하는지 정하지 않는다.</a:t>
             </a:r>
           </a:p>
-        </p:txBody>
-      </p:sp>
-      <p:sp>
-        <p:nvSpPr>
-          <p:cNvPr id="9" name="내용 개체 틀 7">
-            <a:extLst>
-              <a:ext uri="{FF2B5EF4-FFF2-40B4-BE49-F238E27FC236}">
-                <a16:creationId xmlns:a16="http://schemas.microsoft.com/office/drawing/2014/main" id="{BEBA2C4A-B0BF-F2E4-EA6E-614C99CBA184}"/>
-              </a:ext>
-            </a:extLst>
-          </p:cNvPr>
-          <p:cNvSpPr>
-            <a:spLocks noGrp="1"/>
-          </p:cNvSpPr>
-          <p:nvPr>
-            <p:ph idx="1"/>
-          </p:nvPr>
-        </p:nvSpPr>
-        <p:spPr>
-          <a:xfrm>
-            <a:off x="233172" y="960120"/>
-            <a:ext cx="8778240" cy="443936"/>
-          </a:xfrm>
-        </p:spPr>
-        <p:txBody>
-          <a:bodyPr>
-            <a:normAutofit/>
-          </a:bodyPr>
-          <a:lstStyle/>
-          <a:p>
-            <a:pPr marL="182880" indent="0">
-              <a:spcBef>
-                <a:spcPts val="300"/>
-              </a:spcBef>
-              <a:spcAft>
-                <a:spcPts val="300"/>
-              </a:spcAft>
-              <a:buNone/>
-            </a:pPr>
-            <a:r>
-              <a:rPr sz="1000" b="0">
-                <a:solidFill>
-                  <a:srgbClr val="000000"/>
-                </a:solidFill>
-                <a:latin typeface="맑은 고딕"/>
-                <a:ea typeface="맑은 고딕"/>
-              </a:rPr>
-              <a:t>PaymentGateway</a:t>
-            </a:r>
-            <a:r>
-              <a:rPr sz="1000" b="0">
-                <a:solidFill>
-                  <a:srgbClr val="000000"/>
-                </a:solidFill>
-                <a:latin typeface="맑은 고딕"/>
-                <a:ea typeface="맑은 고딕"/>
-              </a:rPr>
-              <a:t>에는 업무의 말만 둔다. 전송 방식과 결제 제공자의 전문·필드·참조 값·코드는 확정하지 않으며 </a:t>
-            </a:r>
-            <a:r>
-              <a:rPr sz="1000" b="0">
-                <a:solidFill>
-                  <a:srgbClr val="000000"/>
-                </a:solidFill>
-                <a:latin typeface="맑은 고딕"/>
-                <a:ea typeface="맑은 고딕"/>
-              </a:rPr>
-              <a:t>paymentadapter</a:t>
-            </a:r>
-            <a:r>
-              <a:rPr sz="1000" b="0">
-                <a:solidFill>
-                  <a:srgbClr val="000000"/>
-                </a:solidFill>
-                <a:latin typeface="맑은 고딕"/>
-                <a:ea typeface="맑은 고딕"/>
-              </a:rPr>
-              <a:t>가 변환한다.</a:t>
-            </a:r>
-          </a:p>
-        </p:txBody>
-      </p:sp>
-      <p:sp>
-        <p:nvSpPr>
-          <p:cNvPr id="10" name="내용 개체 틀 7">
-            <a:extLst>
-              <a:ext uri="{FF2B5EF4-FFF2-40B4-BE49-F238E27FC236}">
-                <a16:creationId xmlns:a16="http://schemas.microsoft.com/office/drawing/2014/main" id="{BEBA2C4A-B0BF-F2E4-EA6E-614C99CBA184}"/>
-              </a:ext>
-            </a:extLst>
-          </p:cNvPr>
-          <p:cNvSpPr>
-            <a:spLocks noGrp="1"/>
-          </p:cNvSpPr>
-          <p:nvPr>
-            <p:ph idx="1"/>
-          </p:nvPr>
-        </p:nvSpPr>
-        <p:spPr>
-          <a:xfrm>
-            <a:off x="4572000" y="1404056"/>
-            <a:ext cx="4439412" cy="4908409"/>
-          </a:xfrm>
-        </p:spPr>
-        <p:txBody>
-          <a:bodyPr>
-            <a:normAutofit/>
-          </a:bodyPr>
-          <a:lstStyle/>
           <a:p>
             <a:pPr lvl="2" marL="411480" indent="-137160">
               <a:spcBef>
@@ -26042,6 +25457,140 @@
                 <a:ea typeface="맑은 고딕"/>
               </a:rPr>
               <a:t> 업무가 외부를 직접 부르면 외부가 업무를 정한다. 추상을 업무 쪽에 두고 방향을 뒤집는다.</a:t>
+            </a:r>
+          </a:p>
+          <a:p>
+            <a:pPr lvl="2" marL="723900" indent="-368300">
+              <a:spcBef>
+                <a:spcPts val="600"/>
+              </a:spcBef>
+              <a:spcAft>
+                <a:spcPts val="600"/>
+              </a:spcAft>
+              <a:buSzPct val="90000"/>
+              <a:buFont typeface="Wingdings" pitchFamily="2" charset="2"/>
+              <a:buChar char=""/>
+            </a:pPr>
+            <a:r>
+              <a:rPr sz="1800" b="0">
+                <a:solidFill>
+                  <a:srgbClr val="000000"/>
+                </a:solidFill>
+                <a:latin typeface="맑은 고딕"/>
+                <a:ea typeface="맑은 고딕"/>
+              </a:rPr>
+              <a:t>뒤의 둘은 </a:t>
+            </a:r>
+            <a:r>
+              <a:rPr sz="1800" b="1">
+                <a:solidFill>
+                  <a:srgbClr val="000000"/>
+                </a:solidFill>
+                <a:latin typeface="맑은 고딕"/>
+                <a:ea typeface="맑은 고딕"/>
+              </a:rPr>
+              <a:t>SOLID 다섯 원칙</a:t>
+            </a:r>
+            <a:r>
+              <a:rPr sz="1800" b="0">
+                <a:solidFill>
+                  <a:srgbClr val="000000"/>
+                </a:solidFill>
+                <a:latin typeface="맑은 고딕"/>
+                <a:ea typeface="맑은 고딕"/>
+              </a:rPr>
+              <a:t>의 단일 책임 원칙과 의존성 역전 원칙이다. 여기서는 </a:t>
+            </a:r>
+            <a:r>
+              <a:rPr sz="1800" b="1">
+                <a:solidFill>
+                  <a:srgbClr val="000000"/>
+                </a:solidFill>
+                <a:latin typeface="맑은 고딕"/>
+                <a:ea typeface="맑은 고딕"/>
+              </a:rPr>
+              <a:t>패키지 경계</a:t>
+            </a:r>
+            <a:r>
+              <a:rPr sz="1800" b="0">
+                <a:solidFill>
+                  <a:srgbClr val="000000"/>
+                </a:solidFill>
+                <a:latin typeface="맑은 고딕"/>
+                <a:ea typeface="맑은 고딕"/>
+              </a:rPr>
+              <a:t>의 근거로 쓰고, 다섯 전체를 </a:t>
+            </a:r>
+            <a:r>
+              <a:rPr sz="1800" b="1">
+                <a:solidFill>
+                  <a:srgbClr val="000000"/>
+                </a:solidFill>
+                <a:latin typeface="맑은 고딕"/>
+                <a:ea typeface="맑은 고딕"/>
+              </a:rPr>
+              <a:t>객체와 인터페이스</a:t>
+            </a:r>
+            <a:r>
+              <a:rPr sz="1800" b="0">
+                <a:solidFill>
+                  <a:srgbClr val="000000"/>
+                </a:solidFill>
+                <a:latin typeface="맑은 고딕"/>
+                <a:ea typeface="맑은 고딕"/>
+              </a:rPr>
+              <a:t>의 근거로 쓰는 것은 "세션 07. 설계 —</a:t>
+            </a:r>
+            <a:r>
+              <a:rPr sz="1600" b="0">
+                <a:solidFill>
+                  <a:srgbClr val="000000"/>
+                </a:solidFill>
+                <a:latin typeface="맑은 고딕"/>
+                <a:ea typeface="맑은 고딕"/>
+              </a:rPr>
+              <a:t> 책임과 협력"이다.</a:t>
+            </a:r>
+          </a:p>
+        </p:txBody>
+      </p:sp>
+      <p:sp>
+        <p:nvSpPr>
+          <p:cNvPr id="9" name="TextBox 12">
+            <a:extLst>
+              <a:ext uri="{FF2B5EF4-FFF2-40B4-BE49-F238E27FC236}">
+                <a16:creationId xmlns:a16="http://schemas.microsoft.com/office/drawing/2014/main" id="{654EDDB4-901F-3D48-A715-17D163E8A7AC}"/>
+              </a:ext>
+            </a:extLst>
+          </p:cNvPr>
+          <p:cNvSpPr txBox="1"/>
+          <p:nvPr/>
+        </p:nvSpPr>
+        <p:spPr>
+          <a:xfrm>
+            <a:off x="365760" y="6065577"/>
+            <a:ext cx="8412480" cy="347472"/>
+          </a:xfrm>
+          <a:prstGeom prst="rect">
+            <a:avLst/>
+          </a:prstGeom>
+          <a:noFill/>
+        </p:spPr>
+        <p:txBody>
+          <a:bodyPr wrap="square" anchor="b">
+            <a:spAutoFit/>
+          </a:bodyPr>
+          <a:lstStyle/>
+          <a:p>
+            <a:r>
+              <a:rPr sz="800" b="0">
+                <a:solidFill>
+                  <a:srgbClr val="000000"/>
+                </a:solidFill>
+                <a:latin typeface="맑은 고딕"/>
+                <a:ea typeface="맑은 고딕"/>
+              </a:rPr>
+              <a:t>SOLID — Single Responsibility · Open-Closed · Liskov Substitution · Interface Segregation · Dependency Inversion</a:t>
             </a:r>
           </a:p>
         </p:txBody>

--- a/courses/ai-native/sessions/s06.pptx
+++ b/courses/ai-native/sessions/s06.pptx
@@ -1185,7 +1185,7 @@
             <a:pPr lvl="0"/>
             <a:r>
               <a:rPr lang="ko-KR" sz="1200"/>
-              <a:t>되돌린 셋은 별첨의 실제 실행에서 나온 것이다(「09. 실습 — 아키텍처」의 강사 노트).</a:t>
+              <a:t>되돌린 셋은 별첨의 실제 실행에서 나온 것이다(「09. 실습 6 — 아키텍처」의 강사 노트).</a:t>
             </a:r>
           </a:p>
           <a:p>
@@ -1574,6 +1574,13 @@
             <a:pPr lvl="0"/>
             <a:r>
               <a:rPr lang="ko-KR" sz="1200"/>
+              <a:t>모델에서 보완된 것 — 외부 시스템과 주고받는 이름이 용어집과 맞춰진다.</a:t>
+            </a:r>
+          </a:p>
+          <a:p>
+            <a:pPr lvl="0"/>
+            <a:r>
+              <a:rPr lang="ko-KR" sz="1200"/>
               <a:t>이 세션이 남긴 의존 규칙은 "세션 09. 검사 파이프라인"의 검사 항목이 되고, 패키지 경계는 "세션 07. 설계 — 책임과 협력"에서 객체의 책임이 놓일 범위가 된다.</a:t>
             </a:r>
           </a:p>
@@ -1666,6 +1673,491 @@
               <a:t>업무 패키지에서 연동·영속으로 가는 화살표가 하나도 없는 것이 의존 규칙의 금지와 같은 말이다. 외부 제공자와 저장소는 패키지가 아니므로 패키지 바깥에 둔다.</a:t>
             </a:r>
           </a:p>
+          <a:p>
+            <a:pPr lvl="0"/>
+            <a:r>
+              <a:rPr lang="ko-KR" sz="1200"/>
+              <a:t>실제로 실행한 프롬프트 — 아래가 이 별첨을 만든 입력이다. 본문 실습의 ①~⑤는 수강생용 문구이고, 실제 실행은 앞 응답을 읽고 답한 내용이 붙어 길다. ①은 앞 실습의 최종 MD 셋을 통째로 붙여 22KB이고 ⑤도 SVG 원본이 붙어 길다. 노트에는 앞머리까지만 싣으므로 그대로 재현하려면 code/s06/exercise-conversation/order/prompt-01.txt~prompt-05.txt를 그 파일 그대로 입력으로 쓴다. ①에 붙인 세 파일은 같은 폴더의 input-s03.md·input-s04.md·input-s05.md(실습 3·4·5의 최종 MD)이며 앞 실습의 원본과 바이트 단위로 같다.</a:t>
+            </a:r>
+          </a:p>
+          <a:p>
+            <a:pPr lvl="1"/>
+            <a:r>
+              <a:rPr lang="ko-KR" sz="1200"/>
+              <a:t>1. 실제 프롬프트 1</a:t>
+            </a:r>
+          </a:p>
+          <a:p>
+            <a:pPr lvl="0">
+              <a:buNone/>
+            </a:pPr>
+            <a:r>
+              <a:rPr lang="ko-KR" sz="1200"/>
+              <a:t>    실습 3의 요구사항 정의서와 실습 4의 정적 관점, 실습 5의 동적 관점을 읽고, 이 사례에 맞는 아키텍처를 제안해라. 계층형·포트와 어댑터·모듈러 모놀리스·마이크로서비스를 비교하고 무엇을 근거로 골랐는지 밝혀라. 배포·조직·변경 중 어느 것을 근거로 삼았는지 분명히 해라. 업무 패키지와 포트의 배치, 허용과 금지를 적은 의존 규칙, 외부 시스템과 주고받는 연동 규격을 함께 제안해라. 패키지 다이어그램은 Mermaid로 보여 주고 같은 내용을 목록으로 읽을 수 있게 해라. 근거 없는 정책은 확정하지 말고 질문해라. 앞 실습이 미정으로 남긴 것은 해결하려 하지 마라.</a:t>
+            </a:r>
+          </a:p>
+          <a:p>
+            <a:pPr lvl="0">
+              <a:buNone/>
+            </a:pPr>
+            <a:r>
+              <a:rPr lang="ko-KR" sz="1200"/>
+              <a:t>    [실습 3 실제 최종 MD] # “주문한다” 요구사항 정의서</a:t>
+            </a:r>
+          </a:p>
+          <a:p>
+            <a:pPr lvl="0">
+              <a:buNone/>
+            </a:pPr>
+            <a:r>
+              <a:rPr lang="ko-KR" sz="1200"/>
+              <a:t>    고객이 장바구니의 상품과 수량을 바탕으로 배송지를 지정하고, 카드 승인을 받아 주문을 성립시킨 뒤 그 결과를 확인할 때까지의 요구사항과 수용 기준을 정의한다.</a:t>
+            </a:r>
+          </a:p>
+          <a:p>
+            <a:pPr lvl="0">
+              <a:buNone/>
+            </a:pPr>
+            <a:r>
+              <a:rPr lang="ko-KR" sz="1200"/>
+              <a:t>    ## 목적과 범위</a:t>
+            </a:r>
+          </a:p>
+          <a:p>
+            <a:pPr lvl="2"/>
+            <a:r>
+              <a:rPr lang="ko-KR" sz="1200"/>
+              <a:t>상품 조회와 장바구니 구성은 전제다.</a:t>
+            </a:r>
+          </a:p>
+          <a:p>
+            <a:pPr lvl="2"/>
+            <a:r>
+              <a:rPr lang="ko-KR" sz="1200"/>
+              <a:t>상세 범위는 공통 흐름 3~5단계인 배송지 지정, 결제, 주문 결과 확인이다.</a:t>
+            </a:r>
+          </a:p>
+          <a:p>
+            <a:pPr lvl="2"/>
+            <a:r>
+              <a:rPr lang="ko-KR" sz="1200"/>
+              <a:t>상품·결제·배송 시스템은 외부 시스템으로 연계하며 내부 기능은 재구현하지 않는다.</a:t>
+            </a:r>
+          </a:p>
+          <a:p>
+            <a:pPr lvl="0">
+              <a:buNone/>
+            </a:pPr>
+            <a:r>
+              <a:rPr lang="ko-KR" sz="1200"/>
+              <a:t>    ## 사용자 이야기</a:t>
+            </a:r>
+          </a:p>
+          <a:p>
+            <a:pPr lvl="0">
+              <a:buNone/>
+            </a:pPr>
+            <a:r>
+              <a:rPr lang="ko-KR" sz="1200"/>
+              <a:t>    고객으로서 장바구니의 상품과 수량을 기준으로 배송지를 지정하고 카드 승인을 받아 주문을 성립시킨 뒤 그 결과를 확인하고 싶다.</a:t>
+            </a:r>
+          </a:p>
+          <a:p>
+            <a:pPr lvl="0">
+              <a:buNone/>
+            </a:pPr>
+            <a:r>
+              <a:rPr lang="ko-KR" sz="1200"/>
+              <a:t>    ## 핵심 기능과 업무 규칙</a:t>
+            </a:r>
+          </a:p>
+          <a:p>
+            <a:pPr lvl="2"/>
+            <a:r>
+              <a:rPr lang="ko-KR" sz="1200"/>
+              <a:t>배송지를 지정하면 주문 생성 시점의 판매가로 주문 금액을 확정하고 결제대기 주문을 생성한다.</a:t>
+            </a:r>
+          </a:p>
+          <a:p>
+            <a:pPr lvl="2"/>
+            <a:r>
+              <a:rPr lang="ko-KR" sz="1200"/>
+              <a:t>주문자와 수령인은 같은 사람으로 본다.</a:t>
+            </a:r>
+          </a:p>
+          <a:p>
+            <a:pPr lvl="2"/>
+            <a:r>
+              <a:rPr lang="ko-KR" sz="1200"/>
+              <a:t>주문 금액은 각 주문 항목의 주문 생성 시점 판매가에 수량을 곱하여 합한 금액이다.</a:t>
+            </a:r>
+          </a:p>
+          <a:p>
+            <a:pPr lvl="2"/>
+            <a:r>
+              <a:rPr lang="ko-KR" sz="1200"/>
+              <a:t>주문 생성 뒤 판매가가 변경되어도 주문 금액과 카드 승인 요청 금액은 바뀌지 않는다.</a:t>
+            </a:r>
+          </a:p>
+          <a:p>
+            <a:pPr lvl="2"/>
+            <a:r>
+              <a:rPr lang="ko-KR" sz="1200"/>
+              <a:t>결제대기 주문의 상품·수량·배송지는 변경할 수 없다. 변경하려면 새 주문을 생성한다.</a:t>
+            </a:r>
+          </a:p>
+          <a:p>
+            <a:pPr lvl="2"/>
+            <a:r>
+              <a:rPr lang="ko-KR" sz="1200"/>
+              <a:t>결제 수단은 카드만 허용한다.</a:t>
+            </a:r>
+          </a:p>
+          <a:p>
+            <a:pPr lvl="2"/>
+            <a:r>
+              <a:rPr lang="ko-KR" sz="1200"/>
+              <a:t>카드 승인이 거절되면 같은 주문을 결제대기로 유지하며 다른 카드로 재결제할 수 있다.</a:t>
+            </a:r>
+          </a:p>
+          <a:p>
+            <a:pPr lvl="2"/>
+            <a:r>
+              <a:rPr lang="ko-KR" sz="1200"/>
+              <a:t>카드 승인이 완료되면 같은 주문이 성립하고 상태가 결제완료가 된다.</a:t>
+            </a:r>
+          </a:p>
+          <a:p>
+            <a:pPr lvl="2"/>
+            <a:r>
+              <a:rPr lang="ko-KR" sz="1200"/>
+              <a:t>배송 요청은 카드 승인 완료 뒤 해당 주문의 확정된 배송지로 보낸다.</a:t>
+            </a:r>
+          </a:p>
+          <a:p>
+            <a:pPr lvl="2"/>
+            <a:r>
+              <a:rPr lang="ko-KR" sz="1200"/>
+              <a:t>주문 쪽에서 재고를 별도로 확보하지 않고 상품 시스템의 판단을 따른다.</a:t>
+            </a:r>
+          </a:p>
+          <a:p>
+            <a:pPr lvl="2"/>
+            <a:r>
+              <a:rPr lang="ko-KR" sz="1200"/>
+              <a:t>결제 응답을 확정할 수 없으면 승인 또는 거절로 간주하지 않는다.</a:t>
+            </a:r>
+          </a:p>
+          <a:p>
+            <a:pPr lvl="2"/>
+            <a:r>
+              <a:rPr lang="ko-KR" sz="1200"/>
+              <a:t>본인 주문에 대해서만 조회 또는 변경 요청의 권한을 인정한다. 권한이 있더라도 실제 변경 가능 여부에는 주문 상태와 업무 규칙을 적용한다.</a:t>
+            </a:r>
+          </a:p>
+          <a:p>
+            <a:pPr lvl="2"/>
+            <a:r>
+              <a:rPr lang="ko-KR" sz="1200"/>
+              <a:t>다른 고객의 주문에 대한 조회·변경 요청은 거절한다.</a:t>
+            </a:r>
+          </a:p>
+          <a:p>
+            <a:pPr lvl="0">
+              <a:buNone/>
+            </a:pPr>
+            <a:r>
+              <a:rPr lang="ko-KR" sz="1200"/>
+              <a:t>    ## 기본 용어집</a:t>
+            </a:r>
+          </a:p>
+          <a:p>
+            <a:pPr lvl="2"/>
+            <a:r>
+              <a:rPr lang="ko-KR" sz="1200"/>
+              <a:t>주문(Order): 배송지가 지정되어 생성된 거래 기록</a:t>
+            </a:r>
+          </a:p>
+          <a:p>
+            <a:pPr lvl="2"/>
+            <a:r>
+              <a:rPr lang="ko-KR" sz="1200"/>
+              <a:t>주문 항목(OrderItem): 주문에 포함된 상품, 수량 및 주문 생성 시점의 판매가</a:t>
+            </a:r>
+          </a:p>
+          <a:p>
+            <a:pPr lvl="2"/>
+            <a:r>
+              <a:rPr lang="ko-KR" sz="1200"/>
+              <a:t>판매가(salePrice): 상품 시스템이 제공하는 상품 가격</a:t>
+            </a:r>
+          </a:p>
+          <a:p>
+            <a:pPr lvl="2"/>
+            <a:r>
+              <a:rPr lang="ko-KR" sz="1200"/>
+              <a:t>주문 금액(totalAmount): 각 주문 항목의 주문 생성 시점 판매가에 수량을 곱하여 합한 금액</a:t>
+            </a:r>
+          </a:p>
+          <a:p>
+            <a:pPr lvl="2"/>
+            <a:r>
+              <a:rPr lang="ko-KR" sz="1200"/>
+              <a:t>주문 생성: 배송지 지정에 따라 주문이 기록되고 결제대기가 되는 것</a:t>
+            </a:r>
+          </a:p>
+          <a:p>
+            <a:pPr lvl="2"/>
+            <a:r>
+              <a:rPr lang="ko-KR" sz="1200"/>
+              <a:t>결제대기(PENDING_PAYMENT): 주문은 생성됐지만 카드 승인이 완료되지 않은 상태</a:t>
+            </a:r>
+          </a:p>
+          <a:p>
+            <a:pPr lvl="2"/>
+            <a:r>
+              <a:rPr lang="ko-KR" sz="1200"/>
+              <a:t>주문 성립: 카드 승인이 완료되어 같은 주문이 결제완료가 되는 것</a:t>
+            </a:r>
+          </a:p>
+          <a:p>
+            <a:pPr lvl="2"/>
+            <a:r>
+              <a:rPr lang="ko-KR" sz="1200"/>
+              <a:t>결제완료(PAID): 카드 승인이 완료되어 주문이 성립한 상태</a:t>
+            </a:r>
+          </a:p>
+          <a:p>
+            <a:pPr lvl="2"/>
+            <a:r>
+              <a:rPr lang="ko-KR" sz="1200"/>
+              <a:t>주문 결과 확인: 카드 승인 응답에 따른 주문 상태와 결과를 확인하는 것</a:t>
+            </a:r>
+          </a:p>
+          <a:p>
+            <a:pPr lvl="0">
+              <a:buNone/>
+            </a:pPr>
+            <a:r>
+              <a:rPr lang="ko-KR" sz="1200"/>
+              <a:t>    ## 공통 흐름</a:t>
+            </a:r>
+          </a:p>
+          <a:p>
+            <a:pPr lvl="2"/>
+            <a:r>
+              <a:rPr lang="ko-KR" sz="1200"/>
+              <a:t>1. 상품 조회 — 전제: 고객이 상품을 조회한다.</a:t>
+            </a:r>
+          </a:p>
+          <a:p>
+            <a:pPr lvl="2"/>
+            <a:r>
+              <a:rPr lang="ko-KR" sz="1200"/>
+              <a:t>2. 장바구니 — 전제: 고객이 상품과 수량을 장바구니에 담는다.</a:t>
+            </a:r>
+          </a:p>
+          <a:p>
+            <a:pPr lvl="0">
+              <a:buNone/>
+            </a:pPr>
+            <a:r>
+              <a:rPr lang="ko-KR" sz="1200"/>
+              <a:t>    ⟨이하 생략 — input-s03.md·input-s04.md·input-s05.md의 전문이 이어진다. 이 프롬프트의 전문은 prompt-01.txt에 있다⟩</a:t>
+            </a:r>
+          </a:p>
+          <a:p>
+            <a:pPr lvl="1"/>
+            <a:r>
+              <a:rPr lang="ko-KR" sz="1200"/>
+              <a:t>2. 실제 프롬프트 2</a:t>
+            </a:r>
+          </a:p>
+          <a:p>
+            <a:pPr lvl="0">
+              <a:buNone/>
+            </a:pPr>
+            <a:r>
+              <a:rPr lang="ko-KR" sz="1200"/>
+              <a:t>    스타일 비교와 미정을 질문으로 되돌린 것은 받아들인다. 다만 경계와 포트의 배치를 고쳐야 한다.</a:t>
+            </a:r>
+          </a:p>
+          <a:p>
+            <a:pPr lvl="2"/>
+            <a:r>
+              <a:rPr lang="ko-KR" sz="1200"/>
+              <a:t>1. 패키지 이름을 기술 역할이 아니라 업무로 지어라. adapter.in·application.service·application.port.out·bootstrap은 기술 역할이다. 실습 4의 용어집에 있는 업무 이름을 쓰고, 연동과 영속은 그 대상별로 나눠라 — 업무는 order·payment·delivery·product, 연동은 paymentadapter·deliveryadapter, 영속은 persistence다.</a:t>
+            </a:r>
+          </a:p>
+          <a:p>
+            <a:pPr lvl="2"/>
+            <a:r>
+              <a:rPr lang="ko-KR" sz="1200"/>
+              <a:t>2. 입력 포트와 유스케이스 인터페이스는 두지 마라. 지금 필요한 것은 업무가 외부를 부르는 쪽, 즉 출력 포트뿐이다. 호출자가 들어오는 쪽은 이 과제의 범위가 아니다.</a:t>
+            </a:r>
+          </a:p>
+          <a:p>
+            <a:pPr lvl="2"/>
+            <a:r>
+              <a:rPr lang="ko-KR" sz="1200"/>
+              <a:t>3. 포트를 한 모듈에 몰지 마라. 업무 패키지가 각자 자기 포트를 소유해야 한다 — 결제 승인 포트는 payment에, 배송 요청 포트는 delivery에, 판매가 조회 포트는 product에, 주문 저장 포트는 order에 둔다. 연동과 영속이 그 포트를 구현한다.</a:t>
+            </a:r>
+          </a:p>
+          <a:p>
+            <a:pPr lvl="2"/>
+            <a:r>
+              <a:rPr lang="ko-KR" sz="1200"/>
+              <a:t>4. 그 배치로 패키지 다이어그램과 의존 규칙을 다시 써라. 금지는 검사가 판정할 수 있게 패키지 이름으로 적어라.</a:t>
+            </a:r>
+          </a:p>
+          <a:p>
+            <a:pPr lvl="0">
+              <a:buNone/>
+            </a:pPr>
+            <a:r>
+              <a:rPr lang="ko-KR" sz="1200"/>
+              <a:t>    연동 규격의 내용과 미정 열두 개는 그대로 유지해라. 새 정책을 만들지 마라.</a:t>
+            </a:r>
+          </a:p>
+          <a:p>
+            <a:pPr lvl="1"/>
+            <a:r>
+              <a:rPr lang="ko-KR" sz="1200"/>
+              <a:t>3. 실제 프롬프트 3</a:t>
+            </a:r>
+          </a:p>
+          <a:p>
+            <a:pPr lvl="0">
+              <a:buNone/>
+            </a:pPr>
+            <a:r>
+              <a:rPr lang="ko-KR" sz="1200"/>
+              <a:t>    포트 배치와 패키지 이름은 받아들인다. 의존 규칙을 고쳐야 한다.</a:t>
+            </a:r>
+          </a:p>
+          <a:p>
+            <a:pPr lvl="2"/>
+            <a:r>
+              <a:rPr lang="ko-KR" sz="1200"/>
+              <a:t>1. 패키지 순환 금지가 빠졌다. 더해라. 순환이 있으면 두 패키지를 따로 바꿀 수도 따로 검증할 수도 없다.</a:t>
+            </a:r>
+          </a:p>
+          <a:p>
+            <a:pPr lvl="2"/>
+            <a:r>
+              <a:rPr lang="ko-KR" sz="1200"/>
+              <a:t>2. 금지 목록이 쌍마다 나열되어 길다. 검사가 판정할 수 있는 최소한으로 줄여라. 업무 패키지에서 연동·영속으로 가는 의존과 패키지 사이의 순환, 이 둘이 검사가 볼 금지다. 업무 패키지끼리의 참조는 허용 목록의 반대로 읽히므로 따로 적지 마라. "주문 상태를 직접 변경하지 않는다" 같은 책임에 관한 금지는 검사가 판정하지 못하므로 의존 규칙이 아니라 책임의 약속으로 따로 묶어라.</a:t>
+            </a:r>
+          </a:p>
+          <a:p>
+            <a:pPr lvl="2"/>
+            <a:r>
+              <a:rPr lang="ko-KR" sz="1200"/>
+              <a:t>3. 상품 시스템 연동 구현은 이번 범위 밖으로 둔다. product는 포트를 선언만 하고 구현 패키지는 만들지 않는다는 것을 적어라.</a:t>
+            </a:r>
+          </a:p>
+          <a:p>
+            <a:pPr lvl="2"/>
+            <a:r>
+              <a:rPr lang="ko-KR" sz="1200"/>
+              <a:t>4. 패키지 다이어그램에서 연동·영속이 업무의 포트를 구현한다는 화살표가 업무 쪽을 향하도록 그려라. 지금 도식은 어댑터에서 포트로 가는 간선이 보이지 않는다.</a:t>
+            </a:r>
+          </a:p>
+          <a:p>
+            <a:pPr lvl="0">
+              <a:buNone/>
+            </a:pPr>
+            <a:r>
+              <a:rPr lang="ko-KR" sz="1200"/>
+              <a:t>    연동 규격과 미정은 그대로 유지해라.</a:t>
+            </a:r>
+          </a:p>
+          <a:p>
+            <a:pPr lvl="1"/>
+            <a:r>
+              <a:rPr lang="ko-KR" sz="1200"/>
+              <a:t>4. 실제 프롬프트 4</a:t>
+            </a:r>
+          </a:p>
+          <a:p>
+            <a:pPr lvl="0">
+              <a:buNone/>
+            </a:pPr>
+            <a:r>
+              <a:rPr lang="ko-KR" sz="1200"/>
+              <a:t>    의존 규칙과 도식은 받아들인다. 연동 규격을 한 번 더 보자.</a:t>
+            </a:r>
+          </a:p>
+          <a:p>
+            <a:pPr lvl="0">
+              <a:buNone/>
+            </a:pPr>
+            <a:r>
+              <a:rPr lang="ko-KR" sz="1200"/>
+              <a:t>    규격에 currencyOrUnit, requestReference, externalApprovalReference, declineInformation, acceptanceResult, externalDeliveryReference 같은 필드가 들어 있다. 이것들은 제공자가 정하는 전문의 형식이지 업무가 주고받는 말이 아니다. 업무 쪽에서 보내는 것과 받는 것만 남기고, 제공자의 필드 이름·참조 값·코드 체계는 연동 안의 일로 돌려라. 금액은 원 단위 정수라는 업무 규칙이 이미 있으므로 단위 필드를 따로 두지 마라.</a:t>
+            </a:r>
+          </a:p>
+          <a:p>
+            <a:pPr lvl="0">
+              <a:buNone/>
+            </a:pPr>
+            <a:r>
+              <a:rPr lang="ko-KR" sz="1200"/>
+              <a:t>    승인·거절·확정 불가 셋을 업무의 결과로 두는 것은 맞다. 그 셋이 업무의 말이고, 그것을 무엇으로 받아 오는지는 연동이 정한다.</a:t>
+            </a:r>
+          </a:p>
+          <a:p>
+            <a:pPr lvl="0">
+              <a:buNone/>
+            </a:pPr>
+            <a:r>
+              <a:rPr lang="ko-KR" sz="1200"/>
+              <a:t>    나머지는 그대로 두고, 품질 기준과 결정이 필요한 질문도 유지해라.</a:t>
+            </a:r>
+          </a:p>
+          <a:p>
+            <a:pPr lvl="1"/>
+            <a:r>
+              <a:rPr lang="ko-KR" sz="1200"/>
+              <a:t>5. 실제 프롬프트 5</a:t>
+            </a:r>
+          </a:p>
+          <a:p>
+            <a:pPr lvl="0">
+              <a:buNone/>
+            </a:pPr>
+            <a:r>
+              <a:rPr lang="ko-KR" sz="1200"/>
+              <a:t>    「패키지 다이어그램 — 포트의 구현」 그림을 앞 그림과 같은 방식으로 바꿔 다시 생성해라. 업무 경계 그림은 패키지를 탭 달린 사각형으로, 클래스를 그 안의 상자로 그리는데, 포트 구현 그림만 Mermaid라 두 그림의 표기가 다르다.</a:t>
+            </a:r>
+          </a:p>
+          <a:p>
+            <a:pPr lvl="0">
+              <a:buNone/>
+            </a:pPr>
+            <a:r>
+              <a:rPr lang="ko-KR" sz="1200"/>
+              <a:t>    아래 SVG를 그대로 그 자리에 넣어라. 요소와 관계는 지금 응답과 같다 — 업무 패키지 셋과 각자의 포트, 연동·영속 패키지 셋과 그 클래스, 외부 제공자 둘과 저장소 하나, 그리고 구현·통신 관계다. 노드나 관계를 더하거나 빼지 마라.</a:t>
+            </a:r>
+          </a:p>
+          <a:p>
+            <a:pPr lvl="0">
+              <a:buNone/>
+            </a:pPr>
+            <a:r>
+              <a:rPr lang="ko-KR" sz="1200"/>
+              <a:t>    문서의 다른 절(스타일과 근거, 업무 경계 그림, 패키지별 배치, 의존 규칙, 결제 포트 연동 규격)은 바꾸지 마라. 범례 문장도 그대로 두되, 외부 제공자와 저장소를 구분해 표시했다는 설명은 유지해라.</a:t>
+            </a:r>
+          </a:p>
+          <a:p>
+            <a:pPr lvl="0">
+              <a:buNone/>
+            </a:pPr>
+            <a:r>
+              <a:rPr lang="ko-KR" sz="1200"/>
+              <a:t>    svg:uml &lt;svg xmlns="http://www.w3.org/2000/svg" width="960" height="430" viewBox="0 0 960 430"&gt; &lt;defs&gt;&lt;marker id="dependency" markerWidth="9" markerHeight="9" refX="8" refY="4.5" orient="auto"&gt;&lt;path d="M1,1 L8,4.5 L1,8" fill="none" stroke="#222" stroke-width="1.3"/&gt;&lt;/marker&gt;&lt;/defs&gt; &lt;rect width="960" height="430" fill="white"/&gt; &lt;path d="M10,27 V5 H125 V27 H300 V130 H10 Z" fill="#fafafa" stroke="#555" stroke-width="1.5"/&gt; &lt;text x="20" y="21" font-family="Arial" font-size="14" font-weight="bold"&gt;payment&lt;/text&gt; &lt;rect x="25" y="47" width="260" height="44" fill="#eee" stroke="#777"/&gt; &lt;text x="155" y="64" text-anchor="middle" font-family="Arial" font-size="14"&gt;«port»&lt;/text&gt; &lt;text x="155" y="82" text-anchor="middle" font-family="Arial" font-size="14" font-weight="bold"&gt;PaymentGateway&lt;/text&gt; &lt;path d="M360,27 V5 H475 V27 H650 V130 H360 Z" fill="#fafafa" stroke="#555" stroke-width="1.5"/&gt; &lt;text x="370" y="21" font-family="Arial" font-size="14" font-weight="bold"&gt;paymentadapter&lt;/text&gt; &lt;rect x="375" y="47" width="260" height="44" fill="#eee" stroke="#777"/&gt; &lt;text x="505" y="74" text-anchor="middle" font-family="Arial" font-size="14" font-weight="bold"&gt;PaymentAdapter&lt;/text&gt; &lt;rect x="710" y="47" width="240" height="44" fill="#eee" stroke="#777"/&gt; &lt;text x="830" y="64" text-anchor="middle" font-family="Arial" font-size="14"&gt;«system»&lt;/text&gt; ⟨이하 생략 — 저자가 준 SVG 원본이 이어진다. 이 프롬프트의 전문은 prompt-05.txt에 있다⟩</a:t>
+            </a:r>
+          </a:p>
         </p:txBody>
       </p:sp>
     </p:spTree>
@@ -2106,7 +2598,7 @@
             <a:pPr lvl="0"/>
             <a:r>
               <a:rPr lang="ko-KR" sz="1200"/>
-              <a:t>넷째 줄은 패키지 의존 검사로 잡히지 않는다. 「05. 의존 규칙」의 「허용과 금지」에서 검사가 보는 것과 못 보는 것을 가른다.</a:t>
+              <a:t>넷째 줄은 패키지 의존 검사로 잡히지 않는다. 「05. 의존 규칙」의 「허용과 금지」에서 검사가 보는 것과 못 보는 것을 구분한다.</a:t>
             </a:r>
           </a:p>
         </p:txBody>
@@ -3613,7 +4105,7 @@
                 <a:latin typeface="맑은 고딕"/>
                 <a:ea typeface="맑은 고딕"/>
               </a:rPr>
-              <a:t>09. 실습 —</a:t>
+              <a:t>09. 실습 6 —</a:t>
             </a:r>
             <a:r>
               <a:rPr sz="1400" b="0">
@@ -14734,7 +15226,7 @@
                 <a:latin typeface="맑은 고딕"/>
                 <a:ea typeface="맑은 고딕"/>
               </a:rPr>
-              <a:t>으로 경계를 가르는 근거를 댄다.</a:t>
+              <a:t>으로 경계를 나누는 근거를 댄다.</a:t>
             </a:r>
           </a:p>
           <a:p>
@@ -16240,7 +16732,7 @@
                 <a:latin typeface="맑은 고딕"/>
                 <a:ea typeface="맑은 고딕"/>
               </a:rPr>
-              <a:t>09. 실습 — 아키텍처</a:t>
+              <a:t>09. 실습 6 — 아키텍처</a:t>
             </a:r>
           </a:p>
         </p:txBody>
@@ -16403,27 +16895,7 @@
                 <a:latin typeface="맑은 고딕"/>
                 <a:ea typeface="맑은 고딕"/>
               </a:rPr>
-              <a:t>앞선 요구와 모델을 LLM에 제공하고, </a:t>
-            </a:r>
-            <a:r>
-              <a:rPr sz="1200" b="1">
-                <a:solidFill>
-                  <a:srgbClr val="000000"/>
-                </a:solidFill>
-                <a:latin typeface="맑은 고딕"/>
-                <a:ea typeface="맑은 고딕"/>
-              </a:rPr>
-              <a:t>아키텍처 결정</a:t>
-            </a:r>
-            <a:r>
-              <a:rPr sz="1200" b="0">
-                <a:solidFill>
-                  <a:srgbClr val="000000"/>
-                </a:solidFill>
-                <a:latin typeface="맑은 고딕"/>
-                <a:ea typeface="맑은 고딕"/>
-              </a:rPr>
-              <a:t>을 검토·보완해 최종 MD로 남긴다. 스타일은 강의에서 정한 것을 쓰고, 판단은 </a:t>
+              <a:t>스타일은 강의에서 정한 것을 쓰고, 판단은 </a:t>
             </a:r>
             <a:r>
               <a:rPr sz="1200" b="1">
@@ -17058,7 +17530,37 @@
               <a:buNone/>
             </a:pPr>
             <a:r>
-              <a:rPr sz="1000" b="1">
+              <a:rPr sz="1000" b="0">
+                <a:solidFill>
+                  <a:srgbClr val="000000"/>
+                </a:solidFill>
+                <a:latin typeface="맑은 고딕"/>
+                <a:ea typeface="맑은 고딕"/>
+              </a:rPr>
+              <a:t>주문한다-아키텍처결정.md</a:t>
+            </a:r>
+            <a:r>
+              <a:rPr sz="1000" b="0">
+                <a:solidFill>
+                  <a:srgbClr val="000000"/>
+                </a:solidFill>
+                <a:latin typeface="맑은 고딕"/>
+                <a:ea typeface="맑은 고딕"/>
+              </a:rPr>
+              <a:t> —</a:t>
+            </a:r>
+            <a:r>
+              <a:rPr sz="800" b="0">
+                <a:solidFill>
+                  <a:srgbClr val="000000"/>
+                </a:solidFill>
+                <a:latin typeface="맑은 고딕"/>
+                <a:ea typeface="맑은 고딕"/>
+              </a:rPr>
+              <a:t> </a:t>
+            </a:r>
+            <a:r>
+              <a:rPr sz="800" b="1">
                 <a:solidFill>
                   <a:srgbClr val="000000"/>
                 </a:solidFill>
@@ -17075,20 +17577,10 @@
                 <a:latin typeface="맑은 고딕"/>
                 <a:ea typeface="맑은 고딕"/>
               </a:rPr>
-              <a:t>(경계와 포트)</a:t>
-            </a:r>
-            <a:r>
-              <a:rPr sz="1000" b="0">
-                <a:solidFill>
-                  <a:srgbClr val="000000"/>
-                </a:solidFill>
-                <a:latin typeface="맑은 고딕"/>
-                <a:ea typeface="맑은 고딕"/>
-              </a:rPr>
-              <a:t>, </a:t>
-            </a:r>
-            <a:r>
-              <a:rPr sz="1000" b="1">
+              <a:t>·</a:t>
+            </a:r>
+            <a:r>
+              <a:rPr sz="800" b="1">
                 <a:solidFill>
                   <a:srgbClr val="000000"/>
                 </a:solidFill>
@@ -17105,20 +17597,10 @@
                 <a:latin typeface="맑은 고딕"/>
                 <a:ea typeface="맑은 고딕"/>
               </a:rPr>
-              <a:t>(허용·금지·책임의 약속)</a:t>
-            </a:r>
-            <a:r>
-              <a:rPr sz="1000" b="0">
-                <a:solidFill>
-                  <a:srgbClr val="000000"/>
-                </a:solidFill>
-                <a:latin typeface="맑은 고딕"/>
-                <a:ea typeface="맑은 고딕"/>
-              </a:rPr>
-              <a:t>, </a:t>
-            </a:r>
-            <a:r>
-              <a:rPr sz="1000" b="1">
+              <a:t>·</a:t>
+            </a:r>
+            <a:r>
+              <a:rPr sz="800" b="1">
                 <a:solidFill>
                   <a:srgbClr val="000000"/>
                 </a:solidFill>
@@ -17128,17 +17610,17 @@
               <a:t>결제 포트의 연동 규격</a:t>
             </a:r>
             <a:r>
-              <a:rPr sz="1000" b="0">
-                <a:solidFill>
-                  <a:srgbClr val="000000"/>
-                </a:solidFill>
-                <a:latin typeface="맑은 고딕"/>
-                <a:ea typeface="맑은 고딕"/>
-              </a:rPr>
-              <a:t> 셋을 담은 최종 MD를 저장소의 </a:t>
-            </a:r>
-            <a:r>
-              <a:rPr sz="1000" b="0">
+              <a:rPr sz="800" b="0">
+                <a:solidFill>
+                  <a:srgbClr val="000000"/>
+                </a:solidFill>
+                <a:latin typeface="맑은 고딕"/>
+                <a:ea typeface="맑은 고딕"/>
+              </a:rPr>
+              <a:t> 셋을 담아 저장소의 </a:t>
+            </a:r>
+            <a:r>
+              <a:rPr sz="800" b="0">
                 <a:solidFill>
                   <a:srgbClr val="000000"/>
                 </a:solidFill>
@@ -17148,14 +17630,34 @@
               <a:t>docs</a:t>
             </a:r>
             <a:r>
-              <a:rPr sz="1000" b="0">
-                <a:solidFill>
-                  <a:srgbClr val="000000"/>
-                </a:solidFill>
-                <a:latin typeface="맑은 고딕"/>
-                <a:ea typeface="맑은 고딕"/>
-              </a:rPr>
-              <a:t>에 두고 커밋한다. 배송·상품 포트의 규격은 같은 방법이므로 만들지 않는다. 실습 7에 요구·정적·동적 관점과 함께 첨부한다.</a:t>
+              <a:rPr sz="800" b="0">
+                <a:solidFill>
+                  <a:srgbClr val="000000"/>
+                </a:solidFill>
+                <a:latin typeface="맑은 고딕"/>
+                <a:ea typeface="맑은 고딕"/>
+              </a:rPr>
+              <a:t>에 두고 커밋한다. </a:t>
+            </a:r>
+            <a:r>
+              <a:rPr sz="800" b="1">
+                <a:solidFill>
+                  <a:srgbClr val="000000"/>
+                </a:solidFill>
+                <a:latin typeface="맑은 고딕"/>
+                <a:ea typeface="맑은 고딕"/>
+              </a:rPr>
+              <a:t>실습 7의 투입물</a:t>
+            </a:r>
+            <a:r>
+              <a:rPr sz="800" b="0">
+                <a:solidFill>
+                  <a:srgbClr val="000000"/>
+                </a:solidFill>
+                <a:latin typeface="맑은 고딕"/>
+                <a:ea typeface="맑은 고딕"/>
+              </a:rPr>
+              <a:t>이다</a:t>
             </a:r>
           </a:p>
         </p:txBody>
@@ -25234,7 +25736,7 @@
                 <a:latin typeface="맑은 고딕"/>
                 <a:ea typeface="맑은 고딕"/>
               </a:rPr>
-              <a:t>가를지</a:t>
+              <a:t>나눌지</a:t>
             </a:r>
             <a:r>
               <a:rPr sz="1600" b="0">
@@ -25413,7 +25915,7 @@
                 <a:latin typeface="맑은 고딕"/>
                 <a:ea typeface="맑은 고딕"/>
               </a:rPr>
-              <a:t> 바뀌는 이유가 다르면 가른다. 업무 규칙은 업무가, 제공자의 전문은 제공자가 바꾸라고 한다.</a:t>
+              <a:t> 바뀌는 이유가 다르면 나눈다. 업무 규칙은 업무가, 제공자의 전문은 제공자가 바꾸라고 한다.</a:t>
             </a:r>
           </a:p>
           <a:p>
@@ -27170,7 +27672,7 @@
                 <a:latin typeface="맑은 고딕"/>
                 <a:ea typeface="맑은 고딕"/>
               </a:rPr>
-              <a:t>이다. 업무 규칙을 고칠 때와 제공자 전문을 고칠 때 같은 패키지를 연다면 가를 자리가 있다.</a:t>
+              <a:t>이다. 업무 규칙을 고칠 때와 제공자 전문을 고칠 때 같은 패키지를 연다면 나눌 자리가 있다.</a:t>
             </a:r>
           </a:p>
         </p:txBody>
@@ -28802,7 +29304,7 @@
                 <a:latin typeface="맑은 고딕"/>
                 <a:ea typeface="맑은 고딕"/>
               </a:rPr>
-              <a:t>로 가른다.</a:t>
+              <a:t>로 구분한다.</a:t>
             </a:r>
           </a:p>
           <a:p>

--- a/courses/ai-native/sessions/s06.pptx
+++ b/courses/ai-native/sessions/s06.pptx
@@ -871,7 +871,7 @@
             <a:pPr lvl="0"/>
             <a:r>
               <a:rPr lang="ko-KR" sz="1200"/>
-              <a:t>표의 마지막 두 줄이 「06. 검증하기 쉬운 구조」의 「규칙 위반을 검사하기」에서 말하는 검사의 한계다. 프레임워크 설정으로 연동을 주입하는 코드가 여기에 해당한다.</a:t>
+              <a:t>표의 마지막 2줄이 「06. 검증하기 쉬운 구조」의 「규칙 위반을 검사하기」에서 말하는 검사의 한계다. 프레임워크 설정으로 연동을 주입하는 코드가 여기에 해당한다.</a:t>
             </a:r>
           </a:p>
         </p:txBody>
@@ -1014,7 +1014,7 @@
             <a:pPr lvl="0"/>
             <a:r>
               <a:rPr lang="ko-KR" sz="1200"/>
-              <a:t>Cockburn의 "자동화된 테스트에서도 똑같이 구동된다"가 여기서 실현된다(「02. 아키텍처가 정하는 것」의 「이 과정이 쓰는 것」). 확인하는 것은 업무 규칙이지 제공자와의 통신이 아니다.</a:t>
+              <a:t>Cockburn의 "자동화된 테스트에서도 똑같이 구동된다"가 여기서 실현된다(「02. 아키텍처가 정하는 것」의 「이 과정이 사용하는 것」). 확인하는 것은 업무 규칙이지 제공자와의 통신이 아니다.</a:t>
             </a:r>
           </a:p>
           <a:p>
@@ -1471,7 +1471,7 @@
             <a:pPr lvl="0"/>
             <a:r>
               <a:rPr lang="ko-KR" sz="1200"/>
-              <a:t>별첨은 실제 LLM 최종 응답 전체다. 입력·응답·근거는 code/s06/exercise-conversation/order에 있다. ①~⑤ 다섯 단계 뒤 최종화 보완 아홉 회를 포함해 성공한 실제 실행은 총 14회다. 수강생의 필수 횟수가 아니며 실습 소요 시간은 아직 계측하지 않았다.</a:t>
+              <a:t>별첨은 실제 LLM 최종 응답 전체다. 입력·응답·근거는 code/s06/exercise-conversation/order에 있다. ①~⑤ 5단계 뒤 최종화 보완 아홉 회를 포함해 성공한 실제 실행은 총 14회다. 수강생의 필수 횟수가 아니며 실습 소요 시간은 아직 계측하지 않았다.</a:t>
             </a:r>
           </a:p>
           <a:p>
@@ -2016,7 +2016,7 @@
             </a:pPr>
             <a:r>
               <a:rPr lang="ko-KR" sz="1200"/>
-              <a:t>    연동 규격의 내용과 미정 열두 개는 그대로 유지해라. 새 정책을 만들지 마라.</a:t>
+              <a:t>    연동 규격의 내용과 미정 12개는 그대로 유지해라. 새 정책을 만들지 마라.</a:t>
             </a:r>
           </a:p>
           <a:p>
@@ -2448,7 +2448,7 @@
             <a:pPr lvl="0"/>
             <a:r>
               <a:rPr lang="ko-KR" sz="1200"/>
-              <a:t>네 원칙은 "세션 07. 설계 — 책임과 협력"에서 객체의 책임을 판단할 때 다시 나온다. 여기서는 패키지 경계의 근거로만 쓴다.</a:t>
+              <a:t>4원칙은 "세션 07. 설계 — 책임과 협력"에서 객체의 책임을 판단할 때 다시 나온다. 여기서는 패키지 경계의 근거로만 쓴다.</a:t>
             </a:r>
           </a:p>
           <a:p>
@@ -6492,7 +6492,7 @@
                       </a:r>
                     </a:p>
                   </a:txBody>
-                  <a:tcPr marL="6750" marR="6750" marT="6750" marB="0" anchor="ctr">
+                  <a:tcPr marL="6750" marR="6750" marT="6750" marB="6750" anchor="ctr">
                     <a:lnL>
                       <a:noFill/>
                     </a:lnL>
@@ -6554,7 +6554,7 @@
                       </a:r>
                     </a:p>
                   </a:txBody>
-                  <a:tcPr marL="6750" marR="6750" marT="6750" marB="0" anchor="ctr">
+                  <a:tcPr marL="6750" marR="6750" marT="6750" marB="6750" anchor="ctr">
                     <a:lnL w="9525" cap="flat" cmpd="sng" algn="ctr">
                       <a:solidFill>
                         <a:schemeClr val="bg1">
@@ -6624,7 +6624,7 @@
                       </a:r>
                     </a:p>
                   </a:txBody>
-                  <a:tcPr marL="6750" marR="6750" marT="6750" marB="0" anchor="ctr">
+                  <a:tcPr marL="6750" marR="6750" marT="6750" marB="6750" anchor="ctr">
                     <a:lnL w="9525" cap="flat" cmpd="sng" algn="ctr">
                       <a:solidFill>
                         <a:schemeClr val="bg1">
@@ -6694,7 +6694,7 @@
                       </a:r>
                     </a:p>
                   </a:txBody>
-                  <a:tcPr marL="6750" marR="6750" marT="6750" marB="0" anchor="ctr">
+                  <a:tcPr marL="6750" marR="6750" marT="6750" marB="6750" anchor="ctr">
                     <a:lnL w="9525" cap="flat" cmpd="sng" algn="ctr">
                       <a:solidFill>
                         <a:schemeClr val="bg1">
@@ -6766,7 +6766,7 @@
                       </a:r>
                     </a:p>
                   </a:txBody>
-                  <a:tcPr marL="81005" marR="6750" marT="6750" marB="0" anchor="ctr">
+                  <a:tcPr marL="81005" marR="6750" marT="6750" marB="6750" anchor="ctr">
                     <a:lnL>
                       <a:noFill/>
                     </a:lnL>
@@ -6820,7 +6820,7 @@
                       </a:r>
                     </a:p>
                   </a:txBody>
-                  <a:tcPr marL="81005" marR="6750" marT="6750" marB="0" anchor="ctr">
+                  <a:tcPr marL="81005" marR="6750" marT="6750" marB="6750" anchor="ctr">
                     <a:lnL>
                       <a:noFill/>
                     </a:lnL>
@@ -6876,7 +6876,7 @@
                       </a:r>
                     </a:p>
                   </a:txBody>
-                  <a:tcPr marL="81005" marR="6750" marT="6750" marB="0" anchor="ctr">
+                  <a:tcPr marL="81005" marR="6750" marT="6750" marB="6750" anchor="ctr">
                     <a:lnL>
                       <a:noFill/>
                     </a:lnL>
@@ -6932,7 +6932,7 @@
                       </a:r>
                     </a:p>
                   </a:txBody>
-                  <a:tcPr marL="81005" marR="6750" marT="6750" marB="0" anchor="ctr">
+                  <a:tcPr marL="81005" marR="6750" marT="6750" marB="6750" anchor="ctr">
                     <a:lnL>
                       <a:noFill/>
                     </a:lnL>
@@ -6990,7 +6990,7 @@
                       </a:r>
                     </a:p>
                   </a:txBody>
-                  <a:tcPr marL="81005" marR="6750" marT="6750" marB="0" anchor="ctr">
+                  <a:tcPr marL="81005" marR="6750" marT="6750" marB="6750" anchor="ctr">
                     <a:lnL>
                       <a:noFill/>
                     </a:lnL>
@@ -7044,7 +7044,7 @@
                       </a:r>
                     </a:p>
                   </a:txBody>
-                  <a:tcPr marL="81005" marR="6750" marT="6750" marB="0" anchor="ctr">
+                  <a:tcPr marL="81005" marR="6750" marT="6750" marB="6750" anchor="ctr">
                     <a:lnL>
                       <a:noFill/>
                     </a:lnL>
@@ -7100,7 +7100,7 @@
                       </a:r>
                     </a:p>
                   </a:txBody>
-                  <a:tcPr marL="81005" marR="6750" marT="6750" marB="0" anchor="ctr">
+                  <a:tcPr marL="81005" marR="6750" marT="6750" marB="6750" anchor="ctr">
                     <a:lnL>
                       <a:noFill/>
                     </a:lnL>
@@ -7156,7 +7156,7 @@
                       </a:r>
                     </a:p>
                   </a:txBody>
-                  <a:tcPr marL="81005" marR="6750" marT="6750" marB="0" anchor="ctr">
+                  <a:tcPr marL="81005" marR="6750" marT="6750" marB="6750" anchor="ctr">
                     <a:lnL>
                       <a:noFill/>
                     </a:lnL>
@@ -7214,7 +7214,7 @@
                       </a:r>
                     </a:p>
                   </a:txBody>
-                  <a:tcPr marL="81005" marR="6750" marT="6750" marB="0" anchor="ctr">
+                  <a:tcPr marL="81005" marR="6750" marT="6750" marB="6750" anchor="ctr">
                     <a:lnL>
                       <a:noFill/>
                     </a:lnL>
@@ -7268,7 +7268,7 @@
                       </a:r>
                     </a:p>
                   </a:txBody>
-                  <a:tcPr marL="81005" marR="6750" marT="6750" marB="0" anchor="ctr">
+                  <a:tcPr marL="81005" marR="6750" marT="6750" marB="6750" anchor="ctr">
                     <a:lnL>
                       <a:noFill/>
                     </a:lnL>
@@ -7324,7 +7324,7 @@
                       </a:r>
                     </a:p>
                   </a:txBody>
-                  <a:tcPr marL="81005" marR="6750" marT="6750" marB="0" anchor="ctr">
+                  <a:tcPr marL="81005" marR="6750" marT="6750" marB="6750" anchor="ctr">
                     <a:lnL>
                       <a:noFill/>
                     </a:lnL>
@@ -7380,7 +7380,7 @@
                       </a:r>
                     </a:p>
                   </a:txBody>
-                  <a:tcPr marL="81005" marR="6750" marT="6750" marB="0" anchor="ctr">
+                  <a:tcPr marL="81005" marR="6750" marT="6750" marB="6750" anchor="ctr">
                     <a:lnL>
                       <a:noFill/>
                     </a:lnL>
@@ -7935,7 +7935,7 @@
                       </a:r>
                     </a:p>
                   </a:txBody>
-                  <a:tcPr marL="6750" marR="6750" marT="6750" marB="0" anchor="ctr">
+                  <a:tcPr marL="6750" marR="6750" marT="6750" marB="6750" anchor="ctr">
                     <a:lnL>
                       <a:noFill/>
                     </a:lnL>
@@ -7997,7 +7997,7 @@
                       </a:r>
                     </a:p>
                   </a:txBody>
-                  <a:tcPr marL="6750" marR="6750" marT="6750" marB="0" anchor="ctr">
+                  <a:tcPr marL="6750" marR="6750" marT="6750" marB="6750" anchor="ctr">
                     <a:lnL w="9525" cap="flat" cmpd="sng" algn="ctr">
                       <a:solidFill>
                         <a:schemeClr val="bg1">
@@ -8067,7 +8067,7 @@
                       </a:r>
                     </a:p>
                   </a:txBody>
-                  <a:tcPr marL="6750" marR="6750" marT="6750" marB="0" anchor="ctr">
+                  <a:tcPr marL="6750" marR="6750" marT="6750" marB="6750" anchor="ctr">
                     <a:lnL w="9525" cap="flat" cmpd="sng" algn="ctr">
                       <a:solidFill>
                         <a:schemeClr val="bg1">
@@ -8139,7 +8139,7 @@
                       </a:r>
                     </a:p>
                   </a:txBody>
-                  <a:tcPr marL="81005" marR="6750" marT="6750" marB="0" anchor="ctr">
+                  <a:tcPr marL="81005" marR="6750" marT="6750" marB="6750" anchor="ctr">
                     <a:lnL>
                       <a:noFill/>
                     </a:lnL>
@@ -8193,7 +8193,7 @@
                       </a:r>
                     </a:p>
                   </a:txBody>
-                  <a:tcPr marL="81005" marR="6750" marT="6750" marB="0" anchor="ctr">
+                  <a:tcPr marL="81005" marR="6750" marT="6750" marB="6750" anchor="ctr">
                     <a:lnL>
                       <a:noFill/>
                     </a:lnL>
@@ -8249,7 +8249,7 @@
                       </a:r>
                     </a:p>
                   </a:txBody>
-                  <a:tcPr marL="81005" marR="6750" marT="6750" marB="0" anchor="ctr">
+                  <a:tcPr marL="81005" marR="6750" marT="6750" marB="6750" anchor="ctr">
                     <a:lnL>
                       <a:noFill/>
                     </a:lnL>
@@ -8307,7 +8307,7 @@
                       </a:r>
                     </a:p>
                   </a:txBody>
-                  <a:tcPr marL="81005" marR="6750" marT="6750" marB="0" anchor="ctr">
+                  <a:tcPr marL="81005" marR="6750" marT="6750" marB="6750" anchor="ctr">
                     <a:lnL>
                       <a:noFill/>
                     </a:lnL>
@@ -8361,7 +8361,7 @@
                       </a:r>
                     </a:p>
                   </a:txBody>
-                  <a:tcPr marL="81005" marR="6750" marT="6750" marB="0" anchor="ctr">
+                  <a:tcPr marL="81005" marR="6750" marT="6750" marB="6750" anchor="ctr">
                     <a:lnL>
                       <a:noFill/>
                     </a:lnL>
@@ -8417,7 +8417,7 @@
                       </a:r>
                     </a:p>
                   </a:txBody>
-                  <a:tcPr marL="81005" marR="6750" marT="6750" marB="0" anchor="ctr">
+                  <a:tcPr marL="81005" marR="6750" marT="6750" marB="6750" anchor="ctr">
                     <a:lnL>
                       <a:noFill/>
                     </a:lnL>
@@ -8475,7 +8475,7 @@
                       </a:r>
                     </a:p>
                   </a:txBody>
-                  <a:tcPr marL="81005" marR="6750" marT="6750" marB="0" anchor="ctr">
+                  <a:tcPr marL="81005" marR="6750" marT="6750" marB="6750" anchor="ctr">
                     <a:lnL>
                       <a:noFill/>
                     </a:lnL>
@@ -8529,7 +8529,7 @@
                       </a:r>
                     </a:p>
                   </a:txBody>
-                  <a:tcPr marL="81005" marR="6750" marT="6750" marB="0" anchor="ctr">
+                  <a:tcPr marL="81005" marR="6750" marT="6750" marB="6750" anchor="ctr">
                     <a:lnL>
                       <a:noFill/>
                     </a:lnL>
@@ -8585,7 +8585,7 @@
                       </a:r>
                     </a:p>
                   </a:txBody>
-                  <a:tcPr marL="81005" marR="6750" marT="6750" marB="0" anchor="ctr">
+                  <a:tcPr marL="81005" marR="6750" marT="6750" marB="6750" anchor="ctr">
                     <a:lnL>
                       <a:noFill/>
                     </a:lnL>
@@ -8643,7 +8643,7 @@
                       </a:r>
                     </a:p>
                   </a:txBody>
-                  <a:tcPr marL="81005" marR="6750" marT="6750" marB="0" anchor="ctr">
+                  <a:tcPr marL="81005" marR="6750" marT="6750" marB="6750" anchor="ctr">
                     <a:lnL>
                       <a:noFill/>
                     </a:lnL>
@@ -8697,7 +8697,7 @@
                       </a:r>
                     </a:p>
                   </a:txBody>
-                  <a:tcPr marL="81005" marR="6750" marT="6750" marB="0" anchor="ctr">
+                  <a:tcPr marL="81005" marR="6750" marT="6750" marB="6750" anchor="ctr">
                     <a:lnL>
                       <a:noFill/>
                     </a:lnL>
@@ -8753,7 +8753,7 @@
                       </a:r>
                     </a:p>
                   </a:txBody>
-                  <a:tcPr marL="81005" marR="6750" marT="6750" marB="0" anchor="ctr">
+                  <a:tcPr marL="81005" marR="6750" marT="6750" marB="6750" anchor="ctr">
                     <a:lnL>
                       <a:noFill/>
                     </a:lnL>
@@ -8811,7 +8811,7 @@
                       </a:r>
                     </a:p>
                   </a:txBody>
-                  <a:tcPr marL="81005" marR="6750" marT="6750" marB="0" anchor="ctr">
+                  <a:tcPr marL="81005" marR="6750" marT="6750" marB="6750" anchor="ctr">
                     <a:lnL>
                       <a:noFill/>
                     </a:lnL>
@@ -8865,7 +8865,7 @@
                       </a:r>
                     </a:p>
                   </a:txBody>
-                  <a:tcPr marL="81005" marR="6750" marT="6750" marB="0" anchor="ctr">
+                  <a:tcPr marL="81005" marR="6750" marT="6750" marB="6750" anchor="ctr">
                     <a:lnL>
                       <a:noFill/>
                     </a:lnL>
@@ -8921,7 +8921,7 @@
                       </a:r>
                     </a:p>
                   </a:txBody>
-                  <a:tcPr marL="81005" marR="6750" marT="6750" marB="0" anchor="ctr">
+                  <a:tcPr marL="81005" marR="6750" marT="6750" marB="6750" anchor="ctr">
                     <a:lnL>
                       <a:noFill/>
                     </a:lnL>
@@ -8979,7 +8979,7 @@
                       </a:r>
                     </a:p>
                   </a:txBody>
-                  <a:tcPr marL="81005" marR="6750" marT="6750" marB="0" anchor="ctr">
+                  <a:tcPr marL="81005" marR="6750" marT="6750" marB="6750" anchor="ctr">
                     <a:lnL>
                       <a:noFill/>
                     </a:lnL>
@@ -9033,7 +9033,7 @@
                       </a:r>
                     </a:p>
                   </a:txBody>
-                  <a:tcPr marL="81005" marR="6750" marT="6750" marB="0" anchor="ctr">
+                  <a:tcPr marL="81005" marR="6750" marT="6750" marB="6750" anchor="ctr">
                     <a:lnL>
                       <a:noFill/>
                     </a:lnL>
@@ -9089,7 +9089,7 @@
                       </a:r>
                     </a:p>
                   </a:txBody>
-                  <a:tcPr marL="81005" marR="6750" marT="6750" marB="0" anchor="ctr">
+                  <a:tcPr marL="81005" marR="6750" marT="6750" marB="6750" anchor="ctr">
                     <a:lnL>
                       <a:noFill/>
                     </a:lnL>
@@ -9715,7 +9715,7 @@
                       </a:r>
                     </a:p>
                   </a:txBody>
-                  <a:tcPr marL="6750" marR="6750" marT="6750" marB="0" anchor="ctr">
+                  <a:tcPr marL="6750" marR="6750" marT="6750" marB="6750" anchor="ctr">
                     <a:lnL>
                       <a:noFill/>
                     </a:lnL>
@@ -9777,7 +9777,7 @@
                       </a:r>
                     </a:p>
                   </a:txBody>
-                  <a:tcPr marL="6750" marR="6750" marT="6750" marB="0" anchor="ctr">
+                  <a:tcPr marL="6750" marR="6750" marT="6750" marB="6750" anchor="ctr">
                     <a:lnL w="9525" cap="flat" cmpd="sng" algn="ctr">
                       <a:solidFill>
                         <a:schemeClr val="bg1">
@@ -9849,7 +9849,7 @@
                       </a:r>
                     </a:p>
                   </a:txBody>
-                  <a:tcPr marL="81005" marR="6750" marT="6750" marB="0" anchor="ctr">
+                  <a:tcPr marL="81005" marR="6750" marT="6750" marB="6750" anchor="ctr">
                     <a:lnL>
                       <a:noFill/>
                     </a:lnL>
@@ -9903,7 +9903,7 @@
                       </a:r>
                     </a:p>
                   </a:txBody>
-                  <a:tcPr marL="81005" marR="6750" marT="6750" marB="0" anchor="ctr">
+                  <a:tcPr marL="81005" marR="6750" marT="6750" marB="6750" anchor="ctr">
                     <a:lnL>
                       <a:noFill/>
                     </a:lnL>
@@ -9961,7 +9961,7 @@
                       </a:r>
                     </a:p>
                   </a:txBody>
-                  <a:tcPr marL="81005" marR="6750" marT="6750" marB="0" anchor="ctr">
+                  <a:tcPr marL="81005" marR="6750" marT="6750" marB="6750" anchor="ctr">
                     <a:lnL>
                       <a:noFill/>
                     </a:lnL>
@@ -10015,7 +10015,7 @@
                       </a:r>
                     </a:p>
                   </a:txBody>
-                  <a:tcPr marL="81005" marR="6750" marT="6750" marB="0" anchor="ctr">
+                  <a:tcPr marL="81005" marR="6750" marT="6750" marB="6750" anchor="ctr">
                     <a:lnL>
                       <a:noFill/>
                     </a:lnL>
@@ -10073,7 +10073,7 @@
                       </a:r>
                     </a:p>
                   </a:txBody>
-                  <a:tcPr marL="81005" marR="6750" marT="6750" marB="0" anchor="ctr">
+                  <a:tcPr marL="81005" marR="6750" marT="6750" marB="6750" anchor="ctr">
                     <a:lnL>
                       <a:noFill/>
                     </a:lnL>
@@ -10127,7 +10127,7 @@
                       </a:r>
                     </a:p>
                   </a:txBody>
-                  <a:tcPr marL="81005" marR="6750" marT="6750" marB="0" anchor="ctr">
+                  <a:tcPr marL="81005" marR="6750" marT="6750" marB="6750" anchor="ctr">
                     <a:lnL>
                       <a:noFill/>
                     </a:lnL>
@@ -10185,7 +10185,7 @@
                       </a:r>
                     </a:p>
                   </a:txBody>
-                  <a:tcPr marL="81005" marR="6750" marT="6750" marB="0" anchor="ctr">
+                  <a:tcPr marL="81005" marR="6750" marT="6750" marB="6750" anchor="ctr">
                     <a:lnL>
                       <a:noFill/>
                     </a:lnL>
@@ -10239,7 +10239,7 @@
                       </a:r>
                     </a:p>
                   </a:txBody>
-                  <a:tcPr marL="81005" marR="6750" marT="6750" marB="0" anchor="ctr">
+                  <a:tcPr marL="81005" marR="6750" marT="6750" marB="6750" anchor="ctr">
                     <a:lnL>
                       <a:noFill/>
                     </a:lnL>
@@ -10297,7 +10297,7 @@
                       </a:r>
                     </a:p>
                   </a:txBody>
-                  <a:tcPr marL="81005" marR="6750" marT="6750" marB="0" anchor="ctr">
+                  <a:tcPr marL="81005" marR="6750" marT="6750" marB="6750" anchor="ctr">
                     <a:lnL>
                       <a:noFill/>
                     </a:lnL>
@@ -10351,7 +10351,7 @@
                       </a:r>
                     </a:p>
                   </a:txBody>
-                  <a:tcPr marL="81005" marR="6750" marT="6750" marB="0" anchor="ctr">
+                  <a:tcPr marL="81005" marR="6750" marT="6750" marB="6750" anchor="ctr">
                     <a:lnL>
                       <a:noFill/>
                     </a:lnL>
@@ -12173,7 +12173,7 @@
                       </a:r>
                     </a:p>
                   </a:txBody>
-                  <a:tcPr marL="6750" marR="6750" marT="6750" marB="0" anchor="ctr">
+                  <a:tcPr marL="6750" marR="6750" marT="6750" marB="6750" anchor="ctr">
                     <a:lnL>
                       <a:noFill/>
                     </a:lnL>
@@ -12235,7 +12235,7 @@
                       </a:r>
                     </a:p>
                   </a:txBody>
-                  <a:tcPr marL="6750" marR="6750" marT="6750" marB="0" anchor="ctr">
+                  <a:tcPr marL="6750" marR="6750" marT="6750" marB="6750" anchor="ctr">
                     <a:lnL w="9525" cap="flat" cmpd="sng" algn="ctr">
                       <a:solidFill>
                         <a:schemeClr val="bg1">
@@ -12305,7 +12305,7 @@
                       </a:r>
                     </a:p>
                   </a:txBody>
-                  <a:tcPr marL="6750" marR="6750" marT="6750" marB="0" anchor="ctr">
+                  <a:tcPr marL="6750" marR="6750" marT="6750" marB="6750" anchor="ctr">
                     <a:lnL w="9525" cap="flat" cmpd="sng" algn="ctr">
                       <a:solidFill>
                         <a:schemeClr val="bg1">
@@ -12377,7 +12377,7 @@
                       </a:r>
                     </a:p>
                   </a:txBody>
-                  <a:tcPr marL="81005" marR="6750" marT="6750" marB="0" anchor="ctr">
+                  <a:tcPr marL="81005" marR="6750" marT="6750" marB="6750" anchor="ctr">
                     <a:lnL>
                       <a:noFill/>
                     </a:lnL>
@@ -12431,7 +12431,7 @@
                       </a:r>
                     </a:p>
                   </a:txBody>
-                  <a:tcPr marL="81005" marR="6750" marT="6750" marB="0" anchor="ctr">
+                  <a:tcPr marL="81005" marR="6750" marT="6750" marB="6750" anchor="ctr">
                     <a:lnL>
                       <a:noFill/>
                     </a:lnL>
@@ -12487,7 +12487,7 @@
                       </a:r>
                     </a:p>
                   </a:txBody>
-                  <a:tcPr marL="81005" marR="6750" marT="6750" marB="0" anchor="ctr">
+                  <a:tcPr marL="81005" marR="6750" marT="6750" marB="6750" anchor="ctr">
                     <a:lnL>
                       <a:noFill/>
                     </a:lnL>
@@ -12545,7 +12545,7 @@
                       </a:r>
                     </a:p>
                   </a:txBody>
-                  <a:tcPr marL="81005" marR="6750" marT="6750" marB="0" anchor="ctr">
+                  <a:tcPr marL="81005" marR="6750" marT="6750" marB="6750" anchor="ctr">
                     <a:lnL>
                       <a:noFill/>
                     </a:lnL>
@@ -12599,7 +12599,7 @@
                       </a:r>
                     </a:p>
                   </a:txBody>
-                  <a:tcPr marL="81005" marR="6750" marT="6750" marB="0" anchor="ctr">
+                  <a:tcPr marL="81005" marR="6750" marT="6750" marB="6750" anchor="ctr">
                     <a:lnL>
                       <a:noFill/>
                     </a:lnL>
@@ -12655,7 +12655,7 @@
                       </a:r>
                     </a:p>
                   </a:txBody>
-                  <a:tcPr marL="81005" marR="6750" marT="6750" marB="0" anchor="ctr">
+                  <a:tcPr marL="81005" marR="6750" marT="6750" marB="6750" anchor="ctr">
                     <a:lnL>
                       <a:noFill/>
                     </a:lnL>
@@ -12713,7 +12713,7 @@
                       </a:r>
                     </a:p>
                   </a:txBody>
-                  <a:tcPr marL="81005" marR="6750" marT="6750" marB="0" anchor="ctr">
+                  <a:tcPr marL="81005" marR="6750" marT="6750" marB="6750" anchor="ctr">
                     <a:lnL>
                       <a:noFill/>
                     </a:lnL>
@@ -12767,7 +12767,7 @@
                       </a:r>
                     </a:p>
                   </a:txBody>
-                  <a:tcPr marL="81005" marR="6750" marT="6750" marB="0" anchor="ctr">
+                  <a:tcPr marL="81005" marR="6750" marT="6750" marB="6750" anchor="ctr">
                     <a:lnL>
                       <a:noFill/>
                     </a:lnL>
@@ -12819,11 +12819,11 @@
                           <a:ea typeface="맑은 고딕" panose="020B0503020000020004" pitchFamily="34" charset="-127"/>
                           <a:cs typeface="맑은 고딕"/>
                         </a:rPr>
-                        <a:t>선언을 쓴다</a:t>
+                        <a:t>선언을 작성한다</a:t>
                       </a:r>
                     </a:p>
                   </a:txBody>
-                  <a:tcPr marL="81005" marR="6750" marT="6750" marB="0" anchor="ctr">
+                  <a:tcPr marL="81005" marR="6750" marT="6750" marB="6750" anchor="ctr">
                     <a:lnL>
                       <a:noFill/>
                     </a:lnL>
@@ -12881,7 +12881,7 @@
                       </a:r>
                     </a:p>
                   </a:txBody>
-                  <a:tcPr marL="81005" marR="6750" marT="6750" marB="0" anchor="ctr">
+                  <a:tcPr marL="81005" marR="6750" marT="6750" marB="6750" anchor="ctr">
                     <a:lnL>
                       <a:noFill/>
                     </a:lnL>
@@ -12935,7 +12935,7 @@
                       </a:r>
                     </a:p>
                   </a:txBody>
-                  <a:tcPr marL="81005" marR="6750" marT="6750" marB="0" anchor="ctr">
+                  <a:tcPr marL="81005" marR="6750" marT="6750" marB="6750" anchor="ctr">
                     <a:lnL>
                       <a:noFill/>
                     </a:lnL>
@@ -12991,7 +12991,7 @@
                       </a:r>
                     </a:p>
                   </a:txBody>
-                  <a:tcPr marL="81005" marR="6750" marT="6750" marB="0" anchor="ctr">
+                  <a:tcPr marL="81005" marR="6750" marT="6750" marB="6750" anchor="ctr">
                     <a:lnL>
                       <a:noFill/>
                     </a:lnL>
@@ -13049,7 +13049,7 @@
                       </a:r>
                     </a:p>
                   </a:txBody>
-                  <a:tcPr marL="81005" marR="6750" marT="6750" marB="0" anchor="ctr">
+                  <a:tcPr marL="81005" marR="6750" marT="6750" marB="6750" anchor="ctr">
                     <a:lnL>
                       <a:noFill/>
                     </a:lnL>
@@ -13103,7 +13103,7 @@
                       </a:r>
                     </a:p>
                   </a:txBody>
-                  <a:tcPr marL="81005" marR="6750" marT="6750" marB="0" anchor="ctr">
+                  <a:tcPr marL="81005" marR="6750" marT="6750" marB="6750" anchor="ctr">
                     <a:lnL>
                       <a:noFill/>
                     </a:lnL>
@@ -13155,11 +13155,11 @@
                           <a:ea typeface="맑은 고딕" panose="020B0503020000020004" pitchFamily="34" charset="-127"/>
                           <a:cs typeface="맑은 고딕"/>
                         </a:rPr>
-                        <a:t>검사를 쓰고 돌린다</a:t>
+                        <a:t>검사를 작성하고 돌린다</a:t>
                       </a:r>
                     </a:p>
                   </a:txBody>
-                  <a:tcPr marL="81005" marR="6750" marT="6750" marB="0" anchor="ctr">
+                  <a:tcPr marL="81005" marR="6750" marT="6750" marB="6750" anchor="ctr">
                     <a:lnL>
                       <a:noFill/>
                     </a:lnL>
@@ -13763,7 +13763,7 @@
                       </a:r>
                     </a:p>
                   </a:txBody>
-                  <a:tcPr marL="6750" marR="6750" marT="6750" marB="0" anchor="ctr">
+                  <a:tcPr marL="6750" marR="6750" marT="6750" marB="6750" anchor="ctr">
                     <a:lnL>
                       <a:noFill/>
                     </a:lnL>
@@ -13825,7 +13825,7 @@
                       </a:r>
                     </a:p>
                   </a:txBody>
-                  <a:tcPr marL="6750" marR="6750" marT="6750" marB="0" anchor="ctr">
+                  <a:tcPr marL="6750" marR="6750" marT="6750" marB="6750" anchor="ctr">
                     <a:lnL w="9525" cap="flat" cmpd="sng" algn="ctr">
                       <a:solidFill>
                         <a:schemeClr val="bg1">
@@ -13895,7 +13895,7 @@
                       </a:r>
                     </a:p>
                   </a:txBody>
-                  <a:tcPr marL="6750" marR="6750" marT="6750" marB="0" anchor="ctr">
+                  <a:tcPr marL="6750" marR="6750" marT="6750" marB="6750" anchor="ctr">
                     <a:lnL w="9525" cap="flat" cmpd="sng" algn="ctr">
                       <a:solidFill>
                         <a:schemeClr val="bg1">
@@ -13967,7 +13967,7 @@
                       </a:r>
                     </a:p>
                   </a:txBody>
-                  <a:tcPr marL="81005" marR="6750" marT="6750" marB="0" anchor="ctr">
+                  <a:tcPr marL="81005" marR="6750" marT="6750" marB="6750" anchor="ctr">
                     <a:lnL>
                       <a:noFill/>
                     </a:lnL>
@@ -14021,7 +14021,7 @@
                       </a:r>
                     </a:p>
                   </a:txBody>
-                  <a:tcPr marL="81005" marR="6750" marT="6750" marB="0" anchor="ctr">
+                  <a:tcPr marL="81005" marR="6750" marT="6750" marB="6750" anchor="ctr">
                     <a:lnL>
                       <a:noFill/>
                     </a:lnL>
@@ -14077,7 +14077,7 @@
                       </a:r>
                     </a:p>
                   </a:txBody>
-                  <a:tcPr marL="81005" marR="6750" marT="6750" marB="0" anchor="ctr">
+                  <a:tcPr marL="81005" marR="6750" marT="6750" marB="6750" anchor="ctr">
                     <a:lnL>
                       <a:noFill/>
                     </a:lnL>
@@ -14135,7 +14135,7 @@
                       </a:r>
                     </a:p>
                   </a:txBody>
-                  <a:tcPr marL="81005" marR="6750" marT="6750" marB="0" anchor="ctr">
+                  <a:tcPr marL="81005" marR="6750" marT="6750" marB="6750" anchor="ctr">
                     <a:lnL>
                       <a:noFill/>
                     </a:lnL>
@@ -14189,7 +14189,7 @@
                       </a:r>
                     </a:p>
                   </a:txBody>
-                  <a:tcPr marL="81005" marR="6750" marT="6750" marB="0" anchor="ctr">
+                  <a:tcPr marL="81005" marR="6750" marT="6750" marB="6750" anchor="ctr">
                     <a:lnL>
                       <a:noFill/>
                     </a:lnL>
@@ -14245,7 +14245,7 @@
                       </a:r>
                     </a:p>
                   </a:txBody>
-                  <a:tcPr marL="81005" marR="6750" marT="6750" marB="0" anchor="ctr">
+                  <a:tcPr marL="81005" marR="6750" marT="6750" marB="6750" anchor="ctr">
                     <a:lnL>
                       <a:noFill/>
                     </a:lnL>
@@ -14303,7 +14303,7 @@
                       </a:r>
                     </a:p>
                   </a:txBody>
-                  <a:tcPr marL="81005" marR="6750" marT="6750" marB="0" anchor="ctr">
+                  <a:tcPr marL="81005" marR="6750" marT="6750" marB="6750" anchor="ctr">
                     <a:lnL>
                       <a:noFill/>
                     </a:lnL>
@@ -14357,7 +14357,7 @@
                       </a:r>
                     </a:p>
                   </a:txBody>
-                  <a:tcPr marL="81005" marR="6750" marT="6750" marB="0" anchor="ctr">
+                  <a:tcPr marL="81005" marR="6750" marT="6750" marB="6750" anchor="ctr">
                     <a:lnL>
                       <a:noFill/>
                     </a:lnL>
@@ -14413,7 +14413,7 @@
                       </a:r>
                     </a:p>
                   </a:txBody>
-                  <a:tcPr marL="81005" marR="6750" marT="6750" marB="0" anchor="ctr">
+                  <a:tcPr marL="81005" marR="6750" marT="6750" marB="6750" anchor="ctr">
                     <a:lnL>
                       <a:noFill/>
                     </a:lnL>
@@ -14557,7 +14557,7 @@
                 <a:latin typeface="맑은 고딕"/>
                 <a:ea typeface="맑은 고딕"/>
               </a:rPr>
-              <a:t>업무 규칙이 세 곳으로 흩어진다</a:t>
+              <a:t>업무 규칙이 3곳으로 흩어진다</a:t>
             </a:r>
             <a:r>
               <a:rPr sz="1800" b="0">
@@ -15596,7 +15596,7 @@
                       </a:r>
                     </a:p>
                   </a:txBody>
-                  <a:tcPr marL="6750" marR="6750" marT="6750" marB="0" anchor="ctr">
+                  <a:tcPr marL="6750" marR="6750" marT="6750" marB="6750" anchor="ctr">
                     <a:lnL>
                       <a:noFill/>
                     </a:lnL>
@@ -15658,7 +15658,7 @@
                       </a:r>
                     </a:p>
                   </a:txBody>
-                  <a:tcPr marL="6750" marR="6750" marT="6750" marB="0" anchor="ctr">
+                  <a:tcPr marL="6750" marR="6750" marT="6750" marB="6750" anchor="ctr">
                     <a:lnL w="9525" cap="flat" cmpd="sng" algn="ctr">
                       <a:solidFill>
                         <a:schemeClr val="bg1">
@@ -15728,7 +15728,7 @@
                       </a:r>
                     </a:p>
                   </a:txBody>
-                  <a:tcPr marL="6750" marR="6750" marT="6750" marB="0" anchor="ctr">
+                  <a:tcPr marL="6750" marR="6750" marT="6750" marB="6750" anchor="ctr">
                     <a:lnL w="9525" cap="flat" cmpd="sng" algn="ctr">
                       <a:solidFill>
                         <a:schemeClr val="bg1">
@@ -15800,7 +15800,7 @@
                       </a:r>
                     </a:p>
                   </a:txBody>
-                  <a:tcPr marL="81005" marR="6750" marT="6750" marB="0" anchor="ctr">
+                  <a:tcPr marL="81005" marR="6750" marT="6750" marB="6750" anchor="ctr">
                     <a:lnL>
                       <a:noFill/>
                     </a:lnL>
@@ -15854,7 +15854,7 @@
                       </a:r>
                     </a:p>
                   </a:txBody>
-                  <a:tcPr marL="81005" marR="6750" marT="6750" marB="0" anchor="ctr">
+                  <a:tcPr marL="81005" marR="6750" marT="6750" marB="6750" anchor="ctr">
                     <a:lnL>
                       <a:noFill/>
                     </a:lnL>
@@ -15910,7 +15910,7 @@
                       </a:r>
                     </a:p>
                   </a:txBody>
-                  <a:tcPr marL="81005" marR="6750" marT="6750" marB="0" anchor="ctr">
+                  <a:tcPr marL="81005" marR="6750" marT="6750" marB="6750" anchor="ctr">
                     <a:lnL>
                       <a:noFill/>
                     </a:lnL>
@@ -15968,7 +15968,7 @@
                       </a:r>
                     </a:p>
                   </a:txBody>
-                  <a:tcPr marL="81005" marR="6750" marT="6750" marB="0" anchor="ctr">
+                  <a:tcPr marL="81005" marR="6750" marT="6750" marB="6750" anchor="ctr">
                     <a:lnL>
                       <a:noFill/>
                     </a:lnL>
@@ -16022,7 +16022,7 @@
                       </a:r>
                     </a:p>
                   </a:txBody>
-                  <a:tcPr marL="81005" marR="6750" marT="6750" marB="0" anchor="ctr">
+                  <a:tcPr marL="81005" marR="6750" marT="6750" marB="6750" anchor="ctr">
                     <a:lnL>
                       <a:noFill/>
                     </a:lnL>
@@ -16078,7 +16078,7 @@
                       </a:r>
                     </a:p>
                   </a:txBody>
-                  <a:tcPr marL="81005" marR="6750" marT="6750" marB="0" anchor="ctr">
+                  <a:tcPr marL="81005" marR="6750" marT="6750" marB="6750" anchor="ctr">
                     <a:lnL>
                       <a:noFill/>
                     </a:lnL>
@@ -16136,7 +16136,7 @@
                       </a:r>
                     </a:p>
                   </a:txBody>
-                  <a:tcPr marL="81005" marR="6750" marT="6750" marB="0" anchor="ctr">
+                  <a:tcPr marL="81005" marR="6750" marT="6750" marB="6750" anchor="ctr">
                     <a:lnL>
                       <a:noFill/>
                     </a:lnL>
@@ -16190,7 +16190,7 @@
                       </a:r>
                     </a:p>
                   </a:txBody>
-                  <a:tcPr marL="81005" marR="6750" marT="6750" marB="0" anchor="ctr">
+                  <a:tcPr marL="81005" marR="6750" marT="6750" marB="6750" anchor="ctr">
                     <a:lnL>
                       <a:noFill/>
                     </a:lnL>
@@ -16246,7 +16246,7 @@
                       </a:r>
                     </a:p>
                   </a:txBody>
-                  <a:tcPr marL="81005" marR="6750" marT="6750" marB="0" anchor="ctr">
+                  <a:tcPr marL="81005" marR="6750" marT="6750" marB="6750" anchor="ctr">
                     <a:lnL>
                       <a:noFill/>
                     </a:lnL>
@@ -16895,7 +16895,7 @@
                 <a:latin typeface="맑은 고딕"/>
                 <a:ea typeface="맑은 고딕"/>
               </a:rPr>
-              <a:t>스타일은 강의에서 정한 것을 쓰고, 판단은 </a:t>
+              <a:t>스타일은 강의에서 정한 것을 사용하고, 판단은 </a:t>
             </a:r>
             <a:r>
               <a:rPr sz="1200" b="1">
@@ -16915,7 +16915,7 @@
                 <a:latin typeface="맑은 고딕"/>
                 <a:ea typeface="맑은 고딕"/>
               </a:rPr>
-              <a:t>에만 쓴다.</a:t>
+              <a:t>에만 한다.</a:t>
             </a:r>
           </a:p>
           <a:p>
@@ -17064,7 +17064,7 @@
                 <a:latin typeface="맑은 고딕"/>
                 <a:ea typeface="맑은 고딕"/>
               </a:rPr>
-              <a:t>"포트와 어댑터를 쓴다는 전제로 </a:t>
+              <a:t>"포트와 어댑터를 사용한다는 전제로 </a:t>
             </a:r>
             <a:r>
               <a:rPr sz="1000" b="1">
@@ -22746,7 +22746,7 @@
                 <a:latin typeface="맑은 고딕"/>
                 <a:ea typeface="맑은 고딕"/>
               </a:rPr>
-              <a:t>스타일 넷의 비교</a:t>
+              <a:t>스타일 4가지의 비교</a:t>
             </a:r>
           </a:p>
           <a:p>
@@ -22899,7 +22899,7 @@
                       </a:r>
                     </a:p>
                   </a:txBody>
-                  <a:tcPr marL="6750" marR="6750" marT="6750" marB="0" anchor="ctr">
+                  <a:tcPr marL="6750" marR="6750" marT="6750" marB="6750" anchor="ctr">
                     <a:lnL>
                       <a:noFill/>
                     </a:lnL>
@@ -22961,7 +22961,7 @@
                       </a:r>
                     </a:p>
                   </a:txBody>
-                  <a:tcPr marL="6750" marR="6750" marT="6750" marB="0" anchor="ctr">
+                  <a:tcPr marL="6750" marR="6750" marT="6750" marB="6750" anchor="ctr">
                     <a:lnL w="9525" cap="flat" cmpd="sng" algn="ctr">
                       <a:solidFill>
                         <a:schemeClr val="bg1">
@@ -23031,7 +23031,7 @@
                       </a:r>
                     </a:p>
                   </a:txBody>
-                  <a:tcPr marL="6750" marR="6750" marT="6750" marB="0" anchor="ctr">
+                  <a:tcPr marL="6750" marR="6750" marT="6750" marB="6750" anchor="ctr">
                     <a:lnL w="9525" cap="flat" cmpd="sng" algn="ctr">
                       <a:solidFill>
                         <a:schemeClr val="bg1">
@@ -23101,7 +23101,7 @@
                       </a:r>
                     </a:p>
                   </a:txBody>
-                  <a:tcPr marL="6750" marR="6750" marT="6750" marB="0" anchor="ctr">
+                  <a:tcPr marL="6750" marR="6750" marT="6750" marB="6750" anchor="ctr">
                     <a:lnL w="9525" cap="flat" cmpd="sng" algn="ctr">
                       <a:solidFill>
                         <a:schemeClr val="bg1">
@@ -23171,7 +23171,7 @@
                       </a:r>
                     </a:p>
                   </a:txBody>
-                  <a:tcPr marL="6750" marR="6750" marT="6750" marB="0" anchor="ctr">
+                  <a:tcPr marL="6750" marR="6750" marT="6750" marB="6750" anchor="ctr">
                     <a:lnL w="9525" cap="flat" cmpd="sng" algn="ctr">
                       <a:solidFill>
                         <a:schemeClr val="bg1">
@@ -23235,7 +23235,7 @@
                       </a:r>
                     </a:p>
                   </a:txBody>
-                  <a:tcPr marL="81005" marR="6750" marT="6750" marB="0" anchor="ctr">
+                  <a:tcPr marL="81005" marR="6750" marT="6750" marB="6750" anchor="ctr">
                     <a:lnL>
                       <a:noFill/>
                     </a:lnL>
@@ -23289,7 +23289,7 @@
                       </a:r>
                     </a:p>
                   </a:txBody>
-                  <a:tcPr marL="81005" marR="6750" marT="6750" marB="0" anchor="ctr">
+                  <a:tcPr marL="81005" marR="6750" marT="6750" marB="6750" anchor="ctr">
                     <a:lnL>
                       <a:noFill/>
                     </a:lnL>
@@ -23345,7 +23345,7 @@
                       </a:r>
                     </a:p>
                   </a:txBody>
-                  <a:tcPr marL="81005" marR="6750" marT="6750" marB="0" anchor="ctr">
+                  <a:tcPr marL="81005" marR="6750" marT="6750" marB="6750" anchor="ctr">
                     <a:lnL>
                       <a:noFill/>
                     </a:lnL>
@@ -23401,7 +23401,7 @@
                       </a:r>
                     </a:p>
                   </a:txBody>
-                  <a:tcPr marL="81005" marR="6750" marT="6750" marB="0" anchor="ctr">
+                  <a:tcPr marL="81005" marR="6750" marT="6750" marB="6750" anchor="ctr">
                     <a:lnL>
                       <a:noFill/>
                     </a:lnL>
@@ -23457,7 +23457,7 @@
                       </a:r>
                     </a:p>
                   </a:txBody>
-                  <a:tcPr marL="81005" marR="6750" marT="6750" marB="0" anchor="ctr">
+                  <a:tcPr marL="81005" marR="6750" marT="6750" marB="6750" anchor="ctr">
                     <a:lnL>
                       <a:noFill/>
                     </a:lnL>
@@ -23515,7 +23515,7 @@
                       </a:r>
                     </a:p>
                   </a:txBody>
-                  <a:tcPr marL="81005" marR="6750" marT="6750" marB="0" anchor="ctr">
+                  <a:tcPr marL="81005" marR="6750" marT="6750" marB="6750" anchor="ctr">
                     <a:lnL>
                       <a:noFill/>
                     </a:lnL>
@@ -23569,7 +23569,7 @@
                       </a:r>
                     </a:p>
                   </a:txBody>
-                  <a:tcPr marL="81005" marR="6750" marT="6750" marB="0" anchor="ctr">
+                  <a:tcPr marL="81005" marR="6750" marT="6750" marB="6750" anchor="ctr">
                     <a:lnL>
                       <a:noFill/>
                     </a:lnL>
@@ -23625,7 +23625,7 @@
                       </a:r>
                     </a:p>
                   </a:txBody>
-                  <a:tcPr marL="81005" marR="6750" marT="6750" marB="0" anchor="ctr">
+                  <a:tcPr marL="81005" marR="6750" marT="6750" marB="6750" anchor="ctr">
                     <a:lnL>
                       <a:noFill/>
                     </a:lnL>
@@ -23681,7 +23681,7 @@
                       </a:r>
                     </a:p>
                   </a:txBody>
-                  <a:tcPr marL="81005" marR="6750" marT="6750" marB="0" anchor="ctr">
+                  <a:tcPr marL="81005" marR="6750" marT="6750" marB="6750" anchor="ctr">
                     <a:lnL>
                       <a:noFill/>
                     </a:lnL>
@@ -23737,7 +23737,7 @@
                       </a:r>
                     </a:p>
                   </a:txBody>
-                  <a:tcPr marL="81005" marR="6750" marT="6750" marB="0" anchor="ctr">
+                  <a:tcPr marL="81005" marR="6750" marT="6750" marB="6750" anchor="ctr">
                     <a:lnL>
                       <a:noFill/>
                     </a:lnL>
@@ -23795,7 +23795,7 @@
                       </a:r>
                     </a:p>
                   </a:txBody>
-                  <a:tcPr marL="81005" marR="6750" marT="6750" marB="0" anchor="ctr">
+                  <a:tcPr marL="81005" marR="6750" marT="6750" marB="6750" anchor="ctr">
                     <a:lnL>
                       <a:noFill/>
                     </a:lnL>
@@ -23849,7 +23849,7 @@
                       </a:r>
                     </a:p>
                   </a:txBody>
-                  <a:tcPr marL="81005" marR="6750" marT="6750" marB="0" anchor="ctr">
+                  <a:tcPr marL="81005" marR="6750" marT="6750" marB="6750" anchor="ctr">
                     <a:lnL>
                       <a:noFill/>
                     </a:lnL>
@@ -23905,7 +23905,7 @@
                       </a:r>
                     </a:p>
                   </a:txBody>
-                  <a:tcPr marL="81005" marR="6750" marT="6750" marB="0" anchor="ctr">
+                  <a:tcPr marL="81005" marR="6750" marT="6750" marB="6750" anchor="ctr">
                     <a:lnL>
                       <a:noFill/>
                     </a:lnL>
@@ -23961,7 +23961,7 @@
                       </a:r>
                     </a:p>
                   </a:txBody>
-                  <a:tcPr marL="81005" marR="6750" marT="6750" marB="0" anchor="ctr">
+                  <a:tcPr marL="81005" marR="6750" marT="6750" marB="6750" anchor="ctr">
                     <a:lnL>
                       <a:noFill/>
                     </a:lnL>
@@ -24017,7 +24017,7 @@
                       </a:r>
                     </a:p>
                   </a:txBody>
-                  <a:tcPr marL="81005" marR="6750" marT="6750" marB="0" anchor="ctr">
+                  <a:tcPr marL="81005" marR="6750" marT="6750" marB="6750" anchor="ctr">
                     <a:lnL>
                       <a:noFill/>
                     </a:lnL>
@@ -24075,7 +24075,7 @@
                       </a:r>
                     </a:p>
                   </a:txBody>
-                  <a:tcPr marL="81005" marR="6750" marT="6750" marB="0" anchor="ctr">
+                  <a:tcPr marL="81005" marR="6750" marT="6750" marB="6750" anchor="ctr">
                     <a:lnL>
                       <a:noFill/>
                     </a:lnL>
@@ -24129,7 +24129,7 @@
                       </a:r>
                     </a:p>
                   </a:txBody>
-                  <a:tcPr marL="81005" marR="6750" marT="6750" marB="0" anchor="ctr">
+                  <a:tcPr marL="81005" marR="6750" marT="6750" marB="6750" anchor="ctr">
                     <a:lnL>
                       <a:noFill/>
                     </a:lnL>
@@ -24185,7 +24185,7 @@
                       </a:r>
                     </a:p>
                   </a:txBody>
-                  <a:tcPr marL="81005" marR="6750" marT="6750" marB="0" anchor="ctr">
+                  <a:tcPr marL="81005" marR="6750" marT="6750" marB="6750" anchor="ctr">
                     <a:lnL>
                       <a:noFill/>
                     </a:lnL>
@@ -24241,7 +24241,7 @@
                       </a:r>
                     </a:p>
                   </a:txBody>
-                  <a:tcPr marL="81005" marR="6750" marT="6750" marB="0" anchor="ctr">
+                  <a:tcPr marL="81005" marR="6750" marT="6750" marB="6750" anchor="ctr">
                     <a:lnL>
                       <a:noFill/>
                     </a:lnL>
@@ -24297,7 +24297,7 @@
                       </a:r>
                     </a:p>
                   </a:txBody>
-                  <a:tcPr marL="81005" marR="6750" marT="6750" marB="0" anchor="ctr">
+                  <a:tcPr marL="81005" marR="6750" marT="6750" marB="6750" anchor="ctr">
                     <a:lnL>
                       <a:noFill/>
                     </a:lnL>
@@ -24780,7 +24780,7 @@
                 <a:latin typeface="맑은 고딕"/>
                 <a:ea typeface="맑은 고딕"/>
               </a:rPr>
-              <a:t>이 과정이 쓰는 것</a:t>
+              <a:t>이 과정이 사용하는 것</a:t>
             </a:r>
           </a:p>
           <a:p>
@@ -25991,7 +25991,7 @@
                 <a:latin typeface="맑은 고딕"/>
                 <a:ea typeface="맑은 고딕"/>
               </a:rPr>
-              <a:t>SOLID 다섯 원칙</a:t>
+              <a:t>SOLID 5원칙</a:t>
             </a:r>
             <a:r>
               <a:rPr sz="1800" b="0">
@@ -26313,7 +26313,7 @@
                       </a:r>
                     </a:p>
                   </a:txBody>
-                  <a:tcPr marL="6750" marR="6750" marT="6750" marB="0" anchor="ctr">
+                  <a:tcPr marL="6750" marR="6750" marT="6750" marB="6750" anchor="ctr">
                     <a:lnL>
                       <a:noFill/>
                     </a:lnL>
@@ -26375,7 +26375,7 @@
                       </a:r>
                     </a:p>
                   </a:txBody>
-                  <a:tcPr marL="6750" marR="6750" marT="6750" marB="0" anchor="ctr">
+                  <a:tcPr marL="6750" marR="6750" marT="6750" marB="6750" anchor="ctr">
                     <a:lnL w="9525" cap="flat" cmpd="sng" algn="ctr">
                       <a:solidFill>
                         <a:schemeClr val="bg1">
@@ -26445,7 +26445,7 @@
                       </a:r>
                     </a:p>
                   </a:txBody>
-                  <a:tcPr marL="6750" marR="6750" marT="6750" marB="0" anchor="ctr">
+                  <a:tcPr marL="6750" marR="6750" marT="6750" marB="6750" anchor="ctr">
                     <a:lnL w="9525" cap="flat" cmpd="sng" algn="ctr">
                       <a:solidFill>
                         <a:schemeClr val="bg1">
@@ -26517,7 +26517,7 @@
                       </a:r>
                     </a:p>
                   </a:txBody>
-                  <a:tcPr marL="81005" marR="6750" marT="6750" marB="0" anchor="ctr">
+                  <a:tcPr marL="81005" marR="6750" marT="6750" marB="6750" anchor="ctr">
                     <a:lnL>
                       <a:noFill/>
                     </a:lnL>
@@ -26571,7 +26571,7 @@
                       </a:r>
                     </a:p>
                   </a:txBody>
-                  <a:tcPr marL="81005" marR="6750" marT="6750" marB="0" anchor="ctr">
+                  <a:tcPr marL="81005" marR="6750" marT="6750" marB="6750" anchor="ctr">
                     <a:lnL>
                       <a:noFill/>
                     </a:lnL>
@@ -26627,7 +26627,7 @@
                       </a:r>
                     </a:p>
                   </a:txBody>
-                  <a:tcPr marL="81005" marR="6750" marT="6750" marB="0" anchor="ctr">
+                  <a:tcPr marL="81005" marR="6750" marT="6750" marB="6750" anchor="ctr">
                     <a:lnL>
                       <a:noFill/>
                     </a:lnL>
@@ -26685,7 +26685,7 @@
                       </a:r>
                     </a:p>
                   </a:txBody>
-                  <a:tcPr marL="81005" marR="6750" marT="6750" marB="0" anchor="ctr">
+                  <a:tcPr marL="81005" marR="6750" marT="6750" marB="6750" anchor="ctr">
                     <a:lnL>
                       <a:noFill/>
                     </a:lnL>
@@ -26739,7 +26739,7 @@
                       </a:r>
                     </a:p>
                   </a:txBody>
-                  <a:tcPr marL="81005" marR="6750" marT="6750" marB="0" anchor="ctr">
+                  <a:tcPr marL="81005" marR="6750" marT="6750" marB="6750" anchor="ctr">
                     <a:lnL>
                       <a:noFill/>
                     </a:lnL>
@@ -26795,7 +26795,7 @@
                       </a:r>
                     </a:p>
                   </a:txBody>
-                  <a:tcPr marL="81005" marR="6750" marT="6750" marB="0" anchor="ctr">
+                  <a:tcPr marL="81005" marR="6750" marT="6750" marB="6750" anchor="ctr">
                     <a:lnL>
                       <a:noFill/>
                     </a:lnL>
@@ -26853,7 +26853,7 @@
                       </a:r>
                     </a:p>
                   </a:txBody>
-                  <a:tcPr marL="81005" marR="6750" marT="6750" marB="0" anchor="ctr">
+                  <a:tcPr marL="81005" marR="6750" marT="6750" marB="6750" anchor="ctr">
                     <a:lnL>
                       <a:noFill/>
                     </a:lnL>
@@ -26907,7 +26907,7 @@
                       </a:r>
                     </a:p>
                   </a:txBody>
-                  <a:tcPr marL="81005" marR="6750" marT="6750" marB="0" anchor="ctr">
+                  <a:tcPr marL="81005" marR="6750" marT="6750" marB="6750" anchor="ctr">
                     <a:lnL>
                       <a:noFill/>
                     </a:lnL>
@@ -26963,7 +26963,7 @@
                       </a:r>
                     </a:p>
                   </a:txBody>
-                  <a:tcPr marL="81005" marR="6750" marT="6750" marB="0" anchor="ctr">
+                  <a:tcPr marL="81005" marR="6750" marT="6750" marB="6750" anchor="ctr">
                     <a:lnL>
                       <a:noFill/>
                     </a:lnL>
@@ -27021,7 +27021,7 @@
                       </a:r>
                     </a:p>
                   </a:txBody>
-                  <a:tcPr marL="81005" marR="6750" marT="6750" marB="0" anchor="ctr">
+                  <a:tcPr marL="81005" marR="6750" marT="6750" marB="6750" anchor="ctr">
                     <a:lnL>
                       <a:noFill/>
                     </a:lnL>
@@ -27075,7 +27075,7 @@
                       </a:r>
                     </a:p>
                   </a:txBody>
-                  <a:tcPr marL="81005" marR="6750" marT="6750" marB="0" anchor="ctr">
+                  <a:tcPr marL="81005" marR="6750" marT="6750" marB="6750" anchor="ctr">
                     <a:lnL>
                       <a:noFill/>
                     </a:lnL>
@@ -27131,7 +27131,7 @@
                       </a:r>
                     </a:p>
                   </a:txBody>
-                  <a:tcPr marL="81005" marR="6750" marT="6750" marB="0" anchor="ctr">
+                  <a:tcPr marL="81005" marR="6750" marT="6750" marB="6750" anchor="ctr">
                     <a:lnL>
                       <a:noFill/>
                     </a:lnL>
@@ -27189,7 +27189,7 @@
                       </a:r>
                     </a:p>
                   </a:txBody>
-                  <a:tcPr marL="81005" marR="6750" marT="6750" marB="0" anchor="ctr">
+                  <a:tcPr marL="81005" marR="6750" marT="6750" marB="6750" anchor="ctr">
                     <a:lnL>
                       <a:noFill/>
                     </a:lnL>
@@ -27243,7 +27243,7 @@
                       </a:r>
                     </a:p>
                   </a:txBody>
-                  <a:tcPr marL="81005" marR="6750" marT="6750" marB="0" anchor="ctr">
+                  <a:tcPr marL="81005" marR="6750" marT="6750" marB="6750" anchor="ctr">
                     <a:lnL>
                       <a:noFill/>
                     </a:lnL>
@@ -27295,11 +27295,11 @@
                           <a:ea typeface="맑은 고딕" panose="020B0503020000020004" pitchFamily="34" charset="-127"/>
                           <a:cs typeface="맑은 고딕"/>
                         </a:rPr>
-                        <a:t>쓰는 쪽이 약속을 소유한다</a:t>
+                        <a:t>사용하는 쪽이 약속을 소유한다</a:t>
                       </a:r>
                     </a:p>
                   </a:txBody>
-                  <a:tcPr marL="81005" marR="6750" marT="6750" marB="0" anchor="ctr">
+                  <a:tcPr marL="81005" marR="6750" marT="6750" marB="6750" anchor="ctr">
                     <a:lnL>
                       <a:noFill/>
                     </a:lnL>
@@ -27662,7 +27662,7 @@
                 <a:latin typeface="맑은 고딕"/>
                 <a:ea typeface="맑은 고딕"/>
               </a:rPr>
-              <a:t>한 패키지가 두 가지 이유로 열리는 것</a:t>
+              <a:t>한 패키지가 2가지 이유로 열리는 것</a:t>
             </a:r>
             <a:r>
               <a:rPr sz="1800" b="0">
@@ -27893,7 +27893,7 @@
                       </a:r>
                     </a:p>
                   </a:txBody>
-                  <a:tcPr marL="6750" marR="6750" marT="6750" marB="0" anchor="ctr">
+                  <a:tcPr marL="6750" marR="6750" marT="6750" marB="6750" anchor="ctr">
                     <a:lnL>
                       <a:noFill/>
                     </a:lnL>
@@ -27955,7 +27955,7 @@
                       </a:r>
                     </a:p>
                   </a:txBody>
-                  <a:tcPr marL="6750" marR="6750" marT="6750" marB="0" anchor="ctr">
+                  <a:tcPr marL="6750" marR="6750" marT="6750" marB="6750" anchor="ctr">
                     <a:lnL w="9525" cap="flat" cmpd="sng" algn="ctr">
                       <a:solidFill>
                         <a:schemeClr val="bg1">
@@ -28025,7 +28025,7 @@
                       </a:r>
                     </a:p>
                   </a:txBody>
-                  <a:tcPr marL="6750" marR="6750" marT="6750" marB="0" anchor="ctr">
+                  <a:tcPr marL="6750" marR="6750" marT="6750" marB="6750" anchor="ctr">
                     <a:lnL w="9525" cap="flat" cmpd="sng" algn="ctr">
                       <a:solidFill>
                         <a:schemeClr val="bg1">
@@ -28097,7 +28097,7 @@
                       </a:r>
                     </a:p>
                   </a:txBody>
-                  <a:tcPr marL="81005" marR="6750" marT="6750" marB="0" anchor="ctr">
+                  <a:tcPr marL="81005" marR="6750" marT="6750" marB="6750" anchor="ctr">
                     <a:lnL>
                       <a:noFill/>
                     </a:lnL>
@@ -28151,7 +28151,7 @@
                       </a:r>
                     </a:p>
                   </a:txBody>
-                  <a:tcPr marL="81005" marR="6750" marT="6750" marB="0" anchor="ctr">
+                  <a:tcPr marL="81005" marR="6750" marT="6750" marB="6750" anchor="ctr">
                     <a:lnL>
                       <a:noFill/>
                     </a:lnL>
@@ -28207,7 +28207,7 @@
                       </a:r>
                     </a:p>
                   </a:txBody>
-                  <a:tcPr marL="81005" marR="6750" marT="6750" marB="0" anchor="ctr">
+                  <a:tcPr marL="81005" marR="6750" marT="6750" marB="6750" anchor="ctr">
                     <a:lnL>
                       <a:noFill/>
                     </a:lnL>
@@ -28265,7 +28265,7 @@
                       </a:r>
                     </a:p>
                   </a:txBody>
-                  <a:tcPr marL="81005" marR="6750" marT="6750" marB="0" anchor="ctr">
+                  <a:tcPr marL="81005" marR="6750" marT="6750" marB="6750" anchor="ctr">
                     <a:lnL>
                       <a:noFill/>
                     </a:lnL>
@@ -28319,7 +28319,7 @@
                       </a:r>
                     </a:p>
                   </a:txBody>
-                  <a:tcPr marL="81005" marR="6750" marT="6750" marB="0" anchor="ctr">
+                  <a:tcPr marL="81005" marR="6750" marT="6750" marB="6750" anchor="ctr">
                     <a:lnL>
                       <a:noFill/>
                     </a:lnL>
@@ -28375,7 +28375,7 @@
                       </a:r>
                     </a:p>
                   </a:txBody>
-                  <a:tcPr marL="81005" marR="6750" marT="6750" marB="0" anchor="ctr">
+                  <a:tcPr marL="81005" marR="6750" marT="6750" marB="6750" anchor="ctr">
                     <a:lnL>
                       <a:noFill/>
                     </a:lnL>
@@ -28433,7 +28433,7 @@
                       </a:r>
                     </a:p>
                   </a:txBody>
-                  <a:tcPr marL="81005" marR="6750" marT="6750" marB="0" anchor="ctr">
+                  <a:tcPr marL="81005" marR="6750" marT="6750" marB="6750" anchor="ctr">
                     <a:lnL>
                       <a:noFill/>
                     </a:lnL>
@@ -28487,7 +28487,7 @@
                       </a:r>
                     </a:p>
                   </a:txBody>
-                  <a:tcPr marL="81005" marR="6750" marT="6750" marB="0" anchor="ctr">
+                  <a:tcPr marL="81005" marR="6750" marT="6750" marB="6750" anchor="ctr">
                     <a:lnL>
                       <a:noFill/>
                     </a:lnL>
@@ -28543,7 +28543,7 @@
                       </a:r>
                     </a:p>
                   </a:txBody>
-                  <a:tcPr marL="81005" marR="6750" marT="6750" marB="0" anchor="ctr">
+                  <a:tcPr marL="81005" marR="6750" marT="6750" marB="6750" anchor="ctr">
                     <a:lnL>
                       <a:noFill/>
                     </a:lnL>
@@ -28601,7 +28601,7 @@
                       </a:r>
                     </a:p>
                   </a:txBody>
-                  <a:tcPr marL="81005" marR="6750" marT="6750" marB="0" anchor="ctr">
+                  <a:tcPr marL="81005" marR="6750" marT="6750" marB="6750" anchor="ctr">
                     <a:lnL>
                       <a:noFill/>
                     </a:lnL>
@@ -28655,7 +28655,7 @@
                       </a:r>
                     </a:p>
                   </a:txBody>
-                  <a:tcPr marL="81005" marR="6750" marT="6750" marB="0" anchor="ctr">
+                  <a:tcPr marL="81005" marR="6750" marT="6750" marB="6750" anchor="ctr">
                     <a:lnL>
                       <a:noFill/>
                     </a:lnL>
@@ -28711,7 +28711,7 @@
                       </a:r>
                     </a:p>
                   </a:txBody>
-                  <a:tcPr marL="81005" marR="6750" marT="6750" marB="0" anchor="ctr">
+                  <a:tcPr marL="81005" marR="6750" marT="6750" marB="6750" anchor="ctr">
                     <a:lnL>
                       <a:noFill/>
                     </a:lnL>
@@ -29001,7 +29001,7 @@
                 <a:latin typeface="맑은 고딕"/>
                 <a:ea typeface="맑은 고딕"/>
               </a:rPr>
-              <a:t> 쓴다. 포트의 입출력을 업무의 값으로 적는 것이 결합을 이름까지로 묶는 방법이다.</a:t>
+              <a:t> 사용한다. 포트의 입출력을 업무의 값으로 적는 것이 결합을 이름까지로 묶는 방법이다.</a:t>
             </a:r>
           </a:p>
           <a:p>
@@ -29024,7 +29024,7 @@
                 <a:latin typeface="맑은 고딕"/>
                 <a:ea typeface="맑은 고딕"/>
               </a:rPr>
-              <a:t>결합을 없앨 수는 없다. 쓰는 쪽은 무엇이든 알아야 한다. 정하는 것은 </a:t>
+              <a:t>결합을 없앨 수는 없다. 사용하는 쪽은 무엇이든 알아야 한다. 정하는 것은 </a:t>
             </a:r>
             <a:r>
               <a:rPr sz="1800" b="1">

--- a/courses/ai-native/sessions/s06.pptx
+++ b/courses/ai-native/sessions/s06.pptx
@@ -6457,7 +6457,7 @@
         </p:nvGraphicFramePr>
         <p:xfrm>
           <a:off x="910146" y="2112010"/>
-          <a:ext cx="7310120" cy="3873500"/>
+          <a:ext cx="7310120" cy="1152000"/>
         </p:xfrm>
         <a:graphic>
           <a:graphicData uri="http://schemas.openxmlformats.org/drawingml/2006/table">
@@ -7901,7 +7901,7 @@
         </p:nvGraphicFramePr>
         <p:xfrm>
           <a:off x="1230185" y="2624628"/>
-          <a:ext cx="6670040" cy="3873500"/>
+          <a:ext cx="6670040" cy="2016000"/>
         </p:xfrm>
         <a:graphic>
           <a:graphicData uri="http://schemas.openxmlformats.org/drawingml/2006/table">
@@ -9682,7 +9682,7 @@
         </p:nvGraphicFramePr>
         <p:xfrm>
           <a:off x="908875" y="2112010"/>
-          <a:ext cx="7312660" cy="3873500"/>
+          <a:ext cx="7312660" cy="1728000"/>
         </p:xfrm>
         <a:graphic>
           <a:graphicData uri="http://schemas.openxmlformats.org/drawingml/2006/table">
@@ -12139,7 +12139,7 @@
         </p:nvGraphicFramePr>
         <p:xfrm>
           <a:off x="1104456" y="2112010"/>
-          <a:ext cx="6921500" cy="3873500"/>
+          <a:ext cx="6921500" cy="1728000"/>
         </p:xfrm>
         <a:graphic>
           <a:graphicData uri="http://schemas.openxmlformats.org/drawingml/2006/table">
@@ -13729,7 +13729,7 @@
         </p:nvGraphicFramePr>
         <p:xfrm>
           <a:off x="1118426" y="2112010"/>
-          <a:ext cx="6893560" cy="3873500"/>
+          <a:ext cx="6893560" cy="1152000"/>
         </p:xfrm>
         <a:graphic>
           <a:graphicData uri="http://schemas.openxmlformats.org/drawingml/2006/table">
@@ -15562,7 +15562,7 @@
         </p:nvGraphicFramePr>
         <p:xfrm>
           <a:off x="412306" y="2112010"/>
-          <a:ext cx="8305800" cy="3873500"/>
+          <a:ext cx="8305800" cy="1152000"/>
         </p:xfrm>
         <a:graphic>
           <a:graphicData uri="http://schemas.openxmlformats.org/drawingml/2006/table">
@@ -22863,7 +22863,7 @@
         </p:nvGraphicFramePr>
         <p:xfrm>
           <a:off x="412306" y="2112010"/>
-          <a:ext cx="8305800" cy="3873500"/>
+          <a:ext cx="8305800" cy="1440000"/>
         </p:xfrm>
         <a:graphic>
           <a:graphicData uri="http://schemas.openxmlformats.org/drawingml/2006/table">
@@ -26279,7 +26279,7 @@
         </p:nvGraphicFramePr>
         <p:xfrm>
           <a:off x="475806" y="2898948"/>
-          <a:ext cx="8178800" cy="3873500"/>
+          <a:ext cx="8178800" cy="1728000"/>
         </p:xfrm>
         <a:graphic>
           <a:graphicData uri="http://schemas.openxmlformats.org/drawingml/2006/table">
@@ -27859,7 +27859,7 @@
         </p:nvGraphicFramePr>
         <p:xfrm>
           <a:off x="461835" y="2112010"/>
-          <a:ext cx="8206740" cy="3873500"/>
+          <a:ext cx="8206740" cy="1440000"/>
         </p:xfrm>
         <a:graphic>
           <a:graphicData uri="http://schemas.openxmlformats.org/drawingml/2006/table">
